--- a/presentation_hacktues.pptx
+++ b/presentation_hacktues.pptx
@@ -5,7 +5,7 @@
     <p:sldMasterId id="2147483648" r:id="rId1"/>
   </p:sldMasterIdLst>
   <p:notesMasterIdLst>
-    <p:notesMasterId r:id="rId12"/>
+    <p:notesMasterId r:id="rId13"/>
   </p:notesMasterIdLst>
   <p:sldIdLst>
     <p:sldId id="256" r:id="rId2"/>
@@ -16,15 +16,16 @@
     <p:sldId id="263" r:id="rId7"/>
     <p:sldId id="264" r:id="rId8"/>
     <p:sldId id="267" r:id="rId9"/>
-    <p:sldId id="265" r:id="rId10"/>
-    <p:sldId id="266" r:id="rId11"/>
+    <p:sldId id="268" r:id="rId10"/>
+    <p:sldId id="265" r:id="rId11"/>
+    <p:sldId id="266" r:id="rId12"/>
   </p:sldIdLst>
   <p:sldSz cx="9144000" cy="5143500" type="screen16x9"/>
   <p:notesSz cx="5143500" cy="9144000"/>
   <p:embeddedFontLst>
     <p:embeddedFont>
       <p:font typeface="PT Mono" panose="02060509020205020204" pitchFamily="49" charset="-52"/>
-      <p:regular r:id="rId13"/>
+      <p:regular r:id="rId14"/>
     </p:embeddedFont>
   </p:embeddedFontLst>
   <p:defaultTextStyle>
@@ -261,7 +262,7 @@
       <p15:sldGuideLst xmlns:p15="http://schemas.microsoft.com/office/powerpoint/2012/main"/>
     </p:ext>
     <p:ext uri="GoogleSlidesCustomDataVersion2">
-      <go:slidesCustomData xmlns:go="http://customooxmlschemas.google.com/" xmlns:ahyp="http://schemas.microsoft.com/office/drawing/2018/hyperlinkcolor" xmlns:p15="http://schemas.microsoft.com/office/powerpoint/2012/main" xmlns:p14="http://schemas.microsoft.com/office/powerpoint/2010/main" xmlns:com="http://schemas.openxmlformats.org/drawingml/2006/compatibility" xmlns:pvml="urn:schemas-microsoft-com:office:powerpoint" xmlns:v="urn:schemas-microsoft-com:vml" xmlns:o="urn:schemas-microsoft-com:office:office" xmlns:dgm="http://schemas.openxmlformats.org/drawingml/2006/diagram" xmlns:c="http://schemas.openxmlformats.org/drawingml/2006/chart" xmlns:mv="urn:schemas-microsoft-com:mac:vml" xmlns:mc="http://schemas.openxmlformats.org/markup-compatibility/2006" xmlns="" r:id="rId20" roundtripDataSignature="AMtx7miml5qiCSj3k9PFfL3kPWsBeWI5Yg=="/>
+      <go:slidesCustomData xmlns="" xmlns:mc="http://schemas.openxmlformats.org/markup-compatibility/2006" xmlns:mv="urn:schemas-microsoft-com:mac:vml" xmlns:c="http://schemas.openxmlformats.org/drawingml/2006/chart" xmlns:dgm="http://schemas.openxmlformats.org/drawingml/2006/diagram" xmlns:o="urn:schemas-microsoft-com:office:office" xmlns:v="urn:schemas-microsoft-com:vml" xmlns:pvml="urn:schemas-microsoft-com:office:powerpoint" xmlns:com="http://schemas.openxmlformats.org/drawingml/2006/compatibility" xmlns:p14="http://schemas.microsoft.com/office/powerpoint/2010/main" xmlns:p15="http://schemas.microsoft.com/office/powerpoint/2012/main" xmlns:ahyp="http://schemas.microsoft.com/office/drawing/2018/hyperlinkcolor" xmlns:go="http://customooxmlschemas.google.com/" r:id="rId20" roundtripDataSignature="AMtx7miml5qiCSj3k9PFfL3kPWsBeWI5Yg=="/>
     </p:ext>
   </p:extLst>
 </p:presentation>
@@ -906,6 +907,188 @@
   <p:cSld>
     <p:spTree>
       <p:nvGrpSpPr>
+        <p:cNvPr id="1" name="Shape 113"/>
+        <p:cNvGrpSpPr/>
+        <p:nvPr/>
+      </p:nvGrpSpPr>
+      <p:grpSpPr>
+        <a:xfrm>
+          <a:off x="0" y="0"/>
+          <a:ext cx="0" cy="0"/>
+          <a:chOff x="0" y="0"/>
+          <a:chExt cx="0" cy="0"/>
+        </a:xfrm>
+      </p:grpSpPr>
+      <p:sp>
+        <p:nvSpPr>
+          <p:cNvPr id="114" name="Google Shape;114;p10:notes"/>
+          <p:cNvSpPr>
+            <a:spLocks noGrp="1" noRot="1" noChangeAspect="1"/>
+          </p:cNvSpPr>
+          <p:nvPr>
+            <p:ph type="sldImg" idx="2"/>
+          </p:nvPr>
+        </p:nvSpPr>
+        <p:spPr>
+          <a:xfrm>
+            <a:off x="-1166813" y="0"/>
+            <a:ext cx="5334001" cy="3000375"/>
+          </a:xfrm>
+          <a:custGeom>
+            <a:avLst/>
+            <a:gdLst/>
+            <a:ahLst/>
+            <a:cxnLst/>
+            <a:rect l="l" t="t" r="r" b="b"/>
+            <a:pathLst>
+              <a:path w="120000" h="120000" extrusionOk="0">
+                <a:moveTo>
+                  <a:pt x="0" y="0"/>
+                </a:moveTo>
+                <a:lnTo>
+                  <a:pt x="120000" y="0"/>
+                </a:lnTo>
+                <a:lnTo>
+                  <a:pt x="120000" y="120000"/>
+                </a:lnTo>
+                <a:lnTo>
+                  <a:pt x="0" y="120000"/>
+                </a:lnTo>
+                <a:close/>
+              </a:path>
+            </a:pathLst>
+          </a:custGeom>
+          <a:noFill/>
+          <a:ln>
+            <a:noFill/>
+          </a:ln>
+        </p:spPr>
+      </p:sp>
+      <p:sp>
+        <p:nvSpPr>
+          <p:cNvPr id="115" name="Google Shape;115;p10:notes"/>
+          <p:cNvSpPr txBox="1">
+            <a:spLocks noGrp="1"/>
+          </p:cNvSpPr>
+          <p:nvPr>
+            <p:ph type="body" idx="1"/>
+          </p:nvPr>
+        </p:nvSpPr>
+        <p:spPr>
+          <a:xfrm>
+            <a:off x="0" y="0"/>
+            <a:ext cx="3000000" cy="3000000"/>
+          </a:xfrm>
+          <a:prstGeom prst="rect">
+            <a:avLst/>
+          </a:prstGeom>
+          <a:noFill/>
+          <a:ln>
+            <a:noFill/>
+          </a:ln>
+        </p:spPr>
+        <p:txBody>
+          <a:bodyPr spcFirstLastPara="1" wrap="square" lIns="91425" tIns="45700" rIns="91425" bIns="45700" anchor="t" anchorCtr="0">
+            <a:noAutofit/>
+          </a:bodyPr>
+          <a:lstStyle/>
+          <a:p>
+            <a:pPr marL="0" marR="0" lvl="0" indent="0" algn="l" rtl="0">
+              <a:spcBef>
+                <a:spcPts val="0"/>
+              </a:spcBef>
+              <a:spcAft>
+                <a:spcPts val="0"/>
+              </a:spcAft>
+              <a:buNone/>
+            </a:pPr>
+            <a:endParaRPr sz="1200">
+              <a:solidFill>
+                <a:schemeClr val="dk1"/>
+              </a:solidFill>
+              <a:latin typeface="Arial"/>
+              <a:ea typeface="Arial"/>
+              <a:cs typeface="Arial"/>
+              <a:sym typeface="Arial"/>
+            </a:endParaRPr>
+          </a:p>
+        </p:txBody>
+      </p:sp>
+      <p:sp>
+        <p:nvSpPr>
+          <p:cNvPr id="116" name="Google Shape;116;p10:notes"/>
+          <p:cNvSpPr txBox="1">
+            <a:spLocks noGrp="1"/>
+          </p:cNvSpPr>
+          <p:nvPr>
+            <p:ph type="sldNum" idx="12"/>
+          </p:nvPr>
+        </p:nvSpPr>
+        <p:spPr>
+          <a:xfrm>
+            <a:off x="0" y="0"/>
+            <a:ext cx="3000000" cy="3000000"/>
+          </a:xfrm>
+          <a:prstGeom prst="rect">
+            <a:avLst/>
+          </a:prstGeom>
+          <a:noFill/>
+          <a:ln>
+            <a:noFill/>
+          </a:ln>
+        </p:spPr>
+        <p:txBody>
+          <a:bodyPr spcFirstLastPara="1" wrap="square" lIns="91425" tIns="45700" rIns="91425" bIns="45700" anchor="t" anchorCtr="0">
+            <a:noAutofit/>
+          </a:bodyPr>
+          <a:lstStyle/>
+          <a:p>
+            <a:pPr marL="0" marR="0" lvl="0" indent="0" algn="l" rtl="0">
+              <a:spcBef>
+                <a:spcPts val="0"/>
+              </a:spcBef>
+              <a:spcAft>
+                <a:spcPts val="0"/>
+              </a:spcAft>
+              <a:buNone/>
+            </a:pPr>
+            <a:fld id="{00000000-1234-1234-1234-123412341234}" type="slidenum">
+              <a:rPr lang="en-US" sz="1800">
+                <a:solidFill>
+                  <a:schemeClr val="dk1"/>
+                </a:solidFill>
+                <a:latin typeface="Arial"/>
+                <a:ea typeface="Arial"/>
+                <a:cs typeface="Arial"/>
+                <a:sym typeface="Arial"/>
+              </a:rPr>
+              <a:t>10</a:t>
+            </a:fld>
+            <a:endParaRPr sz="1800">
+              <a:solidFill>
+                <a:schemeClr val="dk1"/>
+              </a:solidFill>
+              <a:latin typeface="Arial"/>
+              <a:ea typeface="Arial"/>
+              <a:cs typeface="Arial"/>
+              <a:sym typeface="Arial"/>
+            </a:endParaRPr>
+          </a:p>
+        </p:txBody>
+      </p:sp>
+    </p:spTree>
+  </p:cSld>
+  <p:clrMapOvr>
+    <a:masterClrMapping/>
+  </p:clrMapOvr>
+</p:notes>
+</file>
+
+<file path=ppt/notesSlides/notesSlide11.xml><?xml version="1.0" encoding="utf-8"?>
+<p:notes xmlns:a="http://schemas.openxmlformats.org/drawingml/2006/main" xmlns:r="http://schemas.openxmlformats.org/officeDocument/2006/relationships" xmlns:p="http://schemas.openxmlformats.org/presentationml/2006/main" showMasterSp="0" showMasterPhAnim="0">
+  <p:cSld>
+    <p:spTree>
+      <p:nvGrpSpPr>
         <p:cNvPr id="1" name="Shape 124"/>
         <p:cNvGrpSpPr/>
         <p:nvPr/>
@@ -1061,7 +1244,7 @@
                 <a:cs typeface="Arial"/>
                 <a:sym typeface="Arial"/>
               </a:rPr>
-              <a:t>10</a:t>
+              <a:t>11</a:t>
             </a:fld>
             <a:endParaRPr sz="1800">
               <a:solidFill>
@@ -2542,7 +2725,13 @@
   <p:cSld>
     <p:spTree>
       <p:nvGrpSpPr>
-        <p:cNvPr id="1" name="Shape 113"/>
+        <p:cNvPr id="1" name="Shape 101">
+          <a:extLst>
+            <a:ext uri="{FF2B5EF4-FFF2-40B4-BE49-F238E27FC236}">
+              <a16:creationId xmlns:a16="http://schemas.microsoft.com/office/drawing/2014/main" id="{DC32A69C-A7C1-2C7E-2B63-AFD83FB644C2}"/>
+            </a:ext>
+          </a:extLst>
+        </p:cNvPr>
         <p:cNvGrpSpPr/>
         <p:nvPr/>
       </p:nvGrpSpPr>
@@ -2556,7 +2745,13 @@
       </p:grpSpPr>
       <p:sp>
         <p:nvSpPr>
-          <p:cNvPr id="114" name="Google Shape;114;p10:notes"/>
+          <p:cNvPr id="102" name="Google Shape;102;p9:notes">
+            <a:extLst>
+              <a:ext uri="{FF2B5EF4-FFF2-40B4-BE49-F238E27FC236}">
+                <a16:creationId xmlns:a16="http://schemas.microsoft.com/office/drawing/2014/main" id="{50AE3366-98B9-0DAB-7819-D2821E603F9C}"/>
+              </a:ext>
+            </a:extLst>
+          </p:cNvPr>
           <p:cNvSpPr>
             <a:spLocks noGrp="1" noRot="1" noChangeAspect="1"/>
           </p:cNvSpPr>
@@ -2601,7 +2796,13 @@
       </p:sp>
       <p:sp>
         <p:nvSpPr>
-          <p:cNvPr id="115" name="Google Shape;115;p10:notes"/>
+          <p:cNvPr id="103" name="Google Shape;103;p9:notes">
+            <a:extLst>
+              <a:ext uri="{FF2B5EF4-FFF2-40B4-BE49-F238E27FC236}">
+                <a16:creationId xmlns:a16="http://schemas.microsoft.com/office/drawing/2014/main" id="{875EE2F0-F1B8-894D-852C-82E8B5C8B326}"/>
+              </a:ext>
+            </a:extLst>
+          </p:cNvPr>
           <p:cNvSpPr txBox="1">
             <a:spLocks noGrp="1"/>
           </p:cNvSpPr>
@@ -2651,7 +2852,13 @@
       </p:sp>
       <p:sp>
         <p:nvSpPr>
-          <p:cNvPr id="116" name="Google Shape;116;p10:notes"/>
+          <p:cNvPr id="104" name="Google Shape;104;p9:notes">
+            <a:extLst>
+              <a:ext uri="{FF2B5EF4-FFF2-40B4-BE49-F238E27FC236}">
+                <a16:creationId xmlns:a16="http://schemas.microsoft.com/office/drawing/2014/main" id="{4716880F-0816-624E-32B3-BAA66323AF25}"/>
+              </a:ext>
+            </a:extLst>
+          </p:cNvPr>
           <p:cNvSpPr txBox="1">
             <a:spLocks noGrp="1"/>
           </p:cNvSpPr>
@@ -2712,6 +2919,11 @@
         </p:txBody>
       </p:sp>
     </p:spTree>
+    <p:extLst>
+      <p:ext uri="{BB962C8B-B14F-4D97-AF65-F5344CB8AC3E}">
+        <p14:creationId xmlns:p14="http://schemas.microsoft.com/office/powerpoint/2010/main" val="3717609624"/>
+      </p:ext>
+    </p:extLst>
   </p:cSld>
   <p:clrMapOvr>
     <a:masterClrMapping/>
@@ -3898,6 +4110,370 @@
     </p:bg>
     <p:spTree>
       <p:nvGrpSpPr>
+        <p:cNvPr id="1" name="Shape 117"/>
+        <p:cNvGrpSpPr/>
+        <p:nvPr/>
+      </p:nvGrpSpPr>
+      <p:grpSpPr>
+        <a:xfrm>
+          <a:off x="0" y="0"/>
+          <a:ext cx="0" cy="0"/>
+          <a:chOff x="0" y="0"/>
+          <a:chExt cx="0" cy="0"/>
+        </a:xfrm>
+      </p:grpSpPr>
+      <p:pic>
+        <p:nvPicPr>
+          <p:cNvPr id="118" name="Google Shape;118;p10" descr="A circular object with a black background&#10;&#10;Description automatically generated"/>
+          <p:cNvPicPr preferRelativeResize="0"/>
+          <p:nvPr/>
+        </p:nvPicPr>
+        <p:blipFill rotWithShape="1">
+          <a:blip r:embed="rId3">
+            <a:alphaModFix/>
+          </a:blip>
+          <a:srcRect/>
+          <a:stretch/>
+        </p:blipFill>
+        <p:spPr>
+          <a:xfrm>
+            <a:off x="-821475" y="428319"/>
+            <a:ext cx="10786950" cy="10786950"/>
+          </a:xfrm>
+          <a:prstGeom prst="rect">
+            <a:avLst/>
+          </a:prstGeom>
+          <a:noFill/>
+          <a:ln>
+            <a:noFill/>
+          </a:ln>
+        </p:spPr>
+      </p:pic>
+      <p:sp>
+        <p:nvSpPr>
+          <p:cNvPr id="119" name="Google Shape;119;p10"/>
+          <p:cNvSpPr/>
+          <p:nvPr/>
+        </p:nvSpPr>
+        <p:spPr>
+          <a:xfrm>
+            <a:off x="0" y="0"/>
+            <a:ext cx="9144000" cy="5143500"/>
+          </a:xfrm>
+          <a:prstGeom prst="rect">
+            <a:avLst/>
+          </a:prstGeom>
+          <a:noFill/>
+          <a:ln>
+            <a:noFill/>
+          </a:ln>
+        </p:spPr>
+        <p:txBody>
+          <a:bodyPr spcFirstLastPara="1" wrap="square" lIns="91425" tIns="45700" rIns="91425" bIns="45700" anchor="t" anchorCtr="0">
+            <a:noAutofit/>
+          </a:bodyPr>
+          <a:lstStyle/>
+          <a:p>
+            <a:pPr marL="0" marR="0" lvl="0" indent="0" algn="l" rtl="0">
+              <a:spcBef>
+                <a:spcPts val="0"/>
+              </a:spcBef>
+              <a:spcAft>
+                <a:spcPts val="0"/>
+              </a:spcAft>
+              <a:buNone/>
+            </a:pPr>
+            <a:endParaRPr sz="1800">
+              <a:solidFill>
+                <a:schemeClr val="dk1"/>
+              </a:solidFill>
+              <a:latin typeface="Calibri"/>
+              <a:ea typeface="Calibri"/>
+              <a:cs typeface="Calibri"/>
+              <a:sym typeface="Calibri"/>
+            </a:endParaRPr>
+          </a:p>
+        </p:txBody>
+      </p:sp>
+      <p:pic>
+        <p:nvPicPr>
+          <p:cNvPr id="120" name="Google Shape;120;p10" descr="preencoded.png"/>
+          <p:cNvPicPr preferRelativeResize="0"/>
+          <p:nvPr/>
+        </p:nvPicPr>
+        <p:blipFill rotWithShape="1">
+          <a:blip r:embed="rId4">
+            <a:alphaModFix/>
+          </a:blip>
+          <a:srcRect/>
+          <a:stretch/>
+        </p:blipFill>
+        <p:spPr>
+          <a:xfrm>
+            <a:off x="0" y="0"/>
+            <a:ext cx="9144000" cy="5143500"/>
+          </a:xfrm>
+          <a:prstGeom prst="rect">
+            <a:avLst/>
+          </a:prstGeom>
+          <a:noFill/>
+          <a:ln>
+            <a:noFill/>
+          </a:ln>
+        </p:spPr>
+      </p:pic>
+      <p:sp>
+        <p:nvSpPr>
+          <p:cNvPr id="121" name="Google Shape;121;p10"/>
+          <p:cNvSpPr/>
+          <p:nvPr/>
+        </p:nvSpPr>
+        <p:spPr>
+          <a:xfrm>
+            <a:off x="871538" y="2047875"/>
+            <a:ext cx="7862888" cy="1047750"/>
+          </a:xfrm>
+          <a:prstGeom prst="rect">
+            <a:avLst/>
+          </a:prstGeom>
+          <a:noFill/>
+          <a:ln>
+            <a:noFill/>
+          </a:ln>
+        </p:spPr>
+        <p:txBody>
+          <a:bodyPr spcFirstLastPara="1" wrap="square" lIns="91425" tIns="45700" rIns="91425" bIns="45700" anchor="ctr" anchorCtr="0">
+            <a:noAutofit/>
+          </a:bodyPr>
+          <a:lstStyle/>
+          <a:p>
+            <a:pPr marL="0" marR="0" lvl="0" indent="0" algn="ctr" rtl="0">
+              <a:lnSpc>
+                <a:spcPct val="82500"/>
+              </a:lnSpc>
+              <a:spcBef>
+                <a:spcPts val="0"/>
+              </a:spcBef>
+              <a:spcAft>
+                <a:spcPts val="0"/>
+              </a:spcAft>
+              <a:buClr>
+                <a:srgbClr val="FFFFFF"/>
+              </a:buClr>
+              <a:buSzPts val="5000"/>
+              <a:buFont typeface="PT Mono"/>
+              <a:buNone/>
+            </a:pPr>
+            <a:r>
+              <a:rPr lang="en-US" sz="5000" dirty="0" err="1">
+                <a:solidFill>
+                  <a:srgbClr val="FFFFFF"/>
+                </a:solidFill>
+                <a:latin typeface="PT Mono"/>
+                <a:ea typeface="PT Mono"/>
+                <a:cs typeface="PT Mono"/>
+                <a:sym typeface="PT Mono"/>
+              </a:rPr>
+              <a:t>Благодарим</a:t>
+            </a:r>
+            <a:r>
+              <a:rPr lang="en-US" sz="5000" dirty="0">
+                <a:solidFill>
+                  <a:srgbClr val="FFFFFF"/>
+                </a:solidFill>
+                <a:latin typeface="PT Mono"/>
+                <a:ea typeface="PT Mono"/>
+                <a:cs typeface="PT Mono"/>
+                <a:sym typeface="PT Mono"/>
+              </a:rPr>
+              <a:t> </a:t>
+            </a:r>
+            <a:r>
+              <a:rPr lang="en-US" sz="5000" dirty="0" err="1">
+                <a:solidFill>
+                  <a:srgbClr val="FFFFFF"/>
+                </a:solidFill>
+                <a:latin typeface="PT Mono"/>
+                <a:ea typeface="PT Mono"/>
+                <a:cs typeface="PT Mono"/>
+                <a:sym typeface="PT Mono"/>
+              </a:rPr>
+              <a:t>ви</a:t>
+            </a:r>
+            <a:r>
+              <a:rPr lang="en-US" sz="5000" dirty="0">
+                <a:solidFill>
+                  <a:srgbClr val="FFFFFF"/>
+                </a:solidFill>
+                <a:latin typeface="PT Mono"/>
+                <a:ea typeface="PT Mono"/>
+                <a:cs typeface="PT Mono"/>
+                <a:sym typeface="PT Mono"/>
+              </a:rPr>
+              <a:t> </a:t>
+            </a:r>
+            <a:r>
+              <a:rPr lang="en-US" sz="5000" dirty="0" err="1">
+                <a:solidFill>
+                  <a:srgbClr val="FFFFFF"/>
+                </a:solidFill>
+                <a:latin typeface="PT Mono"/>
+                <a:ea typeface="PT Mono"/>
+                <a:cs typeface="PT Mono"/>
+                <a:sym typeface="PT Mono"/>
+              </a:rPr>
+              <a:t>за</a:t>
+            </a:r>
+            <a:r>
+              <a:rPr lang="en-US" sz="5000" dirty="0">
+                <a:solidFill>
+                  <a:srgbClr val="FFFFFF"/>
+                </a:solidFill>
+                <a:latin typeface="PT Mono"/>
+                <a:ea typeface="PT Mono"/>
+                <a:cs typeface="PT Mono"/>
+                <a:sym typeface="PT Mono"/>
+              </a:rPr>
+              <a:t> </a:t>
+            </a:r>
+            <a:r>
+              <a:rPr lang="en-US" sz="5000" dirty="0" err="1">
+                <a:solidFill>
+                  <a:srgbClr val="FFFFFF"/>
+                </a:solidFill>
+                <a:latin typeface="PT Mono"/>
+                <a:ea typeface="PT Mono"/>
+                <a:cs typeface="PT Mono"/>
+                <a:sym typeface="PT Mono"/>
+              </a:rPr>
+              <a:t>вниманието</a:t>
+            </a:r>
+            <a:r>
+              <a:rPr lang="en-US" sz="5000" dirty="0">
+                <a:solidFill>
+                  <a:srgbClr val="FFFFFF"/>
+                </a:solidFill>
+                <a:latin typeface="PT Mono"/>
+                <a:ea typeface="PT Mono"/>
+                <a:cs typeface="PT Mono"/>
+                <a:sym typeface="PT Mono"/>
+              </a:rPr>
+              <a:t>!</a:t>
+            </a:r>
+            <a:endParaRPr sz="5000" dirty="0">
+              <a:solidFill>
+                <a:schemeClr val="dk1"/>
+              </a:solidFill>
+              <a:latin typeface="Calibri"/>
+              <a:ea typeface="Calibri"/>
+              <a:cs typeface="Calibri"/>
+              <a:sym typeface="Calibri"/>
+            </a:endParaRPr>
+          </a:p>
+        </p:txBody>
+      </p:sp>
+      <p:sp>
+        <p:nvSpPr>
+          <p:cNvPr id="122" name="Google Shape;122;p10"/>
+          <p:cNvSpPr/>
+          <p:nvPr/>
+        </p:nvSpPr>
+        <p:spPr>
+          <a:xfrm>
+            <a:off x="3543300" y="3933825"/>
+            <a:ext cx="2519363" cy="947737"/>
+          </a:xfrm>
+          <a:prstGeom prst="rect">
+            <a:avLst/>
+          </a:prstGeom>
+          <a:noFill/>
+          <a:ln>
+            <a:noFill/>
+          </a:ln>
+        </p:spPr>
+        <p:txBody>
+          <a:bodyPr spcFirstLastPara="1" wrap="square" lIns="91425" tIns="45700" rIns="91425" bIns="45700" anchor="ctr" anchorCtr="0">
+            <a:noAutofit/>
+          </a:bodyPr>
+          <a:lstStyle/>
+          <a:p>
+            <a:pPr marL="0" marR="0" lvl="0" indent="0" algn="ctr" rtl="0">
+              <a:lnSpc>
+                <a:spcPct val="468750"/>
+              </a:lnSpc>
+              <a:spcBef>
+                <a:spcPts val="0"/>
+              </a:spcBef>
+              <a:spcAft>
+                <a:spcPts val="0"/>
+              </a:spcAft>
+              <a:buClr>
+                <a:schemeClr val="dk1"/>
+              </a:buClr>
+              <a:buSzPts val="2400"/>
+              <a:buFont typeface="Calibri"/>
+              <a:buNone/>
+            </a:pPr>
+            <a:endParaRPr sz="2400">
+              <a:solidFill>
+                <a:schemeClr val="dk1"/>
+              </a:solidFill>
+              <a:latin typeface="Calibri"/>
+              <a:ea typeface="Calibri"/>
+              <a:cs typeface="Calibri"/>
+              <a:sym typeface="Calibri"/>
+            </a:endParaRPr>
+          </a:p>
+        </p:txBody>
+      </p:sp>
+      <p:pic>
+        <p:nvPicPr>
+          <p:cNvPr id="123" name="Google Shape;123;p10"/>
+          <p:cNvPicPr preferRelativeResize="0"/>
+          <p:nvPr/>
+        </p:nvPicPr>
+        <p:blipFill rotWithShape="1">
+          <a:blip r:embed="rId5">
+            <a:alphaModFix/>
+          </a:blip>
+          <a:srcRect/>
+          <a:stretch/>
+        </p:blipFill>
+        <p:spPr>
+          <a:xfrm>
+            <a:off x="3631411" y="4515528"/>
+            <a:ext cx="1881178" cy="199653"/>
+          </a:xfrm>
+          <a:prstGeom prst="rect">
+            <a:avLst/>
+          </a:prstGeom>
+          <a:noFill/>
+          <a:ln>
+            <a:noFill/>
+          </a:ln>
+        </p:spPr>
+      </p:pic>
+    </p:spTree>
+  </p:cSld>
+  <p:clrMapOvr>
+    <a:masterClrMapping/>
+  </p:clrMapOvr>
+</p:sld>
+</file>
+
+<file path=ppt/slides/slide11.xml><?xml version="1.0" encoding="utf-8"?>
+<p:sld xmlns:a="http://schemas.openxmlformats.org/drawingml/2006/main" xmlns:r="http://schemas.openxmlformats.org/officeDocument/2006/relationships" xmlns:p="http://schemas.openxmlformats.org/presentationml/2006/main">
+  <p:cSld>
+    <p:bg>
+      <p:bgPr>
+        <a:solidFill>
+          <a:srgbClr val="000000"/>
+        </a:solidFill>
+        <a:effectLst/>
+      </p:bgPr>
+    </p:bg>
+    <p:spTree>
+      <p:nvGrpSpPr>
         <p:cNvPr id="1" name="Shape 128"/>
         <p:cNvGrpSpPr/>
         <p:nvPr/>
@@ -5879,7 +6455,7 @@
         <p:spPr>
           <a:xfrm>
             <a:off x="1924493" y="1861482"/>
-            <a:ext cx="5295014" cy="1846659"/>
+            <a:ext cx="5295014" cy="1015663"/>
           </a:xfrm>
           <a:prstGeom prst="rect">
             <a:avLst/>
@@ -5894,22 +6470,6 @@
           <a:p>
             <a:pPr algn="ctr"/>
             <a:r>
-              <a:rPr lang="ru-RU" sz="2000" b="1" dirty="0">
-                <a:solidFill>
-                  <a:schemeClr val="bg1"/>
-                </a:solidFill>
-              </a:rPr>
-              <a:t>За производители:</a:t>
-            </a:r>
-            <a:r>
-              <a:rPr lang="ru-RU" sz="2000" dirty="0">
-                <a:solidFill>
-                  <a:schemeClr val="bg1"/>
-                </a:solidFill>
-              </a:rPr>
-              <a:t> </a:t>
-            </a:r>
-            <a:r>
               <a:rPr lang="ru-RU" sz="2000" dirty="0" err="1">
                 <a:solidFill>
                   <a:schemeClr val="bg1"/>
@@ -5939,6 +6499,54 @@
                   <a:schemeClr val="bg1"/>
                 </a:solidFill>
               </a:rPr>
+              <a:t> с цени, </a:t>
+            </a:r>
+            <a:r>
+              <a:rPr lang="ru-RU" sz="2000" dirty="0" err="1">
+                <a:solidFill>
+                  <a:schemeClr val="bg1"/>
+                </a:solidFill>
+              </a:rPr>
+              <a:t>продукти</a:t>
+            </a:r>
+            <a:r>
+              <a:rPr lang="ru-RU" sz="2000" dirty="0">
+                <a:solidFill>
+                  <a:schemeClr val="bg1"/>
+                </a:solidFill>
+              </a:rPr>
+              <a:t> и локации, </a:t>
+            </a:r>
+            <a:r>
+              <a:rPr lang="ru-RU" sz="2000" dirty="0" err="1">
+                <a:solidFill>
+                  <a:schemeClr val="bg1"/>
+                </a:solidFill>
+              </a:rPr>
+              <a:t>както</a:t>
+            </a:r>
+            <a:r>
+              <a:rPr lang="ru-RU" sz="2000" dirty="0">
+                <a:solidFill>
+                  <a:schemeClr val="bg1"/>
+                </a:solidFill>
+              </a:rPr>
+              <a:t> и </a:t>
+            </a:r>
+            <a:r>
+              <a:rPr lang="ru-RU" sz="2000" dirty="0" err="1">
+                <a:solidFill>
+                  <a:schemeClr val="bg1"/>
+                </a:solidFill>
+              </a:rPr>
+              <a:t>търсене</a:t>
+            </a:r>
+            <a:r>
+              <a:rPr lang="ru-RU" sz="2000" dirty="0">
+                <a:solidFill>
+                  <a:schemeClr val="bg1"/>
+                </a:solidFill>
+              </a:rPr>
               <a:t> с </a:t>
             </a:r>
             <a:r>
@@ -5947,15 +6555,7 @@
                   <a:schemeClr val="bg1"/>
                 </a:solidFill>
               </a:rPr>
-              <a:t>продукти</a:t>
-            </a:r>
-            <a:r>
-              <a:rPr lang="en-GB" sz="2000" dirty="0">
-                <a:solidFill>
-                  <a:schemeClr val="bg1"/>
-                </a:solidFill>
-              </a:rPr>
-              <a:t>, </a:t>
+              <a:t>филтри</a:t>
             </a:r>
             <a:r>
               <a:rPr lang="ru-RU" sz="2000" dirty="0">
@@ -5963,124 +6563,13 @@
                   <a:schemeClr val="bg1"/>
                 </a:solidFill>
               </a:rPr>
-              <a:t>цени и локация</a:t>
+              <a:t> за вид продукт, цена и локация.</a:t>
             </a:r>
-            <a:r>
-              <a:rPr lang="bg-BG" sz="2000" dirty="0">
-                <a:solidFill>
-                  <a:schemeClr val="bg1"/>
-                </a:solidFill>
-              </a:rPr>
-              <a:t>.</a:t>
-            </a:r>
-            <a:endParaRPr lang="en-GB" sz="2000" dirty="0">
+            <a:endParaRPr lang="en-US" sz="2000" dirty="0">
               <a:solidFill>
                 <a:schemeClr val="bg1"/>
               </a:solidFill>
             </a:endParaRPr>
-          </a:p>
-          <a:p>
-            <a:pPr algn="ctr"/>
-            <a:endParaRPr lang="ru-RU" sz="2000" dirty="0">
-              <a:solidFill>
-                <a:schemeClr val="bg1"/>
-              </a:solidFill>
-            </a:endParaRPr>
-          </a:p>
-          <a:p>
-            <a:pPr algn="ctr"/>
-            <a:r>
-              <a:rPr lang="ru-RU" sz="2000" b="1" dirty="0">
-                <a:solidFill>
-                  <a:schemeClr val="bg1"/>
-                </a:solidFill>
-              </a:rPr>
-              <a:t>За потребители:</a:t>
-            </a:r>
-            <a:r>
-              <a:rPr lang="ru-RU" sz="2000" dirty="0">
-                <a:solidFill>
-                  <a:schemeClr val="bg1"/>
-                </a:solidFill>
-              </a:rPr>
-              <a:t> </a:t>
-            </a:r>
-            <a:r>
-              <a:rPr lang="bg-BG" sz="2000" dirty="0">
-                <a:solidFill>
-                  <a:schemeClr val="bg1"/>
-                </a:solidFill>
-              </a:rPr>
-              <a:t>Т</a:t>
-            </a:r>
-            <a:r>
-              <a:rPr lang="ru-RU" sz="2000" dirty="0" err="1">
-                <a:solidFill>
-                  <a:schemeClr val="bg1"/>
-                </a:solidFill>
-              </a:rPr>
-              <a:t>ърсене</a:t>
-            </a:r>
-            <a:r>
-              <a:rPr lang="ru-RU" sz="2000" dirty="0">
-                <a:solidFill>
-                  <a:schemeClr val="bg1"/>
-                </a:solidFill>
-              </a:rPr>
-              <a:t> с </a:t>
-            </a:r>
-            <a:r>
-              <a:rPr lang="ru-RU" sz="2000" dirty="0" err="1">
-                <a:solidFill>
-                  <a:schemeClr val="bg1"/>
-                </a:solidFill>
-              </a:rPr>
-              <a:t>филтри</a:t>
-            </a:r>
-            <a:r>
-              <a:rPr lang="ru-RU" sz="2000" dirty="0">
-                <a:solidFill>
-                  <a:schemeClr val="bg1"/>
-                </a:solidFill>
-              </a:rPr>
-              <a:t> за вид продукт</a:t>
-            </a:r>
-            <a:r>
-              <a:rPr lang="en-GB" sz="2000" dirty="0">
-                <a:solidFill>
-                  <a:schemeClr val="bg1"/>
-                </a:solidFill>
-              </a:rPr>
-              <a:t>, </a:t>
-            </a:r>
-            <a:r>
-              <a:rPr lang="ru-RU" sz="2000" dirty="0">
-                <a:solidFill>
-                  <a:schemeClr val="bg1"/>
-                </a:solidFill>
-              </a:rPr>
-              <a:t>цена</a:t>
-            </a:r>
-            <a:r>
-              <a:rPr lang="en-GB" sz="2000" dirty="0">
-                <a:solidFill>
-                  <a:schemeClr val="bg1"/>
-                </a:solidFill>
-              </a:rPr>
-              <a:t> </a:t>
-            </a:r>
-            <a:r>
-              <a:rPr lang="ru-RU" sz="2000" dirty="0">
-                <a:solidFill>
-                  <a:schemeClr val="bg1"/>
-                </a:solidFill>
-              </a:rPr>
-              <a:t> и разстояние.</a:t>
-            </a:r>
-          </a:p>
-          <a:p>
-            <a:pPr algn="ctr"/>
-            <a:endParaRPr lang="en-US" dirty="0"/>
           </a:p>
         </p:txBody>
       </p:sp>
@@ -6379,24 +6868,21 @@
                   <a:schemeClr val="bg1"/>
                 </a:solidFill>
               </a:rPr>
-              <a:t>Database - </a:t>
+              <a:t>Database – MongoDB</a:t>
             </a:r>
             <a:r>
-              <a:rPr lang="en-US" sz="2000" dirty="0" err="1">
+              <a:rPr lang="en-GB" sz="2000" dirty="0">
                 <a:solidFill>
                   <a:schemeClr val="bg1"/>
                 </a:solidFill>
               </a:rPr>
-              <a:t>Pymongo</a:t>
+              <a:t>;</a:t>
             </a:r>
-            <a:r>
-              <a:rPr lang="en-US" sz="2000" dirty="0">
-                <a:solidFill>
-                  <a:schemeClr val="bg1"/>
-                </a:solidFill>
-              </a:rPr>
-              <a:t> (Driver for MongoDB);</a:t>
-            </a:r>
+            <a:endParaRPr lang="en-US" sz="2000" dirty="0">
+              <a:solidFill>
+                <a:schemeClr val="bg1"/>
+              </a:solidFill>
+            </a:endParaRPr>
           </a:p>
           <a:p>
             <a:endParaRPr lang="en-US" sz="2000" dirty="0">
@@ -6632,7 +7118,7 @@
         </p:nvSpPr>
         <p:spPr>
           <a:xfrm>
-            <a:off x="816768" y="562957"/>
+            <a:off x="640556" y="536831"/>
             <a:ext cx="7862888" cy="428625"/>
           </a:xfrm>
           <a:prstGeom prst="rect">
@@ -6773,7 +7259,7 @@
         </p:nvSpPr>
         <p:spPr>
           <a:xfrm>
-            <a:off x="3123791" y="2225070"/>
+            <a:off x="2954689" y="2166287"/>
             <a:ext cx="6635047" cy="1569660"/>
           </a:xfrm>
           <a:prstGeom prst="rect">
@@ -7245,53 +7731,6 @@
           </a:ln>
         </p:spPr>
       </p:pic>
-      <p:sp>
-        <p:nvSpPr>
-          <p:cNvPr id="4" name="TextBox 3"/>
-          <p:cNvSpPr txBox="1"/>
-          <p:nvPr/>
-        </p:nvSpPr>
-        <p:spPr>
-          <a:xfrm>
-            <a:off x="1222744" y="2424229"/>
-            <a:ext cx="6698511" cy="1415772"/>
-          </a:xfrm>
-          <a:prstGeom prst="rect">
-            <a:avLst/>
-          </a:prstGeom>
-          <a:noFill/>
-        </p:spPr>
-        <p:txBody>
-          <a:bodyPr wrap="square" rtlCol="0">
-            <a:spAutoFit/>
-          </a:bodyPr>
-          <a:lstStyle/>
-          <a:p>
-            <a:pPr lvl="0" algn="ctr"/>
-            <a:r>
-              <a:rPr lang="ru-RU" sz="2400" dirty="0">
-                <a:solidFill>
-                  <a:schemeClr val="bg1"/>
-                </a:solidFill>
-              </a:rPr>
-              <a:t>От сблъсъка на идеи и напрежението на крайните срокове се родиха най-добрите ни решения.</a:t>
-            </a:r>
-            <a:endParaRPr lang="ru-RU" sz="2400" dirty="0">
-              <a:solidFill>
-                <a:schemeClr val="dk1"/>
-              </a:solidFill>
-              <a:latin typeface="Calibri"/>
-              <a:ea typeface="Calibri"/>
-              <a:cs typeface="Calibri"/>
-              <a:sym typeface="Calibri"/>
-            </a:endParaRPr>
-          </a:p>
-          <a:p>
-            <a:pPr algn="ctr"/>
-            <a:endParaRPr lang="en-US" dirty="0"/>
-          </a:p>
-        </p:txBody>
-      </p:sp>
       <p:pic>
         <p:nvPicPr>
           <p:cNvPr id="12" name="Google Shape;137;p11" descr="preencoded.png"/>
@@ -7487,7 +7926,7 @@
               <a:buSzPts val="4500"/>
             </a:pPr>
             <a:r>
-              <a:rPr lang="az-Cyrl-AZ" sz="4500" dirty="0">
+              <a:rPr lang="az-Cyrl-AZ" sz="4000" dirty="0">
                 <a:solidFill>
                   <a:schemeClr val="bg1"/>
                 </a:solidFill>
@@ -7496,7 +7935,7 @@
               <a:t>Менторско</a:t>
             </a:r>
             <a:r>
-              <a:rPr lang="en-US" sz="4500" dirty="0">
+              <a:rPr lang="en-US" sz="4000" dirty="0">
                 <a:solidFill>
                   <a:schemeClr val="bg1"/>
                 </a:solidFill>
@@ -7505,7 +7944,7 @@
               <a:t> </a:t>
             </a:r>
             <a:r>
-              <a:rPr lang="en-US" sz="4500" dirty="0" err="1">
+              <a:rPr lang="en-US" sz="4000" dirty="0" err="1">
                 <a:solidFill>
                   <a:srgbClr val="FFFFFF"/>
                 </a:solidFill>
@@ -7516,7 +7955,7 @@
               </a:rPr>
               <a:t>преживяване</a:t>
             </a:r>
-            <a:endParaRPr sz="4500" dirty="0">
+            <a:endParaRPr sz="4000" dirty="0">
               <a:solidFill>
                 <a:schemeClr val="dk1"/>
               </a:solidFill>
@@ -7626,14 +8065,20 @@
     <p:bg>
       <p:bgPr>
         <a:solidFill>
-          <a:srgbClr val="000000"/>
+          <a:schemeClr val="tx1"/>
         </a:solidFill>
         <a:effectLst/>
       </p:bgPr>
     </p:bg>
     <p:spTree>
       <p:nvGrpSpPr>
-        <p:cNvPr id="1" name="Shape 117"/>
+        <p:cNvPr id="1" name="Shape 105">
+          <a:extLst>
+            <a:ext uri="{FF2B5EF4-FFF2-40B4-BE49-F238E27FC236}">
+              <a16:creationId xmlns:a16="http://schemas.microsoft.com/office/drawing/2014/main" id="{B93021DD-DE50-BBC7-1176-B470A06B7C32}"/>
+            </a:ext>
+          </a:extLst>
+        </p:cNvPr>
         <p:cNvGrpSpPr/>
         <p:nvPr/>
       </p:nvGrpSpPr>
@@ -7647,7 +8092,13 @@
       </p:grpSpPr>
       <p:pic>
         <p:nvPicPr>
-          <p:cNvPr id="118" name="Google Shape;118;p10" descr="A circular object with a black background&#10;&#10;Description automatically generated"/>
+          <p:cNvPr id="112" name="Google Shape;112;p9" descr="A black and gold circle with black lines&#10;&#10;Description automatically generated">
+            <a:extLst>
+              <a:ext uri="{FF2B5EF4-FFF2-40B4-BE49-F238E27FC236}">
+                <a16:creationId xmlns:a16="http://schemas.microsoft.com/office/drawing/2014/main" id="{FBD6B0D4-2AE2-7F0C-A551-252900DE110D}"/>
+              </a:ext>
+            </a:extLst>
+          </p:cNvPr>
           <p:cNvPicPr preferRelativeResize="0"/>
           <p:nvPr/>
         </p:nvPicPr>
@@ -7660,8 +8111,8 @@
         </p:blipFill>
         <p:spPr>
           <a:xfrm>
-            <a:off x="-821475" y="428319"/>
-            <a:ext cx="10786950" cy="10786950"/>
+            <a:off x="-5811723" y="-1334930"/>
+            <a:ext cx="8864569" cy="8864569"/>
           </a:xfrm>
           <a:prstGeom prst="rect">
             <a:avLst/>
@@ -7674,7 +8125,13 @@
       </p:pic>
       <p:sp>
         <p:nvSpPr>
-          <p:cNvPr id="119" name="Google Shape;119;p10"/>
+          <p:cNvPr id="106" name="Google Shape;106;p9">
+            <a:extLst>
+              <a:ext uri="{FF2B5EF4-FFF2-40B4-BE49-F238E27FC236}">
+                <a16:creationId xmlns:a16="http://schemas.microsoft.com/office/drawing/2014/main" id="{B0B7F720-E70D-0BDD-3B44-C56647E73264}"/>
+              </a:ext>
+            </a:extLst>
+          </p:cNvPr>
           <p:cNvSpPr/>
           <p:nvPr/>
         </p:nvSpPr>
@@ -7720,7 +8177,13 @@
       </p:sp>
       <p:pic>
         <p:nvPicPr>
-          <p:cNvPr id="120" name="Google Shape;120;p10" descr="preencoded.png"/>
+          <p:cNvPr id="107" name="Google Shape;107;p9" descr="preencoded.png">
+            <a:extLst>
+              <a:ext uri="{FF2B5EF4-FFF2-40B4-BE49-F238E27FC236}">
+                <a16:creationId xmlns:a16="http://schemas.microsoft.com/office/drawing/2014/main" id="{2ED2E951-064A-9AC4-A5E2-542693CA2288}"/>
+              </a:ext>
+            </a:extLst>
+          </p:cNvPr>
           <p:cNvPicPr preferRelativeResize="0"/>
           <p:nvPr/>
         </p:nvPicPr>
@@ -7733,7 +8196,7 @@
         </p:blipFill>
         <p:spPr>
           <a:xfrm>
-            <a:off x="0" y="0"/>
+            <a:off x="212271" y="0"/>
             <a:ext cx="9144000" cy="5143500"/>
           </a:xfrm>
           <a:prstGeom prst="rect">
@@ -7747,14 +8210,20 @@
       </p:pic>
       <p:sp>
         <p:nvSpPr>
-          <p:cNvPr id="121" name="Google Shape;121;p10"/>
+          <p:cNvPr id="110" name="Google Shape;110;p9">
+            <a:extLst>
+              <a:ext uri="{FF2B5EF4-FFF2-40B4-BE49-F238E27FC236}">
+                <a16:creationId xmlns:a16="http://schemas.microsoft.com/office/drawing/2014/main" id="{A538F5C1-DE7F-07E5-5D3A-016C2628505F}"/>
+              </a:ext>
+            </a:extLst>
+          </p:cNvPr>
           <p:cNvSpPr/>
           <p:nvPr/>
         </p:nvSpPr>
         <p:spPr>
           <a:xfrm>
-            <a:off x="871538" y="2047875"/>
-            <a:ext cx="7862888" cy="1047750"/>
+            <a:off x="745718" y="685340"/>
+            <a:ext cx="7862888" cy="428625"/>
           </a:xfrm>
           <a:prstGeom prst="rect">
             <a:avLst/>
@@ -7770,124 +8239,32 @@
           </a:bodyPr>
           <a:lstStyle/>
           <a:p>
-            <a:pPr marL="0" marR="0" lvl="0" indent="0" algn="ctr" rtl="0">
+            <a:pPr algn="ctr">
               <a:lnSpc>
-                <a:spcPct val="82500"/>
+                <a:spcPct val="75000"/>
               </a:lnSpc>
-              <a:spcBef>
-                <a:spcPts val="0"/>
-              </a:spcBef>
-              <a:spcAft>
-                <a:spcPts val="0"/>
-              </a:spcAft>
               <a:buClr>
                 <a:srgbClr val="FFFFFF"/>
               </a:buClr>
-              <a:buSzPts val="5000"/>
-              <a:buFont typeface="PT Mono"/>
-              <a:buNone/>
+              <a:buSzPts val="4500"/>
             </a:pPr>
             <a:r>
-              <a:rPr lang="en-US" sz="5000" dirty="0" err="1">
-                <a:solidFill>
-                  <a:srgbClr val="FFFFFF"/>
-                </a:solidFill>
-                <a:latin typeface="PT Mono"/>
-                <a:ea typeface="PT Mono"/>
-                <a:cs typeface="PT Mono"/>
-                <a:sym typeface="PT Mono"/>
-              </a:rPr>
-              <a:t>Благодарим</a:t>
+              <a:rPr lang="bg-BG" sz="4000" dirty="0">
+                <a:solidFill>
+                  <a:schemeClr val="bg1"/>
+                </a:solidFill>
+                <a:latin typeface="PT Mono" panose="020B0604020202020204" charset="0"/>
+                <a:ea typeface="Calibri"/>
+                <a:cs typeface="Calibri"/>
+                <a:sym typeface="Calibri"/>
+              </a:rPr>
+              <a:t>Какво научихме?</a:t>
             </a:r>
-            <a:r>
-              <a:rPr lang="en-US" sz="5000" dirty="0">
-                <a:solidFill>
-                  <a:srgbClr val="FFFFFF"/>
-                </a:solidFill>
-                <a:latin typeface="PT Mono"/>
-                <a:ea typeface="PT Mono"/>
-                <a:cs typeface="PT Mono"/>
-                <a:sym typeface="PT Mono"/>
-              </a:rPr>
-              <a:t> </a:t>
-            </a:r>
-            <a:r>
-              <a:rPr lang="en-US" sz="5000" dirty="0" err="1">
-                <a:solidFill>
-                  <a:srgbClr val="FFFFFF"/>
-                </a:solidFill>
-                <a:latin typeface="PT Mono"/>
-                <a:ea typeface="PT Mono"/>
-                <a:cs typeface="PT Mono"/>
-                <a:sym typeface="PT Mono"/>
-              </a:rPr>
-              <a:t>ви</a:t>
-            </a:r>
-            <a:r>
-              <a:rPr lang="en-US" sz="5000" dirty="0">
-                <a:solidFill>
-                  <a:srgbClr val="FFFFFF"/>
-                </a:solidFill>
-                <a:latin typeface="PT Mono"/>
-                <a:ea typeface="PT Mono"/>
-                <a:cs typeface="PT Mono"/>
-                <a:sym typeface="PT Mono"/>
-              </a:rPr>
-              <a:t> </a:t>
-            </a:r>
-            <a:r>
-              <a:rPr lang="en-US" sz="5000" dirty="0" err="1">
-                <a:solidFill>
-                  <a:srgbClr val="FFFFFF"/>
-                </a:solidFill>
-                <a:latin typeface="PT Mono"/>
-                <a:ea typeface="PT Mono"/>
-                <a:cs typeface="PT Mono"/>
-                <a:sym typeface="PT Mono"/>
-              </a:rPr>
-              <a:t>за</a:t>
-            </a:r>
-            <a:r>
-              <a:rPr lang="en-US" sz="5000" dirty="0">
-                <a:solidFill>
-                  <a:srgbClr val="FFFFFF"/>
-                </a:solidFill>
-                <a:latin typeface="PT Mono"/>
-                <a:ea typeface="PT Mono"/>
-                <a:cs typeface="PT Mono"/>
-                <a:sym typeface="PT Mono"/>
-              </a:rPr>
-              <a:t> </a:t>
-            </a:r>
-            <a:r>
-              <a:rPr lang="en-US" sz="5000" dirty="0" err="1">
-                <a:solidFill>
-                  <a:srgbClr val="FFFFFF"/>
-                </a:solidFill>
-                <a:latin typeface="PT Mono"/>
-                <a:ea typeface="PT Mono"/>
-                <a:cs typeface="PT Mono"/>
-                <a:sym typeface="PT Mono"/>
-              </a:rPr>
-              <a:t>вниманието</a:t>
-            </a:r>
-            <a:r>
-              <a:rPr lang="en-US" sz="5000" dirty="0">
-                <a:solidFill>
-                  <a:srgbClr val="FFFFFF"/>
-                </a:solidFill>
-                <a:latin typeface="PT Mono"/>
-                <a:ea typeface="PT Mono"/>
-                <a:cs typeface="PT Mono"/>
-                <a:sym typeface="PT Mono"/>
-              </a:rPr>
-              <a:t>!</a:t>
-            </a:r>
-            <a:endParaRPr sz="5000" dirty="0">
+            <a:endParaRPr sz="4000" dirty="0">
               <a:solidFill>
-                <a:schemeClr val="dk1"/>
+                <a:schemeClr val="bg1"/>
               </a:solidFill>
-              <a:latin typeface="Calibri"/>
+              <a:latin typeface="PT Mono" panose="020B0604020202020204" charset="0"/>
               <a:ea typeface="Calibri"/>
               <a:cs typeface="Calibri"/>
               <a:sym typeface="Calibri"/>
@@ -7897,14 +8274,20 @@
       </p:sp>
       <p:sp>
         <p:nvSpPr>
-          <p:cNvPr id="122" name="Google Shape;122;p10"/>
+          <p:cNvPr id="111" name="Google Shape;111;p9">
+            <a:extLst>
+              <a:ext uri="{FF2B5EF4-FFF2-40B4-BE49-F238E27FC236}">
+                <a16:creationId xmlns:a16="http://schemas.microsoft.com/office/drawing/2014/main" id="{77FFA7E8-0A12-89BC-9146-D4891DC9D532}"/>
+              </a:ext>
+            </a:extLst>
+          </p:cNvPr>
           <p:cNvSpPr/>
           <p:nvPr/>
         </p:nvSpPr>
         <p:spPr>
           <a:xfrm>
-            <a:off x="3543300" y="3933825"/>
-            <a:ext cx="2519363" cy="947737"/>
+            <a:off x="745718" y="1019175"/>
+            <a:ext cx="6633277" cy="1256192"/>
           </a:xfrm>
           <a:prstGeom prst="rect">
             <a:avLst/>
@@ -7920,24 +8303,16 @@
           </a:bodyPr>
           <a:lstStyle/>
           <a:p>
-            <a:pPr marL="0" marR="0" lvl="0" indent="0" algn="ctr" rtl="0">
+            <a:pPr lvl="0">
               <a:lnSpc>
-                <a:spcPct val="468750"/>
+                <a:spcPct val="140625"/>
               </a:lnSpc>
-              <a:spcBef>
-                <a:spcPts val="0"/>
-              </a:spcBef>
-              <a:spcAft>
-                <a:spcPts val="0"/>
-              </a:spcAft>
               <a:buClr>
-                <a:schemeClr val="dk1"/>
+                <a:srgbClr val="FFFFFF"/>
               </a:buClr>
               <a:buSzPts val="2400"/>
-              <a:buFont typeface="Calibri"/>
-              <a:buNone/>
             </a:pPr>
-            <a:endParaRPr sz="2400">
+            <a:endParaRPr sz="2400" dirty="0">
               <a:solidFill>
                 <a:schemeClr val="dk1"/>
               </a:solidFill>
@@ -7951,7 +8326,13 @@
       </p:sp>
       <p:pic>
         <p:nvPicPr>
-          <p:cNvPr id="123" name="Google Shape;123;p10"/>
+          <p:cNvPr id="4" name="Google Shape;147;p11" descr="preencoded.png">
+            <a:extLst>
+              <a:ext uri="{FF2B5EF4-FFF2-40B4-BE49-F238E27FC236}">
+                <a16:creationId xmlns:a16="http://schemas.microsoft.com/office/drawing/2014/main" id="{E931A286-FF47-5A6F-593F-A74C8C5DCA39}"/>
+              </a:ext>
+            </a:extLst>
+          </p:cNvPr>
           <p:cNvPicPr preferRelativeResize="0"/>
           <p:nvPr/>
         </p:nvPicPr>
@@ -7964,8 +8345,8 @@
         </p:blipFill>
         <p:spPr>
           <a:xfrm>
-            <a:off x="3631411" y="4515528"/>
-            <a:ext cx="1881178" cy="199653"/>
+            <a:off x="7908120" y="3685743"/>
+            <a:ext cx="1587572" cy="1419169"/>
           </a:xfrm>
           <a:prstGeom prst="rect">
             <a:avLst/>
@@ -7977,6 +8358,11 @@
         </p:spPr>
       </p:pic>
     </p:spTree>
+    <p:extLst>
+      <p:ext uri="{BB962C8B-B14F-4D97-AF65-F5344CB8AC3E}">
+        <p14:creationId xmlns:p14="http://schemas.microsoft.com/office/powerpoint/2010/main" val="3682514201"/>
+      </p:ext>
+    </p:extLst>
   </p:cSld>
   <p:clrMapOvr>
     <a:masterClrMapping/>

--- a/presentation_hacktues.pptx
+++ b/presentation_hacktues.pptx
@@ -5,27 +5,26 @@
     <p:sldMasterId id="2147483648" r:id="rId1"/>
   </p:sldMasterIdLst>
   <p:notesMasterIdLst>
-    <p:notesMasterId r:id="rId13"/>
+    <p:notesMasterId r:id="rId12"/>
   </p:notesMasterIdLst>
   <p:sldIdLst>
     <p:sldId id="256" r:id="rId2"/>
     <p:sldId id="258" r:id="rId3"/>
-    <p:sldId id="257" r:id="rId4"/>
-    <p:sldId id="260" r:id="rId5"/>
-    <p:sldId id="262" r:id="rId6"/>
+    <p:sldId id="260" r:id="rId4"/>
+    <p:sldId id="262" r:id="rId5"/>
+    <p:sldId id="257" r:id="rId6"/>
     <p:sldId id="263" r:id="rId7"/>
     <p:sldId id="264" r:id="rId8"/>
     <p:sldId id="267" r:id="rId9"/>
     <p:sldId id="268" r:id="rId10"/>
     <p:sldId id="265" r:id="rId11"/>
-    <p:sldId id="266" r:id="rId12"/>
   </p:sldIdLst>
   <p:sldSz cx="9144000" cy="5143500" type="screen16x9"/>
   <p:notesSz cx="5143500" cy="9144000"/>
   <p:embeddedFontLst>
     <p:embeddedFont>
-      <p:font typeface="PT Mono" panose="02060509020205020204" pitchFamily="49" charset="-52"/>
-      <p:regular r:id="rId14"/>
+      <p:font typeface="PT Mono" panose="02060509020205020204" pitchFamily="49" charset="0"/>
+      <p:regular r:id="rId13"/>
     </p:embeddedFont>
   </p:embeddedFontLst>
   <p:defaultTextStyle>
@@ -262,7 +261,7 @@
       <p15:sldGuideLst xmlns:p15="http://schemas.microsoft.com/office/powerpoint/2012/main"/>
     </p:ext>
     <p:ext uri="GoogleSlidesCustomDataVersion2">
-      <go:slidesCustomData xmlns="" xmlns:mc="http://schemas.openxmlformats.org/markup-compatibility/2006" xmlns:mv="urn:schemas-microsoft-com:mac:vml" xmlns:c="http://schemas.openxmlformats.org/drawingml/2006/chart" xmlns:dgm="http://schemas.openxmlformats.org/drawingml/2006/diagram" xmlns:o="urn:schemas-microsoft-com:office:office" xmlns:v="urn:schemas-microsoft-com:vml" xmlns:pvml="urn:schemas-microsoft-com:office:powerpoint" xmlns:com="http://schemas.openxmlformats.org/drawingml/2006/compatibility" xmlns:p14="http://schemas.microsoft.com/office/powerpoint/2010/main" xmlns:p15="http://schemas.microsoft.com/office/powerpoint/2012/main" xmlns:ahyp="http://schemas.microsoft.com/office/drawing/2018/hyperlinkcolor" xmlns:go="http://customooxmlschemas.google.com/" r:id="rId20" roundtripDataSignature="AMtx7miml5qiCSj3k9PFfL3kPWsBeWI5Yg=="/>
+      <go:slidesCustomData xmlns:go="http://customooxmlschemas.google.com/" xmlns:ahyp="http://schemas.microsoft.com/office/drawing/2018/hyperlinkcolor" xmlns:p15="http://schemas.microsoft.com/office/powerpoint/2012/main" xmlns:p14="http://schemas.microsoft.com/office/powerpoint/2010/main" xmlns:com="http://schemas.openxmlformats.org/drawingml/2006/compatibility" xmlns:pvml="urn:schemas-microsoft-com:office:powerpoint" xmlns:v="urn:schemas-microsoft-com:vml" xmlns:o="urn:schemas-microsoft-com:office:office" xmlns:dgm="http://schemas.openxmlformats.org/drawingml/2006/diagram" xmlns:c="http://schemas.openxmlformats.org/drawingml/2006/chart" xmlns:mv="urn:schemas-microsoft-com:mac:vml" xmlns:mc="http://schemas.openxmlformats.org/markup-compatibility/2006" xmlns="" r:id="rId20" roundtripDataSignature="AMtx7miml5qiCSj3k9PFfL3kPWsBeWI5Yg=="/>
     </p:ext>
   </p:extLst>
 </p:presentation>
@@ -1084,188 +1083,6 @@
 </p:notes>
 </file>
 
-<file path=ppt/notesSlides/notesSlide11.xml><?xml version="1.0" encoding="utf-8"?>
-<p:notes xmlns:a="http://schemas.openxmlformats.org/drawingml/2006/main" xmlns:r="http://schemas.openxmlformats.org/officeDocument/2006/relationships" xmlns:p="http://schemas.openxmlformats.org/presentationml/2006/main" showMasterSp="0" showMasterPhAnim="0">
-  <p:cSld>
-    <p:spTree>
-      <p:nvGrpSpPr>
-        <p:cNvPr id="1" name="Shape 124"/>
-        <p:cNvGrpSpPr/>
-        <p:nvPr/>
-      </p:nvGrpSpPr>
-      <p:grpSpPr>
-        <a:xfrm>
-          <a:off x="0" y="0"/>
-          <a:ext cx="0" cy="0"/>
-          <a:chOff x="0" y="0"/>
-          <a:chExt cx="0" cy="0"/>
-        </a:xfrm>
-      </p:grpSpPr>
-      <p:sp>
-        <p:nvSpPr>
-          <p:cNvPr id="125" name="Google Shape;125;p11:notes"/>
-          <p:cNvSpPr>
-            <a:spLocks noGrp="1" noRot="1" noChangeAspect="1"/>
-          </p:cNvSpPr>
-          <p:nvPr>
-            <p:ph type="sldImg" idx="2"/>
-          </p:nvPr>
-        </p:nvSpPr>
-        <p:spPr>
-          <a:xfrm>
-            <a:off x="-1166813" y="0"/>
-            <a:ext cx="5334001" cy="3000375"/>
-          </a:xfrm>
-          <a:custGeom>
-            <a:avLst/>
-            <a:gdLst/>
-            <a:ahLst/>
-            <a:cxnLst/>
-            <a:rect l="l" t="t" r="r" b="b"/>
-            <a:pathLst>
-              <a:path w="120000" h="120000" extrusionOk="0">
-                <a:moveTo>
-                  <a:pt x="0" y="0"/>
-                </a:moveTo>
-                <a:lnTo>
-                  <a:pt x="120000" y="0"/>
-                </a:lnTo>
-                <a:lnTo>
-                  <a:pt x="120000" y="120000"/>
-                </a:lnTo>
-                <a:lnTo>
-                  <a:pt x="0" y="120000"/>
-                </a:lnTo>
-                <a:close/>
-              </a:path>
-            </a:pathLst>
-          </a:custGeom>
-          <a:noFill/>
-          <a:ln>
-            <a:noFill/>
-          </a:ln>
-        </p:spPr>
-      </p:sp>
-      <p:sp>
-        <p:nvSpPr>
-          <p:cNvPr id="126" name="Google Shape;126;p11:notes"/>
-          <p:cNvSpPr txBox="1">
-            <a:spLocks noGrp="1"/>
-          </p:cNvSpPr>
-          <p:nvPr>
-            <p:ph type="body" idx="1"/>
-          </p:nvPr>
-        </p:nvSpPr>
-        <p:spPr>
-          <a:xfrm>
-            <a:off x="0" y="0"/>
-            <a:ext cx="3000000" cy="3000000"/>
-          </a:xfrm>
-          <a:prstGeom prst="rect">
-            <a:avLst/>
-          </a:prstGeom>
-          <a:noFill/>
-          <a:ln>
-            <a:noFill/>
-          </a:ln>
-        </p:spPr>
-        <p:txBody>
-          <a:bodyPr spcFirstLastPara="1" wrap="square" lIns="91425" tIns="45700" rIns="91425" bIns="45700" anchor="t" anchorCtr="0">
-            <a:noAutofit/>
-          </a:bodyPr>
-          <a:lstStyle/>
-          <a:p>
-            <a:pPr marL="0" marR="0" lvl="0" indent="0" algn="l" rtl="0">
-              <a:spcBef>
-                <a:spcPts val="0"/>
-              </a:spcBef>
-              <a:spcAft>
-                <a:spcPts val="0"/>
-              </a:spcAft>
-              <a:buNone/>
-            </a:pPr>
-            <a:endParaRPr sz="1200">
-              <a:solidFill>
-                <a:schemeClr val="dk1"/>
-              </a:solidFill>
-              <a:latin typeface="Arial"/>
-              <a:ea typeface="Arial"/>
-              <a:cs typeface="Arial"/>
-              <a:sym typeface="Arial"/>
-            </a:endParaRPr>
-          </a:p>
-        </p:txBody>
-      </p:sp>
-      <p:sp>
-        <p:nvSpPr>
-          <p:cNvPr id="127" name="Google Shape;127;p11:notes"/>
-          <p:cNvSpPr txBox="1">
-            <a:spLocks noGrp="1"/>
-          </p:cNvSpPr>
-          <p:nvPr>
-            <p:ph type="sldNum" idx="12"/>
-          </p:nvPr>
-        </p:nvSpPr>
-        <p:spPr>
-          <a:xfrm>
-            <a:off x="0" y="0"/>
-            <a:ext cx="3000000" cy="3000000"/>
-          </a:xfrm>
-          <a:prstGeom prst="rect">
-            <a:avLst/>
-          </a:prstGeom>
-          <a:noFill/>
-          <a:ln>
-            <a:noFill/>
-          </a:ln>
-        </p:spPr>
-        <p:txBody>
-          <a:bodyPr spcFirstLastPara="1" wrap="square" lIns="91425" tIns="45700" rIns="91425" bIns="45700" anchor="t" anchorCtr="0">
-            <a:noAutofit/>
-          </a:bodyPr>
-          <a:lstStyle/>
-          <a:p>
-            <a:pPr marL="0" marR="0" lvl="0" indent="0" algn="l" rtl="0">
-              <a:spcBef>
-                <a:spcPts val="0"/>
-              </a:spcBef>
-              <a:spcAft>
-                <a:spcPts val="0"/>
-              </a:spcAft>
-              <a:buNone/>
-            </a:pPr>
-            <a:fld id="{00000000-1234-1234-1234-123412341234}" type="slidenum">
-              <a:rPr lang="en-US" sz="1800">
-                <a:solidFill>
-                  <a:schemeClr val="dk1"/>
-                </a:solidFill>
-                <a:latin typeface="Arial"/>
-                <a:ea typeface="Arial"/>
-                <a:cs typeface="Arial"/>
-                <a:sym typeface="Arial"/>
-              </a:rPr>
-              <a:t>11</a:t>
-            </a:fld>
-            <a:endParaRPr sz="1800">
-              <a:solidFill>
-                <a:schemeClr val="dk1"/>
-              </a:solidFill>
-              <a:latin typeface="Arial"/>
-              <a:ea typeface="Arial"/>
-              <a:cs typeface="Arial"/>
-              <a:sym typeface="Arial"/>
-            </a:endParaRPr>
-          </a:p>
-        </p:txBody>
-      </p:sp>
-    </p:spTree>
-  </p:cSld>
-  <p:clrMapOvr>
-    <a:masterClrMapping/>
-  </p:clrMapOvr>
-</p:notes>
-</file>
-
 <file path=ppt/notesSlides/notesSlide2.xml><?xml version="1.0" encoding="utf-8"?>
 <p:notes xmlns:a="http://schemas.openxmlformats.org/drawingml/2006/main" xmlns:r="http://schemas.openxmlformats.org/officeDocument/2006/relationships" xmlns:p="http://schemas.openxmlformats.org/presentationml/2006/main" showMasterSp="0" showMasterPhAnim="0">
   <p:cSld>
@@ -1449,6 +1266,370 @@
 </file>
 
 <file path=ppt/notesSlides/notesSlide3.xml><?xml version="1.0" encoding="utf-8"?>
+<p:notes xmlns:a="http://schemas.openxmlformats.org/drawingml/2006/main" xmlns:r="http://schemas.openxmlformats.org/officeDocument/2006/relationships" xmlns:p="http://schemas.openxmlformats.org/presentationml/2006/main" showMasterSp="0" showMasterPhAnim="0">
+  <p:cSld>
+    <p:spTree>
+      <p:nvGrpSpPr>
+        <p:cNvPr id="1" name="Shape 57"/>
+        <p:cNvGrpSpPr/>
+        <p:nvPr/>
+      </p:nvGrpSpPr>
+      <p:grpSpPr>
+        <a:xfrm>
+          <a:off x="0" y="0"/>
+          <a:ext cx="0" cy="0"/>
+          <a:chOff x="0" y="0"/>
+          <a:chExt cx="0" cy="0"/>
+        </a:xfrm>
+      </p:grpSpPr>
+      <p:sp>
+        <p:nvSpPr>
+          <p:cNvPr id="58" name="Google Shape;58;p5:notes"/>
+          <p:cNvSpPr>
+            <a:spLocks noGrp="1" noRot="1" noChangeAspect="1"/>
+          </p:cNvSpPr>
+          <p:nvPr>
+            <p:ph type="sldImg" idx="2"/>
+          </p:nvPr>
+        </p:nvSpPr>
+        <p:spPr>
+          <a:xfrm>
+            <a:off x="-1166813" y="0"/>
+            <a:ext cx="5334001" cy="3000375"/>
+          </a:xfrm>
+          <a:custGeom>
+            <a:avLst/>
+            <a:gdLst/>
+            <a:ahLst/>
+            <a:cxnLst/>
+            <a:rect l="l" t="t" r="r" b="b"/>
+            <a:pathLst>
+              <a:path w="120000" h="120000" extrusionOk="0">
+                <a:moveTo>
+                  <a:pt x="0" y="0"/>
+                </a:moveTo>
+                <a:lnTo>
+                  <a:pt x="120000" y="0"/>
+                </a:lnTo>
+                <a:lnTo>
+                  <a:pt x="120000" y="120000"/>
+                </a:lnTo>
+                <a:lnTo>
+                  <a:pt x="0" y="120000"/>
+                </a:lnTo>
+                <a:close/>
+              </a:path>
+            </a:pathLst>
+          </a:custGeom>
+          <a:noFill/>
+          <a:ln>
+            <a:noFill/>
+          </a:ln>
+        </p:spPr>
+      </p:sp>
+      <p:sp>
+        <p:nvSpPr>
+          <p:cNvPr id="59" name="Google Shape;59;p5:notes"/>
+          <p:cNvSpPr txBox="1">
+            <a:spLocks noGrp="1"/>
+          </p:cNvSpPr>
+          <p:nvPr>
+            <p:ph type="body" idx="1"/>
+          </p:nvPr>
+        </p:nvSpPr>
+        <p:spPr>
+          <a:xfrm>
+            <a:off x="0" y="0"/>
+            <a:ext cx="3000000" cy="3000000"/>
+          </a:xfrm>
+          <a:prstGeom prst="rect">
+            <a:avLst/>
+          </a:prstGeom>
+          <a:noFill/>
+          <a:ln>
+            <a:noFill/>
+          </a:ln>
+        </p:spPr>
+        <p:txBody>
+          <a:bodyPr spcFirstLastPara="1" wrap="square" lIns="91425" tIns="45700" rIns="91425" bIns="45700" anchor="t" anchorCtr="0">
+            <a:noAutofit/>
+          </a:bodyPr>
+          <a:lstStyle/>
+          <a:p>
+            <a:pPr marL="0" marR="0" lvl="0" indent="0" algn="l" rtl="0">
+              <a:spcBef>
+                <a:spcPts val="0"/>
+              </a:spcBef>
+              <a:spcAft>
+                <a:spcPts val="0"/>
+              </a:spcAft>
+              <a:buNone/>
+            </a:pPr>
+            <a:endParaRPr sz="1200">
+              <a:solidFill>
+                <a:schemeClr val="dk1"/>
+              </a:solidFill>
+              <a:latin typeface="Arial"/>
+              <a:ea typeface="Arial"/>
+              <a:cs typeface="Arial"/>
+              <a:sym typeface="Arial"/>
+            </a:endParaRPr>
+          </a:p>
+        </p:txBody>
+      </p:sp>
+      <p:sp>
+        <p:nvSpPr>
+          <p:cNvPr id="60" name="Google Shape;60;p5:notes"/>
+          <p:cNvSpPr txBox="1">
+            <a:spLocks noGrp="1"/>
+          </p:cNvSpPr>
+          <p:nvPr>
+            <p:ph type="sldNum" idx="12"/>
+          </p:nvPr>
+        </p:nvSpPr>
+        <p:spPr>
+          <a:xfrm>
+            <a:off x="0" y="0"/>
+            <a:ext cx="3000000" cy="3000000"/>
+          </a:xfrm>
+          <a:prstGeom prst="rect">
+            <a:avLst/>
+          </a:prstGeom>
+          <a:noFill/>
+          <a:ln>
+            <a:noFill/>
+          </a:ln>
+        </p:spPr>
+        <p:txBody>
+          <a:bodyPr spcFirstLastPara="1" wrap="square" lIns="91425" tIns="45700" rIns="91425" bIns="45700" anchor="t" anchorCtr="0">
+            <a:noAutofit/>
+          </a:bodyPr>
+          <a:lstStyle/>
+          <a:p>
+            <a:pPr marL="0" marR="0" lvl="0" indent="0" algn="l" rtl="0">
+              <a:spcBef>
+                <a:spcPts val="0"/>
+              </a:spcBef>
+              <a:spcAft>
+                <a:spcPts val="0"/>
+              </a:spcAft>
+              <a:buNone/>
+            </a:pPr>
+            <a:fld id="{00000000-1234-1234-1234-123412341234}" type="slidenum">
+              <a:rPr lang="en-US" sz="1800">
+                <a:solidFill>
+                  <a:schemeClr val="dk1"/>
+                </a:solidFill>
+                <a:latin typeface="Arial"/>
+                <a:ea typeface="Arial"/>
+                <a:cs typeface="Arial"/>
+                <a:sym typeface="Arial"/>
+              </a:rPr>
+              <a:t>3</a:t>
+            </a:fld>
+            <a:endParaRPr sz="1800">
+              <a:solidFill>
+                <a:schemeClr val="dk1"/>
+              </a:solidFill>
+              <a:latin typeface="Arial"/>
+              <a:ea typeface="Arial"/>
+              <a:cs typeface="Arial"/>
+              <a:sym typeface="Arial"/>
+            </a:endParaRPr>
+          </a:p>
+        </p:txBody>
+      </p:sp>
+    </p:spTree>
+  </p:cSld>
+  <p:clrMapOvr>
+    <a:masterClrMapping/>
+  </p:clrMapOvr>
+</p:notes>
+</file>
+
+<file path=ppt/notesSlides/notesSlide4.xml><?xml version="1.0" encoding="utf-8"?>
+<p:notes xmlns:a="http://schemas.openxmlformats.org/drawingml/2006/main" xmlns:r="http://schemas.openxmlformats.org/officeDocument/2006/relationships" xmlns:p="http://schemas.openxmlformats.org/presentationml/2006/main" showMasterSp="0" showMasterPhAnim="0">
+  <p:cSld>
+    <p:spTree>
+      <p:nvGrpSpPr>
+        <p:cNvPr id="1" name="Shape 79"/>
+        <p:cNvGrpSpPr/>
+        <p:nvPr/>
+      </p:nvGrpSpPr>
+      <p:grpSpPr>
+        <a:xfrm>
+          <a:off x="0" y="0"/>
+          <a:ext cx="0" cy="0"/>
+          <a:chOff x="0" y="0"/>
+          <a:chExt cx="0" cy="0"/>
+        </a:xfrm>
+      </p:grpSpPr>
+      <p:sp>
+        <p:nvSpPr>
+          <p:cNvPr id="80" name="Google Shape;80;p7:notes"/>
+          <p:cNvSpPr>
+            <a:spLocks noGrp="1" noRot="1" noChangeAspect="1"/>
+          </p:cNvSpPr>
+          <p:nvPr>
+            <p:ph type="sldImg" idx="2"/>
+          </p:nvPr>
+        </p:nvSpPr>
+        <p:spPr>
+          <a:xfrm>
+            <a:off x="-1166813" y="0"/>
+            <a:ext cx="5334001" cy="3000375"/>
+          </a:xfrm>
+          <a:custGeom>
+            <a:avLst/>
+            <a:gdLst/>
+            <a:ahLst/>
+            <a:cxnLst/>
+            <a:rect l="l" t="t" r="r" b="b"/>
+            <a:pathLst>
+              <a:path w="120000" h="120000" extrusionOk="0">
+                <a:moveTo>
+                  <a:pt x="0" y="0"/>
+                </a:moveTo>
+                <a:lnTo>
+                  <a:pt x="120000" y="0"/>
+                </a:lnTo>
+                <a:lnTo>
+                  <a:pt x="120000" y="120000"/>
+                </a:lnTo>
+                <a:lnTo>
+                  <a:pt x="0" y="120000"/>
+                </a:lnTo>
+                <a:close/>
+              </a:path>
+            </a:pathLst>
+          </a:custGeom>
+          <a:noFill/>
+          <a:ln>
+            <a:noFill/>
+          </a:ln>
+        </p:spPr>
+      </p:sp>
+      <p:sp>
+        <p:nvSpPr>
+          <p:cNvPr id="81" name="Google Shape;81;p7:notes"/>
+          <p:cNvSpPr txBox="1">
+            <a:spLocks noGrp="1"/>
+          </p:cNvSpPr>
+          <p:nvPr>
+            <p:ph type="body" idx="1"/>
+          </p:nvPr>
+        </p:nvSpPr>
+        <p:spPr>
+          <a:xfrm>
+            <a:off x="0" y="0"/>
+            <a:ext cx="3000000" cy="3000000"/>
+          </a:xfrm>
+          <a:prstGeom prst="rect">
+            <a:avLst/>
+          </a:prstGeom>
+          <a:noFill/>
+          <a:ln>
+            <a:noFill/>
+          </a:ln>
+        </p:spPr>
+        <p:txBody>
+          <a:bodyPr spcFirstLastPara="1" wrap="square" lIns="91425" tIns="45700" rIns="91425" bIns="45700" anchor="t" anchorCtr="0">
+            <a:noAutofit/>
+          </a:bodyPr>
+          <a:lstStyle/>
+          <a:p>
+            <a:pPr marL="0" marR="0" lvl="0" indent="0" algn="l" rtl="0">
+              <a:spcBef>
+                <a:spcPts val="0"/>
+              </a:spcBef>
+              <a:spcAft>
+                <a:spcPts val="0"/>
+              </a:spcAft>
+              <a:buNone/>
+            </a:pPr>
+            <a:endParaRPr sz="1200">
+              <a:solidFill>
+                <a:schemeClr val="dk1"/>
+              </a:solidFill>
+              <a:latin typeface="Arial"/>
+              <a:ea typeface="Arial"/>
+              <a:cs typeface="Arial"/>
+              <a:sym typeface="Arial"/>
+            </a:endParaRPr>
+          </a:p>
+        </p:txBody>
+      </p:sp>
+      <p:sp>
+        <p:nvSpPr>
+          <p:cNvPr id="82" name="Google Shape;82;p7:notes"/>
+          <p:cNvSpPr txBox="1">
+            <a:spLocks noGrp="1"/>
+          </p:cNvSpPr>
+          <p:nvPr>
+            <p:ph type="sldNum" idx="12"/>
+          </p:nvPr>
+        </p:nvSpPr>
+        <p:spPr>
+          <a:xfrm>
+            <a:off x="0" y="0"/>
+            <a:ext cx="3000000" cy="3000000"/>
+          </a:xfrm>
+          <a:prstGeom prst="rect">
+            <a:avLst/>
+          </a:prstGeom>
+          <a:noFill/>
+          <a:ln>
+            <a:noFill/>
+          </a:ln>
+        </p:spPr>
+        <p:txBody>
+          <a:bodyPr spcFirstLastPara="1" wrap="square" lIns="91425" tIns="45700" rIns="91425" bIns="45700" anchor="t" anchorCtr="0">
+            <a:noAutofit/>
+          </a:bodyPr>
+          <a:lstStyle/>
+          <a:p>
+            <a:pPr marL="0" marR="0" lvl="0" indent="0" algn="l" rtl="0">
+              <a:spcBef>
+                <a:spcPts val="0"/>
+              </a:spcBef>
+              <a:spcAft>
+                <a:spcPts val="0"/>
+              </a:spcAft>
+              <a:buNone/>
+            </a:pPr>
+            <a:fld id="{00000000-1234-1234-1234-123412341234}" type="slidenum">
+              <a:rPr lang="en-US" sz="1800">
+                <a:solidFill>
+                  <a:schemeClr val="dk1"/>
+                </a:solidFill>
+                <a:latin typeface="Arial"/>
+                <a:ea typeface="Arial"/>
+                <a:cs typeface="Arial"/>
+                <a:sym typeface="Arial"/>
+              </a:rPr>
+              <a:t>4</a:t>
+            </a:fld>
+            <a:endParaRPr sz="1800">
+              <a:solidFill>
+                <a:schemeClr val="dk1"/>
+              </a:solidFill>
+              <a:latin typeface="Arial"/>
+              <a:ea typeface="Arial"/>
+              <a:cs typeface="Arial"/>
+              <a:sym typeface="Arial"/>
+            </a:endParaRPr>
+          </a:p>
+        </p:txBody>
+      </p:sp>
+    </p:spTree>
+  </p:cSld>
+  <p:clrMapOvr>
+    <a:masterClrMapping/>
+  </p:clrMapOvr>
+</p:notes>
+</file>
+
+<file path=ppt/notesSlides/notesSlide5.xml><?xml version="1.0" encoding="utf-8"?>
 <p:notes xmlns:a="http://schemas.openxmlformats.org/drawingml/2006/main" xmlns:r="http://schemas.openxmlformats.org/officeDocument/2006/relationships" xmlns:p="http://schemas.openxmlformats.org/presentationml/2006/main" showMasterSp="0" showMasterPhAnim="0">
   <p:cSld>
     <p:spTree>
@@ -1738,370 +1919,6 @@
       <p:sp>
         <p:nvSpPr>
           <p:cNvPr id="23" name="Google Shape;23;p2:notes"/>
-          <p:cNvSpPr txBox="1">
-            <a:spLocks noGrp="1"/>
-          </p:cNvSpPr>
-          <p:nvPr>
-            <p:ph type="sldNum" idx="12"/>
-          </p:nvPr>
-        </p:nvSpPr>
-        <p:spPr>
-          <a:xfrm>
-            <a:off x="0" y="0"/>
-            <a:ext cx="3000000" cy="3000000"/>
-          </a:xfrm>
-          <a:prstGeom prst="rect">
-            <a:avLst/>
-          </a:prstGeom>
-          <a:noFill/>
-          <a:ln>
-            <a:noFill/>
-          </a:ln>
-        </p:spPr>
-        <p:txBody>
-          <a:bodyPr spcFirstLastPara="1" wrap="square" lIns="91425" tIns="45700" rIns="91425" bIns="45700" anchor="t" anchorCtr="0">
-            <a:noAutofit/>
-          </a:bodyPr>
-          <a:lstStyle/>
-          <a:p>
-            <a:pPr marL="0" marR="0" lvl="0" indent="0" algn="l" rtl="0">
-              <a:spcBef>
-                <a:spcPts val="0"/>
-              </a:spcBef>
-              <a:spcAft>
-                <a:spcPts val="0"/>
-              </a:spcAft>
-              <a:buNone/>
-            </a:pPr>
-            <a:fld id="{00000000-1234-1234-1234-123412341234}" type="slidenum">
-              <a:rPr lang="en-US" sz="1800">
-                <a:solidFill>
-                  <a:schemeClr val="dk1"/>
-                </a:solidFill>
-                <a:latin typeface="Arial"/>
-                <a:ea typeface="Arial"/>
-                <a:cs typeface="Arial"/>
-                <a:sym typeface="Arial"/>
-              </a:rPr>
-              <a:t>3</a:t>
-            </a:fld>
-            <a:endParaRPr sz="1800">
-              <a:solidFill>
-                <a:schemeClr val="dk1"/>
-              </a:solidFill>
-              <a:latin typeface="Arial"/>
-              <a:ea typeface="Arial"/>
-              <a:cs typeface="Arial"/>
-              <a:sym typeface="Arial"/>
-            </a:endParaRPr>
-          </a:p>
-        </p:txBody>
-      </p:sp>
-    </p:spTree>
-  </p:cSld>
-  <p:clrMapOvr>
-    <a:masterClrMapping/>
-  </p:clrMapOvr>
-</p:notes>
-</file>
-
-<file path=ppt/notesSlides/notesSlide4.xml><?xml version="1.0" encoding="utf-8"?>
-<p:notes xmlns:a="http://schemas.openxmlformats.org/drawingml/2006/main" xmlns:r="http://schemas.openxmlformats.org/officeDocument/2006/relationships" xmlns:p="http://schemas.openxmlformats.org/presentationml/2006/main" showMasterSp="0" showMasterPhAnim="0">
-  <p:cSld>
-    <p:spTree>
-      <p:nvGrpSpPr>
-        <p:cNvPr id="1" name="Shape 57"/>
-        <p:cNvGrpSpPr/>
-        <p:nvPr/>
-      </p:nvGrpSpPr>
-      <p:grpSpPr>
-        <a:xfrm>
-          <a:off x="0" y="0"/>
-          <a:ext cx="0" cy="0"/>
-          <a:chOff x="0" y="0"/>
-          <a:chExt cx="0" cy="0"/>
-        </a:xfrm>
-      </p:grpSpPr>
-      <p:sp>
-        <p:nvSpPr>
-          <p:cNvPr id="58" name="Google Shape;58;p5:notes"/>
-          <p:cNvSpPr>
-            <a:spLocks noGrp="1" noRot="1" noChangeAspect="1"/>
-          </p:cNvSpPr>
-          <p:nvPr>
-            <p:ph type="sldImg" idx="2"/>
-          </p:nvPr>
-        </p:nvSpPr>
-        <p:spPr>
-          <a:xfrm>
-            <a:off x="-1166813" y="0"/>
-            <a:ext cx="5334001" cy="3000375"/>
-          </a:xfrm>
-          <a:custGeom>
-            <a:avLst/>
-            <a:gdLst/>
-            <a:ahLst/>
-            <a:cxnLst/>
-            <a:rect l="l" t="t" r="r" b="b"/>
-            <a:pathLst>
-              <a:path w="120000" h="120000" extrusionOk="0">
-                <a:moveTo>
-                  <a:pt x="0" y="0"/>
-                </a:moveTo>
-                <a:lnTo>
-                  <a:pt x="120000" y="0"/>
-                </a:lnTo>
-                <a:lnTo>
-                  <a:pt x="120000" y="120000"/>
-                </a:lnTo>
-                <a:lnTo>
-                  <a:pt x="0" y="120000"/>
-                </a:lnTo>
-                <a:close/>
-              </a:path>
-            </a:pathLst>
-          </a:custGeom>
-          <a:noFill/>
-          <a:ln>
-            <a:noFill/>
-          </a:ln>
-        </p:spPr>
-      </p:sp>
-      <p:sp>
-        <p:nvSpPr>
-          <p:cNvPr id="59" name="Google Shape;59;p5:notes"/>
-          <p:cNvSpPr txBox="1">
-            <a:spLocks noGrp="1"/>
-          </p:cNvSpPr>
-          <p:nvPr>
-            <p:ph type="body" idx="1"/>
-          </p:nvPr>
-        </p:nvSpPr>
-        <p:spPr>
-          <a:xfrm>
-            <a:off x="0" y="0"/>
-            <a:ext cx="3000000" cy="3000000"/>
-          </a:xfrm>
-          <a:prstGeom prst="rect">
-            <a:avLst/>
-          </a:prstGeom>
-          <a:noFill/>
-          <a:ln>
-            <a:noFill/>
-          </a:ln>
-        </p:spPr>
-        <p:txBody>
-          <a:bodyPr spcFirstLastPara="1" wrap="square" lIns="91425" tIns="45700" rIns="91425" bIns="45700" anchor="t" anchorCtr="0">
-            <a:noAutofit/>
-          </a:bodyPr>
-          <a:lstStyle/>
-          <a:p>
-            <a:pPr marL="0" marR="0" lvl="0" indent="0" algn="l" rtl="0">
-              <a:spcBef>
-                <a:spcPts val="0"/>
-              </a:spcBef>
-              <a:spcAft>
-                <a:spcPts val="0"/>
-              </a:spcAft>
-              <a:buNone/>
-            </a:pPr>
-            <a:endParaRPr sz="1200">
-              <a:solidFill>
-                <a:schemeClr val="dk1"/>
-              </a:solidFill>
-              <a:latin typeface="Arial"/>
-              <a:ea typeface="Arial"/>
-              <a:cs typeface="Arial"/>
-              <a:sym typeface="Arial"/>
-            </a:endParaRPr>
-          </a:p>
-        </p:txBody>
-      </p:sp>
-      <p:sp>
-        <p:nvSpPr>
-          <p:cNvPr id="60" name="Google Shape;60;p5:notes"/>
-          <p:cNvSpPr txBox="1">
-            <a:spLocks noGrp="1"/>
-          </p:cNvSpPr>
-          <p:nvPr>
-            <p:ph type="sldNum" idx="12"/>
-          </p:nvPr>
-        </p:nvSpPr>
-        <p:spPr>
-          <a:xfrm>
-            <a:off x="0" y="0"/>
-            <a:ext cx="3000000" cy="3000000"/>
-          </a:xfrm>
-          <a:prstGeom prst="rect">
-            <a:avLst/>
-          </a:prstGeom>
-          <a:noFill/>
-          <a:ln>
-            <a:noFill/>
-          </a:ln>
-        </p:spPr>
-        <p:txBody>
-          <a:bodyPr spcFirstLastPara="1" wrap="square" lIns="91425" tIns="45700" rIns="91425" bIns="45700" anchor="t" anchorCtr="0">
-            <a:noAutofit/>
-          </a:bodyPr>
-          <a:lstStyle/>
-          <a:p>
-            <a:pPr marL="0" marR="0" lvl="0" indent="0" algn="l" rtl="0">
-              <a:spcBef>
-                <a:spcPts val="0"/>
-              </a:spcBef>
-              <a:spcAft>
-                <a:spcPts val="0"/>
-              </a:spcAft>
-              <a:buNone/>
-            </a:pPr>
-            <a:fld id="{00000000-1234-1234-1234-123412341234}" type="slidenum">
-              <a:rPr lang="en-US" sz="1800">
-                <a:solidFill>
-                  <a:schemeClr val="dk1"/>
-                </a:solidFill>
-                <a:latin typeface="Arial"/>
-                <a:ea typeface="Arial"/>
-                <a:cs typeface="Arial"/>
-                <a:sym typeface="Arial"/>
-              </a:rPr>
-              <a:t>4</a:t>
-            </a:fld>
-            <a:endParaRPr sz="1800">
-              <a:solidFill>
-                <a:schemeClr val="dk1"/>
-              </a:solidFill>
-              <a:latin typeface="Arial"/>
-              <a:ea typeface="Arial"/>
-              <a:cs typeface="Arial"/>
-              <a:sym typeface="Arial"/>
-            </a:endParaRPr>
-          </a:p>
-        </p:txBody>
-      </p:sp>
-    </p:spTree>
-  </p:cSld>
-  <p:clrMapOvr>
-    <a:masterClrMapping/>
-  </p:clrMapOvr>
-</p:notes>
-</file>
-
-<file path=ppt/notesSlides/notesSlide5.xml><?xml version="1.0" encoding="utf-8"?>
-<p:notes xmlns:a="http://schemas.openxmlformats.org/drawingml/2006/main" xmlns:r="http://schemas.openxmlformats.org/officeDocument/2006/relationships" xmlns:p="http://schemas.openxmlformats.org/presentationml/2006/main" showMasterSp="0" showMasterPhAnim="0">
-  <p:cSld>
-    <p:spTree>
-      <p:nvGrpSpPr>
-        <p:cNvPr id="1" name="Shape 79"/>
-        <p:cNvGrpSpPr/>
-        <p:nvPr/>
-      </p:nvGrpSpPr>
-      <p:grpSpPr>
-        <a:xfrm>
-          <a:off x="0" y="0"/>
-          <a:ext cx="0" cy="0"/>
-          <a:chOff x="0" y="0"/>
-          <a:chExt cx="0" cy="0"/>
-        </a:xfrm>
-      </p:grpSpPr>
-      <p:sp>
-        <p:nvSpPr>
-          <p:cNvPr id="80" name="Google Shape;80;p7:notes"/>
-          <p:cNvSpPr>
-            <a:spLocks noGrp="1" noRot="1" noChangeAspect="1"/>
-          </p:cNvSpPr>
-          <p:nvPr>
-            <p:ph type="sldImg" idx="2"/>
-          </p:nvPr>
-        </p:nvSpPr>
-        <p:spPr>
-          <a:xfrm>
-            <a:off x="-1166813" y="0"/>
-            <a:ext cx="5334001" cy="3000375"/>
-          </a:xfrm>
-          <a:custGeom>
-            <a:avLst/>
-            <a:gdLst/>
-            <a:ahLst/>
-            <a:cxnLst/>
-            <a:rect l="l" t="t" r="r" b="b"/>
-            <a:pathLst>
-              <a:path w="120000" h="120000" extrusionOk="0">
-                <a:moveTo>
-                  <a:pt x="0" y="0"/>
-                </a:moveTo>
-                <a:lnTo>
-                  <a:pt x="120000" y="0"/>
-                </a:lnTo>
-                <a:lnTo>
-                  <a:pt x="120000" y="120000"/>
-                </a:lnTo>
-                <a:lnTo>
-                  <a:pt x="0" y="120000"/>
-                </a:lnTo>
-                <a:close/>
-              </a:path>
-            </a:pathLst>
-          </a:custGeom>
-          <a:noFill/>
-          <a:ln>
-            <a:noFill/>
-          </a:ln>
-        </p:spPr>
-      </p:sp>
-      <p:sp>
-        <p:nvSpPr>
-          <p:cNvPr id="81" name="Google Shape;81;p7:notes"/>
-          <p:cNvSpPr txBox="1">
-            <a:spLocks noGrp="1"/>
-          </p:cNvSpPr>
-          <p:nvPr>
-            <p:ph type="body" idx="1"/>
-          </p:nvPr>
-        </p:nvSpPr>
-        <p:spPr>
-          <a:xfrm>
-            <a:off x="0" y="0"/>
-            <a:ext cx="3000000" cy="3000000"/>
-          </a:xfrm>
-          <a:prstGeom prst="rect">
-            <a:avLst/>
-          </a:prstGeom>
-          <a:noFill/>
-          <a:ln>
-            <a:noFill/>
-          </a:ln>
-        </p:spPr>
-        <p:txBody>
-          <a:bodyPr spcFirstLastPara="1" wrap="square" lIns="91425" tIns="45700" rIns="91425" bIns="45700" anchor="t" anchorCtr="0">
-            <a:noAutofit/>
-          </a:bodyPr>
-          <a:lstStyle/>
-          <a:p>
-            <a:pPr marL="0" marR="0" lvl="0" indent="0" algn="l" rtl="0">
-              <a:spcBef>
-                <a:spcPts val="0"/>
-              </a:spcBef>
-              <a:spcAft>
-                <a:spcPts val="0"/>
-              </a:spcAft>
-              <a:buNone/>
-            </a:pPr>
-            <a:endParaRPr sz="1200">
-              <a:solidFill>
-                <a:schemeClr val="dk1"/>
-              </a:solidFill>
-              <a:latin typeface="Arial"/>
-              <a:ea typeface="Arial"/>
-              <a:cs typeface="Arial"/>
-              <a:sym typeface="Arial"/>
-            </a:endParaRPr>
-          </a:p>
-        </p:txBody>
-      </p:sp>
-      <p:sp>
-        <p:nvSpPr>
-          <p:cNvPr id="82" name="Google Shape;82;p7:notes"/>
           <p:cNvSpPr txBox="1">
             <a:spLocks noGrp="1"/>
           </p:cNvSpPr>
@@ -4065,7 +3882,7 @@
         </p:blipFill>
         <p:spPr>
           <a:xfrm>
-            <a:off x="4376058" y="-3013975"/>
+            <a:off x="4376058" y="-2998735"/>
             <a:ext cx="6720928" cy="6442352"/>
           </a:xfrm>
           <a:prstGeom prst="rect">
@@ -4082,18 +3899,159 @@
   <p:clrMapOvr>
     <a:masterClrMapping/>
   </p:clrMapOvr>
-  <mc:AlternateContent xmlns:mc="http://schemas.openxmlformats.org/markup-compatibility/2006" xmlns:p14="http://schemas.microsoft.com/office/powerpoint/2010/main">
-    <mc:Choice Requires="p14">
-      <p:transition spd="slow" p14:dur="1400">
-        <p14:ripple/>
+  <mc:AlternateContent xmlns:mc="http://schemas.openxmlformats.org/markup-compatibility/2006">
+    <mc:Choice xmlns:p14="http://schemas.microsoft.com/office/powerpoint/2010/main" Requires="p14">
+      <p:transition spd="slow" p14:dur="1750">
+        <p:fade thruBlk="1"/>
       </p:transition>
     </mc:Choice>
-    <mc:Fallback xmlns="">
+    <mc:Fallback>
       <p:transition spd="slow">
-        <p:fade/>
+        <p:fade thruBlk="1"/>
       </p:transition>
     </mc:Fallback>
   </mc:AlternateContent>
+  <p:timing>
+    <p:tnLst>
+      <p:par>
+        <p:cTn id="1" dur="indefinite" restart="never" nodeType="tmRoot">
+          <p:childTnLst>
+            <p:seq concurrent="1" nextAc="seek">
+              <p:cTn id="2" dur="indefinite" nodeType="mainSeq">
+                <p:childTnLst>
+                  <p:par>
+                    <p:cTn id="3" fill="hold">
+                      <p:stCondLst>
+                        <p:cond delay="indefinite"/>
+                        <p:cond evt="onBegin" delay="0">
+                          <p:tn val="2"/>
+                        </p:cond>
+                      </p:stCondLst>
+                      <p:childTnLst>
+                        <p:par>
+                          <p:cTn id="4" fill="hold">
+                            <p:stCondLst>
+                              <p:cond delay="0"/>
+                            </p:stCondLst>
+                            <p:childTnLst>
+                              <p:par>
+                                <p:cTn id="5" presetID="10" presetClass="entr" presetSubtype="0" fill="hold" grpId="0" nodeType="withEffect">
+                                  <p:stCondLst>
+                                    <p:cond delay="0"/>
+                                  </p:stCondLst>
+                                  <p:childTnLst>
+                                    <p:set>
+                                      <p:cBhvr>
+                                        <p:cTn id="6" dur="1" fill="hold">
+                                          <p:stCondLst>
+                                            <p:cond delay="0"/>
+                                          </p:stCondLst>
+                                        </p:cTn>
+                                        <p:tgtEl>
+                                          <p:spTgt spid="15"/>
+                                        </p:tgtEl>
+                                        <p:attrNameLst>
+                                          <p:attrName>style.visibility</p:attrName>
+                                        </p:attrNameLst>
+                                      </p:cBhvr>
+                                      <p:to>
+                                        <p:strVal val="visible"/>
+                                      </p:to>
+                                    </p:set>
+                                    <p:animEffect transition="in" filter="fade">
+                                      <p:cBhvr>
+                                        <p:cTn id="7" dur="1000"/>
+                                        <p:tgtEl>
+                                          <p:spTgt spid="15"/>
+                                        </p:tgtEl>
+                                      </p:cBhvr>
+                                    </p:animEffect>
+                                  </p:childTnLst>
+                                </p:cTn>
+                              </p:par>
+                            </p:childTnLst>
+                          </p:cTn>
+                        </p:par>
+                        <p:par>
+                          <p:cTn id="8" fill="hold">
+                            <p:stCondLst>
+                              <p:cond delay="1000"/>
+                            </p:stCondLst>
+                            <p:childTnLst>
+                              <p:par>
+                                <p:cTn id="9" presetID="10" presetClass="entr" presetSubtype="0" fill="hold" nodeType="afterEffect">
+                                  <p:stCondLst>
+                                    <p:cond delay="0"/>
+                                  </p:stCondLst>
+                                  <p:childTnLst>
+                                    <p:set>
+                                      <p:cBhvr>
+                                        <p:cTn id="10" dur="1" fill="hold">
+                                          <p:stCondLst>
+                                            <p:cond delay="0"/>
+                                          </p:stCondLst>
+                                        </p:cTn>
+                                        <p:tgtEl>
+                                          <p:spTgt spid="16">
+                                            <p:txEl>
+                                              <p:pRg st="0" end="0"/>
+                                            </p:txEl>
+                                          </p:spTgt>
+                                        </p:tgtEl>
+                                        <p:attrNameLst>
+                                          <p:attrName>style.visibility</p:attrName>
+                                        </p:attrNameLst>
+                                      </p:cBhvr>
+                                      <p:to>
+                                        <p:strVal val="visible"/>
+                                      </p:to>
+                                    </p:set>
+                                    <p:animEffect transition="in" filter="fade">
+                                      <p:cBhvr>
+                                        <p:cTn id="11" dur="1000"/>
+                                        <p:tgtEl>
+                                          <p:spTgt spid="16">
+                                            <p:txEl>
+                                              <p:pRg st="0" end="0"/>
+                                            </p:txEl>
+                                          </p:spTgt>
+                                        </p:tgtEl>
+                                      </p:cBhvr>
+                                    </p:animEffect>
+                                  </p:childTnLst>
+                                </p:cTn>
+                              </p:par>
+                            </p:childTnLst>
+                          </p:cTn>
+                        </p:par>
+                      </p:childTnLst>
+                    </p:cTn>
+                  </p:par>
+                </p:childTnLst>
+              </p:cTn>
+              <p:prevCondLst>
+                <p:cond evt="onPrev" delay="0">
+                  <p:tgtEl>
+                    <p:sldTgt/>
+                  </p:tgtEl>
+                </p:cond>
+              </p:prevCondLst>
+              <p:nextCondLst>
+                <p:cond evt="onNext" delay="0">
+                  <p:tgtEl>
+                    <p:sldTgt/>
+                  </p:tgtEl>
+                </p:cond>
+              </p:nextCondLst>
+            </p:seq>
+          </p:childTnLst>
+        </p:cTn>
+      </p:par>
+    </p:tnLst>
+    <p:bldLst>
+      <p:bldP spid="15" grpId="0"/>
+    </p:bldLst>
+  </p:timing>
 </p:sld>
 </file>
 
@@ -4230,7 +4188,7 @@
         </p:nvSpPr>
         <p:spPr>
           <a:xfrm>
-            <a:off x="871538" y="2047875"/>
+            <a:off x="752593" y="483067"/>
             <a:ext cx="7862888" cy="1047750"/>
           </a:xfrm>
           <a:prstGeom prst="rect">
@@ -4453,723 +4411,2579 @@
           </a:ln>
         </p:spPr>
       </p:pic>
+      <mc:AlternateContent xmlns:mc="http://schemas.openxmlformats.org/markup-compatibility/2006">
+        <mc:Choice xmlns:am3d="http://schemas.microsoft.com/office/drawing/2017/model3d" Requires="am3d">
+          <p:graphicFrame>
+            <p:nvGraphicFramePr>
+              <p:cNvPr id="2" name="3D Model 1" descr="Smiling Face With Sunglasses Emoji">
+                <a:extLst>
+                  <a:ext uri="{FF2B5EF4-FFF2-40B4-BE49-F238E27FC236}">
+                    <a16:creationId xmlns:a16="http://schemas.microsoft.com/office/drawing/2014/main" id="{A28314BB-967D-5BC8-02F8-A2A01A477B3E}"/>
+                  </a:ext>
+                </a:extLst>
+              </p:cNvPr>
+              <p:cNvGraphicFramePr>
+                <a:graphicFrameLocks noChangeAspect="1"/>
+              </p:cNvGraphicFramePr>
+              <p:nvPr>
+                <p:extLst>
+                  <p:ext uri="{D42A27DB-BD31-4B8C-83A1-F6EECF244321}">
+                    <p14:modId xmlns:p14="http://schemas.microsoft.com/office/powerpoint/2010/main" val="916891462"/>
+                  </p:ext>
+                </p:extLst>
+              </p:nvPr>
+            </p:nvGraphicFramePr>
+            <p:xfrm>
+              <a:off x="3411242" y="1867050"/>
+              <a:ext cx="2321513" cy="2225284"/>
+            </p:xfrm>
+            <a:graphic>
+              <a:graphicData uri="http://schemas.microsoft.com/office/drawing/2017/model3d">
+                <am3d:model3d r:embed="rId6">
+                  <am3d:spPr>
+                    <a:xfrm>
+                      <a:off x="0" y="0"/>
+                      <a:ext cx="2321513" cy="2225284"/>
+                    </a:xfrm>
+                    <a:prstGeom prst="rect">
+                      <a:avLst/>
+                    </a:prstGeom>
+                  </am3d:spPr>
+                  <am3d:camera>
+                    <am3d:pos x="0" y="0" z="78334150"/>
+                    <am3d:up dx="0" dy="36000000" dz="0"/>
+                    <am3d:lookAt x="0" y="0" z="0"/>
+                    <am3d:perspective fov="2700000"/>
+                  </am3d:camera>
+                  <am3d:trans>
+                    <am3d:meterPerModelUnit n="88884" d="1000000"/>
+                    <am3d:preTrans dx="1832" dy="-16799170" dz="-1200816"/>
+                    <am3d:scale>
+                      <am3d:sx n="1000000" d="1000000"/>
+                      <am3d:sy n="1000000" d="1000000"/>
+                      <am3d:sz n="1000000" d="1000000"/>
+                    </am3d:scale>
+                    <am3d:rot/>
+                    <am3d:postTrans dx="0" dy="0" dz="0"/>
+                  </am3d:trans>
+                  <am3d:raster rName="Office3DRenderer" rVer="16.0.8326">
+                    <am3d:blip r:embed="rId7"/>
+                  </am3d:raster>
+                  <am3d:objViewport viewportSz="4077683"/>
+                  <am3d:ambientLight>
+                    <am3d:clr>
+                      <a:scrgbClr r="50000" g="50000" b="50000"/>
+                    </am3d:clr>
+                    <am3d:illuminance n="500000" d="1000000"/>
+                  </am3d:ambientLight>
+                  <am3d:ptLight rad="0">
+                    <am3d:clr>
+                      <a:scrgbClr r="100000" g="75000" b="50000"/>
+                    </am3d:clr>
+                    <am3d:intensity n="9765625" d="1000000"/>
+                    <am3d:pos x="21959998" y="70920001" z="16344003"/>
+                  </am3d:ptLight>
+                  <am3d:ptLight rad="0">
+                    <am3d:clr>
+                      <a:scrgbClr r="40000" g="60000" b="95000"/>
+                    </am3d:clr>
+                    <am3d:intensity n="12250000" d="1000000"/>
+                    <am3d:pos x="-37964106" y="51130435" z="57631972"/>
+                  </am3d:ptLight>
+                  <am3d:ptLight rad="0">
+                    <am3d:clr>
+                      <a:scrgbClr r="86837" g="72700" b="100000"/>
+                    </am3d:clr>
+                    <am3d:intensity n="3125000" d="1000000"/>
+                    <am3d:pos x="-37739122" y="58056624" z="-34769649"/>
+                  </am3d:ptLight>
+                </am3d:model3d>
+              </a:graphicData>
+            </a:graphic>
+          </p:graphicFrame>
+        </mc:Choice>
+        <mc:Fallback>
+          <p:pic>
+            <p:nvPicPr>
+              <p:cNvPr id="2" name="3D Model 1" descr="Smiling Face With Sunglasses Emoji">
+                <a:extLst>
+                  <a:ext uri="{FF2B5EF4-FFF2-40B4-BE49-F238E27FC236}">
+                    <a16:creationId xmlns:a16="http://schemas.microsoft.com/office/drawing/2014/main" id="{A28314BB-967D-5BC8-02F8-A2A01A477B3E}"/>
+                  </a:ext>
+                </a:extLst>
+              </p:cNvPr>
+              <p:cNvPicPr>
+                <a:picLocks noGrp="1" noRot="1" noChangeAspect="1" noMove="1" noResize="1" noEditPoints="1" noAdjustHandles="1" noChangeArrowheads="1" noChangeShapeType="1" noCrop="1"/>
+              </p:cNvPicPr>
+              <p:nvPr/>
+            </p:nvPicPr>
+            <p:blipFill>
+              <a:blip r:embed="rId7"/>
+              <a:stretch>
+                <a:fillRect/>
+              </a:stretch>
+            </p:blipFill>
+            <p:spPr>
+              <a:xfrm>
+                <a:off x="3411242" y="1867050"/>
+                <a:ext cx="2321513" cy="2225284"/>
+              </a:xfrm>
+              <a:prstGeom prst="rect">
+                <a:avLst/>
+              </a:prstGeom>
+            </p:spPr>
+          </p:pic>
+        </mc:Fallback>
+      </mc:AlternateContent>
     </p:spTree>
   </p:cSld>
   <p:clrMapOvr>
     <a:masterClrMapping/>
   </p:clrMapOvr>
-</p:sld>
-</file>
-
-<file path=ppt/slides/slide11.xml><?xml version="1.0" encoding="utf-8"?>
-<p:sld xmlns:a="http://schemas.openxmlformats.org/drawingml/2006/main" xmlns:r="http://schemas.openxmlformats.org/officeDocument/2006/relationships" xmlns:p="http://schemas.openxmlformats.org/presentationml/2006/main">
-  <p:cSld>
-    <p:bg>
-      <p:bgPr>
-        <a:solidFill>
-          <a:srgbClr val="000000"/>
-        </a:solidFill>
-        <a:effectLst/>
-      </p:bgPr>
-    </p:bg>
-    <p:spTree>
-      <p:nvGrpSpPr>
-        <p:cNvPr id="1" name="Shape 128"/>
-        <p:cNvGrpSpPr/>
-        <p:nvPr/>
-      </p:nvGrpSpPr>
-      <p:grpSpPr>
-        <a:xfrm>
-          <a:off x="0" y="0"/>
-          <a:ext cx="0" cy="0"/>
-          <a:chOff x="0" y="0"/>
-          <a:chExt cx="0" cy="0"/>
-        </a:xfrm>
-      </p:grpSpPr>
-      <p:sp>
-        <p:nvSpPr>
-          <p:cNvPr id="129" name="Google Shape;129;p11"/>
-          <p:cNvSpPr/>
-          <p:nvPr/>
-        </p:nvSpPr>
-        <p:spPr>
-          <a:xfrm>
-            <a:off x="0" y="0"/>
-            <a:ext cx="9144000" cy="5143500"/>
-          </a:xfrm>
-          <a:prstGeom prst="rect">
-            <a:avLst/>
-          </a:prstGeom>
-          <a:noFill/>
-          <a:ln>
-            <a:noFill/>
-          </a:ln>
-        </p:spPr>
-        <p:txBody>
-          <a:bodyPr spcFirstLastPara="1" wrap="square" lIns="91425" tIns="45700" rIns="91425" bIns="45700" anchor="t" anchorCtr="0">
-            <a:noAutofit/>
-          </a:bodyPr>
-          <a:lstStyle/>
-          <a:p>
-            <a:pPr marL="0" marR="0" lvl="0" indent="0" algn="l" rtl="0">
-              <a:spcBef>
-                <a:spcPts val="0"/>
-              </a:spcBef>
-              <a:spcAft>
-                <a:spcPts val="0"/>
-              </a:spcAft>
-              <a:buNone/>
-            </a:pPr>
-            <a:endParaRPr sz="1800">
-              <a:solidFill>
-                <a:schemeClr val="dk1"/>
-              </a:solidFill>
-              <a:latin typeface="Calibri"/>
-              <a:ea typeface="Calibri"/>
-              <a:cs typeface="Calibri"/>
-              <a:sym typeface="Calibri"/>
-            </a:endParaRPr>
-          </a:p>
-        </p:txBody>
-      </p:sp>
-      <p:pic>
-        <p:nvPicPr>
-          <p:cNvPr id="130" name="Google Shape;130;p11" descr="preencoded.png"/>
-          <p:cNvPicPr preferRelativeResize="0"/>
-          <p:nvPr/>
-        </p:nvPicPr>
-        <p:blipFill rotWithShape="1">
-          <a:blip r:embed="rId3">
-            <a:alphaModFix/>
-          </a:blip>
-          <a:srcRect/>
-          <a:stretch/>
-        </p:blipFill>
-        <p:spPr>
-          <a:xfrm>
-            <a:off x="0" y="0"/>
-            <a:ext cx="9144000" cy="5143500"/>
-          </a:xfrm>
-          <a:prstGeom prst="rect">
-            <a:avLst/>
-          </a:prstGeom>
-          <a:noFill/>
-          <a:ln>
-            <a:noFill/>
-          </a:ln>
-        </p:spPr>
-      </p:pic>
-      <p:pic>
-        <p:nvPicPr>
-          <p:cNvPr id="131" name="Google Shape;131;p11" descr="preencoded.png"/>
-          <p:cNvPicPr preferRelativeResize="0"/>
-          <p:nvPr/>
-        </p:nvPicPr>
-        <p:blipFill rotWithShape="1">
-          <a:blip r:embed="rId4">
-            <a:alphaModFix/>
-          </a:blip>
-          <a:srcRect/>
-          <a:stretch/>
-        </p:blipFill>
-        <p:spPr>
-          <a:xfrm>
-            <a:off x="289010" y="802482"/>
-            <a:ext cx="1314450" cy="1581150"/>
-          </a:xfrm>
-          <a:prstGeom prst="rect">
-            <a:avLst/>
-          </a:prstGeom>
-          <a:noFill/>
-          <a:ln>
-            <a:noFill/>
-          </a:ln>
-        </p:spPr>
-      </p:pic>
-      <p:pic>
-        <p:nvPicPr>
-          <p:cNvPr id="132" name="Google Shape;132;p11" descr="preencoded.png"/>
-          <p:cNvPicPr preferRelativeResize="0"/>
-          <p:nvPr/>
-        </p:nvPicPr>
-        <p:blipFill rotWithShape="1">
-          <a:blip r:embed="rId5">
-            <a:alphaModFix/>
-          </a:blip>
-          <a:srcRect/>
-          <a:stretch/>
-        </p:blipFill>
-        <p:spPr>
-          <a:xfrm>
-            <a:off x="2276475" y="768706"/>
-            <a:ext cx="1643063" cy="1285875"/>
-          </a:xfrm>
-          <a:prstGeom prst="rect">
-            <a:avLst/>
-          </a:prstGeom>
-          <a:noFill/>
-          <a:ln>
-            <a:noFill/>
-          </a:ln>
-        </p:spPr>
-      </p:pic>
-      <p:pic>
-        <p:nvPicPr>
-          <p:cNvPr id="133" name="Google Shape;133;p11" descr="preencoded.png"/>
-          <p:cNvPicPr preferRelativeResize="0"/>
-          <p:nvPr/>
-        </p:nvPicPr>
-        <p:blipFill rotWithShape="1">
-          <a:blip r:embed="rId6">
-            <a:alphaModFix/>
-          </a:blip>
-          <a:srcRect/>
-          <a:stretch/>
-        </p:blipFill>
-        <p:spPr>
-          <a:xfrm>
-            <a:off x="988744" y="2305050"/>
-            <a:ext cx="1576388" cy="1533525"/>
-          </a:xfrm>
-          <a:prstGeom prst="rect">
-            <a:avLst/>
-          </a:prstGeom>
-          <a:noFill/>
-          <a:ln>
-            <a:noFill/>
-          </a:ln>
-        </p:spPr>
-      </p:pic>
-      <p:pic>
-        <p:nvPicPr>
-          <p:cNvPr id="134" name="Google Shape;134;p11" descr="preencoded.png"/>
-          <p:cNvPicPr preferRelativeResize="0"/>
-          <p:nvPr/>
-        </p:nvPicPr>
-        <p:blipFill rotWithShape="1">
-          <a:blip r:embed="rId7">
-            <a:alphaModFix/>
-          </a:blip>
-          <a:srcRect/>
-          <a:stretch/>
-        </p:blipFill>
-        <p:spPr>
-          <a:xfrm>
-            <a:off x="250556" y="2897980"/>
-            <a:ext cx="1619250" cy="1443038"/>
-          </a:xfrm>
-          <a:prstGeom prst="rect">
-            <a:avLst/>
-          </a:prstGeom>
-          <a:noFill/>
-          <a:ln>
-            <a:noFill/>
-          </a:ln>
-        </p:spPr>
-      </p:pic>
-      <p:pic>
-        <p:nvPicPr>
-          <p:cNvPr id="135" name="Google Shape;135;p11" descr="preencoded.png"/>
-          <p:cNvPicPr preferRelativeResize="0"/>
-          <p:nvPr/>
-        </p:nvPicPr>
-        <p:blipFill rotWithShape="1">
-          <a:blip r:embed="rId8">
-            <a:alphaModFix/>
-          </a:blip>
-          <a:srcRect/>
-          <a:stretch/>
-        </p:blipFill>
-        <p:spPr>
-          <a:xfrm>
-            <a:off x="1866900" y="2195513"/>
-            <a:ext cx="1647825" cy="1338263"/>
-          </a:xfrm>
-          <a:prstGeom prst="rect">
-            <a:avLst/>
-          </a:prstGeom>
-          <a:noFill/>
-          <a:ln>
-            <a:noFill/>
-          </a:ln>
-        </p:spPr>
-      </p:pic>
-      <p:pic>
-        <p:nvPicPr>
-          <p:cNvPr id="136" name="Google Shape;136;p11" descr="preencoded.png"/>
-          <p:cNvPicPr preferRelativeResize="0"/>
-          <p:nvPr/>
-        </p:nvPicPr>
-        <p:blipFill rotWithShape="1">
-          <a:blip r:embed="rId9">
-            <a:alphaModFix/>
-          </a:blip>
-          <a:srcRect/>
-          <a:stretch/>
-        </p:blipFill>
-        <p:spPr>
-          <a:xfrm>
-            <a:off x="3239189" y="1435145"/>
-            <a:ext cx="2052637" cy="1343025"/>
-          </a:xfrm>
-          <a:prstGeom prst="rect">
-            <a:avLst/>
-          </a:prstGeom>
-          <a:noFill/>
-          <a:ln>
-            <a:noFill/>
-          </a:ln>
-        </p:spPr>
-      </p:pic>
-      <p:pic>
-        <p:nvPicPr>
-          <p:cNvPr id="137" name="Google Shape;137;p11" descr="preencoded.png"/>
-          <p:cNvPicPr preferRelativeResize="0"/>
-          <p:nvPr/>
-        </p:nvPicPr>
-        <p:blipFill rotWithShape="1">
-          <a:blip r:embed="rId10">
-            <a:alphaModFix/>
-          </a:blip>
-          <a:srcRect/>
-          <a:stretch/>
-        </p:blipFill>
-        <p:spPr>
-          <a:xfrm>
-            <a:off x="4942807" y="1777734"/>
-            <a:ext cx="1589791" cy="1666875"/>
-          </a:xfrm>
-          <a:prstGeom prst="rect">
-            <a:avLst/>
-          </a:prstGeom>
-          <a:noFill/>
-          <a:ln>
-            <a:noFill/>
-          </a:ln>
-        </p:spPr>
-      </p:pic>
-      <p:pic>
-        <p:nvPicPr>
-          <p:cNvPr id="138" name="Google Shape;138;p11" descr="preencoded.png"/>
-          <p:cNvPicPr preferRelativeResize="0"/>
-          <p:nvPr/>
-        </p:nvPicPr>
-        <p:blipFill rotWithShape="1">
-          <a:blip r:embed="rId11">
-            <a:alphaModFix/>
-          </a:blip>
-          <a:srcRect/>
-          <a:stretch/>
-        </p:blipFill>
-        <p:spPr>
-          <a:xfrm>
-            <a:off x="3297449" y="2648611"/>
-            <a:ext cx="2324100" cy="1538288"/>
-          </a:xfrm>
-          <a:prstGeom prst="rect">
-            <a:avLst/>
-          </a:prstGeom>
-          <a:noFill/>
-          <a:ln>
-            <a:noFill/>
-          </a:ln>
-        </p:spPr>
-      </p:pic>
-      <p:pic>
-        <p:nvPicPr>
-          <p:cNvPr id="139" name="Google Shape;139;p11" descr="preencoded.png"/>
-          <p:cNvPicPr preferRelativeResize="0"/>
-          <p:nvPr/>
-        </p:nvPicPr>
-        <p:blipFill rotWithShape="1">
-          <a:blip r:embed="rId12">
-            <a:alphaModFix/>
-          </a:blip>
-          <a:srcRect/>
-          <a:stretch/>
-        </p:blipFill>
-        <p:spPr>
-          <a:xfrm>
-            <a:off x="2007409" y="3838575"/>
-            <a:ext cx="809625" cy="966788"/>
-          </a:xfrm>
-          <a:prstGeom prst="rect">
-            <a:avLst/>
-          </a:prstGeom>
-          <a:noFill/>
-          <a:ln>
-            <a:noFill/>
-          </a:ln>
-        </p:spPr>
-      </p:pic>
-      <p:pic>
-        <p:nvPicPr>
-          <p:cNvPr id="140" name="Google Shape;140;p11" descr="preencoded.png"/>
-          <p:cNvPicPr preferRelativeResize="0"/>
-          <p:nvPr/>
-        </p:nvPicPr>
-        <p:blipFill rotWithShape="1">
-          <a:blip r:embed="rId13">
-            <a:alphaModFix/>
-          </a:blip>
-          <a:srcRect/>
-          <a:stretch/>
-        </p:blipFill>
-        <p:spPr>
-          <a:xfrm>
-            <a:off x="3193644" y="566285"/>
-            <a:ext cx="3771900" cy="1381125"/>
-          </a:xfrm>
-          <a:prstGeom prst="rect">
-            <a:avLst/>
-          </a:prstGeom>
-          <a:noFill/>
-          <a:ln>
-            <a:noFill/>
-          </a:ln>
-        </p:spPr>
-      </p:pic>
-      <p:pic>
-        <p:nvPicPr>
-          <p:cNvPr id="141" name="Google Shape;141;p11" descr="preencoded.png"/>
-          <p:cNvPicPr preferRelativeResize="0"/>
-          <p:nvPr/>
-        </p:nvPicPr>
-        <p:blipFill rotWithShape="1">
-          <a:blip r:embed="rId14">
-            <a:alphaModFix/>
-          </a:blip>
-          <a:srcRect/>
-          <a:stretch/>
-        </p:blipFill>
-        <p:spPr>
-          <a:xfrm>
-            <a:off x="5424488" y="3462338"/>
-            <a:ext cx="638175" cy="762000"/>
-          </a:xfrm>
-          <a:prstGeom prst="rect">
-            <a:avLst/>
-          </a:prstGeom>
-          <a:noFill/>
-          <a:ln>
-            <a:noFill/>
-          </a:ln>
-        </p:spPr>
-      </p:pic>
-      <p:pic>
-        <p:nvPicPr>
-          <p:cNvPr id="142" name="Google Shape;142;p11" descr="preencoded.png"/>
-          <p:cNvPicPr preferRelativeResize="0"/>
-          <p:nvPr/>
-        </p:nvPicPr>
-        <p:blipFill rotWithShape="1">
-          <a:blip r:embed="rId15">
-            <a:alphaModFix/>
-          </a:blip>
-          <a:srcRect/>
-          <a:stretch/>
-        </p:blipFill>
-        <p:spPr>
-          <a:xfrm>
-            <a:off x="8143875" y="1047750"/>
-            <a:ext cx="581025" cy="695325"/>
-          </a:xfrm>
-          <a:prstGeom prst="rect">
-            <a:avLst/>
-          </a:prstGeom>
-          <a:noFill/>
-          <a:ln>
-            <a:noFill/>
-          </a:ln>
-        </p:spPr>
-      </p:pic>
-      <p:pic>
-        <p:nvPicPr>
-          <p:cNvPr id="143" name="Google Shape;143;p11" descr="preencoded.png"/>
-          <p:cNvPicPr preferRelativeResize="0"/>
-          <p:nvPr/>
-        </p:nvPicPr>
-        <p:blipFill rotWithShape="1">
-          <a:blip r:embed="rId16">
-            <a:alphaModFix/>
-          </a:blip>
-          <a:srcRect/>
-          <a:stretch/>
-        </p:blipFill>
-        <p:spPr>
-          <a:xfrm>
-            <a:off x="6656810" y="3417755"/>
-            <a:ext cx="852488" cy="714375"/>
-          </a:xfrm>
-          <a:prstGeom prst="rect">
-            <a:avLst/>
-          </a:prstGeom>
-          <a:noFill/>
-          <a:ln>
-            <a:noFill/>
-          </a:ln>
-        </p:spPr>
-      </p:pic>
-      <p:pic>
-        <p:nvPicPr>
-          <p:cNvPr id="144" name="Google Shape;144;p11" descr="preencoded.png"/>
-          <p:cNvPicPr preferRelativeResize="0"/>
-          <p:nvPr/>
-        </p:nvPicPr>
-        <p:blipFill rotWithShape="1">
-          <a:blip r:embed="rId17">
-            <a:alphaModFix/>
-          </a:blip>
-          <a:srcRect/>
-          <a:stretch/>
-        </p:blipFill>
-        <p:spPr>
-          <a:xfrm>
-            <a:off x="5919788" y="4300538"/>
-            <a:ext cx="881063" cy="681038"/>
-          </a:xfrm>
-          <a:prstGeom prst="rect">
-            <a:avLst/>
-          </a:prstGeom>
-          <a:noFill/>
-          <a:ln>
-            <a:noFill/>
-          </a:ln>
-        </p:spPr>
-      </p:pic>
-      <p:pic>
-        <p:nvPicPr>
-          <p:cNvPr id="145" name="Google Shape;145;p11" descr="preencoded.png"/>
-          <p:cNvPicPr preferRelativeResize="0"/>
-          <p:nvPr/>
-        </p:nvPicPr>
-        <p:blipFill rotWithShape="1">
-          <a:blip r:embed="rId18">
-            <a:alphaModFix/>
-          </a:blip>
-          <a:srcRect/>
-          <a:stretch/>
-        </p:blipFill>
-        <p:spPr>
-          <a:xfrm>
-            <a:off x="7260431" y="3284504"/>
-            <a:ext cx="1804988" cy="1752600"/>
-          </a:xfrm>
-          <a:prstGeom prst="rect">
-            <a:avLst/>
-          </a:prstGeom>
-          <a:noFill/>
-          <a:ln>
-            <a:noFill/>
-          </a:ln>
-        </p:spPr>
-      </p:pic>
-      <p:pic>
-        <p:nvPicPr>
-          <p:cNvPr id="146" name="Google Shape;146;p11" descr="preencoded.png"/>
-          <p:cNvPicPr preferRelativeResize="0"/>
-          <p:nvPr/>
-        </p:nvPicPr>
-        <p:blipFill rotWithShape="1">
-          <a:blip r:embed="rId19">
-            <a:alphaModFix/>
-          </a:blip>
-          <a:srcRect/>
-          <a:stretch/>
-        </p:blipFill>
-        <p:spPr>
-          <a:xfrm>
-            <a:off x="6453575" y="961214"/>
-            <a:ext cx="1023938" cy="2066925"/>
-          </a:xfrm>
-          <a:prstGeom prst="rect">
-            <a:avLst/>
-          </a:prstGeom>
-          <a:noFill/>
-          <a:ln>
-            <a:noFill/>
-          </a:ln>
-        </p:spPr>
-      </p:pic>
-      <p:pic>
-        <p:nvPicPr>
-          <p:cNvPr id="147" name="Google Shape;147;p11" descr="preencoded.png"/>
-          <p:cNvPicPr preferRelativeResize="0"/>
-          <p:nvPr/>
-        </p:nvPicPr>
-        <p:blipFill rotWithShape="1">
-          <a:blip r:embed="rId20">
-            <a:alphaModFix/>
-          </a:blip>
-          <a:srcRect/>
-          <a:stretch/>
-        </p:blipFill>
-        <p:spPr>
-          <a:xfrm>
-            <a:off x="7673659" y="2144646"/>
-            <a:ext cx="1333500" cy="1162050"/>
-          </a:xfrm>
-          <a:prstGeom prst="rect">
-            <a:avLst/>
-          </a:prstGeom>
-          <a:noFill/>
-          <a:ln>
-            <a:noFill/>
-          </a:ln>
-        </p:spPr>
-      </p:pic>
-      <p:sp>
-        <p:nvSpPr>
-          <p:cNvPr id="148" name="Google Shape;148;p11"/>
-          <p:cNvSpPr/>
-          <p:nvPr/>
-        </p:nvSpPr>
-        <p:spPr>
-          <a:xfrm>
-            <a:off x="3543300" y="3933825"/>
-            <a:ext cx="2519363" cy="947737"/>
-          </a:xfrm>
-          <a:prstGeom prst="rect">
-            <a:avLst/>
-          </a:prstGeom>
-          <a:noFill/>
-          <a:ln>
-            <a:noFill/>
-          </a:ln>
-        </p:spPr>
-        <p:txBody>
-          <a:bodyPr spcFirstLastPara="1" wrap="square" lIns="91425" tIns="45700" rIns="91425" bIns="45700" anchor="ctr" anchorCtr="0">
-            <a:noAutofit/>
-          </a:bodyPr>
-          <a:lstStyle/>
-          <a:p>
-            <a:pPr marL="0" marR="0" lvl="0" indent="0" algn="ctr" rtl="0">
-              <a:lnSpc>
-                <a:spcPct val="468750"/>
-              </a:lnSpc>
-              <a:spcBef>
-                <a:spcPts val="0"/>
-              </a:spcBef>
-              <a:spcAft>
-                <a:spcPts val="0"/>
-              </a:spcAft>
-              <a:buClr>
-                <a:schemeClr val="dk1"/>
-              </a:buClr>
-              <a:buSzPts val="2400"/>
-              <a:buFont typeface="Calibri"/>
-              <a:buNone/>
-            </a:pPr>
-            <a:endParaRPr sz="2400">
-              <a:solidFill>
-                <a:schemeClr val="dk1"/>
-              </a:solidFill>
-              <a:latin typeface="Calibri"/>
-              <a:ea typeface="Calibri"/>
-              <a:cs typeface="Calibri"/>
-              <a:sym typeface="Calibri"/>
-            </a:endParaRPr>
-          </a:p>
-        </p:txBody>
-      </p:sp>
-      <p:sp>
-        <p:nvSpPr>
-          <p:cNvPr id="149" name="Google Shape;149;p11"/>
-          <p:cNvSpPr/>
-          <p:nvPr/>
-        </p:nvSpPr>
-        <p:spPr>
-          <a:xfrm>
-            <a:off x="871538" y="276225"/>
-            <a:ext cx="7862888" cy="428625"/>
-          </a:xfrm>
-          <a:prstGeom prst="rect">
-            <a:avLst/>
-          </a:prstGeom>
-          <a:noFill/>
-          <a:ln>
-            <a:noFill/>
-          </a:ln>
-        </p:spPr>
-        <p:txBody>
-          <a:bodyPr spcFirstLastPara="1" wrap="square" lIns="91425" tIns="45700" rIns="91425" bIns="45700" anchor="ctr" anchorCtr="0">
-            <a:noAutofit/>
-          </a:bodyPr>
-          <a:lstStyle/>
-          <a:p>
-            <a:pPr marL="0" marR="0" lvl="0" indent="0" algn="ctr" rtl="0">
-              <a:lnSpc>
-                <a:spcPct val="75000"/>
-              </a:lnSpc>
-              <a:spcBef>
-                <a:spcPts val="0"/>
-              </a:spcBef>
-              <a:spcAft>
-                <a:spcPts val="0"/>
-              </a:spcAft>
-              <a:buClr>
-                <a:srgbClr val="FFFFFF"/>
-              </a:buClr>
-              <a:buSzPts val="4500"/>
-              <a:buFont typeface="PT Mono"/>
-              <a:buNone/>
-            </a:pPr>
-            <a:r>
-              <a:rPr lang="en-US" sz="4500">
-                <a:solidFill>
-                  <a:srgbClr val="FFFFFF"/>
-                </a:solidFill>
-                <a:latin typeface="PT Mono"/>
-                <a:ea typeface="PT Mono"/>
-                <a:cs typeface="PT Mono"/>
-                <a:sym typeface="PT Mono"/>
-              </a:rPr>
-              <a:t>Добрита за използване</a:t>
-            </a:r>
-            <a:endParaRPr sz="4500">
-              <a:solidFill>
-                <a:schemeClr val="dk1"/>
-              </a:solidFill>
-              <a:latin typeface="Calibri"/>
-              <a:ea typeface="Calibri"/>
-              <a:cs typeface="Calibri"/>
-              <a:sym typeface="Calibri"/>
-            </a:endParaRPr>
-          </a:p>
-        </p:txBody>
-      </p:sp>
-      <p:pic>
-        <p:nvPicPr>
-          <p:cNvPr id="150" name="Google Shape;150;p11"/>
-          <p:cNvPicPr preferRelativeResize="0"/>
-          <p:nvPr/>
-        </p:nvPicPr>
-        <p:blipFill rotWithShape="1">
-          <a:blip r:embed="rId21">
-            <a:alphaModFix/>
-          </a:blip>
-          <a:srcRect/>
-          <a:stretch/>
-        </p:blipFill>
-        <p:spPr>
-          <a:xfrm>
-            <a:off x="3631411" y="4517493"/>
-            <a:ext cx="1881178" cy="199653"/>
-          </a:xfrm>
-          <a:prstGeom prst="rect">
-            <a:avLst/>
-          </a:prstGeom>
-          <a:noFill/>
-          <a:ln>
-            <a:noFill/>
-          </a:ln>
-        </p:spPr>
-      </p:pic>
-    </p:spTree>
-  </p:cSld>
-  <p:clrMapOvr>
-    <a:masterClrMapping/>
-  </p:clrMapOvr>
+  <p:timing>
+    <p:tnLst>
+      <p:par>
+        <p:cTn id="1" dur="indefinite" restart="never" nodeType="tmRoot">
+          <p:childTnLst>
+            <p:seq concurrent="1" nextAc="seek">
+              <p:cTn id="2" dur="indefinite" nodeType="mainSeq">
+                <p:childTnLst>
+                  <p:par>
+                    <p:cTn id="3" fill="hold">
+                      <p:stCondLst>
+                        <p:cond delay="indefinite"/>
+                        <p:cond evt="onBegin" delay="0">
+                          <p:tn val="2"/>
+                        </p:cond>
+                      </p:stCondLst>
+                      <p:childTnLst>
+                        <p:par>
+                          <p:cTn id="4" fill="hold">
+                            <p:stCondLst>
+                              <p:cond delay="0"/>
+                            </p:stCondLst>
+                            <p:childTnLst>
+                              <p:par>
+                                <p:cTn id="5" presetID="39" presetClass="emph" presetSubtype="512" fill="hold" nodeType="withEffect">
+                                  <p:stCondLst>
+                                    <p:cond delay="0"/>
+                                  </p:stCondLst>
+                                  <p:childTnLst>
+                                    <p:anim calcmode="lin" valueType="num">
+                                      <p:cBhvr additive="sum">
+                                        <p:cTn id="6" dur="2000" fill="hold"/>
+                                        <p:tgtEl>
+                                          <p:spTgt spid="2"/>
+                                        </p:tgtEl>
+                                        <p:attrNameLst>
+                                          <p:attrName>3d.view.rotation.x</p:attrName>
+                                        </p:attrNameLst>
+                                      </p:cBhvr>
+                                      <p:tavLst>
+                                        <p:tav tm="0">
+                                          <p:val>
+                                            <p:fltVal val="0"/>
+                                          </p:val>
+                                        </p:tav>
+                                        <p:tav tm="1120">
+                                          <p:val>
+                                            <p:fltVal val="0.0012"/>
+                                          </p:val>
+                                        </p:tav>
+                                        <p:tav tm="2250">
+                                          <p:val>
+                                            <p:fltVal val="0.0098"/>
+                                          </p:val>
+                                        </p:tav>
+                                        <p:tav tm="3370">
+                                          <p:val>
+                                            <p:fltVal val="0.033"/>
+                                          </p:val>
+                                        </p:tav>
+                                        <p:tav tm="4490">
+                                          <p:val>
+                                            <p:fltVal val="0.0789"/>
+                                          </p:val>
+                                        </p:tav>
+                                        <p:tav tm="5620">
+                                          <p:val>
+                                            <p:fltVal val="0.1548"/>
+                                          </p:val>
+                                        </p:tav>
+                                        <p:tav tm="6740">
+                                          <p:val>
+                                            <p:fltVal val="0.267"/>
+                                          </p:val>
+                                        </p:tav>
+                                        <p:tav tm="7870">
+                                          <p:val>
+                                            <p:fltVal val="0.4235"/>
+                                          </p:val>
+                                        </p:tav>
+                                        <p:tav tm="8990">
+                                          <p:val>
+                                            <p:fltVal val="0.6337"/>
+                                          </p:val>
+                                        </p:tav>
+                                        <p:tav tm="10110">
+                                          <p:val>
+                                            <p:fltVal val="0.9013"/>
+                                          </p:val>
+                                        </p:tav>
+                                        <p:tav tm="11240">
+                                          <p:val>
+                                            <p:fltVal val="1.2353"/>
+                                          </p:val>
+                                        </p:tav>
+                                        <p:tav tm="12360">
+                                          <p:val>
+                                            <p:fltVal val="1.647"/>
+                                          </p:val>
+                                        </p:tav>
+                                        <p:tav tm="13480">
+                                          <p:val>
+                                            <p:fltVal val="2.0869"/>
+                                          </p:val>
+                                        </p:tav>
+                                        <p:tav tm="14610">
+                                          <p:val>
+                                            <p:fltVal val="2.4538"/>
+                                          </p:val>
+                                        </p:tav>
+                                        <p:tav tm="15730">
+                                          <p:val>
+                                            <p:fltVal val="2.7534"/>
+                                          </p:val>
+                                        </p:tav>
+                                        <p:tav tm="16850">
+                                          <p:val>
+                                            <p:fltVal val="2.9876"/>
+                                          </p:val>
+                                        </p:tav>
+                                        <p:tav tm="17980">
+                                          <p:val>
+                                            <p:fltVal val="3.1669"/>
+                                          </p:val>
+                                        </p:tav>
+                                        <p:tav tm="19100">
+                                          <p:val>
+                                            <p:fltVal val="3.2996"/>
+                                          </p:val>
+                                        </p:tav>
+                                        <p:tav tm="20220">
+                                          <p:val>
+                                            <p:fltVal val="3.3906"/>
+                                          </p:val>
+                                        </p:tav>
+                                        <p:tav tm="21350">
+                                          <p:val>
+                                            <p:fltVal val="3.4488"/>
+                                          </p:val>
+                                        </p:tav>
+                                        <p:tav tm="22470">
+                                          <p:val>
+                                            <p:fltVal val="3.4815"/>
+                                          </p:val>
+                                        </p:tav>
+                                        <p:tav tm="23600">
+                                          <p:val>
+                                            <p:fltVal val="3.4961"/>
+                                          </p:val>
+                                        </p:tav>
+                                        <p:tav tm="24720">
+                                          <p:val>
+                                            <p:fltVal val="3.4998"/>
+                                          </p:val>
+                                        </p:tav>
+                                        <p:tav tm="25840">
+                                          <p:val>
+                                            <p:fltVal val="3.0301"/>
+                                          </p:val>
+                                        </p:tav>
+                                        <p:tav tm="26970">
+                                          <p:val>
+                                            <p:fltVal val="0.9661"/>
+                                          </p:val>
+                                        </p:tav>
+                                        <p:tav tm="28090">
+                                          <p:val>
+                                            <p:fltVal val="-2.1525"/>
+                                          </p:val>
+                                        </p:tav>
+                                        <p:tav tm="29210">
+                                          <p:val>
+                                            <p:fltVal val="-6.1215"/>
+                                          </p:val>
+                                        </p:tav>
+                                        <p:tav tm="30340">
+                                          <p:val>
+                                            <p:fltVal val="-10.8322"/>
+                                          </p:val>
+                                        </p:tav>
+                                        <p:tav tm="31460">
+                                          <p:val>
+                                            <p:fltVal val="-16.2132"/>
+                                          </p:val>
+                                        </p:tav>
+                                        <p:tav tm="32580">
+                                          <p:val>
+                                            <p:fltVal val="-22.2128"/>
+                                          </p:val>
+                                        </p:tav>
+                                        <p:tav tm="33710">
+                                          <p:val>
+                                            <p:fltVal val="-28.7297"/>
+                                          </p:val>
+                                        </p:tav>
+                                        <p:tav tm="34830">
+                                          <p:val>
+                                            <p:fltVal val="-35.8493"/>
+                                          </p:val>
+                                        </p:tav>
+                                        <p:tav tm="35960">
+                                          <p:val>
+                                            <p:fltVal val="-43.4888"/>
+                                          </p:val>
+                                        </p:tav>
+                                        <p:tav tm="37080">
+                                          <p:val>
+                                            <p:fltVal val="-51.6257"/>
+                                          </p:val>
+                                        </p:tav>
+                                        <p:tav tm="38200">
+                                          <p:val>
+                                            <p:fltVal val="-60.2402"/>
+                                          </p:val>
+                                        </p:tav>
+                                        <p:tav tm="39330">
+                                          <p:val>
+                                            <p:fltVal val="-69.3155"/>
+                                          </p:val>
+                                        </p:tav>
+                                        <p:tav tm="40450">
+                                          <p:val>
+                                            <p:fltVal val="-78.8364"/>
+                                          </p:val>
+                                        </p:tav>
+                                        <p:tav tm="41570">
+                                          <p:val>
+                                            <p:fltVal val="-88.6987"/>
+                                          </p:val>
+                                        </p:tav>
+                                        <p:tav tm="42700">
+                                          <p:val>
+                                            <p:fltVal val="-99.0679"/>
+                                          </p:val>
+                                        </p:tav>
+                                        <p:tav tm="43820">
+                                          <p:val>
+                                            <p:fltVal val="-109.8461"/>
+                                          </p:val>
+                                        </p:tav>
+                                        <p:tav tm="44940">
+                                          <p:val>
+                                            <p:fltVal val="-121.0232"/>
+                                          </p:val>
+                                        </p:tav>
+                                        <p:tav tm="46070">
+                                          <p:val>
+                                            <p:fltVal val="-132.5899"/>
+                                          </p:val>
+                                        </p:tav>
+                                        <p:tav tm="47190">
+                                          <p:val>
+                                            <p:fltVal val="-144.5376"/>
+                                          </p:val>
+                                        </p:tav>
+                                        <p:tav tm="48310">
+                                          <p:val>
+                                            <p:fltVal val="-156.85851"/>
+                                          </p:val>
+                                        </p:tav>
+                                        <p:tav tm="49440">
+                                          <p:val>
+                                            <p:fltVal val="-169.43021"/>
+                                          </p:val>
+                                        </p:tav>
+                                        <p:tav tm="50560">
+                                          <p:val>
+                                            <p:fltVal val="-182.34309"/>
+                                          </p:val>
+                                        </p:tav>
+                                        <p:tav tm="51690">
+                                          <p:val>
+                                            <p:fltVal val="-195.1411"/>
+                                          </p:val>
+                                        </p:tav>
+                                        <p:tav tm="52810">
+                                          <p:val>
+                                            <p:fltVal val="-207.6945"/>
+                                          </p:val>
+                                        </p:tav>
+                                        <p:tav tm="53930">
+                                          <p:val>
+                                            <p:fltVal val="-219.77251"/>
+                                          </p:val>
+                                        </p:tav>
+                                        <p:tav tm="55060">
+                                          <p:val>
+                                            <p:fltVal val="-231.4814"/>
+                                          </p:val>
+                                        </p:tav>
+                                        <p:tav tm="56180">
+                                          <p:val>
+                                            <p:fltVal val="-242.91341"/>
+                                          </p:val>
+                                        </p:tav>
+                                        <p:tav tm="57300">
+                                          <p:val>
+                                            <p:fltVal val="-253.8558"/>
+                                          </p:val>
+                                        </p:tav>
+                                        <p:tav tm="58430">
+                                          <p:val>
+                                            <p:fltVal val="-264.40329"/>
+                                          </p:val>
+                                        </p:tav>
+                                        <p:tav tm="59550">
+                                          <p:val>
+                                            <p:fltVal val="-274.63501"/>
+                                          </p:val>
+                                        </p:tav>
+                                        <p:tav tm="60670">
+                                          <p:val>
+                                            <p:fltVal val="-284.35721"/>
+                                          </p:val>
+                                        </p:tav>
+                                        <p:tav tm="61800">
+                                          <p:val>
+                                            <p:fltVal val="-293.6507"/>
+                                          </p:val>
+                                        </p:tav>
+                                        <p:tav tm="62920">
+                                          <p:val>
+                                            <p:fltVal val="-302.57959"/>
+                                          </p:val>
+                                        </p:tav>
+                                        <p:tav tm="64040">
+                                          <p:val>
+                                            <p:fltVal val="-310.96921"/>
+                                          </p:val>
+                                        </p:tav>
+                                        <p:tav tm="65170">
+                                          <p:val>
+                                            <p:fltVal val="-318.88379"/>
+                                          </p:val>
+                                        </p:tav>
+                                        <p:tav tm="66290">
+                                          <p:val>
+                                            <p:fltVal val="-326.36801"/>
+                                          </p:val>
+                                        </p:tav>
+                                        <p:tav tm="67420">
+                                          <p:val>
+                                            <p:fltVal val="-333.26511"/>
+                                          </p:val>
+                                        </p:tav>
+                                        <p:tav tm="68540">
+                                          <p:val>
+                                            <p:fltVal val="-339.6712"/>
+                                          </p:val>
+                                        </p:tav>
+                                        <p:tav tm="69660">
+                                          <p:val>
+                                            <p:fltVal val="-345.43851"/>
+                                          </p:val>
+                                        </p:tav>
+                                        <p:tav tm="70790">
+                                          <p:val>
+                                            <p:fltVal val="-350.58469"/>
+                                          </p:val>
+                                        </p:tav>
+                                        <p:tav tm="71910">
+                                          <p:val>
+                                            <p:fltVal val="-355.09189"/>
+                                          </p:val>
+                                        </p:tav>
+                                        <p:tav tm="73030">
+                                          <p:val>
+                                            <p:fltVal val="-358.80179"/>
+                                          </p:val>
+                                        </p:tav>
+                                        <p:tav tm="74160">
+                                          <p:val>
+                                            <p:fltVal val="-361.63531"/>
+                                          </p:val>
+                                        </p:tav>
+                                        <p:tav tm="75280">
+                                          <p:val>
+                                            <p:fltVal val="-363.345"/>
+                                          </p:val>
+                                        </p:tav>
+                                        <p:tav tm="76400">
+                                          <p:val>
+                                            <p:fltVal val="-363.4978"/>
+                                          </p:val>
+                                        </p:tav>
+                                        <p:tav tm="77530">
+                                          <p:val>
+                                            <p:fltVal val="-363.47061"/>
+                                          </p:val>
+                                        </p:tav>
+                                        <p:tav tm="78650">
+                                          <p:val>
+                                            <p:fltVal val="-363.38339"/>
+                                          </p:val>
+                                        </p:tav>
+                                        <p:tav tm="79780">
+                                          <p:val>
+                                            <p:fltVal val="-363.20349"/>
+                                          </p:val>
+                                        </p:tav>
+                                        <p:tav tm="80900">
+                                          <p:val>
+                                            <p:fltVal val="-362.8963"/>
+                                          </p:val>
+                                        </p:tav>
+                                        <p:tav tm="82020">
+                                          <p:val>
+                                            <p:fltVal val="-362.4227"/>
+                                          </p:val>
+                                        </p:tav>
+                                        <p:tav tm="83150">
+                                          <p:val>
+                                            <p:fltVal val="-361.7569"/>
+                                          </p:val>
+                                        </p:tav>
+                                        <p:tav tm="84270">
+                                          <p:val>
+                                            <p:fltVal val="-361.0874"/>
+                                          </p:val>
+                                        </p:tav>
+                                        <p:tav tm="85390">
+                                          <p:val>
+                                            <p:fltVal val="-360.6105"/>
+                                          </p:val>
+                                        </p:tav>
+                                        <p:tav tm="86520">
+                                          <p:val>
+                                            <p:fltVal val="-360.30069"/>
+                                          </p:val>
+                                        </p:tav>
+                                        <p:tav tm="87640">
+                                          <p:val>
+                                            <p:fltVal val="-360.1188"/>
+                                          </p:val>
+                                        </p:tav>
+                                        <p:tav tm="88760">
+                                          <p:val>
+                                            <p:fltVal val="-360.03021"/>
+                                          </p:val>
+                                        </p:tav>
+                                        <p:tav tm="89890">
+                                          <p:val>
+                                            <p:fltVal val="-360.00229"/>
+                                          </p:val>
+                                        </p:tav>
+                                        <p:tav tm="91010">
+                                          <p:val>
+                                            <p:fltVal val="-360"/>
+                                          </p:val>
+                                        </p:tav>
+                                        <p:tav tm="92130">
+                                          <p:val>
+                                            <p:fltVal val="-360"/>
+                                          </p:val>
+                                        </p:tav>
+                                        <p:tav tm="93260">
+                                          <p:val>
+                                            <p:fltVal val="-360"/>
+                                          </p:val>
+                                        </p:tav>
+                                        <p:tav tm="94380">
+                                          <p:val>
+                                            <p:fltVal val="-360"/>
+                                          </p:val>
+                                        </p:tav>
+                                        <p:tav tm="95510">
+                                          <p:val>
+                                            <p:fltVal val="-360"/>
+                                          </p:val>
+                                        </p:tav>
+                                        <p:tav tm="96630">
+                                          <p:val>
+                                            <p:fltVal val="-360"/>
+                                          </p:val>
+                                        </p:tav>
+                                        <p:tav tm="97750">
+                                          <p:val>
+                                            <p:fltVal val="-360"/>
+                                          </p:val>
+                                        </p:tav>
+                                        <p:tav tm="98880">
+                                          <p:val>
+                                            <p:fltVal val="-360"/>
+                                          </p:val>
+                                        </p:tav>
+                                        <p:tav tm="100000">
+                                          <p:val>
+                                            <p:fltVal val="-360"/>
+                                          </p:val>
+                                        </p:tav>
+                                      </p:tavLst>
+                                    </p:anim>
+                                    <p:anim calcmode="lin" valueType="num">
+                                      <p:cBhvr additive="sum">
+                                        <p:cTn id="7" dur="2000" fill="hold"/>
+                                        <p:tgtEl>
+                                          <p:spTgt spid="2"/>
+                                        </p:tgtEl>
+                                        <p:attrNameLst>
+                                          <p:attrName>3d.view.translation.y</p:attrName>
+                                        </p:attrNameLst>
+                                      </p:cBhvr>
+                                      <p:tavLst>
+                                        <p:tav tm="0">
+                                          <p:val>
+                                            <p:fltVal val="0"/>
+                                          </p:val>
+                                        </p:tav>
+                                        <p:tav tm="1120">
+                                          <p:val>
+                                            <p:fltVal val="0"/>
+                                          </p:val>
+                                        </p:tav>
+                                        <p:tav tm="2250">
+                                          <p:val>
+                                            <p:fltVal val="-10E-5"/>
+                                          </p:val>
+                                        </p:tav>
+                                        <p:tav tm="3370">
+                                          <p:val>
+                                            <p:fltVal val="-0.0004"/>
+                                          </p:val>
+                                        </p:tav>
+                                        <p:tav tm="4490">
+                                          <p:val>
+                                            <p:fltVal val="-0.0011"/>
+                                          </p:val>
+                                        </p:tav>
+                                        <p:tav tm="5620">
+                                          <p:val>
+                                            <p:fltVal val="-0.0021"/>
+                                          </p:val>
+                                        </p:tav>
+                                        <p:tav tm="6740">
+                                          <p:val>
+                                            <p:fltVal val="-0.0037"/>
+                                          </p:val>
+                                        </p:tav>
+                                        <p:tav tm="7870">
+                                          <p:val>
+                                            <p:fltVal val="-0.0059"/>
+                                          </p:val>
+                                        </p:tav>
+                                        <p:tav tm="8990">
+                                          <p:val>
+                                            <p:fltVal val="-0.0088"/>
+                                          </p:val>
+                                        </p:tav>
+                                        <p:tav tm="10110">
+                                          <p:val>
+                                            <p:fltVal val="-0.0125"/>
+                                          </p:val>
+                                        </p:tav>
+                                        <p:tav tm="11240">
+                                          <p:val>
+                                            <p:fltVal val="-0.0162"/>
+                                          </p:val>
+                                        </p:tav>
+                                        <p:tav tm="12360">
+                                          <p:val>
+                                            <p:fltVal val="-0.0191"/>
+                                          </p:val>
+                                        </p:tav>
+                                        <p:tav tm="13480">
+                                          <p:val>
+                                            <p:fltVal val="-0.0213"/>
+                                          </p:val>
+                                        </p:tav>
+                                        <p:tav tm="14610">
+                                          <p:val>
+                                            <p:fltVal val="-0.0228"/>
+                                          </p:val>
+                                        </p:tav>
+                                        <p:tav tm="15730">
+                                          <p:val>
+                                            <p:fltVal val="-0.0239"/>
+                                          </p:val>
+                                        </p:tav>
+                                        <p:tav tm="16850">
+                                          <p:val>
+                                            <p:fltVal val="-0.0245"/>
+                                          </p:val>
+                                        </p:tav>
+                                        <p:tav tm="17980">
+                                          <p:val>
+                                            <p:fltVal val="-0.0248"/>
+                                          </p:val>
+                                        </p:tav>
+                                        <p:tav tm="19100">
+                                          <p:val>
+                                            <p:fltVal val="-0.0249"/>
+                                          </p:val>
+                                        </p:tav>
+                                        <p:tav tm="20220">
+                                          <p:val>
+                                            <p:fltVal val="-0.0249"/>
+                                          </p:val>
+                                        </p:tav>
+                                        <p:tav tm="21350">
+                                          <p:val>
+                                            <p:fltVal val="-0.0248"/>
+                                          </p:val>
+                                        </p:tav>
+                                        <p:tav tm="22470">
+                                          <p:val>
+                                            <p:fltVal val="-0.0241"/>
+                                          </p:val>
+                                        </p:tav>
+                                        <p:tav tm="23600">
+                                          <p:val>
+                                            <p:fltVal val="-0.022"/>
+                                          </p:val>
+                                        </p:tav>
+                                        <p:tav tm="24720">
+                                          <p:val>
+                                            <p:fltVal val="-0.0179"/>
+                                          </p:val>
+                                        </p:tav>
+                                        <p:tav tm="25840">
+                                          <p:val>
+                                            <p:fltVal val="-0.0113"/>
+                                          </p:val>
+                                        </p:tav>
+                                        <p:tav tm="26970">
+                                          <p:val>
+                                            <p:fltVal val="-0.0013"/>
+                                          </p:val>
+                                        </p:tav>
+                                        <p:tav tm="28090">
+                                          <p:val>
+                                            <p:fltVal val="0.0124"/>
+                                          </p:val>
+                                        </p:tav>
+                                        <p:tav tm="29210">
+                                          <p:val>
+                                            <p:fltVal val="0.0309"/>
+                                          </p:val>
+                                        </p:tav>
+                                        <p:tav tm="30340">
+                                          <p:val>
+                                            <p:fltVal val="0.0546"/>
+                                          </p:val>
+                                        </p:tav>
+                                        <p:tav tm="31460">
+                                          <p:val>
+                                            <p:fltVal val="0.0842"/>
+                                          </p:val>
+                                        </p:tav>
+                                        <p:tav tm="32580">
+                                          <p:val>
+                                            <p:fltVal val="0.1204"/>
+                                          </p:val>
+                                        </p:tav>
+                                        <p:tav tm="33710">
+                                          <p:val>
+                                            <p:fltVal val="0.1634"/>
+                                          </p:val>
+                                        </p:tav>
+                                        <p:tav tm="34830">
+                                          <p:val>
+                                            <p:fltVal val="0.2145"/>
+                                          </p:val>
+                                        </p:tav>
+                                        <p:tav tm="35960">
+                                          <p:val>
+                                            <p:fltVal val="0.2711"/>
+                                          </p:val>
+                                        </p:tav>
+                                        <p:tav tm="37080">
+                                          <p:val>
+                                            <p:fltVal val="0.3207"/>
+                                          </p:val>
+                                        </p:tav>
+                                        <p:tav tm="38200">
+                                          <p:val>
+                                            <p:fltVal val="0.3625"/>
+                                          </p:val>
+                                        </p:tav>
+                                        <p:tav tm="39330">
+                                          <p:val>
+                                            <p:fltVal val="0.3973"/>
+                                          </p:val>
+                                        </p:tav>
+                                        <p:tav tm="40450">
+                                          <p:val>
+                                            <p:fltVal val="0.4256"/>
+                                          </p:val>
+                                        </p:tav>
+                                        <p:tav tm="41570">
+                                          <p:val>
+                                            <p:fltVal val="0.448"/>
+                                          </p:val>
+                                        </p:tav>
+                                        <p:tav tm="42700">
+                                          <p:val>
+                                            <p:fltVal val="0.4655"/>
+                                          </p:val>
+                                        </p:tav>
+                                        <p:tav tm="43820">
+                                          <p:val>
+                                            <p:fltVal val="0.4786"/>
+                                          </p:val>
+                                        </p:tav>
+                                        <p:tav tm="44940">
+                                          <p:val>
+                                            <p:fltVal val="0.4878"/>
+                                          </p:val>
+                                        </p:tav>
+                                        <p:tav tm="46070">
+                                          <p:val>
+                                            <p:fltVal val="0.4939"/>
+                                          </p:val>
+                                        </p:tav>
+                                        <p:tav tm="47190">
+                                          <p:val>
+                                            <p:fltVal val="0.4975"/>
+                                          </p:val>
+                                        </p:tav>
+                                        <p:tav tm="48310">
+                                          <p:val>
+                                            <p:fltVal val="0.4993"/>
+                                          </p:val>
+                                        </p:tav>
+                                        <p:tav tm="49440">
+                                          <p:val>
+                                            <p:fltVal val="0.4999"/>
+                                          </p:val>
+                                        </p:tav>
+                                        <p:tav tm="50560">
+                                          <p:val>
+                                            <p:fltVal val="0.4999"/>
+                                          </p:val>
+                                        </p:tav>
+                                        <p:tav tm="51690">
+                                          <p:val>
+                                            <p:fltVal val="0.4998"/>
+                                          </p:val>
+                                        </p:tav>
+                                        <p:tav tm="52810">
+                                          <p:val>
+                                            <p:fltVal val="0.4988"/>
+                                          </p:val>
+                                        </p:tav>
+                                        <p:tav tm="53930">
+                                          <p:val>
+                                            <p:fltVal val="0.4965"/>
+                                          </p:val>
+                                        </p:tav>
+                                        <p:tav tm="55060">
+                                          <p:val>
+                                            <p:fltVal val="0.4921"/>
+                                          </p:val>
+                                        </p:tav>
+                                        <p:tav tm="56180">
+                                          <p:val>
+                                            <p:fltVal val="0.485"/>
+                                          </p:val>
+                                        </p:tav>
+                                        <p:tav tm="57300">
+                                          <p:val>
+                                            <p:fltVal val="0.4746"/>
+                                          </p:val>
+                                        </p:tav>
+                                        <p:tav tm="58430">
+                                          <p:val>
+                                            <p:fltVal val="0.4603"/>
+                                          </p:val>
+                                        </p:tav>
+                                        <p:tav tm="59550">
+                                          <p:val>
+                                            <p:fltVal val="0.4411"/>
+                                          </p:val>
+                                        </p:tav>
+                                        <p:tav tm="60670">
+                                          <p:val>
+                                            <p:fltVal val="0.4169"/>
+                                          </p:val>
+                                        </p:tav>
+                                        <p:tav tm="61800">
+                                          <p:val>
+                                            <p:fltVal val="0.3868"/>
+                                          </p:val>
+                                        </p:tav>
+                                        <p:tav tm="62920">
+                                          <p:val>
+                                            <p:fltVal val="0.3499"/>
+                                          </p:val>
+                                        </p:tav>
+                                        <p:tav tm="64040">
+                                          <p:val>
+                                            <p:fltVal val="0.306"/>
+                                          </p:val>
+                                        </p:tav>
+                                        <p:tav tm="65170">
+                                          <p:val>
+                                            <p:fltVal val="0.2544"/>
+                                          </p:val>
+                                        </p:tav>
+                                        <p:tav tm="66290">
+                                          <p:val>
+                                            <p:fltVal val="0.1981"/>
+                                          </p:val>
+                                        </p:tav>
+                                        <p:tav tm="67420">
+                                          <p:val>
+                                            <p:fltVal val="0.1498"/>
+                                          </p:val>
+                                        </p:tav>
+                                        <p:tav tm="68540">
+                                          <p:val>
+                                            <p:fltVal val="0.1087"/>
+                                          </p:val>
+                                        </p:tav>
+                                        <p:tav tm="69660">
+                                          <p:val>
+                                            <p:fltVal val="0.0748"/>
+                                          </p:val>
+                                        </p:tav>
+                                        <p:tav tm="70790">
+                                          <p:val>
+                                            <p:fltVal val="0.0473"/>
+                                          </p:val>
+                                        </p:tav>
+                                        <p:tav tm="71910">
+                                          <p:val>
+                                            <p:fltVal val="0.0251"/>
+                                          </p:val>
+                                        </p:tav>
+                                        <p:tav tm="73030">
+                                          <p:val>
+                                            <p:fltVal val="0.0082"/>
+                                          </p:val>
+                                        </p:tav>
+                                        <p:tav tm="74160">
+                                          <p:val>
+                                            <p:fltVal val="-0.0044"/>
+                                          </p:val>
+                                        </p:tav>
+                                        <p:tav tm="75280">
+                                          <p:val>
+                                            <p:fltVal val="-0.0134"/>
+                                          </p:val>
+                                        </p:tav>
+                                        <p:tav tm="76400">
+                                          <p:val>
+                                            <p:fltVal val="-0.0192"/>
+                                          </p:val>
+                                        </p:tav>
+                                        <p:tav tm="77530">
+                                          <p:val>
+                                            <p:fltVal val="-0.0227"/>
+                                          </p:val>
+                                        </p:tav>
+                                        <p:tav tm="78650">
+                                          <p:val>
+                                            <p:fltVal val="-0.0244"/>
+                                          </p:val>
+                                        </p:tav>
+                                        <p:tav tm="79780">
+                                          <p:val>
+                                            <p:fltVal val="-0.0249"/>
+                                          </p:val>
+                                        </p:tav>
+                                        <p:tav tm="80900">
+                                          <p:val>
+                                            <p:fltVal val="-0.0249"/>
+                                          </p:val>
+                                        </p:tav>
+                                        <p:tav tm="82020">
+                                          <p:val>
+                                            <p:fltVal val="-0.0244"/>
+                                          </p:val>
+                                        </p:tav>
+                                        <p:tav tm="83150">
+                                          <p:val>
+                                            <p:fltVal val="-0.0219"/>
+                                          </p:val>
+                                        </p:tav>
+                                        <p:tav tm="84270">
+                                          <p:val>
+                                            <p:fltVal val="-0.0156"/>
+                                          </p:val>
+                                        </p:tav>
+                                        <p:tav tm="85390">
+                                          <p:val>
+                                            <p:fltVal val="-0.0039"/>
+                                          </p:val>
+                                        </p:tav>
+                                        <p:tav tm="86520">
+                                          <p:val>
+                                            <p:fltVal val="0.0104"/>
+                                          </p:val>
+                                        </p:tav>
+                                        <p:tav tm="87640">
+                                          <p:val>
+                                            <p:fltVal val="0.0192"/>
+                                          </p:val>
+                                        </p:tav>
+                                        <p:tav tm="88760">
+                                          <p:val>
+                                            <p:fltVal val="0.0235"/>
+                                          </p:val>
+                                        </p:tav>
+                                        <p:tav tm="89890">
+                                          <p:val>
+                                            <p:fltVal val="0.0248"/>
+                                          </p:val>
+                                        </p:tav>
+                                        <p:tav tm="91010">
+                                          <p:val>
+                                            <p:fltVal val="0.0249"/>
+                                          </p:val>
+                                        </p:tav>
+                                        <p:tav tm="92130">
+                                          <p:val>
+                                            <p:fltVal val="0.0247"/>
+                                          </p:val>
+                                        </p:tav>
+                                        <p:tav tm="93260">
+                                          <p:val>
+                                            <p:fltVal val="0.0234"/>
+                                          </p:val>
+                                        </p:tav>
+                                        <p:tav tm="94380">
+                                          <p:val>
+                                            <p:fltVal val="0.0202"/>
+                                          </p:val>
+                                        </p:tav>
+                                        <p:tav tm="95510">
+                                          <p:val>
+                                            <p:fltVal val="0.0143"/>
+                                          </p:val>
+                                        </p:tav>
+                                        <p:tav tm="96630">
+                                          <p:val>
+                                            <p:fltVal val="0.0071"/>
+                                          </p:val>
+                                        </p:tav>
+                                        <p:tav tm="97750">
+                                          <p:val>
+                                            <p:fltVal val="0.0027"/>
+                                          </p:val>
+                                        </p:tav>
+                                        <p:tav tm="98880">
+                                          <p:val>
+                                            <p:fltVal val="0.0007"/>
+                                          </p:val>
+                                        </p:tav>
+                                        <p:tav tm="100000">
+                                          <p:val>
+                                            <p:fltVal val="0"/>
+                                          </p:val>
+                                        </p:tav>
+                                      </p:tavLst>
+                                    </p:anim>
+                                    <p:anim calcmode="lin" valueType="num">
+                                      <p:cBhvr additive="mult">
+                                        <p:cTn id="8" dur="2000" fill="hold"/>
+                                        <p:tgtEl>
+                                          <p:spTgt spid="2"/>
+                                        </p:tgtEl>
+                                        <p:attrNameLst>
+                                          <p:attrName>3d.view.scale.x</p:attrName>
+                                        </p:attrNameLst>
+                                      </p:cBhvr>
+                                      <p:tavLst>
+                                        <p:tav tm="0">
+                                          <p:val>
+                                            <p:fltVal val="1"/>
+                                          </p:val>
+                                        </p:tav>
+                                        <p:tav tm="1120">
+                                          <p:val>
+                                            <p:fltVal val="1"/>
+                                          </p:val>
+                                        </p:tav>
+                                        <p:tav tm="2250">
+                                          <p:val>
+                                            <p:fltVal val="1.0002"/>
+                                          </p:val>
+                                        </p:tav>
+                                        <p:tav tm="3370">
+                                          <p:val>
+                                            <p:fltVal val="1.0009"/>
+                                          </p:val>
+                                        </p:tav>
+                                        <p:tav tm="4490">
+                                          <p:val>
+                                            <p:fltVal val="1.0023"/>
+                                          </p:val>
+                                        </p:tav>
+                                        <p:tav tm="5620">
+                                          <p:val>
+                                            <p:fltVal val="1.0046"/>
+                                          </p:val>
+                                        </p:tav>
+                                        <p:tav tm="6740">
+                                          <p:val>
+                                            <p:fltVal val="1.008"/>
+                                          </p:val>
+                                        </p:tav>
+                                        <p:tav tm="7870">
+                                          <p:val>
+                                            <p:fltVal val="1.0127"/>
+                                          </p:val>
+                                        </p:tav>
+                                        <p:tav tm="8990">
+                                          <p:val>
+                                            <p:fltVal val="1.019"/>
+                                          </p:val>
+                                        </p:tav>
+                                        <p:tav tm="10110">
+                                          <p:val>
+                                            <p:fltVal val="1.0271"/>
+                                          </p:val>
+                                        </p:tav>
+                                        <p:tav tm="11240">
+                                          <p:val>
+                                            <p:fltVal val="1.0351"/>
+                                          </p:val>
+                                        </p:tav>
+                                        <p:tav tm="12360">
+                                          <p:val>
+                                            <p:fltVal val="1.0414"/>
+                                          </p:val>
+                                        </p:tav>
+                                        <p:tav tm="13480">
+                                          <p:val>
+                                            <p:fltVal val="1.046"/>
+                                          </p:val>
+                                        </p:tav>
+                                        <p:tav tm="14610">
+                                          <p:val>
+                                            <p:fltVal val="1.0494"/>
+                                          </p:val>
+                                        </p:tav>
+                                        <p:tav tm="15730">
+                                          <p:val>
+                                            <p:fltVal val="1.0516"/>
+                                          </p:val>
+                                        </p:tav>
+                                        <p:tav tm="16850">
+                                          <p:val>
+                                            <p:fltVal val="1.053"/>
+                                          </p:val>
+                                        </p:tav>
+                                        <p:tav tm="17980">
+                                          <p:val>
+                                            <p:fltVal val="1.0537"/>
+                                          </p:val>
+                                        </p:tav>
+                                        <p:tav tm="19100">
+                                          <p:val>
+                                            <p:fltVal val="1.0539"/>
+                                          </p:val>
+                                        </p:tav>
+                                        <p:tav tm="20220">
+                                          <p:val>
+                                            <p:fltVal val="1.054"/>
+                                          </p:val>
+                                        </p:tav>
+                                        <p:tav tm="21350">
+                                          <p:val>
+                                            <p:fltVal val="1.0536"/>
+                                          </p:val>
+                                        </p:tav>
+                                        <p:tav tm="22470">
+                                          <p:val>
+                                            <p:fltVal val="1.0515"/>
+                                          </p:val>
+                                        </p:tav>
+                                        <p:tav tm="23600">
+                                          <p:val>
+                                            <p:fltVal val="1.0457"/>
+                                          </p:val>
+                                        </p:tav>
+                                        <p:tav tm="24720">
+                                          <p:val>
+                                            <p:fltVal val="1.0344"/>
+                                          </p:val>
+                                        </p:tav>
+                                        <p:tav tm="25840">
+                                          <p:val>
+                                            <p:fltVal val="1.0183"/>
+                                          </p:val>
+                                        </p:tav>
+                                        <p:tav tm="26970">
+                                          <p:val>
+                                            <p:fltVal val="1.0076"/>
+                                          </p:val>
+                                        </p:tav>
+                                        <p:tav tm="28090">
+                                          <p:val>
+                                            <p:fltVal val="1.0021"/>
+                                          </p:val>
+                                        </p:tav>
+                                        <p:tav tm="29210">
+                                          <p:val>
+                                            <p:fltVal val="1.0002"/>
+                                          </p:val>
+                                        </p:tav>
+                                        <p:tav tm="30340">
+                                          <p:val>
+                                            <p:fltVal val="1"/>
+                                          </p:val>
+                                        </p:tav>
+                                        <p:tav tm="31460">
+                                          <p:val>
+                                            <p:fltVal val="1"/>
+                                          </p:val>
+                                        </p:tav>
+                                        <p:tav tm="32580">
+                                          <p:val>
+                                            <p:fltVal val="1"/>
+                                          </p:val>
+                                        </p:tav>
+                                        <p:tav tm="33710">
+                                          <p:val>
+                                            <p:fltVal val="1"/>
+                                          </p:val>
+                                        </p:tav>
+                                        <p:tav tm="34830">
+                                          <p:val>
+                                            <p:fltVal val="1"/>
+                                          </p:val>
+                                        </p:tav>
+                                        <p:tav tm="35960">
+                                          <p:val>
+                                            <p:fltVal val="1"/>
+                                          </p:val>
+                                        </p:tav>
+                                        <p:tav tm="37080">
+                                          <p:val>
+                                            <p:fltVal val="1"/>
+                                          </p:val>
+                                        </p:tav>
+                                        <p:tav tm="38200">
+                                          <p:val>
+                                            <p:fltVal val="1"/>
+                                          </p:val>
+                                        </p:tav>
+                                        <p:tav tm="39330">
+                                          <p:val>
+                                            <p:fltVal val="1"/>
+                                          </p:val>
+                                        </p:tav>
+                                        <p:tav tm="40450">
+                                          <p:val>
+                                            <p:fltVal val="1"/>
+                                          </p:val>
+                                        </p:tav>
+                                        <p:tav tm="41570">
+                                          <p:val>
+                                            <p:fltVal val="1"/>
+                                          </p:val>
+                                        </p:tav>
+                                        <p:tav tm="42700">
+                                          <p:val>
+                                            <p:fltVal val="1"/>
+                                          </p:val>
+                                        </p:tav>
+                                        <p:tav tm="43820">
+                                          <p:val>
+                                            <p:fltVal val="1"/>
+                                          </p:val>
+                                        </p:tav>
+                                        <p:tav tm="44940">
+                                          <p:val>
+                                            <p:fltVal val="1"/>
+                                          </p:val>
+                                        </p:tav>
+                                        <p:tav tm="46070">
+                                          <p:val>
+                                            <p:fltVal val="1"/>
+                                          </p:val>
+                                        </p:tav>
+                                        <p:tav tm="47190">
+                                          <p:val>
+                                            <p:fltVal val="1"/>
+                                          </p:val>
+                                        </p:tav>
+                                        <p:tav tm="48310">
+                                          <p:val>
+                                            <p:fltVal val="1"/>
+                                          </p:val>
+                                        </p:tav>
+                                        <p:tav tm="49440">
+                                          <p:val>
+                                            <p:fltVal val="1"/>
+                                          </p:val>
+                                        </p:tav>
+                                        <p:tav tm="50560">
+                                          <p:val>
+                                            <p:fltVal val="1"/>
+                                          </p:val>
+                                        </p:tav>
+                                        <p:tav tm="51690">
+                                          <p:val>
+                                            <p:fltVal val="1"/>
+                                          </p:val>
+                                        </p:tav>
+                                        <p:tav tm="52810">
+                                          <p:val>
+                                            <p:fltVal val="1"/>
+                                          </p:val>
+                                        </p:tav>
+                                        <p:tav tm="53930">
+                                          <p:val>
+                                            <p:fltVal val="1"/>
+                                          </p:val>
+                                        </p:tav>
+                                        <p:tav tm="55060">
+                                          <p:val>
+                                            <p:fltVal val="1"/>
+                                          </p:val>
+                                        </p:tav>
+                                        <p:tav tm="56180">
+                                          <p:val>
+                                            <p:fltVal val="1"/>
+                                          </p:val>
+                                        </p:tav>
+                                        <p:tav tm="57300">
+                                          <p:val>
+                                            <p:fltVal val="1"/>
+                                          </p:val>
+                                        </p:tav>
+                                        <p:tav tm="58430">
+                                          <p:val>
+                                            <p:fltVal val="1"/>
+                                          </p:val>
+                                        </p:tav>
+                                        <p:tav tm="59550">
+                                          <p:val>
+                                            <p:fltVal val="1"/>
+                                          </p:val>
+                                        </p:tav>
+                                        <p:tav tm="60670">
+                                          <p:val>
+                                            <p:fltVal val="1"/>
+                                          </p:val>
+                                        </p:tav>
+                                        <p:tav tm="61800">
+                                          <p:val>
+                                            <p:fltVal val="1"/>
+                                          </p:val>
+                                        </p:tav>
+                                        <p:tav tm="62920">
+                                          <p:val>
+                                            <p:fltVal val="1"/>
+                                          </p:val>
+                                        </p:tav>
+                                        <p:tav tm="64040">
+                                          <p:val>
+                                            <p:fltVal val="1"/>
+                                          </p:val>
+                                        </p:tav>
+                                        <p:tav tm="65170">
+                                          <p:val>
+                                            <p:fltVal val="1"/>
+                                          </p:val>
+                                        </p:tav>
+                                        <p:tav tm="66290">
+                                          <p:val>
+                                            <p:fltVal val="1"/>
+                                          </p:val>
+                                        </p:tav>
+                                        <p:tav tm="67420">
+                                          <p:val>
+                                            <p:fltVal val="1"/>
+                                          </p:val>
+                                        </p:tav>
+                                        <p:tav tm="68540">
+                                          <p:val>
+                                            <p:fltVal val="1.0006"/>
+                                          </p:val>
+                                        </p:tav>
+                                        <p:tav tm="69660">
+                                          <p:val>
+                                            <p:fltVal val="1.0024"/>
+                                          </p:val>
+                                        </p:tav>
+                                        <p:tav tm="70790">
+                                          <p:val>
+                                            <p:fltVal val="1.006"/>
+                                          </p:val>
+                                        </p:tav>
+                                        <p:tav tm="71910">
+                                          <p:val>
+                                            <p:fltVal val="1.0121"/>
+                                          </p:val>
+                                        </p:tav>
+                                        <p:tav tm="73030">
+                                          <p:val>
+                                            <p:fltVal val="1.0213"/>
+                                          </p:val>
+                                        </p:tav>
+                                        <p:tav tm="74160">
+                                          <p:val>
+                                            <p:fltVal val="1.0331"/>
+                                          </p:val>
+                                        </p:tav>
+                                        <p:tav tm="75280">
+                                          <p:val>
+                                            <p:fltVal val="1.0422"/>
+                                          </p:val>
+                                        </p:tav>
+                                        <p:tav tm="76400">
+                                          <p:val>
+                                            <p:fltVal val="1.0482"/>
+                                          </p:val>
+                                        </p:tav>
+                                        <p:tav tm="77530">
+                                          <p:val>
+                                            <p:fltVal val="1.0516"/>
+                                          </p:val>
+                                        </p:tav>
+                                        <p:tav tm="78650">
+                                          <p:val>
+                                            <p:fltVal val="1.0534"/>
+                                          </p:val>
+                                        </p:tav>
+                                        <p:tav tm="79780">
+                                          <p:val>
+                                            <p:fltVal val="1.0539"/>
+                                          </p:val>
+                                        </p:tav>
+                                        <p:tav tm="80900">
+                                          <p:val>
+                                            <p:fltVal val="1.0539"/>
+                                          </p:val>
+                                        </p:tav>
+                                        <p:tav tm="82020">
+                                          <p:val>
+                                            <p:fltVal val="1.0534"/>
+                                          </p:val>
+                                        </p:tav>
+                                        <p:tav tm="83150">
+                                          <p:val>
+                                            <p:fltVal val="1.0506"/>
+                                          </p:val>
+                                        </p:tav>
+                                        <p:tav tm="84270">
+                                          <p:val>
+                                            <p:fltVal val="1.0439"/>
+                                          </p:val>
+                                        </p:tav>
+                                        <p:tav tm="85390">
+                                          <p:val>
+                                            <p:fltVal val="1.0312"/>
+                                          </p:val>
+                                        </p:tav>
+                                        <p:tav tm="86520">
+                                          <p:val>
+                                            <p:fltVal val="1.0156"/>
+                                          </p:val>
+                                        </p:tav>
+                                        <p:tav tm="87640">
+                                          <p:val>
+                                            <p:fltVal val="1.0061"/>
+                                          </p:val>
+                                        </p:tav>
+                                        <p:tav tm="88760">
+                                          <p:val>
+                                            <p:fltVal val="1.0015"/>
+                                          </p:val>
+                                        </p:tav>
+                                        <p:tav tm="89890">
+                                          <p:val>
+                                            <p:fltVal val="1.0001"/>
+                                          </p:val>
+                                        </p:tav>
+                                        <p:tav tm="91010">
+                                          <p:val>
+                                            <p:fltVal val="1"/>
+                                          </p:val>
+                                        </p:tav>
+                                        <p:tav tm="92130">
+                                          <p:val>
+                                            <p:fltVal val="1"/>
+                                          </p:val>
+                                        </p:tav>
+                                        <p:tav tm="93260">
+                                          <p:val>
+                                            <p:fltVal val="1"/>
+                                          </p:val>
+                                        </p:tav>
+                                        <p:tav tm="94380">
+                                          <p:val>
+                                            <p:fltVal val="1"/>
+                                          </p:val>
+                                        </p:tav>
+                                        <p:tav tm="95510">
+                                          <p:val>
+                                            <p:fltVal val="1"/>
+                                          </p:val>
+                                        </p:tav>
+                                        <p:tav tm="96630">
+                                          <p:val>
+                                            <p:fltVal val="1"/>
+                                          </p:val>
+                                        </p:tav>
+                                        <p:tav tm="97750">
+                                          <p:val>
+                                            <p:fltVal val="1"/>
+                                          </p:val>
+                                        </p:tav>
+                                        <p:tav tm="98880">
+                                          <p:val>
+                                            <p:fltVal val="1"/>
+                                          </p:val>
+                                        </p:tav>
+                                        <p:tav tm="100000">
+                                          <p:val>
+                                            <p:fltVal val="1"/>
+                                          </p:val>
+                                        </p:tav>
+                                      </p:tavLst>
+                                    </p:anim>
+                                    <p:anim calcmode="lin" valueType="num">
+                                      <p:cBhvr additive="mult">
+                                        <p:cTn id="9" dur="2000" fill="hold"/>
+                                        <p:tgtEl>
+                                          <p:spTgt spid="2"/>
+                                        </p:tgtEl>
+                                        <p:attrNameLst>
+                                          <p:attrName>3d.view.scale.y</p:attrName>
+                                        </p:attrNameLst>
+                                      </p:cBhvr>
+                                      <p:tavLst>
+                                        <p:tav tm="0">
+                                          <p:val>
+                                            <p:fltVal val="1"/>
+                                          </p:val>
+                                        </p:tav>
+                                        <p:tav tm="1120">
+                                          <p:val>
+                                            <p:fltVal val="0.9999"/>
+                                          </p:val>
+                                        </p:tav>
+                                        <p:tav tm="2250">
+                                          <p:val>
+                                            <p:fltVal val="0.9994"/>
+                                          </p:val>
+                                        </p:tav>
+                                        <p:tav tm="3370">
+                                          <p:val>
+                                            <p:fltVal val="0.9981"/>
+                                          </p:val>
+                                        </p:tav>
+                                        <p:tav tm="4490">
+                                          <p:val>
+                                            <p:fltVal val="0.9955"/>
+                                          </p:val>
+                                        </p:tav>
+                                        <p:tav tm="5620">
+                                          <p:val>
+                                            <p:fltVal val="0.9913"/>
+                                          </p:val>
+                                        </p:tav>
+                                        <p:tav tm="6740">
+                                          <p:val>
+                                            <p:fltVal val="0.985"/>
+                                          </p:val>
+                                        </p:tav>
+                                        <p:tav tm="7870">
+                                          <p:val>
+                                            <p:fltVal val="0.9763"/>
+                                          </p:val>
+                                        </p:tav>
+                                        <p:tav tm="8990">
+                                          <p:val>
+                                            <p:fltVal val="0.9646"/>
+                                          </p:val>
+                                        </p:tav>
+                                        <p:tav tm="10110">
+                                          <p:val>
+                                            <p:fltVal val="0.9497"/>
+                                          </p:val>
+                                        </p:tav>
+                                        <p:tav tm="11240">
+                                          <p:val>
+                                            <p:fltVal val="0.9348"/>
+                                          </p:val>
+                                        </p:tav>
+                                        <p:tav tm="12360">
+                                          <p:val>
+                                            <p:fltVal val="0.9232"/>
+                                          </p:val>
+                                        </p:tav>
+                                        <p:tav tm="13480">
+                                          <p:val>
+                                            <p:fltVal val="0.9146"/>
+                                          </p:val>
+                                        </p:tav>
+                                        <p:tav tm="14610">
+                                          <p:val>
+                                            <p:fltVal val="0.9084"/>
+                                          </p:val>
+                                        </p:tav>
+                                        <p:tav tm="15730">
+                                          <p:val>
+                                            <p:fltVal val="0.9042"/>
+                                          </p:val>
+                                        </p:tav>
+                                        <p:tav tm="16850">
+                                          <p:val>
+                                            <p:fltVal val="0.9017"/>
+                                          </p:val>
+                                        </p:tav>
+                                        <p:tav tm="17980">
+                                          <p:val>
+                                            <p:fltVal val="0.9005"/>
+                                          </p:val>
+                                        </p:tav>
+                                        <p:tav tm="19100">
+                                          <p:val>
+                                            <p:fltVal val="0.9"/>
+                                          </p:val>
+                                        </p:tav>
+                                        <p:tav tm="20220">
+                                          <p:val>
+                                            <p:fltVal val="0.8999"/>
+                                          </p:val>
+                                        </p:tav>
+                                        <p:tav tm="21350">
+                                          <p:val>
+                                            <p:fltVal val="0.9006"/>
+                                          </p:val>
+                                        </p:tav>
+                                        <p:tav tm="22470">
+                                          <p:val>
+                                            <p:fltVal val="0.9046"/>
+                                          </p:val>
+                                        </p:tav>
+                                        <p:tav tm="23600">
+                                          <p:val>
+                                            <p:fltVal val="0.9153"/>
+                                          </p:val>
+                                        </p:tav>
+                                        <p:tav tm="24720">
+                                          <p:val>
+                                            <p:fltVal val="0.9362"/>
+                                          </p:val>
+                                        </p:tav>
+                                        <p:tav tm="25840">
+                                          <p:val>
+                                            <p:fltVal val="0.9659"/>
+                                          </p:val>
+                                        </p:tav>
+                                        <p:tav tm="26970">
+                                          <p:val>
+                                            <p:fltVal val="0.9858"/>
+                                          </p:val>
+                                        </p:tav>
+                                        <p:tav tm="28090">
+                                          <p:val>
+                                            <p:fltVal val="0.9959"/>
+                                          </p:val>
+                                        </p:tav>
+                                        <p:tav tm="29210">
+                                          <p:val>
+                                            <p:fltVal val="0.9995"/>
+                                          </p:val>
+                                        </p:tav>
+                                        <p:tav tm="30340">
+                                          <p:val>
+                                            <p:fltVal val="1"/>
+                                          </p:val>
+                                        </p:tav>
+                                        <p:tav tm="31460">
+                                          <p:val>
+                                            <p:fltVal val="1"/>
+                                          </p:val>
+                                        </p:tav>
+                                        <p:tav tm="32580">
+                                          <p:val>
+                                            <p:fltVal val="1"/>
+                                          </p:val>
+                                        </p:tav>
+                                        <p:tav tm="33710">
+                                          <p:val>
+                                            <p:fltVal val="1"/>
+                                          </p:val>
+                                        </p:tav>
+                                        <p:tav tm="34830">
+                                          <p:val>
+                                            <p:fltVal val="1"/>
+                                          </p:val>
+                                        </p:tav>
+                                        <p:tav tm="35960">
+                                          <p:val>
+                                            <p:fltVal val="1"/>
+                                          </p:val>
+                                        </p:tav>
+                                        <p:tav tm="37080">
+                                          <p:val>
+                                            <p:fltVal val="1"/>
+                                          </p:val>
+                                        </p:tav>
+                                        <p:tav tm="38200">
+                                          <p:val>
+                                            <p:fltVal val="1"/>
+                                          </p:val>
+                                        </p:tav>
+                                        <p:tav tm="39330">
+                                          <p:val>
+                                            <p:fltVal val="1"/>
+                                          </p:val>
+                                        </p:tav>
+                                        <p:tav tm="40450">
+                                          <p:val>
+                                            <p:fltVal val="1"/>
+                                          </p:val>
+                                        </p:tav>
+                                        <p:tav tm="41570">
+                                          <p:val>
+                                            <p:fltVal val="1"/>
+                                          </p:val>
+                                        </p:tav>
+                                        <p:tav tm="42700">
+                                          <p:val>
+                                            <p:fltVal val="1"/>
+                                          </p:val>
+                                        </p:tav>
+                                        <p:tav tm="43820">
+                                          <p:val>
+                                            <p:fltVal val="1"/>
+                                          </p:val>
+                                        </p:tav>
+                                        <p:tav tm="44940">
+                                          <p:val>
+                                            <p:fltVal val="1"/>
+                                          </p:val>
+                                        </p:tav>
+                                        <p:tav tm="46070">
+                                          <p:val>
+                                            <p:fltVal val="1"/>
+                                          </p:val>
+                                        </p:tav>
+                                        <p:tav tm="47190">
+                                          <p:val>
+                                            <p:fltVal val="1"/>
+                                          </p:val>
+                                        </p:tav>
+                                        <p:tav tm="48310">
+                                          <p:val>
+                                            <p:fltVal val="1"/>
+                                          </p:val>
+                                        </p:tav>
+                                        <p:tav tm="49440">
+                                          <p:val>
+                                            <p:fltVal val="1"/>
+                                          </p:val>
+                                        </p:tav>
+                                        <p:tav tm="50560">
+                                          <p:val>
+                                            <p:fltVal val="1"/>
+                                          </p:val>
+                                        </p:tav>
+                                        <p:tav tm="51690">
+                                          <p:val>
+                                            <p:fltVal val="1"/>
+                                          </p:val>
+                                        </p:tav>
+                                        <p:tav tm="52810">
+                                          <p:val>
+                                            <p:fltVal val="1"/>
+                                          </p:val>
+                                        </p:tav>
+                                        <p:tav tm="53930">
+                                          <p:val>
+                                            <p:fltVal val="1"/>
+                                          </p:val>
+                                        </p:tav>
+                                        <p:tav tm="55060">
+                                          <p:val>
+                                            <p:fltVal val="1"/>
+                                          </p:val>
+                                        </p:tav>
+                                        <p:tav tm="56180">
+                                          <p:val>
+                                            <p:fltVal val="1"/>
+                                          </p:val>
+                                        </p:tav>
+                                        <p:tav tm="57300">
+                                          <p:val>
+                                            <p:fltVal val="1"/>
+                                          </p:val>
+                                        </p:tav>
+                                        <p:tav tm="58430">
+                                          <p:val>
+                                            <p:fltVal val="1"/>
+                                          </p:val>
+                                        </p:tav>
+                                        <p:tav tm="59550">
+                                          <p:val>
+                                            <p:fltVal val="1"/>
+                                          </p:val>
+                                        </p:tav>
+                                        <p:tav tm="60670">
+                                          <p:val>
+                                            <p:fltVal val="1"/>
+                                          </p:val>
+                                        </p:tav>
+                                        <p:tav tm="61800">
+                                          <p:val>
+                                            <p:fltVal val="1"/>
+                                          </p:val>
+                                        </p:tav>
+                                        <p:tav tm="62920">
+                                          <p:val>
+                                            <p:fltVal val="1"/>
+                                          </p:val>
+                                        </p:tav>
+                                        <p:tav tm="64040">
+                                          <p:val>
+                                            <p:fltVal val="1"/>
+                                          </p:val>
+                                        </p:tav>
+                                        <p:tav tm="65170">
+                                          <p:val>
+                                            <p:fltVal val="1"/>
+                                          </p:val>
+                                        </p:tav>
+                                        <p:tav tm="66290">
+                                          <p:val>
+                                            <p:fltVal val="1"/>
+                                          </p:val>
+                                        </p:tav>
+                                        <p:tav tm="67420">
+                                          <p:val>
+                                            <p:fltVal val="0.9998"/>
+                                          </p:val>
+                                        </p:tav>
+                                        <p:tav tm="68540">
+                                          <p:val>
+                                            <p:fltVal val="0.9987"/>
+                                          </p:val>
+                                        </p:tav>
+                                        <p:tav tm="69660">
+                                          <p:val>
+                                            <p:fltVal val="0.9955"/>
+                                          </p:val>
+                                        </p:tav>
+                                        <p:tav tm="70790">
+                                          <p:val>
+                                            <p:fltVal val="0.9888"/>
+                                          </p:val>
+                                        </p:tav>
+                                        <p:tav tm="71910">
+                                          <p:val>
+                                            <p:fltVal val="0.9775"/>
+                                          </p:val>
+                                        </p:tav>
+                                        <p:tav tm="73030">
+                                          <p:val>
+                                            <p:fltVal val="0.9605"/>
+                                          </p:val>
+                                        </p:tav>
+                                        <p:tav tm="74160">
+                                          <p:val>
+                                            <p:fltVal val="0.9385"/>
+                                          </p:val>
+                                        </p:tav>
+                                        <p:tav tm="75280">
+                                          <p:val>
+                                            <p:fltVal val="0.9217"/>
+                                          </p:val>
+                                        </p:tav>
+                                        <p:tav tm="76400">
+                                          <p:val>
+                                            <p:fltVal val="0.9107"/>
+                                          </p:val>
+                                        </p:tav>
+                                        <p:tav tm="77530">
+                                          <p:val>
+                                            <p:fltVal val="0.9042"/>
+                                          </p:val>
+                                        </p:tav>
+                                        <p:tav tm="78650">
+                                          <p:val>
+                                            <p:fltVal val="0.901"/>
+                                          </p:val>
+                                        </p:tav>
+                                        <p:tav tm="79780">
+                                          <p:val>
+                                            <p:fltVal val="0.9"/>
+                                          </p:val>
+                                        </p:tav>
+                                        <p:tav tm="80900">
+                                          <p:val>
+                                            <p:fltVal val="0.9"/>
+                                          </p:val>
+                                        </p:tav>
+                                        <p:tav tm="82020">
+                                          <p:val>
+                                            <p:fltVal val="0.901"/>
+                                          </p:val>
+                                        </p:tav>
+                                        <p:tav tm="83150">
+                                          <p:val>
+                                            <p:fltVal val="0.9061"/>
+                                          </p:val>
+                                        </p:tav>
+                                        <p:tav tm="84270">
+                                          <p:val>
+                                            <p:fltVal val="0.9186"/>
+                                          </p:val>
+                                        </p:tav>
+                                        <p:tav tm="85390">
+                                          <p:val>
+                                            <p:fltVal val="0.942"/>
+                                          </p:val>
+                                        </p:tav>
+                                        <p:tav tm="86520">
+                                          <p:val>
+                                            <p:fltVal val="0.9709"/>
+                                          </p:val>
+                                        </p:tav>
+                                        <p:tav tm="87640">
+                                          <p:val>
+                                            <p:fltVal val="0.9885"/>
+                                          </p:val>
+                                        </p:tav>
+                                        <p:tav tm="88760">
+                                          <p:val>
+                                            <p:fltVal val="0.997"/>
+                                          </p:val>
+                                        </p:tav>
+                                        <p:tav tm="89890">
+                                          <p:val>
+                                            <p:fltVal val="0.9997"/>
+                                          </p:val>
+                                        </p:tav>
+                                        <p:tav tm="91010">
+                                          <p:val>
+                                            <p:fltVal val="1"/>
+                                          </p:val>
+                                        </p:tav>
+                                        <p:tav tm="92130">
+                                          <p:val>
+                                            <p:fltVal val="1"/>
+                                          </p:val>
+                                        </p:tav>
+                                        <p:tav tm="93260">
+                                          <p:val>
+                                            <p:fltVal val="1"/>
+                                          </p:val>
+                                        </p:tav>
+                                        <p:tav tm="94380">
+                                          <p:val>
+                                            <p:fltVal val="1"/>
+                                          </p:val>
+                                        </p:tav>
+                                        <p:tav tm="95510">
+                                          <p:val>
+                                            <p:fltVal val="1"/>
+                                          </p:val>
+                                        </p:tav>
+                                        <p:tav tm="96630">
+                                          <p:val>
+                                            <p:fltVal val="1"/>
+                                          </p:val>
+                                        </p:tav>
+                                        <p:tav tm="97750">
+                                          <p:val>
+                                            <p:fltVal val="1"/>
+                                          </p:val>
+                                        </p:tav>
+                                        <p:tav tm="98880">
+                                          <p:val>
+                                            <p:fltVal val="1"/>
+                                          </p:val>
+                                        </p:tav>
+                                        <p:tav tm="100000">
+                                          <p:val>
+                                            <p:fltVal val="1"/>
+                                          </p:val>
+                                        </p:tav>
+                                      </p:tavLst>
+                                    </p:anim>
+                                    <p:anim calcmode="lin" valueType="num">
+                                      <p:cBhvr additive="mult">
+                                        <p:cTn id="10" dur="2000" fill="hold"/>
+                                        <p:tgtEl>
+                                          <p:spTgt spid="2"/>
+                                        </p:tgtEl>
+                                        <p:attrNameLst>
+                                          <p:attrName>3d.view.scale.z</p:attrName>
+                                        </p:attrNameLst>
+                                      </p:cBhvr>
+                                      <p:tavLst>
+                                        <p:tav tm="0">
+                                          <p:val>
+                                            <p:fltVal val="1"/>
+                                          </p:val>
+                                        </p:tav>
+                                        <p:tav tm="1120">
+                                          <p:val>
+                                            <p:fltVal val="1"/>
+                                          </p:val>
+                                        </p:tav>
+                                        <p:tav tm="2250">
+                                          <p:val>
+                                            <p:fltVal val="1.0002"/>
+                                          </p:val>
+                                        </p:tav>
+                                        <p:tav tm="3370">
+                                          <p:val>
+                                            <p:fltVal val="1.0009"/>
+                                          </p:val>
+                                        </p:tav>
+                                        <p:tav tm="4490">
+                                          <p:val>
+                                            <p:fltVal val="1.0023"/>
+                                          </p:val>
+                                        </p:tav>
+                                        <p:tav tm="5620">
+                                          <p:val>
+                                            <p:fltVal val="1.0046"/>
+                                          </p:val>
+                                        </p:tav>
+                                        <p:tav tm="6740">
+                                          <p:val>
+                                            <p:fltVal val="1.008"/>
+                                          </p:val>
+                                        </p:tav>
+                                        <p:tav tm="7870">
+                                          <p:val>
+                                            <p:fltVal val="1.0127"/>
+                                          </p:val>
+                                        </p:tav>
+                                        <p:tav tm="8990">
+                                          <p:val>
+                                            <p:fltVal val="1.019"/>
+                                          </p:val>
+                                        </p:tav>
+                                        <p:tav tm="10110">
+                                          <p:val>
+                                            <p:fltVal val="1.0271"/>
+                                          </p:val>
+                                        </p:tav>
+                                        <p:tav tm="11240">
+                                          <p:val>
+                                            <p:fltVal val="1.0351"/>
+                                          </p:val>
+                                        </p:tav>
+                                        <p:tav tm="12360">
+                                          <p:val>
+                                            <p:fltVal val="1.0414"/>
+                                          </p:val>
+                                        </p:tav>
+                                        <p:tav tm="13480">
+                                          <p:val>
+                                            <p:fltVal val="1.046"/>
+                                          </p:val>
+                                        </p:tav>
+                                        <p:tav tm="14610">
+                                          <p:val>
+                                            <p:fltVal val="1.0494"/>
+                                          </p:val>
+                                        </p:tav>
+                                        <p:tav tm="15730">
+                                          <p:val>
+                                            <p:fltVal val="1.0516"/>
+                                          </p:val>
+                                        </p:tav>
+                                        <p:tav tm="16850">
+                                          <p:val>
+                                            <p:fltVal val="1.053"/>
+                                          </p:val>
+                                        </p:tav>
+                                        <p:tav tm="17980">
+                                          <p:val>
+                                            <p:fltVal val="1.0537"/>
+                                          </p:val>
+                                        </p:tav>
+                                        <p:tav tm="19100">
+                                          <p:val>
+                                            <p:fltVal val="1.0539"/>
+                                          </p:val>
+                                        </p:tav>
+                                        <p:tav tm="20220">
+                                          <p:val>
+                                            <p:fltVal val="1.054"/>
+                                          </p:val>
+                                        </p:tav>
+                                        <p:tav tm="21350">
+                                          <p:val>
+                                            <p:fltVal val="1.0536"/>
+                                          </p:val>
+                                        </p:tav>
+                                        <p:tav tm="22470">
+                                          <p:val>
+                                            <p:fltVal val="1.0515"/>
+                                          </p:val>
+                                        </p:tav>
+                                        <p:tav tm="23600">
+                                          <p:val>
+                                            <p:fltVal val="1.0457"/>
+                                          </p:val>
+                                        </p:tav>
+                                        <p:tav tm="24720">
+                                          <p:val>
+                                            <p:fltVal val="1.0344"/>
+                                          </p:val>
+                                        </p:tav>
+                                        <p:tav tm="25840">
+                                          <p:val>
+                                            <p:fltVal val="1.0183"/>
+                                          </p:val>
+                                        </p:tav>
+                                        <p:tav tm="26970">
+                                          <p:val>
+                                            <p:fltVal val="1.0076"/>
+                                          </p:val>
+                                        </p:tav>
+                                        <p:tav tm="28090">
+                                          <p:val>
+                                            <p:fltVal val="1.0021"/>
+                                          </p:val>
+                                        </p:tav>
+                                        <p:tav tm="29210">
+                                          <p:val>
+                                            <p:fltVal val="1.0002"/>
+                                          </p:val>
+                                        </p:tav>
+                                        <p:tav tm="30340">
+                                          <p:val>
+                                            <p:fltVal val="1"/>
+                                          </p:val>
+                                        </p:tav>
+                                        <p:tav tm="31460">
+                                          <p:val>
+                                            <p:fltVal val="1"/>
+                                          </p:val>
+                                        </p:tav>
+                                        <p:tav tm="32580">
+                                          <p:val>
+                                            <p:fltVal val="1"/>
+                                          </p:val>
+                                        </p:tav>
+                                        <p:tav tm="33710">
+                                          <p:val>
+                                            <p:fltVal val="1"/>
+                                          </p:val>
+                                        </p:tav>
+                                        <p:tav tm="34830">
+                                          <p:val>
+                                            <p:fltVal val="1"/>
+                                          </p:val>
+                                        </p:tav>
+                                        <p:tav tm="35960">
+                                          <p:val>
+                                            <p:fltVal val="1"/>
+                                          </p:val>
+                                        </p:tav>
+                                        <p:tav tm="37080">
+                                          <p:val>
+                                            <p:fltVal val="1"/>
+                                          </p:val>
+                                        </p:tav>
+                                        <p:tav tm="38200">
+                                          <p:val>
+                                            <p:fltVal val="1"/>
+                                          </p:val>
+                                        </p:tav>
+                                        <p:tav tm="39330">
+                                          <p:val>
+                                            <p:fltVal val="1"/>
+                                          </p:val>
+                                        </p:tav>
+                                        <p:tav tm="40450">
+                                          <p:val>
+                                            <p:fltVal val="1"/>
+                                          </p:val>
+                                        </p:tav>
+                                        <p:tav tm="41570">
+                                          <p:val>
+                                            <p:fltVal val="1"/>
+                                          </p:val>
+                                        </p:tav>
+                                        <p:tav tm="42700">
+                                          <p:val>
+                                            <p:fltVal val="1"/>
+                                          </p:val>
+                                        </p:tav>
+                                        <p:tav tm="43820">
+                                          <p:val>
+                                            <p:fltVal val="1"/>
+                                          </p:val>
+                                        </p:tav>
+                                        <p:tav tm="44940">
+                                          <p:val>
+                                            <p:fltVal val="1"/>
+                                          </p:val>
+                                        </p:tav>
+                                        <p:tav tm="46070">
+                                          <p:val>
+                                            <p:fltVal val="1"/>
+                                          </p:val>
+                                        </p:tav>
+                                        <p:tav tm="47190">
+                                          <p:val>
+                                            <p:fltVal val="1"/>
+                                          </p:val>
+                                        </p:tav>
+                                        <p:tav tm="48310">
+                                          <p:val>
+                                            <p:fltVal val="1"/>
+                                          </p:val>
+                                        </p:tav>
+                                        <p:tav tm="49440">
+                                          <p:val>
+                                            <p:fltVal val="1"/>
+                                          </p:val>
+                                        </p:tav>
+                                        <p:tav tm="50560">
+                                          <p:val>
+                                            <p:fltVal val="1"/>
+                                          </p:val>
+                                        </p:tav>
+                                        <p:tav tm="51690">
+                                          <p:val>
+                                            <p:fltVal val="1"/>
+                                          </p:val>
+                                        </p:tav>
+                                        <p:tav tm="52810">
+                                          <p:val>
+                                            <p:fltVal val="1"/>
+                                          </p:val>
+                                        </p:tav>
+                                        <p:tav tm="53930">
+                                          <p:val>
+                                            <p:fltVal val="1"/>
+                                          </p:val>
+                                        </p:tav>
+                                        <p:tav tm="55060">
+                                          <p:val>
+                                            <p:fltVal val="1"/>
+                                          </p:val>
+                                        </p:tav>
+                                        <p:tav tm="56180">
+                                          <p:val>
+                                            <p:fltVal val="1"/>
+                                          </p:val>
+                                        </p:tav>
+                                        <p:tav tm="57300">
+                                          <p:val>
+                                            <p:fltVal val="1"/>
+                                          </p:val>
+                                        </p:tav>
+                                        <p:tav tm="58430">
+                                          <p:val>
+                                            <p:fltVal val="1"/>
+                                          </p:val>
+                                        </p:tav>
+                                        <p:tav tm="59550">
+                                          <p:val>
+                                            <p:fltVal val="1"/>
+                                          </p:val>
+                                        </p:tav>
+                                        <p:tav tm="60670">
+                                          <p:val>
+                                            <p:fltVal val="1"/>
+                                          </p:val>
+                                        </p:tav>
+                                        <p:tav tm="61800">
+                                          <p:val>
+                                            <p:fltVal val="1"/>
+                                          </p:val>
+                                        </p:tav>
+                                        <p:tav tm="62920">
+                                          <p:val>
+                                            <p:fltVal val="1"/>
+                                          </p:val>
+                                        </p:tav>
+                                        <p:tav tm="64040">
+                                          <p:val>
+                                            <p:fltVal val="1"/>
+                                          </p:val>
+                                        </p:tav>
+                                        <p:tav tm="65170">
+                                          <p:val>
+                                            <p:fltVal val="1"/>
+                                          </p:val>
+                                        </p:tav>
+                                        <p:tav tm="66290">
+                                          <p:val>
+                                            <p:fltVal val="1"/>
+                                          </p:val>
+                                        </p:tav>
+                                        <p:tav tm="67420">
+                                          <p:val>
+                                            <p:fltVal val="1"/>
+                                          </p:val>
+                                        </p:tav>
+                                        <p:tav tm="68540">
+                                          <p:val>
+                                            <p:fltVal val="1.0006"/>
+                                          </p:val>
+                                        </p:tav>
+                                        <p:tav tm="69660">
+                                          <p:val>
+                                            <p:fltVal val="1.0024"/>
+                                          </p:val>
+                                        </p:tav>
+                                        <p:tav tm="70790">
+                                          <p:val>
+                                            <p:fltVal val="1.006"/>
+                                          </p:val>
+                                        </p:tav>
+                                        <p:tav tm="71910">
+                                          <p:val>
+                                            <p:fltVal val="1.0121"/>
+                                          </p:val>
+                                        </p:tav>
+                                        <p:tav tm="73030">
+                                          <p:val>
+                                            <p:fltVal val="1.0213"/>
+                                          </p:val>
+                                        </p:tav>
+                                        <p:tav tm="74160">
+                                          <p:val>
+                                            <p:fltVal val="1.0331"/>
+                                          </p:val>
+                                        </p:tav>
+                                        <p:tav tm="75280">
+                                          <p:val>
+                                            <p:fltVal val="1.0422"/>
+                                          </p:val>
+                                        </p:tav>
+                                        <p:tav tm="76400">
+                                          <p:val>
+                                            <p:fltVal val="1.0482"/>
+                                          </p:val>
+                                        </p:tav>
+                                        <p:tav tm="77530">
+                                          <p:val>
+                                            <p:fltVal val="1.0516"/>
+                                          </p:val>
+                                        </p:tav>
+                                        <p:tav tm="78650">
+                                          <p:val>
+                                            <p:fltVal val="1.0534"/>
+                                          </p:val>
+                                        </p:tav>
+                                        <p:tav tm="79780">
+                                          <p:val>
+                                            <p:fltVal val="1.0539"/>
+                                          </p:val>
+                                        </p:tav>
+                                        <p:tav tm="80900">
+                                          <p:val>
+                                            <p:fltVal val="1.0539"/>
+                                          </p:val>
+                                        </p:tav>
+                                        <p:tav tm="82020">
+                                          <p:val>
+                                            <p:fltVal val="1.0534"/>
+                                          </p:val>
+                                        </p:tav>
+                                        <p:tav tm="83150">
+                                          <p:val>
+                                            <p:fltVal val="1.0506"/>
+                                          </p:val>
+                                        </p:tav>
+                                        <p:tav tm="84270">
+                                          <p:val>
+                                            <p:fltVal val="1.0439"/>
+                                          </p:val>
+                                        </p:tav>
+                                        <p:tav tm="85390">
+                                          <p:val>
+                                            <p:fltVal val="1.0312"/>
+                                          </p:val>
+                                        </p:tav>
+                                        <p:tav tm="86520">
+                                          <p:val>
+                                            <p:fltVal val="1.0156"/>
+                                          </p:val>
+                                        </p:tav>
+                                        <p:tav tm="87640">
+                                          <p:val>
+                                            <p:fltVal val="1.0061"/>
+                                          </p:val>
+                                        </p:tav>
+                                        <p:tav tm="88760">
+                                          <p:val>
+                                            <p:fltVal val="1.0015"/>
+                                          </p:val>
+                                        </p:tav>
+                                        <p:tav tm="89890">
+                                          <p:val>
+                                            <p:fltVal val="1.0001"/>
+                                          </p:val>
+                                        </p:tav>
+                                        <p:tav tm="91010">
+                                          <p:val>
+                                            <p:fltVal val="1"/>
+                                          </p:val>
+                                        </p:tav>
+                                        <p:tav tm="92130">
+                                          <p:val>
+                                            <p:fltVal val="1"/>
+                                          </p:val>
+                                        </p:tav>
+                                        <p:tav tm="93260">
+                                          <p:val>
+                                            <p:fltVal val="1"/>
+                                          </p:val>
+                                        </p:tav>
+                                        <p:tav tm="94380">
+                                          <p:val>
+                                            <p:fltVal val="1"/>
+                                          </p:val>
+                                        </p:tav>
+                                        <p:tav tm="95510">
+                                          <p:val>
+                                            <p:fltVal val="1"/>
+                                          </p:val>
+                                        </p:tav>
+                                        <p:tav tm="96630">
+                                          <p:val>
+                                            <p:fltVal val="1"/>
+                                          </p:val>
+                                        </p:tav>
+                                        <p:tav tm="97750">
+                                          <p:val>
+                                            <p:fltVal val="1"/>
+                                          </p:val>
+                                        </p:tav>
+                                        <p:tav tm="98880">
+                                          <p:val>
+                                            <p:fltVal val="1"/>
+                                          </p:val>
+                                        </p:tav>
+                                        <p:tav tm="100000">
+                                          <p:val>
+                                            <p:fltVal val="1"/>
+                                          </p:val>
+                                        </p:tav>
+                                      </p:tavLst>
+                                    </p:anim>
+                                  </p:childTnLst>
+                                </p:cTn>
+                              </p:par>
+                            </p:childTnLst>
+                          </p:cTn>
+                        </p:par>
+                        <p:par>
+                          <p:cTn id="11" fill="hold">
+                            <p:stCondLst>
+                              <p:cond delay="2000"/>
+                            </p:stCondLst>
+                            <p:childTnLst>
+                              <p:par>
+                                <p:cTn id="12" presetID="1" presetClass="exit" presetSubtype="0" fill="hold" nodeType="afterEffect">
+                                  <p:stCondLst>
+                                    <p:cond delay="0"/>
+                                  </p:stCondLst>
+                                  <p:childTnLst>
+                                    <p:set>
+                                      <p:cBhvr>
+                                        <p:cTn id="13" dur="1" fill="hold">
+                                          <p:stCondLst>
+                                            <p:cond delay="0"/>
+                                          </p:stCondLst>
+                                        </p:cTn>
+                                        <p:tgtEl>
+                                          <p:spTgt spid="2"/>
+                                        </p:tgtEl>
+                                        <p:attrNameLst>
+                                          <p:attrName>style.visibility</p:attrName>
+                                        </p:attrNameLst>
+                                      </p:cBhvr>
+                                      <p:to>
+                                        <p:strVal val="hidden"/>
+                                      </p:to>
+                                    </p:set>
+                                  </p:childTnLst>
+                                </p:cTn>
+                              </p:par>
+                            </p:childTnLst>
+                          </p:cTn>
+                        </p:par>
+                        <p:par>
+                          <p:cTn id="14" fill="hold">
+                            <p:stCondLst>
+                              <p:cond delay="2000"/>
+                            </p:stCondLst>
+                            <p:childTnLst>
+                              <p:par>
+                                <p:cTn id="15" presetID="42" presetClass="path" presetSubtype="0" accel="50000" decel="50000" fill="hold" grpId="0" nodeType="afterEffect">
+                                  <p:stCondLst>
+                                    <p:cond delay="0"/>
+                                  </p:stCondLst>
+                                  <p:childTnLst>
+                                    <p:animMotion origin="layout" path="M 0 0 L 0 0.25 E" pathEditMode="relative" ptsTypes="">
+                                      <p:cBhvr>
+                                        <p:cTn id="16" dur="2000" fill="hold"/>
+                                        <p:tgtEl>
+                                          <p:spTgt spid="121"/>
+                                        </p:tgtEl>
+                                        <p:attrNameLst>
+                                          <p:attrName>ppt_x</p:attrName>
+                                          <p:attrName>ppt_y</p:attrName>
+                                        </p:attrNameLst>
+                                      </p:cBhvr>
+                                    </p:animMotion>
+                                  </p:childTnLst>
+                                </p:cTn>
+                              </p:par>
+                            </p:childTnLst>
+                          </p:cTn>
+                        </p:par>
+                      </p:childTnLst>
+                    </p:cTn>
+                  </p:par>
+                </p:childTnLst>
+              </p:cTn>
+              <p:prevCondLst>
+                <p:cond evt="onPrev" delay="0">
+                  <p:tgtEl>
+                    <p:sldTgt/>
+                  </p:tgtEl>
+                </p:cond>
+              </p:prevCondLst>
+              <p:nextCondLst>
+                <p:cond evt="onNext" delay="0">
+                  <p:tgtEl>
+                    <p:sldTgt/>
+                  </p:tgtEl>
+                </p:cond>
+              </p:nextCondLst>
+            </p:seq>
+          </p:childTnLst>
+        </p:cTn>
+      </p:par>
+    </p:tnLst>
+    <p:bldLst>
+      <p:bldP spid="121" grpId="0"/>
+    </p:bldLst>
+  </p:timing>
 </p:sld>
 </file>
 
@@ -5678,10 +7492,790 @@
   <p:clrMapOvr>
     <a:masterClrMapping/>
   </p:clrMapOvr>
+  <p:transition spd="slow">
+    <p:push dir="u"/>
+  </p:transition>
 </p:sld>
 </file>
 
 <file path=ppt/slides/slide3.xml><?xml version="1.0" encoding="utf-8"?>
+<p:sld xmlns:a="http://schemas.openxmlformats.org/drawingml/2006/main" xmlns:r="http://schemas.openxmlformats.org/officeDocument/2006/relationships" xmlns:p="http://schemas.openxmlformats.org/presentationml/2006/main">
+  <p:cSld>
+    <p:bg>
+      <p:bgPr>
+        <a:solidFill>
+          <a:srgbClr val="000000"/>
+        </a:solidFill>
+        <a:effectLst/>
+      </p:bgPr>
+    </p:bg>
+    <p:spTree>
+      <p:nvGrpSpPr>
+        <p:cNvPr id="1" name="Shape 61"/>
+        <p:cNvGrpSpPr/>
+        <p:nvPr/>
+      </p:nvGrpSpPr>
+      <p:grpSpPr>
+        <a:xfrm>
+          <a:off x="0" y="0"/>
+          <a:ext cx="0" cy="0"/>
+          <a:chOff x="0" y="0"/>
+          <a:chExt cx="0" cy="0"/>
+        </a:xfrm>
+      </p:grpSpPr>
+      <p:sp>
+        <p:nvSpPr>
+          <p:cNvPr id="62" name="Google Shape;62;p5"/>
+          <p:cNvSpPr/>
+          <p:nvPr/>
+        </p:nvSpPr>
+        <p:spPr>
+          <a:xfrm>
+            <a:off x="0" y="0"/>
+            <a:ext cx="9144000" cy="5143500"/>
+          </a:xfrm>
+          <a:prstGeom prst="rect">
+            <a:avLst/>
+          </a:prstGeom>
+          <a:noFill/>
+          <a:ln>
+            <a:noFill/>
+          </a:ln>
+        </p:spPr>
+        <p:txBody>
+          <a:bodyPr spcFirstLastPara="1" wrap="square" lIns="91425" tIns="45700" rIns="91425" bIns="45700" anchor="t" anchorCtr="0">
+            <a:noAutofit/>
+          </a:bodyPr>
+          <a:lstStyle/>
+          <a:p>
+            <a:pPr marL="0" marR="0" lvl="0" indent="0" algn="l" rtl="0">
+              <a:spcBef>
+                <a:spcPts val="0"/>
+              </a:spcBef>
+              <a:spcAft>
+                <a:spcPts val="0"/>
+              </a:spcAft>
+              <a:buNone/>
+            </a:pPr>
+            <a:endParaRPr sz="1800">
+              <a:solidFill>
+                <a:schemeClr val="dk1"/>
+              </a:solidFill>
+              <a:latin typeface="Calibri"/>
+              <a:ea typeface="Calibri"/>
+              <a:cs typeface="Calibri"/>
+              <a:sym typeface="Calibri"/>
+            </a:endParaRPr>
+          </a:p>
+        </p:txBody>
+      </p:sp>
+      <p:pic>
+        <p:nvPicPr>
+          <p:cNvPr id="63" name="Google Shape;63;p5" descr="preencoded.png"/>
+          <p:cNvPicPr preferRelativeResize="0"/>
+          <p:nvPr/>
+        </p:nvPicPr>
+        <p:blipFill rotWithShape="1">
+          <a:blip r:embed="rId3">
+            <a:alphaModFix/>
+          </a:blip>
+          <a:srcRect/>
+          <a:stretch/>
+        </p:blipFill>
+        <p:spPr>
+          <a:xfrm>
+            <a:off x="0" y="0"/>
+            <a:ext cx="9144000" cy="5143500"/>
+          </a:xfrm>
+          <a:prstGeom prst="rect">
+            <a:avLst/>
+          </a:prstGeom>
+          <a:noFill/>
+          <a:ln>
+            <a:noFill/>
+          </a:ln>
+        </p:spPr>
+      </p:pic>
+      <p:sp>
+        <p:nvSpPr>
+          <p:cNvPr id="64" name="Google Shape;64;p5"/>
+          <p:cNvSpPr/>
+          <p:nvPr/>
+        </p:nvSpPr>
+        <p:spPr>
+          <a:xfrm>
+            <a:off x="640556" y="502116"/>
+            <a:ext cx="7862888" cy="428625"/>
+          </a:xfrm>
+          <a:prstGeom prst="rect">
+            <a:avLst/>
+          </a:prstGeom>
+          <a:noFill/>
+          <a:ln>
+            <a:noFill/>
+          </a:ln>
+        </p:spPr>
+        <p:txBody>
+          <a:bodyPr spcFirstLastPara="1" wrap="square" lIns="91425" tIns="45700" rIns="91425" bIns="45700" anchor="ctr" anchorCtr="0">
+            <a:noAutofit/>
+          </a:bodyPr>
+          <a:lstStyle/>
+          <a:p>
+            <a:pPr marL="0" marR="0" lvl="0" indent="0" algn="ctr" rtl="0">
+              <a:lnSpc>
+                <a:spcPct val="75000"/>
+              </a:lnSpc>
+              <a:spcBef>
+                <a:spcPts val="0"/>
+              </a:spcBef>
+              <a:spcAft>
+                <a:spcPts val="0"/>
+              </a:spcAft>
+              <a:buClr>
+                <a:srgbClr val="FFFFFF"/>
+              </a:buClr>
+              <a:buSzPts val="4500"/>
+              <a:buFont typeface="PT Mono"/>
+              <a:buNone/>
+            </a:pPr>
+            <a:r>
+              <a:rPr lang="en-US" sz="4000" dirty="0" err="1">
+                <a:solidFill>
+                  <a:srgbClr val="FFFFFF"/>
+                </a:solidFill>
+                <a:latin typeface="PT Mono"/>
+                <a:ea typeface="PT Mono"/>
+                <a:cs typeface="PT Mono"/>
+                <a:sym typeface="PT Mono"/>
+              </a:rPr>
+              <a:t>Как</a:t>
+            </a:r>
+            <a:r>
+              <a:rPr lang="en-US" sz="4000" dirty="0">
+                <a:solidFill>
+                  <a:srgbClr val="FFFFFF"/>
+                </a:solidFill>
+                <a:latin typeface="PT Mono"/>
+                <a:ea typeface="PT Mono"/>
+                <a:cs typeface="PT Mono"/>
+                <a:sym typeface="PT Mono"/>
+              </a:rPr>
+              <a:t> </a:t>
+            </a:r>
+            <a:r>
+              <a:rPr lang="en-US" sz="4000" dirty="0" err="1">
+                <a:solidFill>
+                  <a:srgbClr val="FFFFFF"/>
+                </a:solidFill>
+                <a:latin typeface="PT Mono"/>
+                <a:ea typeface="PT Mono"/>
+                <a:cs typeface="PT Mono"/>
+                <a:sym typeface="PT Mono"/>
+              </a:rPr>
+              <a:t>работи</a:t>
+            </a:r>
+            <a:r>
+              <a:rPr lang="en-US" sz="4000" dirty="0">
+                <a:solidFill>
+                  <a:srgbClr val="FFFFFF"/>
+                </a:solidFill>
+                <a:latin typeface="PT Mono"/>
+                <a:ea typeface="PT Mono"/>
+                <a:cs typeface="PT Mono"/>
+                <a:sym typeface="PT Mono"/>
+              </a:rPr>
+              <a:t> </a:t>
+            </a:r>
+            <a:r>
+              <a:rPr lang="en-US" sz="4000" dirty="0" err="1">
+                <a:solidFill>
+                  <a:srgbClr val="FFFFFF"/>
+                </a:solidFill>
+                <a:latin typeface="PT Mono"/>
+                <a:ea typeface="PT Mono"/>
+                <a:cs typeface="PT Mono"/>
+                <a:sym typeface="PT Mono"/>
+              </a:rPr>
+              <a:t>проектът</a:t>
+            </a:r>
+            <a:endParaRPr sz="4500" dirty="0">
+              <a:solidFill>
+                <a:schemeClr val="dk1"/>
+              </a:solidFill>
+              <a:latin typeface="Calibri"/>
+              <a:ea typeface="Calibri"/>
+              <a:cs typeface="Calibri"/>
+              <a:sym typeface="Calibri"/>
+            </a:endParaRPr>
+          </a:p>
+        </p:txBody>
+      </p:sp>
+      <p:pic>
+        <p:nvPicPr>
+          <p:cNvPr id="65" name="Google Shape;65;p5" descr="A green circle with a black background&#10;&#10;Description automatically generated"/>
+          <p:cNvPicPr preferRelativeResize="0"/>
+          <p:nvPr/>
+        </p:nvPicPr>
+        <p:blipFill rotWithShape="1">
+          <a:blip r:embed="rId4">
+            <a:alphaModFix/>
+          </a:blip>
+          <a:srcRect/>
+          <a:stretch/>
+        </p:blipFill>
+        <p:spPr>
+          <a:xfrm>
+            <a:off x="-2656057" y="2840477"/>
+            <a:ext cx="5143500" cy="5143500"/>
+          </a:xfrm>
+          <a:prstGeom prst="rect">
+            <a:avLst/>
+          </a:prstGeom>
+          <a:noFill/>
+          <a:ln>
+            <a:noFill/>
+          </a:ln>
+        </p:spPr>
+      </p:pic>
+      <p:pic>
+        <p:nvPicPr>
+          <p:cNvPr id="66" name="Google Shape;66;p5" descr="A circular logo with a black background&#10;&#10;Description automatically generated"/>
+          <p:cNvPicPr preferRelativeResize="0"/>
+          <p:nvPr/>
+        </p:nvPicPr>
+        <p:blipFill rotWithShape="1">
+          <a:blip r:embed="rId5">
+            <a:alphaModFix/>
+          </a:blip>
+          <a:srcRect/>
+          <a:stretch/>
+        </p:blipFill>
+        <p:spPr>
+          <a:xfrm>
+            <a:off x="7669531" y="107385"/>
+            <a:ext cx="5143500" cy="5143500"/>
+          </a:xfrm>
+          <a:prstGeom prst="rect">
+            <a:avLst/>
+          </a:prstGeom>
+          <a:noFill/>
+          <a:ln>
+            <a:noFill/>
+          </a:ln>
+        </p:spPr>
+      </p:pic>
+      <p:sp>
+        <p:nvSpPr>
+          <p:cNvPr id="2" name="TextBox 1"/>
+          <p:cNvSpPr txBox="1"/>
+          <p:nvPr/>
+        </p:nvSpPr>
+        <p:spPr>
+          <a:xfrm>
+            <a:off x="1924493" y="1861482"/>
+            <a:ext cx="5295014" cy="1015663"/>
+          </a:xfrm>
+          <a:prstGeom prst="rect">
+            <a:avLst/>
+          </a:prstGeom>
+          <a:noFill/>
+        </p:spPr>
+        <p:txBody>
+          <a:bodyPr wrap="square" rtlCol="0">
+            <a:spAutoFit/>
+          </a:bodyPr>
+          <a:lstStyle/>
+          <a:p>
+            <a:pPr algn="ctr"/>
+            <a:r>
+              <a:rPr lang="ru-RU" sz="2000" dirty="0" err="1">
+                <a:solidFill>
+                  <a:schemeClr val="bg1"/>
+                </a:solidFill>
+              </a:rPr>
+              <a:t>Качване</a:t>
+            </a:r>
+            <a:r>
+              <a:rPr lang="ru-RU" sz="2000" dirty="0">
+                <a:solidFill>
+                  <a:schemeClr val="bg1"/>
+                </a:solidFill>
+              </a:rPr>
+              <a:t> на </a:t>
+            </a:r>
+            <a:r>
+              <a:rPr lang="ru-RU" sz="2000" dirty="0" err="1">
+                <a:solidFill>
+                  <a:schemeClr val="bg1"/>
+                </a:solidFill>
+              </a:rPr>
+              <a:t>обяви</a:t>
+            </a:r>
+            <a:r>
+              <a:rPr lang="ru-RU" sz="2000" dirty="0">
+                <a:solidFill>
+                  <a:schemeClr val="bg1"/>
+                </a:solidFill>
+              </a:rPr>
+              <a:t> с цени, </a:t>
+            </a:r>
+            <a:r>
+              <a:rPr lang="ru-RU" sz="2000" dirty="0" err="1">
+                <a:solidFill>
+                  <a:schemeClr val="bg1"/>
+                </a:solidFill>
+              </a:rPr>
+              <a:t>продукти</a:t>
+            </a:r>
+            <a:r>
+              <a:rPr lang="ru-RU" sz="2000" dirty="0">
+                <a:solidFill>
+                  <a:schemeClr val="bg1"/>
+                </a:solidFill>
+              </a:rPr>
+              <a:t> и локации, </a:t>
+            </a:r>
+            <a:r>
+              <a:rPr lang="ru-RU" sz="2000" dirty="0" err="1">
+                <a:solidFill>
+                  <a:schemeClr val="bg1"/>
+                </a:solidFill>
+              </a:rPr>
+              <a:t>както</a:t>
+            </a:r>
+            <a:r>
+              <a:rPr lang="ru-RU" sz="2000" dirty="0">
+                <a:solidFill>
+                  <a:schemeClr val="bg1"/>
+                </a:solidFill>
+              </a:rPr>
+              <a:t> и </a:t>
+            </a:r>
+            <a:r>
+              <a:rPr lang="ru-RU" sz="2000" dirty="0" err="1">
+                <a:solidFill>
+                  <a:schemeClr val="bg1"/>
+                </a:solidFill>
+              </a:rPr>
+              <a:t>търсене</a:t>
+            </a:r>
+            <a:r>
+              <a:rPr lang="ru-RU" sz="2000" dirty="0">
+                <a:solidFill>
+                  <a:schemeClr val="bg1"/>
+                </a:solidFill>
+              </a:rPr>
+              <a:t> с </a:t>
+            </a:r>
+            <a:r>
+              <a:rPr lang="ru-RU" sz="2000" dirty="0" err="1">
+                <a:solidFill>
+                  <a:schemeClr val="bg1"/>
+                </a:solidFill>
+              </a:rPr>
+              <a:t>филтри</a:t>
+            </a:r>
+            <a:r>
+              <a:rPr lang="ru-RU" sz="2000" dirty="0">
+                <a:solidFill>
+                  <a:schemeClr val="bg1"/>
+                </a:solidFill>
+              </a:rPr>
+              <a:t> за вид продукт, цена и локация.</a:t>
+            </a:r>
+            <a:endParaRPr lang="en-US" sz="2000" dirty="0">
+              <a:solidFill>
+                <a:schemeClr val="bg1"/>
+              </a:solidFill>
+            </a:endParaRPr>
+          </a:p>
+        </p:txBody>
+      </p:sp>
+    </p:spTree>
+  </p:cSld>
+  <p:clrMapOvr>
+    <a:masterClrMapping/>
+  </p:clrMapOvr>
+  <p:transition spd="slow">
+    <p:push dir="u"/>
+  </p:transition>
+</p:sld>
+</file>
+
+<file path=ppt/slides/slide4.xml><?xml version="1.0" encoding="utf-8"?>
+<p:sld xmlns:a="http://schemas.openxmlformats.org/drawingml/2006/main" xmlns:r="http://schemas.openxmlformats.org/officeDocument/2006/relationships" xmlns:p="http://schemas.openxmlformats.org/presentationml/2006/main">
+  <p:cSld>
+    <p:bg>
+      <p:bgPr>
+        <a:solidFill>
+          <a:srgbClr val="000000"/>
+        </a:solidFill>
+        <a:effectLst/>
+      </p:bgPr>
+    </p:bg>
+    <p:spTree>
+      <p:nvGrpSpPr>
+        <p:cNvPr id="1" name="Shape 83"/>
+        <p:cNvGrpSpPr/>
+        <p:nvPr/>
+      </p:nvGrpSpPr>
+      <p:grpSpPr>
+        <a:xfrm>
+          <a:off x="0" y="0"/>
+          <a:ext cx="0" cy="0"/>
+          <a:chOff x="0" y="0"/>
+          <a:chExt cx="0" cy="0"/>
+        </a:xfrm>
+      </p:grpSpPr>
+      <p:pic>
+        <p:nvPicPr>
+          <p:cNvPr id="84" name="Google Shape;84;p7" descr="A black circle with yellow lines&#10;&#10;Description automatically generated"/>
+          <p:cNvPicPr preferRelativeResize="0"/>
+          <p:nvPr/>
+        </p:nvPicPr>
+        <p:blipFill rotWithShape="1">
+          <a:blip r:embed="rId3">
+            <a:alphaModFix/>
+          </a:blip>
+          <a:srcRect/>
+          <a:stretch/>
+        </p:blipFill>
+        <p:spPr>
+          <a:xfrm>
+            <a:off x="-3428486" y="2496639"/>
+            <a:ext cx="6686550" cy="6686550"/>
+          </a:xfrm>
+          <a:prstGeom prst="rect">
+            <a:avLst/>
+          </a:prstGeom>
+          <a:noFill/>
+          <a:ln>
+            <a:noFill/>
+          </a:ln>
+        </p:spPr>
+      </p:pic>
+      <p:pic>
+        <p:nvPicPr>
+          <p:cNvPr id="85" name="Google Shape;85;p7" descr="A screen shot of a clock&#10;&#10;Description automatically generated"/>
+          <p:cNvPicPr preferRelativeResize="0"/>
+          <p:nvPr/>
+        </p:nvPicPr>
+        <p:blipFill rotWithShape="1">
+          <a:blip r:embed="rId4">
+            <a:alphaModFix/>
+          </a:blip>
+          <a:srcRect/>
+          <a:stretch/>
+        </p:blipFill>
+        <p:spPr>
+          <a:xfrm>
+            <a:off x="6271607" y="-329453"/>
+            <a:ext cx="4133896" cy="6501324"/>
+          </a:xfrm>
+          <a:prstGeom prst="rect">
+            <a:avLst/>
+          </a:prstGeom>
+          <a:noFill/>
+          <a:ln>
+            <a:noFill/>
+          </a:ln>
+        </p:spPr>
+      </p:pic>
+      <p:sp>
+        <p:nvSpPr>
+          <p:cNvPr id="86" name="Google Shape;86;p7"/>
+          <p:cNvSpPr/>
+          <p:nvPr/>
+        </p:nvSpPr>
+        <p:spPr>
+          <a:xfrm>
+            <a:off x="0" y="0"/>
+            <a:ext cx="9144000" cy="5143500"/>
+          </a:xfrm>
+          <a:prstGeom prst="rect">
+            <a:avLst/>
+          </a:prstGeom>
+          <a:noFill/>
+          <a:ln>
+            <a:noFill/>
+          </a:ln>
+        </p:spPr>
+        <p:txBody>
+          <a:bodyPr spcFirstLastPara="1" wrap="square" lIns="91425" tIns="45700" rIns="91425" bIns="45700" anchor="t" anchorCtr="0">
+            <a:noAutofit/>
+          </a:bodyPr>
+          <a:lstStyle/>
+          <a:p>
+            <a:pPr marL="0" marR="0" lvl="0" indent="0" algn="l" rtl="0">
+              <a:spcBef>
+                <a:spcPts val="0"/>
+              </a:spcBef>
+              <a:spcAft>
+                <a:spcPts val="0"/>
+              </a:spcAft>
+              <a:buNone/>
+            </a:pPr>
+            <a:endParaRPr sz="1800">
+              <a:solidFill>
+                <a:schemeClr val="dk1"/>
+              </a:solidFill>
+              <a:latin typeface="Calibri"/>
+              <a:ea typeface="Calibri"/>
+              <a:cs typeface="Calibri"/>
+              <a:sym typeface="Calibri"/>
+            </a:endParaRPr>
+          </a:p>
+        </p:txBody>
+      </p:sp>
+      <p:pic>
+        <p:nvPicPr>
+          <p:cNvPr id="87" name="Google Shape;87;p7" descr="preencoded.png"/>
+          <p:cNvPicPr preferRelativeResize="0"/>
+          <p:nvPr/>
+        </p:nvPicPr>
+        <p:blipFill rotWithShape="1">
+          <a:blip r:embed="rId5">
+            <a:alphaModFix/>
+          </a:blip>
+          <a:srcRect/>
+          <a:stretch/>
+        </p:blipFill>
+        <p:spPr>
+          <a:xfrm>
+            <a:off x="0" y="0"/>
+            <a:ext cx="9144000" cy="5143500"/>
+          </a:xfrm>
+          <a:prstGeom prst="rect">
+            <a:avLst/>
+          </a:prstGeom>
+          <a:noFill/>
+          <a:ln>
+            <a:noFill/>
+          </a:ln>
+        </p:spPr>
+      </p:pic>
+      <p:sp>
+        <p:nvSpPr>
+          <p:cNvPr id="88" name="Google Shape;88;p7"/>
+          <p:cNvSpPr/>
+          <p:nvPr/>
+        </p:nvSpPr>
+        <p:spPr>
+          <a:xfrm>
+            <a:off x="594836" y="540068"/>
+            <a:ext cx="7862888" cy="428625"/>
+          </a:xfrm>
+          <a:prstGeom prst="rect">
+            <a:avLst/>
+          </a:prstGeom>
+          <a:noFill/>
+          <a:ln>
+            <a:noFill/>
+          </a:ln>
+        </p:spPr>
+        <p:txBody>
+          <a:bodyPr spcFirstLastPara="1" wrap="square" lIns="91425" tIns="45700" rIns="91425" bIns="45700" anchor="ctr" anchorCtr="0">
+            <a:noAutofit/>
+          </a:bodyPr>
+          <a:lstStyle/>
+          <a:p>
+            <a:pPr marL="0" marR="0" lvl="0" indent="0" algn="ctr" rtl="0">
+              <a:lnSpc>
+                <a:spcPct val="75000"/>
+              </a:lnSpc>
+              <a:spcBef>
+                <a:spcPts val="0"/>
+              </a:spcBef>
+              <a:spcAft>
+                <a:spcPts val="0"/>
+              </a:spcAft>
+              <a:buClr>
+                <a:srgbClr val="FFFFFF"/>
+              </a:buClr>
+              <a:buSzPts val="4500"/>
+              <a:buFont typeface="PT Mono"/>
+              <a:buNone/>
+            </a:pPr>
+            <a:r>
+              <a:rPr lang="en-US" sz="4000" dirty="0" err="1">
+                <a:solidFill>
+                  <a:srgbClr val="FFFFFF"/>
+                </a:solidFill>
+                <a:latin typeface="PT Mono"/>
+                <a:ea typeface="PT Mono"/>
+                <a:cs typeface="PT Mono"/>
+                <a:sym typeface="PT Mono"/>
+              </a:rPr>
+              <a:t>Използвани</a:t>
+            </a:r>
+            <a:r>
+              <a:rPr lang="en-US" sz="4000" dirty="0">
+                <a:solidFill>
+                  <a:srgbClr val="FFFFFF"/>
+                </a:solidFill>
+                <a:latin typeface="PT Mono"/>
+                <a:ea typeface="PT Mono"/>
+                <a:cs typeface="PT Mono"/>
+                <a:sym typeface="PT Mono"/>
+              </a:rPr>
+              <a:t> </a:t>
+            </a:r>
+            <a:r>
+              <a:rPr lang="en-US" sz="4000" dirty="0" err="1">
+                <a:solidFill>
+                  <a:srgbClr val="FFFFFF"/>
+                </a:solidFill>
+                <a:latin typeface="PT Mono"/>
+                <a:ea typeface="PT Mono"/>
+                <a:cs typeface="PT Mono"/>
+                <a:sym typeface="PT Mono"/>
+              </a:rPr>
+              <a:t>технологии</a:t>
+            </a:r>
+            <a:endParaRPr sz="4000" dirty="0">
+              <a:solidFill>
+                <a:schemeClr val="dk1"/>
+              </a:solidFill>
+              <a:latin typeface="Calibri"/>
+              <a:ea typeface="Calibri"/>
+              <a:cs typeface="Calibri"/>
+              <a:sym typeface="Calibri"/>
+            </a:endParaRPr>
+          </a:p>
+        </p:txBody>
+      </p:sp>
+      <p:sp>
+        <p:nvSpPr>
+          <p:cNvPr id="2" name="TextBox 1"/>
+          <p:cNvSpPr txBox="1"/>
+          <p:nvPr/>
+        </p:nvSpPr>
+        <p:spPr>
+          <a:xfrm>
+            <a:off x="2640212" y="2169907"/>
+            <a:ext cx="6368903" cy="1631216"/>
+          </a:xfrm>
+          <a:prstGeom prst="rect">
+            <a:avLst/>
+          </a:prstGeom>
+          <a:noFill/>
+        </p:spPr>
+        <p:txBody>
+          <a:bodyPr wrap="square" rtlCol="0">
+            <a:spAutoFit/>
+          </a:bodyPr>
+          <a:lstStyle/>
+          <a:p>
+            <a:r>
+              <a:rPr lang="en-US" sz="2000" dirty="0">
+                <a:solidFill>
+                  <a:schemeClr val="bg1"/>
+                </a:solidFill>
+              </a:rPr>
+              <a:t>Backend – Python</a:t>
+            </a:r>
+            <a:r>
+              <a:rPr lang="bg-BG" sz="2000" dirty="0">
+                <a:solidFill>
+                  <a:schemeClr val="bg1"/>
+                </a:solidFill>
+              </a:rPr>
+              <a:t> и</a:t>
+            </a:r>
+            <a:r>
+              <a:rPr lang="en-US" sz="2000" dirty="0">
+                <a:solidFill>
+                  <a:schemeClr val="bg1"/>
+                </a:solidFill>
+              </a:rPr>
+              <a:t> Flask;</a:t>
+            </a:r>
+          </a:p>
+          <a:p>
+            <a:endParaRPr lang="en-US" sz="2000" dirty="0">
+              <a:solidFill>
+                <a:schemeClr val="bg1"/>
+              </a:solidFill>
+            </a:endParaRPr>
+          </a:p>
+          <a:p>
+            <a:r>
+              <a:rPr lang="en-US" sz="2000" dirty="0">
+                <a:solidFill>
+                  <a:schemeClr val="bg1"/>
+                </a:solidFill>
+              </a:rPr>
+              <a:t>Database – MongoDB</a:t>
+            </a:r>
+            <a:r>
+              <a:rPr lang="en-GB" sz="2000" dirty="0">
+                <a:solidFill>
+                  <a:schemeClr val="bg1"/>
+                </a:solidFill>
+              </a:rPr>
+              <a:t>;</a:t>
+            </a:r>
+            <a:endParaRPr lang="en-US" sz="2000" dirty="0">
+              <a:solidFill>
+                <a:schemeClr val="bg1"/>
+              </a:solidFill>
+            </a:endParaRPr>
+          </a:p>
+          <a:p>
+            <a:endParaRPr lang="en-US" sz="2000" dirty="0">
+              <a:solidFill>
+                <a:schemeClr val="bg1"/>
+              </a:solidFill>
+            </a:endParaRPr>
+          </a:p>
+          <a:p>
+            <a:r>
+              <a:rPr lang="en-GB" sz="2000" dirty="0">
+                <a:solidFill>
+                  <a:schemeClr val="bg1"/>
+                </a:solidFill>
+              </a:rPr>
+              <a:t>Frontend - </a:t>
+            </a:r>
+            <a:r>
+              <a:rPr lang="en-US" sz="2000" dirty="0">
+                <a:solidFill>
+                  <a:schemeClr val="bg1"/>
+                </a:solidFill>
+              </a:rPr>
+              <a:t>Vue.js </a:t>
+            </a:r>
+            <a:r>
+              <a:rPr lang="bg-BG" sz="2000" dirty="0">
+                <a:solidFill>
+                  <a:schemeClr val="bg1"/>
+                </a:solidFill>
+              </a:rPr>
+              <a:t>и </a:t>
+            </a:r>
+            <a:r>
+              <a:rPr lang="en-US" sz="2000" dirty="0">
+                <a:solidFill>
+                  <a:schemeClr val="bg1"/>
+                </a:solidFill>
+              </a:rPr>
+              <a:t>Tailwind CSS;</a:t>
+            </a:r>
+          </a:p>
+        </p:txBody>
+      </p:sp>
+    </p:spTree>
+  </p:cSld>
+  <p:clrMapOvr>
+    <a:masterClrMapping/>
+  </p:clrMapOvr>
+  <p:transition spd="slow">
+    <p:push dir="u"/>
+  </p:transition>
+</p:sld>
+</file>
+
+<file path=ppt/slides/slide5.xml><?xml version="1.0" encoding="utf-8"?>
 <p:sld xmlns:a="http://schemas.openxmlformats.org/drawingml/2006/main" xmlns:r="http://schemas.openxmlformats.org/officeDocument/2006/relationships" xmlns:p="http://schemas.openxmlformats.org/presentationml/2006/main">
   <p:cSld>
     <p:bg>
@@ -6165,773 +8759,9 @@
   <p:clrMapOvr>
     <a:masterClrMapping/>
   </p:clrMapOvr>
-  <mc:AlternateContent xmlns:mc="http://schemas.openxmlformats.org/markup-compatibility/2006" xmlns:p14="http://schemas.microsoft.com/office/powerpoint/2010/main">
-    <mc:Choice Requires="p14">
-      <p:transition spd="slow" p14:dur="4000">
-        <p14:vortex dir="r"/>
-      </p:transition>
-    </mc:Choice>
-    <mc:Fallback xmlns="">
-      <p:transition spd="slow">
-        <p:fade/>
-      </p:transition>
-    </mc:Fallback>
-  </mc:AlternateContent>
-</p:sld>
-</file>
-
-<file path=ppt/slides/slide4.xml><?xml version="1.0" encoding="utf-8"?>
-<p:sld xmlns:a="http://schemas.openxmlformats.org/drawingml/2006/main" xmlns:r="http://schemas.openxmlformats.org/officeDocument/2006/relationships" xmlns:p="http://schemas.openxmlformats.org/presentationml/2006/main">
-  <p:cSld>
-    <p:bg>
-      <p:bgPr>
-        <a:solidFill>
-          <a:srgbClr val="000000"/>
-        </a:solidFill>
-        <a:effectLst/>
-      </p:bgPr>
-    </p:bg>
-    <p:spTree>
-      <p:nvGrpSpPr>
-        <p:cNvPr id="1" name="Shape 61"/>
-        <p:cNvGrpSpPr/>
-        <p:nvPr/>
-      </p:nvGrpSpPr>
-      <p:grpSpPr>
-        <a:xfrm>
-          <a:off x="0" y="0"/>
-          <a:ext cx="0" cy="0"/>
-          <a:chOff x="0" y="0"/>
-          <a:chExt cx="0" cy="0"/>
-        </a:xfrm>
-      </p:grpSpPr>
-      <p:sp>
-        <p:nvSpPr>
-          <p:cNvPr id="62" name="Google Shape;62;p5"/>
-          <p:cNvSpPr/>
-          <p:nvPr/>
-        </p:nvSpPr>
-        <p:spPr>
-          <a:xfrm>
-            <a:off x="0" y="0"/>
-            <a:ext cx="9144000" cy="5143500"/>
-          </a:xfrm>
-          <a:prstGeom prst="rect">
-            <a:avLst/>
-          </a:prstGeom>
-          <a:noFill/>
-          <a:ln>
-            <a:noFill/>
-          </a:ln>
-        </p:spPr>
-        <p:txBody>
-          <a:bodyPr spcFirstLastPara="1" wrap="square" lIns="91425" tIns="45700" rIns="91425" bIns="45700" anchor="t" anchorCtr="0">
-            <a:noAutofit/>
-          </a:bodyPr>
-          <a:lstStyle/>
-          <a:p>
-            <a:pPr marL="0" marR="0" lvl="0" indent="0" algn="l" rtl="0">
-              <a:spcBef>
-                <a:spcPts val="0"/>
-              </a:spcBef>
-              <a:spcAft>
-                <a:spcPts val="0"/>
-              </a:spcAft>
-              <a:buNone/>
-            </a:pPr>
-            <a:endParaRPr sz="1800">
-              <a:solidFill>
-                <a:schemeClr val="dk1"/>
-              </a:solidFill>
-              <a:latin typeface="Calibri"/>
-              <a:ea typeface="Calibri"/>
-              <a:cs typeface="Calibri"/>
-              <a:sym typeface="Calibri"/>
-            </a:endParaRPr>
-          </a:p>
-        </p:txBody>
-      </p:sp>
-      <p:pic>
-        <p:nvPicPr>
-          <p:cNvPr id="63" name="Google Shape;63;p5" descr="preencoded.png"/>
-          <p:cNvPicPr preferRelativeResize="0"/>
-          <p:nvPr/>
-        </p:nvPicPr>
-        <p:blipFill rotWithShape="1">
-          <a:blip r:embed="rId3">
-            <a:alphaModFix/>
-          </a:blip>
-          <a:srcRect/>
-          <a:stretch/>
-        </p:blipFill>
-        <p:spPr>
-          <a:xfrm>
-            <a:off x="0" y="0"/>
-            <a:ext cx="9144000" cy="5143500"/>
-          </a:xfrm>
-          <a:prstGeom prst="rect">
-            <a:avLst/>
-          </a:prstGeom>
-          <a:noFill/>
-          <a:ln>
-            <a:noFill/>
-          </a:ln>
-        </p:spPr>
-      </p:pic>
-      <p:sp>
-        <p:nvSpPr>
-          <p:cNvPr id="64" name="Google Shape;64;p5"/>
-          <p:cNvSpPr/>
-          <p:nvPr/>
-        </p:nvSpPr>
-        <p:spPr>
-          <a:xfrm>
-            <a:off x="640556" y="502116"/>
-            <a:ext cx="7862888" cy="428625"/>
-          </a:xfrm>
-          <a:prstGeom prst="rect">
-            <a:avLst/>
-          </a:prstGeom>
-          <a:noFill/>
-          <a:ln>
-            <a:noFill/>
-          </a:ln>
-        </p:spPr>
-        <p:txBody>
-          <a:bodyPr spcFirstLastPara="1" wrap="square" lIns="91425" tIns="45700" rIns="91425" bIns="45700" anchor="ctr" anchorCtr="0">
-            <a:noAutofit/>
-          </a:bodyPr>
-          <a:lstStyle/>
-          <a:p>
-            <a:pPr marL="0" marR="0" lvl="0" indent="0" algn="ctr" rtl="0">
-              <a:lnSpc>
-                <a:spcPct val="75000"/>
-              </a:lnSpc>
-              <a:spcBef>
-                <a:spcPts val="0"/>
-              </a:spcBef>
-              <a:spcAft>
-                <a:spcPts val="0"/>
-              </a:spcAft>
-              <a:buClr>
-                <a:srgbClr val="FFFFFF"/>
-              </a:buClr>
-              <a:buSzPts val="4500"/>
-              <a:buFont typeface="PT Mono"/>
-              <a:buNone/>
-            </a:pPr>
-            <a:r>
-              <a:rPr lang="en-US" sz="4000" dirty="0" err="1">
-                <a:solidFill>
-                  <a:srgbClr val="FFFFFF"/>
-                </a:solidFill>
-                <a:latin typeface="PT Mono"/>
-                <a:ea typeface="PT Mono"/>
-                <a:cs typeface="PT Mono"/>
-                <a:sym typeface="PT Mono"/>
-              </a:rPr>
-              <a:t>Как</a:t>
-            </a:r>
-            <a:r>
-              <a:rPr lang="en-US" sz="4000" dirty="0">
-                <a:solidFill>
-                  <a:srgbClr val="FFFFFF"/>
-                </a:solidFill>
-                <a:latin typeface="PT Mono"/>
-                <a:ea typeface="PT Mono"/>
-                <a:cs typeface="PT Mono"/>
-                <a:sym typeface="PT Mono"/>
-              </a:rPr>
-              <a:t> </a:t>
-            </a:r>
-            <a:r>
-              <a:rPr lang="en-US" sz="4000" dirty="0" err="1">
-                <a:solidFill>
-                  <a:srgbClr val="FFFFFF"/>
-                </a:solidFill>
-                <a:latin typeface="PT Mono"/>
-                <a:ea typeface="PT Mono"/>
-                <a:cs typeface="PT Mono"/>
-                <a:sym typeface="PT Mono"/>
-              </a:rPr>
-              <a:t>работи</a:t>
-            </a:r>
-            <a:r>
-              <a:rPr lang="en-US" sz="4000" dirty="0">
-                <a:solidFill>
-                  <a:srgbClr val="FFFFFF"/>
-                </a:solidFill>
-                <a:latin typeface="PT Mono"/>
-                <a:ea typeface="PT Mono"/>
-                <a:cs typeface="PT Mono"/>
-                <a:sym typeface="PT Mono"/>
-              </a:rPr>
-              <a:t> </a:t>
-            </a:r>
-            <a:r>
-              <a:rPr lang="en-US" sz="4000" dirty="0" err="1">
-                <a:solidFill>
-                  <a:srgbClr val="FFFFFF"/>
-                </a:solidFill>
-                <a:latin typeface="PT Mono"/>
-                <a:ea typeface="PT Mono"/>
-                <a:cs typeface="PT Mono"/>
-                <a:sym typeface="PT Mono"/>
-              </a:rPr>
-              <a:t>проектът</a:t>
-            </a:r>
-            <a:endParaRPr sz="4500" dirty="0">
-              <a:solidFill>
-                <a:schemeClr val="dk1"/>
-              </a:solidFill>
-              <a:latin typeface="Calibri"/>
-              <a:ea typeface="Calibri"/>
-              <a:cs typeface="Calibri"/>
-              <a:sym typeface="Calibri"/>
-            </a:endParaRPr>
-          </a:p>
-        </p:txBody>
-      </p:sp>
-      <p:pic>
-        <p:nvPicPr>
-          <p:cNvPr id="65" name="Google Shape;65;p5" descr="A green circle with a black background&#10;&#10;Description automatically generated"/>
-          <p:cNvPicPr preferRelativeResize="0"/>
-          <p:nvPr/>
-        </p:nvPicPr>
-        <p:blipFill rotWithShape="1">
-          <a:blip r:embed="rId4">
-            <a:alphaModFix/>
-          </a:blip>
-          <a:srcRect/>
-          <a:stretch/>
-        </p:blipFill>
-        <p:spPr>
-          <a:xfrm>
-            <a:off x="-2656057" y="2840477"/>
-            <a:ext cx="5143500" cy="5143500"/>
-          </a:xfrm>
-          <a:prstGeom prst="rect">
-            <a:avLst/>
-          </a:prstGeom>
-          <a:noFill/>
-          <a:ln>
-            <a:noFill/>
-          </a:ln>
-        </p:spPr>
-      </p:pic>
-      <p:pic>
-        <p:nvPicPr>
-          <p:cNvPr id="66" name="Google Shape;66;p5" descr="A circular logo with a black background&#10;&#10;Description automatically generated"/>
-          <p:cNvPicPr preferRelativeResize="0"/>
-          <p:nvPr/>
-        </p:nvPicPr>
-        <p:blipFill rotWithShape="1">
-          <a:blip r:embed="rId5">
-            <a:alphaModFix/>
-          </a:blip>
-          <a:srcRect/>
-          <a:stretch/>
-        </p:blipFill>
-        <p:spPr>
-          <a:xfrm>
-            <a:off x="7669531" y="107385"/>
-            <a:ext cx="5143500" cy="5143500"/>
-          </a:xfrm>
-          <a:prstGeom prst="rect">
-            <a:avLst/>
-          </a:prstGeom>
-          <a:noFill/>
-          <a:ln>
-            <a:noFill/>
-          </a:ln>
-        </p:spPr>
-      </p:pic>
-      <p:sp>
-        <p:nvSpPr>
-          <p:cNvPr id="2" name="TextBox 1"/>
-          <p:cNvSpPr txBox="1"/>
-          <p:nvPr/>
-        </p:nvSpPr>
-        <p:spPr>
-          <a:xfrm>
-            <a:off x="1924493" y="1861482"/>
-            <a:ext cx="5295014" cy="1015663"/>
-          </a:xfrm>
-          <a:prstGeom prst="rect">
-            <a:avLst/>
-          </a:prstGeom>
-          <a:noFill/>
-        </p:spPr>
-        <p:txBody>
-          <a:bodyPr wrap="square" rtlCol="0">
-            <a:spAutoFit/>
-          </a:bodyPr>
-          <a:lstStyle/>
-          <a:p>
-            <a:pPr algn="ctr"/>
-            <a:r>
-              <a:rPr lang="ru-RU" sz="2000" dirty="0" err="1">
-                <a:solidFill>
-                  <a:schemeClr val="bg1"/>
-                </a:solidFill>
-              </a:rPr>
-              <a:t>Качване</a:t>
-            </a:r>
-            <a:r>
-              <a:rPr lang="ru-RU" sz="2000" dirty="0">
-                <a:solidFill>
-                  <a:schemeClr val="bg1"/>
-                </a:solidFill>
-              </a:rPr>
-              <a:t> на </a:t>
-            </a:r>
-            <a:r>
-              <a:rPr lang="ru-RU" sz="2000" dirty="0" err="1">
-                <a:solidFill>
-                  <a:schemeClr val="bg1"/>
-                </a:solidFill>
-              </a:rPr>
-              <a:t>обяви</a:t>
-            </a:r>
-            <a:r>
-              <a:rPr lang="ru-RU" sz="2000" dirty="0">
-                <a:solidFill>
-                  <a:schemeClr val="bg1"/>
-                </a:solidFill>
-              </a:rPr>
-              <a:t> с цени, </a:t>
-            </a:r>
-            <a:r>
-              <a:rPr lang="ru-RU" sz="2000" dirty="0" err="1">
-                <a:solidFill>
-                  <a:schemeClr val="bg1"/>
-                </a:solidFill>
-              </a:rPr>
-              <a:t>продукти</a:t>
-            </a:r>
-            <a:r>
-              <a:rPr lang="ru-RU" sz="2000" dirty="0">
-                <a:solidFill>
-                  <a:schemeClr val="bg1"/>
-                </a:solidFill>
-              </a:rPr>
-              <a:t> и локации, </a:t>
-            </a:r>
-            <a:r>
-              <a:rPr lang="ru-RU" sz="2000" dirty="0" err="1">
-                <a:solidFill>
-                  <a:schemeClr val="bg1"/>
-                </a:solidFill>
-              </a:rPr>
-              <a:t>както</a:t>
-            </a:r>
-            <a:r>
-              <a:rPr lang="ru-RU" sz="2000" dirty="0">
-                <a:solidFill>
-                  <a:schemeClr val="bg1"/>
-                </a:solidFill>
-              </a:rPr>
-              <a:t> и </a:t>
-            </a:r>
-            <a:r>
-              <a:rPr lang="ru-RU" sz="2000" dirty="0" err="1">
-                <a:solidFill>
-                  <a:schemeClr val="bg1"/>
-                </a:solidFill>
-              </a:rPr>
-              <a:t>търсене</a:t>
-            </a:r>
-            <a:r>
-              <a:rPr lang="ru-RU" sz="2000" dirty="0">
-                <a:solidFill>
-                  <a:schemeClr val="bg1"/>
-                </a:solidFill>
-              </a:rPr>
-              <a:t> с </a:t>
-            </a:r>
-            <a:r>
-              <a:rPr lang="ru-RU" sz="2000" dirty="0" err="1">
-                <a:solidFill>
-                  <a:schemeClr val="bg1"/>
-                </a:solidFill>
-              </a:rPr>
-              <a:t>филтри</a:t>
-            </a:r>
-            <a:r>
-              <a:rPr lang="ru-RU" sz="2000" dirty="0">
-                <a:solidFill>
-                  <a:schemeClr val="bg1"/>
-                </a:solidFill>
-              </a:rPr>
-              <a:t> за вид продукт, цена и локация.</a:t>
-            </a:r>
-            <a:endParaRPr lang="en-US" sz="2000" dirty="0">
-              <a:solidFill>
-                <a:schemeClr val="bg1"/>
-              </a:solidFill>
-            </a:endParaRPr>
-          </a:p>
-        </p:txBody>
-      </p:sp>
-    </p:spTree>
-  </p:cSld>
-  <p:clrMapOvr>
-    <a:masterClrMapping/>
-  </p:clrMapOvr>
-</p:sld>
-</file>
-
-<file path=ppt/slides/slide5.xml><?xml version="1.0" encoding="utf-8"?>
-<p:sld xmlns:a="http://schemas.openxmlformats.org/drawingml/2006/main" xmlns:r="http://schemas.openxmlformats.org/officeDocument/2006/relationships" xmlns:p="http://schemas.openxmlformats.org/presentationml/2006/main">
-  <p:cSld>
-    <p:bg>
-      <p:bgPr>
-        <a:solidFill>
-          <a:srgbClr val="000000"/>
-        </a:solidFill>
-        <a:effectLst/>
-      </p:bgPr>
-    </p:bg>
-    <p:spTree>
-      <p:nvGrpSpPr>
-        <p:cNvPr id="1" name="Shape 83"/>
-        <p:cNvGrpSpPr/>
-        <p:nvPr/>
-      </p:nvGrpSpPr>
-      <p:grpSpPr>
-        <a:xfrm>
-          <a:off x="0" y="0"/>
-          <a:ext cx="0" cy="0"/>
-          <a:chOff x="0" y="0"/>
-          <a:chExt cx="0" cy="0"/>
-        </a:xfrm>
-      </p:grpSpPr>
-      <p:pic>
-        <p:nvPicPr>
-          <p:cNvPr id="84" name="Google Shape;84;p7" descr="A black circle with yellow lines&#10;&#10;Description automatically generated"/>
-          <p:cNvPicPr preferRelativeResize="0"/>
-          <p:nvPr/>
-        </p:nvPicPr>
-        <p:blipFill rotWithShape="1">
-          <a:blip r:embed="rId3">
-            <a:alphaModFix/>
-          </a:blip>
-          <a:srcRect/>
-          <a:stretch/>
-        </p:blipFill>
-        <p:spPr>
-          <a:xfrm>
-            <a:off x="-3428486" y="2496639"/>
-            <a:ext cx="6686550" cy="6686550"/>
-          </a:xfrm>
-          <a:prstGeom prst="rect">
-            <a:avLst/>
-          </a:prstGeom>
-          <a:noFill/>
-          <a:ln>
-            <a:noFill/>
-          </a:ln>
-        </p:spPr>
-      </p:pic>
-      <p:pic>
-        <p:nvPicPr>
-          <p:cNvPr id="85" name="Google Shape;85;p7" descr="A screen shot of a clock&#10;&#10;Description automatically generated"/>
-          <p:cNvPicPr preferRelativeResize="0"/>
-          <p:nvPr/>
-        </p:nvPicPr>
-        <p:blipFill rotWithShape="1">
-          <a:blip r:embed="rId4">
-            <a:alphaModFix/>
-          </a:blip>
-          <a:srcRect/>
-          <a:stretch/>
-        </p:blipFill>
-        <p:spPr>
-          <a:xfrm>
-            <a:off x="6271607" y="-329453"/>
-            <a:ext cx="4133896" cy="6501324"/>
-          </a:xfrm>
-          <a:prstGeom prst="rect">
-            <a:avLst/>
-          </a:prstGeom>
-          <a:noFill/>
-          <a:ln>
-            <a:noFill/>
-          </a:ln>
-        </p:spPr>
-      </p:pic>
-      <p:sp>
-        <p:nvSpPr>
-          <p:cNvPr id="86" name="Google Shape;86;p7"/>
-          <p:cNvSpPr/>
-          <p:nvPr/>
-        </p:nvSpPr>
-        <p:spPr>
-          <a:xfrm>
-            <a:off x="0" y="0"/>
-            <a:ext cx="9144000" cy="5143500"/>
-          </a:xfrm>
-          <a:prstGeom prst="rect">
-            <a:avLst/>
-          </a:prstGeom>
-          <a:noFill/>
-          <a:ln>
-            <a:noFill/>
-          </a:ln>
-        </p:spPr>
-        <p:txBody>
-          <a:bodyPr spcFirstLastPara="1" wrap="square" lIns="91425" tIns="45700" rIns="91425" bIns="45700" anchor="t" anchorCtr="0">
-            <a:noAutofit/>
-          </a:bodyPr>
-          <a:lstStyle/>
-          <a:p>
-            <a:pPr marL="0" marR="0" lvl="0" indent="0" algn="l" rtl="0">
-              <a:spcBef>
-                <a:spcPts val="0"/>
-              </a:spcBef>
-              <a:spcAft>
-                <a:spcPts val="0"/>
-              </a:spcAft>
-              <a:buNone/>
-            </a:pPr>
-            <a:endParaRPr sz="1800">
-              <a:solidFill>
-                <a:schemeClr val="dk1"/>
-              </a:solidFill>
-              <a:latin typeface="Calibri"/>
-              <a:ea typeface="Calibri"/>
-              <a:cs typeface="Calibri"/>
-              <a:sym typeface="Calibri"/>
-            </a:endParaRPr>
-          </a:p>
-        </p:txBody>
-      </p:sp>
-      <p:pic>
-        <p:nvPicPr>
-          <p:cNvPr id="87" name="Google Shape;87;p7" descr="preencoded.png"/>
-          <p:cNvPicPr preferRelativeResize="0"/>
-          <p:nvPr/>
-        </p:nvPicPr>
-        <p:blipFill rotWithShape="1">
-          <a:blip r:embed="rId5">
-            <a:alphaModFix/>
-          </a:blip>
-          <a:srcRect/>
-          <a:stretch/>
-        </p:blipFill>
-        <p:spPr>
-          <a:xfrm>
-            <a:off x="0" y="0"/>
-            <a:ext cx="9144000" cy="5143500"/>
-          </a:xfrm>
-          <a:prstGeom prst="rect">
-            <a:avLst/>
-          </a:prstGeom>
-          <a:noFill/>
-          <a:ln>
-            <a:noFill/>
-          </a:ln>
-        </p:spPr>
-      </p:pic>
-      <p:sp>
-        <p:nvSpPr>
-          <p:cNvPr id="88" name="Google Shape;88;p7"/>
-          <p:cNvSpPr/>
-          <p:nvPr/>
-        </p:nvSpPr>
-        <p:spPr>
-          <a:xfrm>
-            <a:off x="594836" y="540068"/>
-            <a:ext cx="7862888" cy="428625"/>
-          </a:xfrm>
-          <a:prstGeom prst="rect">
-            <a:avLst/>
-          </a:prstGeom>
-          <a:noFill/>
-          <a:ln>
-            <a:noFill/>
-          </a:ln>
-        </p:spPr>
-        <p:txBody>
-          <a:bodyPr spcFirstLastPara="1" wrap="square" lIns="91425" tIns="45700" rIns="91425" bIns="45700" anchor="ctr" anchorCtr="0">
-            <a:noAutofit/>
-          </a:bodyPr>
-          <a:lstStyle/>
-          <a:p>
-            <a:pPr marL="0" marR="0" lvl="0" indent="0" algn="ctr" rtl="0">
-              <a:lnSpc>
-                <a:spcPct val="75000"/>
-              </a:lnSpc>
-              <a:spcBef>
-                <a:spcPts val="0"/>
-              </a:spcBef>
-              <a:spcAft>
-                <a:spcPts val="0"/>
-              </a:spcAft>
-              <a:buClr>
-                <a:srgbClr val="FFFFFF"/>
-              </a:buClr>
-              <a:buSzPts val="4500"/>
-              <a:buFont typeface="PT Mono"/>
-              <a:buNone/>
-            </a:pPr>
-            <a:r>
-              <a:rPr lang="en-US" sz="4000" dirty="0" err="1">
-                <a:solidFill>
-                  <a:srgbClr val="FFFFFF"/>
-                </a:solidFill>
-                <a:latin typeface="PT Mono"/>
-                <a:ea typeface="PT Mono"/>
-                <a:cs typeface="PT Mono"/>
-                <a:sym typeface="PT Mono"/>
-              </a:rPr>
-              <a:t>Използвани</a:t>
-            </a:r>
-            <a:r>
-              <a:rPr lang="en-US" sz="4000" dirty="0">
-                <a:solidFill>
-                  <a:srgbClr val="FFFFFF"/>
-                </a:solidFill>
-                <a:latin typeface="PT Mono"/>
-                <a:ea typeface="PT Mono"/>
-                <a:cs typeface="PT Mono"/>
-                <a:sym typeface="PT Mono"/>
-              </a:rPr>
-              <a:t> </a:t>
-            </a:r>
-            <a:r>
-              <a:rPr lang="en-US" sz="4000" dirty="0" err="1">
-                <a:solidFill>
-                  <a:srgbClr val="FFFFFF"/>
-                </a:solidFill>
-                <a:latin typeface="PT Mono"/>
-                <a:ea typeface="PT Mono"/>
-                <a:cs typeface="PT Mono"/>
-                <a:sym typeface="PT Mono"/>
-              </a:rPr>
-              <a:t>технологии</a:t>
-            </a:r>
-            <a:endParaRPr sz="4000" dirty="0">
-              <a:solidFill>
-                <a:schemeClr val="dk1"/>
-              </a:solidFill>
-              <a:latin typeface="Calibri"/>
-              <a:ea typeface="Calibri"/>
-              <a:cs typeface="Calibri"/>
-              <a:sym typeface="Calibri"/>
-            </a:endParaRPr>
-          </a:p>
-        </p:txBody>
-      </p:sp>
-      <p:sp>
-        <p:nvSpPr>
-          <p:cNvPr id="2" name="TextBox 1"/>
-          <p:cNvSpPr txBox="1"/>
-          <p:nvPr/>
-        </p:nvSpPr>
-        <p:spPr>
-          <a:xfrm>
-            <a:off x="1969652" y="2169907"/>
-            <a:ext cx="6368903" cy="1631216"/>
-          </a:xfrm>
-          <a:prstGeom prst="rect">
-            <a:avLst/>
-          </a:prstGeom>
-          <a:noFill/>
-        </p:spPr>
-        <p:txBody>
-          <a:bodyPr wrap="square" rtlCol="0">
-            <a:spAutoFit/>
-          </a:bodyPr>
-          <a:lstStyle/>
-          <a:p>
-            <a:r>
-              <a:rPr lang="en-US" sz="2000" dirty="0">
-                <a:solidFill>
-                  <a:schemeClr val="bg1"/>
-                </a:solidFill>
-              </a:rPr>
-              <a:t>Backend - Python, Flask;</a:t>
-            </a:r>
-          </a:p>
-          <a:p>
-            <a:endParaRPr lang="en-US" sz="2000" dirty="0">
-              <a:solidFill>
-                <a:schemeClr val="bg1"/>
-              </a:solidFill>
-            </a:endParaRPr>
-          </a:p>
-          <a:p>
-            <a:r>
-              <a:rPr lang="en-US" sz="2000" dirty="0">
-                <a:solidFill>
-                  <a:schemeClr val="bg1"/>
-                </a:solidFill>
-              </a:rPr>
-              <a:t>Database – MongoDB</a:t>
-            </a:r>
-            <a:r>
-              <a:rPr lang="en-GB" sz="2000" dirty="0">
-                <a:solidFill>
-                  <a:schemeClr val="bg1"/>
-                </a:solidFill>
-              </a:rPr>
-              <a:t>;</a:t>
-            </a:r>
-            <a:endParaRPr lang="en-US" sz="2000" dirty="0">
-              <a:solidFill>
-                <a:schemeClr val="bg1"/>
-              </a:solidFill>
-            </a:endParaRPr>
-          </a:p>
-          <a:p>
-            <a:endParaRPr lang="en-US" sz="2000" dirty="0">
-              <a:solidFill>
-                <a:schemeClr val="bg1"/>
-              </a:solidFill>
-            </a:endParaRPr>
-          </a:p>
-          <a:p>
-            <a:r>
-              <a:rPr lang="en-GB" sz="2000" dirty="0">
-                <a:solidFill>
-                  <a:schemeClr val="bg1"/>
-                </a:solidFill>
-              </a:rPr>
-              <a:t>Frontend - </a:t>
-            </a:r>
-            <a:r>
-              <a:rPr lang="en-US" sz="2000" dirty="0">
-                <a:solidFill>
-                  <a:schemeClr val="bg1"/>
-                </a:solidFill>
-              </a:rPr>
-              <a:t>Vue.js </a:t>
-            </a:r>
-            <a:r>
-              <a:rPr lang="bg-BG" sz="2000" dirty="0">
-                <a:solidFill>
-                  <a:schemeClr val="bg1"/>
-                </a:solidFill>
-              </a:rPr>
-              <a:t>и </a:t>
-            </a:r>
-            <a:r>
-              <a:rPr lang="en-US" sz="2000" dirty="0">
-                <a:solidFill>
-                  <a:schemeClr val="bg1"/>
-                </a:solidFill>
-              </a:rPr>
-              <a:t>Tailwind CSS;</a:t>
-            </a:r>
-          </a:p>
-        </p:txBody>
-      </p:sp>
-    </p:spTree>
-  </p:cSld>
-  <p:clrMapOvr>
-    <a:masterClrMapping/>
-  </p:clrMapOvr>
+  <p:transition spd="slow">
+    <p:push dir="u"/>
+  </p:transition>
 </p:sld>
 </file>
 
@@ -7389,6 +9219,9 @@
   <p:clrMapOvr>
     <a:masterClrMapping/>
   </p:clrMapOvr>
+  <p:transition spd="slow">
+    <p:push dir="u"/>
+  </p:transition>
 </p:sld>
 </file>
 
@@ -7552,7 +9385,7 @@
         </p:nvSpPr>
         <p:spPr>
           <a:xfrm>
-            <a:off x="745718" y="707852"/>
+            <a:off x="640556" y="2233612"/>
             <a:ext cx="7862888" cy="428625"/>
           </a:xfrm>
           <a:prstGeom prst="rect">
@@ -7763,6 +9596,9 @@
   <p:clrMapOvr>
     <a:masterClrMapping/>
   </p:clrMapOvr>
+  <p:transition spd="slow">
+    <p:push dir="u"/>
+  </p:transition>
 </p:sld>
 </file>
 
@@ -7899,7 +9735,7 @@
         </p:nvSpPr>
         <p:spPr>
           <a:xfrm>
-            <a:off x="745718" y="685340"/>
+            <a:off x="640556" y="590550"/>
             <a:ext cx="7862888" cy="428625"/>
           </a:xfrm>
           <a:prstGeom prst="rect">
@@ -7926,22 +9762,16 @@
               <a:buSzPts val="4500"/>
             </a:pPr>
             <a:r>
-              <a:rPr lang="az-Cyrl-AZ" sz="4000" dirty="0">
+              <a:rPr lang="bg-BG" sz="4000" dirty="0">
                 <a:solidFill>
-                  <a:schemeClr val="bg1"/>
+                  <a:srgbClr val="FFFFFF"/>
                 </a:solidFill>
                 <a:latin typeface="PT Mono" panose="020B0604020202020204" charset="0"/>
+                <a:ea typeface="PT Mono"/>
+                <a:cs typeface="PT Mono"/>
+                <a:sym typeface="PT Mono"/>
               </a:rPr>
-              <a:t>Менторско</a:t>
-            </a:r>
-            <a:r>
-              <a:rPr lang="en-US" sz="4000" dirty="0">
-                <a:solidFill>
-                  <a:schemeClr val="bg1"/>
-                </a:solidFill>
-                <a:latin typeface="PT Mono" panose="020B0604020202020204" charset="0"/>
-              </a:rPr>
-              <a:t> </a:t>
+              <a:t>П</a:t>
             </a:r>
             <a:r>
               <a:rPr lang="en-US" sz="4000" dirty="0" err="1">
@@ -7953,7 +9783,7 @@
                 <a:cs typeface="PT Mono"/>
                 <a:sym typeface="PT Mono"/>
               </a:rPr>
-              <a:t>преживяване</a:t>
+              <a:t>реживяване</a:t>
             </a:r>
             <a:endParaRPr sz="4000" dirty="0">
               <a:solidFill>
@@ -8056,6 +9886,9 @@
   <p:clrMapOvr>
     <a:masterClrMapping/>
   </p:clrMapOvr>
+  <p:transition spd="slow">
+    <p:push dir="u"/>
+  </p:transition>
 </p:sld>
 </file>
 
@@ -8222,7 +10055,7 @@
         </p:nvSpPr>
         <p:spPr>
           <a:xfrm>
-            <a:off x="745718" y="685340"/>
+            <a:off x="640556" y="551962"/>
             <a:ext cx="7862888" cy="428625"/>
           </a:xfrm>
           <a:prstGeom prst="rect">
@@ -8258,7 +10091,7 @@
                 <a:cs typeface="Calibri"/>
                 <a:sym typeface="Calibri"/>
               </a:rPr>
-              <a:t>Какво научихме?</a:t>
+              <a:t>Екип</a:t>
             </a:r>
             <a:endParaRPr sz="4000" dirty="0">
               <a:solidFill>
@@ -8367,6 +10200,9 @@
   <p:clrMapOvr>
     <a:masterClrMapping/>
   </p:clrMapOvr>
+  <p:transition spd="slow">
+    <p:push dir="u"/>
+  </p:transition>
 </p:sld>
 </file>
 

--- a/presentation_hacktues.pptx
+++ b/presentation_hacktues.pptx
@@ -9,21 +9,21 @@
   </p:notesMasterIdLst>
   <p:sldIdLst>
     <p:sldId id="256" r:id="rId2"/>
-    <p:sldId id="258" r:id="rId3"/>
-    <p:sldId id="260" r:id="rId4"/>
-    <p:sldId id="262" r:id="rId5"/>
-    <p:sldId id="257" r:id="rId6"/>
-    <p:sldId id="263" r:id="rId7"/>
-    <p:sldId id="264" r:id="rId8"/>
-    <p:sldId id="267" r:id="rId9"/>
-    <p:sldId id="268" r:id="rId10"/>
+    <p:sldId id="271" r:id="rId3"/>
+    <p:sldId id="258" r:id="rId4"/>
+    <p:sldId id="257" r:id="rId5"/>
+    <p:sldId id="260" r:id="rId6"/>
+    <p:sldId id="262" r:id="rId7"/>
+    <p:sldId id="270" r:id="rId8"/>
+    <p:sldId id="263" r:id="rId9"/>
+    <p:sldId id="264" r:id="rId10"/>
     <p:sldId id="265" r:id="rId11"/>
   </p:sldIdLst>
   <p:sldSz cx="9144000" cy="5143500" type="screen16x9"/>
   <p:notesSz cx="5143500" cy="9144000"/>
   <p:embeddedFontLst>
     <p:embeddedFont>
-      <p:font typeface="PT Mono" panose="02060509020205020204" pitchFamily="49" charset="0"/>
+      <p:font typeface="PT Mono" panose="02060509020205020204" pitchFamily="49" charset="-52"/>
       <p:regular r:id="rId13"/>
     </p:embeddedFont>
   </p:embeddedFontLst>
@@ -1088,7 +1088,13 @@
   <p:cSld>
     <p:spTree>
       <p:nvGrpSpPr>
-        <p:cNvPr id="1" name="Shape 32"/>
+        <p:cNvPr id="1" name="Shape 7">
+          <a:extLst>
+            <a:ext uri="{FF2B5EF4-FFF2-40B4-BE49-F238E27FC236}">
+              <a16:creationId xmlns:a16="http://schemas.microsoft.com/office/drawing/2014/main" id="{CA6D381E-1989-1676-4D2E-91301960A69B}"/>
+            </a:ext>
+          </a:extLst>
+        </p:cNvPr>
         <p:cNvGrpSpPr/>
         <p:nvPr/>
       </p:nvGrpSpPr>
@@ -1102,7 +1108,13 @@
       </p:grpSpPr>
       <p:sp>
         <p:nvSpPr>
-          <p:cNvPr id="33" name="Google Shape;33;p3:notes"/>
+          <p:cNvPr id="8" name="Google Shape;8;p1:notes">
+            <a:extLst>
+              <a:ext uri="{FF2B5EF4-FFF2-40B4-BE49-F238E27FC236}">
+                <a16:creationId xmlns:a16="http://schemas.microsoft.com/office/drawing/2014/main" id="{13ECDF56-DE7E-3CC8-F4BB-3D2198C42AC1}"/>
+              </a:ext>
+            </a:extLst>
+          </p:cNvPr>
           <p:cNvSpPr>
             <a:spLocks noGrp="1" noRot="1" noChangeAspect="1"/>
           </p:cNvSpPr>
@@ -1147,7 +1159,13 @@
       </p:sp>
       <p:sp>
         <p:nvSpPr>
-          <p:cNvPr id="34" name="Google Shape;34;p3:notes"/>
+          <p:cNvPr id="9" name="Google Shape;9;p1:notes">
+            <a:extLst>
+              <a:ext uri="{FF2B5EF4-FFF2-40B4-BE49-F238E27FC236}">
+                <a16:creationId xmlns:a16="http://schemas.microsoft.com/office/drawing/2014/main" id="{AAD008DE-1E60-BAE7-C52C-9EEA5277654F}"/>
+              </a:ext>
+            </a:extLst>
+          </p:cNvPr>
           <p:cNvSpPr txBox="1">
             <a:spLocks noGrp="1"/>
           </p:cNvSpPr>
@@ -1197,7 +1215,13 @@
       </p:sp>
       <p:sp>
         <p:nvSpPr>
-          <p:cNvPr id="35" name="Google Shape;35;p3:notes"/>
+          <p:cNvPr id="10" name="Google Shape;10;p1:notes">
+            <a:extLst>
+              <a:ext uri="{FF2B5EF4-FFF2-40B4-BE49-F238E27FC236}">
+                <a16:creationId xmlns:a16="http://schemas.microsoft.com/office/drawing/2014/main" id="{D94D7763-C713-7C24-F8FC-7E0A5054862F}"/>
+              </a:ext>
+            </a:extLst>
+          </p:cNvPr>
           <p:cNvSpPr txBox="1">
             <a:spLocks noGrp="1"/>
           </p:cNvSpPr>
@@ -1258,6 +1282,11 @@
         </p:txBody>
       </p:sp>
     </p:spTree>
+    <p:extLst>
+      <p:ext uri="{BB962C8B-B14F-4D97-AF65-F5344CB8AC3E}">
+        <p14:creationId xmlns:p14="http://schemas.microsoft.com/office/powerpoint/2010/main" val="2403625976"/>
+      </p:ext>
+    </p:extLst>
   </p:cSld>
   <p:clrMapOvr>
     <a:masterClrMapping/>
@@ -1270,7 +1299,7 @@
   <p:cSld>
     <p:spTree>
       <p:nvGrpSpPr>
-        <p:cNvPr id="1" name="Shape 57"/>
+        <p:cNvPr id="1" name="Shape 32"/>
         <p:cNvGrpSpPr/>
         <p:nvPr/>
       </p:nvGrpSpPr>
@@ -1284,7 +1313,7 @@
       </p:grpSpPr>
       <p:sp>
         <p:nvSpPr>
-          <p:cNvPr id="58" name="Google Shape;58;p5:notes"/>
+          <p:cNvPr id="33" name="Google Shape;33;p3:notes"/>
           <p:cNvSpPr>
             <a:spLocks noGrp="1" noRot="1" noChangeAspect="1"/>
           </p:cNvSpPr>
@@ -1329,7 +1358,7 @@
       </p:sp>
       <p:sp>
         <p:nvSpPr>
-          <p:cNvPr id="59" name="Google Shape;59;p5:notes"/>
+          <p:cNvPr id="34" name="Google Shape;34;p3:notes"/>
           <p:cNvSpPr txBox="1">
             <a:spLocks noGrp="1"/>
           </p:cNvSpPr>
@@ -1379,7 +1408,7 @@
       </p:sp>
       <p:sp>
         <p:nvSpPr>
-          <p:cNvPr id="60" name="Google Shape;60;p5:notes"/>
+          <p:cNvPr id="35" name="Google Shape;35;p3:notes"/>
           <p:cNvSpPr txBox="1">
             <a:spLocks noGrp="1"/>
           </p:cNvSpPr>
@@ -1448,188 +1477,6 @@
 </file>
 
 <file path=ppt/notesSlides/notesSlide4.xml><?xml version="1.0" encoding="utf-8"?>
-<p:notes xmlns:a="http://schemas.openxmlformats.org/drawingml/2006/main" xmlns:r="http://schemas.openxmlformats.org/officeDocument/2006/relationships" xmlns:p="http://schemas.openxmlformats.org/presentationml/2006/main" showMasterSp="0" showMasterPhAnim="0">
-  <p:cSld>
-    <p:spTree>
-      <p:nvGrpSpPr>
-        <p:cNvPr id="1" name="Shape 79"/>
-        <p:cNvGrpSpPr/>
-        <p:nvPr/>
-      </p:nvGrpSpPr>
-      <p:grpSpPr>
-        <a:xfrm>
-          <a:off x="0" y="0"/>
-          <a:ext cx="0" cy="0"/>
-          <a:chOff x="0" y="0"/>
-          <a:chExt cx="0" cy="0"/>
-        </a:xfrm>
-      </p:grpSpPr>
-      <p:sp>
-        <p:nvSpPr>
-          <p:cNvPr id="80" name="Google Shape;80;p7:notes"/>
-          <p:cNvSpPr>
-            <a:spLocks noGrp="1" noRot="1" noChangeAspect="1"/>
-          </p:cNvSpPr>
-          <p:nvPr>
-            <p:ph type="sldImg" idx="2"/>
-          </p:nvPr>
-        </p:nvSpPr>
-        <p:spPr>
-          <a:xfrm>
-            <a:off x="-1166813" y="0"/>
-            <a:ext cx="5334001" cy="3000375"/>
-          </a:xfrm>
-          <a:custGeom>
-            <a:avLst/>
-            <a:gdLst/>
-            <a:ahLst/>
-            <a:cxnLst/>
-            <a:rect l="l" t="t" r="r" b="b"/>
-            <a:pathLst>
-              <a:path w="120000" h="120000" extrusionOk="0">
-                <a:moveTo>
-                  <a:pt x="0" y="0"/>
-                </a:moveTo>
-                <a:lnTo>
-                  <a:pt x="120000" y="0"/>
-                </a:lnTo>
-                <a:lnTo>
-                  <a:pt x="120000" y="120000"/>
-                </a:lnTo>
-                <a:lnTo>
-                  <a:pt x="0" y="120000"/>
-                </a:lnTo>
-                <a:close/>
-              </a:path>
-            </a:pathLst>
-          </a:custGeom>
-          <a:noFill/>
-          <a:ln>
-            <a:noFill/>
-          </a:ln>
-        </p:spPr>
-      </p:sp>
-      <p:sp>
-        <p:nvSpPr>
-          <p:cNvPr id="81" name="Google Shape;81;p7:notes"/>
-          <p:cNvSpPr txBox="1">
-            <a:spLocks noGrp="1"/>
-          </p:cNvSpPr>
-          <p:nvPr>
-            <p:ph type="body" idx="1"/>
-          </p:nvPr>
-        </p:nvSpPr>
-        <p:spPr>
-          <a:xfrm>
-            <a:off x="0" y="0"/>
-            <a:ext cx="3000000" cy="3000000"/>
-          </a:xfrm>
-          <a:prstGeom prst="rect">
-            <a:avLst/>
-          </a:prstGeom>
-          <a:noFill/>
-          <a:ln>
-            <a:noFill/>
-          </a:ln>
-        </p:spPr>
-        <p:txBody>
-          <a:bodyPr spcFirstLastPara="1" wrap="square" lIns="91425" tIns="45700" rIns="91425" bIns="45700" anchor="t" anchorCtr="0">
-            <a:noAutofit/>
-          </a:bodyPr>
-          <a:lstStyle/>
-          <a:p>
-            <a:pPr marL="0" marR="0" lvl="0" indent="0" algn="l" rtl="0">
-              <a:spcBef>
-                <a:spcPts val="0"/>
-              </a:spcBef>
-              <a:spcAft>
-                <a:spcPts val="0"/>
-              </a:spcAft>
-              <a:buNone/>
-            </a:pPr>
-            <a:endParaRPr sz="1200">
-              <a:solidFill>
-                <a:schemeClr val="dk1"/>
-              </a:solidFill>
-              <a:latin typeface="Arial"/>
-              <a:ea typeface="Arial"/>
-              <a:cs typeface="Arial"/>
-              <a:sym typeface="Arial"/>
-            </a:endParaRPr>
-          </a:p>
-        </p:txBody>
-      </p:sp>
-      <p:sp>
-        <p:nvSpPr>
-          <p:cNvPr id="82" name="Google Shape;82;p7:notes"/>
-          <p:cNvSpPr txBox="1">
-            <a:spLocks noGrp="1"/>
-          </p:cNvSpPr>
-          <p:nvPr>
-            <p:ph type="sldNum" idx="12"/>
-          </p:nvPr>
-        </p:nvSpPr>
-        <p:spPr>
-          <a:xfrm>
-            <a:off x="0" y="0"/>
-            <a:ext cx="3000000" cy="3000000"/>
-          </a:xfrm>
-          <a:prstGeom prst="rect">
-            <a:avLst/>
-          </a:prstGeom>
-          <a:noFill/>
-          <a:ln>
-            <a:noFill/>
-          </a:ln>
-        </p:spPr>
-        <p:txBody>
-          <a:bodyPr spcFirstLastPara="1" wrap="square" lIns="91425" tIns="45700" rIns="91425" bIns="45700" anchor="t" anchorCtr="0">
-            <a:noAutofit/>
-          </a:bodyPr>
-          <a:lstStyle/>
-          <a:p>
-            <a:pPr marL="0" marR="0" lvl="0" indent="0" algn="l" rtl="0">
-              <a:spcBef>
-                <a:spcPts val="0"/>
-              </a:spcBef>
-              <a:spcAft>
-                <a:spcPts val="0"/>
-              </a:spcAft>
-              <a:buNone/>
-            </a:pPr>
-            <a:fld id="{00000000-1234-1234-1234-123412341234}" type="slidenum">
-              <a:rPr lang="en-US" sz="1800">
-                <a:solidFill>
-                  <a:schemeClr val="dk1"/>
-                </a:solidFill>
-                <a:latin typeface="Arial"/>
-                <a:ea typeface="Arial"/>
-                <a:cs typeface="Arial"/>
-                <a:sym typeface="Arial"/>
-              </a:rPr>
-              <a:t>4</a:t>
-            </a:fld>
-            <a:endParaRPr sz="1800">
-              <a:solidFill>
-                <a:schemeClr val="dk1"/>
-              </a:solidFill>
-              <a:latin typeface="Arial"/>
-              <a:ea typeface="Arial"/>
-              <a:cs typeface="Arial"/>
-              <a:sym typeface="Arial"/>
-            </a:endParaRPr>
-          </a:p>
-        </p:txBody>
-      </p:sp>
-    </p:spTree>
-  </p:cSld>
-  <p:clrMapOvr>
-    <a:masterClrMapping/>
-  </p:clrMapOvr>
-</p:notes>
-</file>
-
-<file path=ppt/notesSlides/notesSlide5.xml><?xml version="1.0" encoding="utf-8"?>
 <p:notes xmlns:a="http://schemas.openxmlformats.org/drawingml/2006/main" xmlns:r="http://schemas.openxmlformats.org/officeDocument/2006/relationships" xmlns:p="http://schemas.openxmlformats.org/presentationml/2006/main" showMasterSp="0" showMasterPhAnim="0">
   <p:cSld>
     <p:spTree>
@@ -1964,7 +1811,7 @@
                 <a:cs typeface="Arial"/>
                 <a:sym typeface="Arial"/>
               </a:rPr>
-              <a:t>5</a:t>
+              <a:t>4</a:t>
             </a:fld>
             <a:endParaRPr sz="1800">
               <a:solidFill>
@@ -1986,12 +1833,12 @@
 </p:notes>
 </file>
 
-<file path=ppt/notesSlides/notesSlide6.xml><?xml version="1.0" encoding="utf-8"?>
+<file path=ppt/notesSlides/notesSlide5.xml><?xml version="1.0" encoding="utf-8"?>
 <p:notes xmlns:a="http://schemas.openxmlformats.org/drawingml/2006/main" xmlns:r="http://schemas.openxmlformats.org/officeDocument/2006/relationships" xmlns:p="http://schemas.openxmlformats.org/presentationml/2006/main" showMasterSp="0" showMasterPhAnim="0">
   <p:cSld>
     <p:spTree>
       <p:nvGrpSpPr>
-        <p:cNvPr id="1" name="Shape 89"/>
+        <p:cNvPr id="1" name="Shape 57"/>
         <p:cNvGrpSpPr/>
         <p:nvPr/>
       </p:nvGrpSpPr>
@@ -2005,7 +1852,7 @@
       </p:grpSpPr>
       <p:sp>
         <p:nvSpPr>
-          <p:cNvPr id="90" name="Google Shape;90;p8:notes"/>
+          <p:cNvPr id="58" name="Google Shape;58;p5:notes"/>
           <p:cNvSpPr>
             <a:spLocks noGrp="1" noRot="1" noChangeAspect="1"/>
           </p:cNvSpPr>
@@ -2050,7 +1897,7 @@
       </p:sp>
       <p:sp>
         <p:nvSpPr>
-          <p:cNvPr id="91" name="Google Shape;91;p8:notes"/>
+          <p:cNvPr id="59" name="Google Shape;59;p5:notes"/>
           <p:cNvSpPr txBox="1">
             <a:spLocks noGrp="1"/>
           </p:cNvSpPr>
@@ -2100,7 +1947,189 @@
       </p:sp>
       <p:sp>
         <p:nvSpPr>
-          <p:cNvPr id="92" name="Google Shape;92;p8:notes"/>
+          <p:cNvPr id="60" name="Google Shape;60;p5:notes"/>
+          <p:cNvSpPr txBox="1">
+            <a:spLocks noGrp="1"/>
+          </p:cNvSpPr>
+          <p:nvPr>
+            <p:ph type="sldNum" idx="12"/>
+          </p:nvPr>
+        </p:nvSpPr>
+        <p:spPr>
+          <a:xfrm>
+            <a:off x="0" y="0"/>
+            <a:ext cx="3000000" cy="3000000"/>
+          </a:xfrm>
+          <a:prstGeom prst="rect">
+            <a:avLst/>
+          </a:prstGeom>
+          <a:noFill/>
+          <a:ln>
+            <a:noFill/>
+          </a:ln>
+        </p:spPr>
+        <p:txBody>
+          <a:bodyPr spcFirstLastPara="1" wrap="square" lIns="91425" tIns="45700" rIns="91425" bIns="45700" anchor="t" anchorCtr="0">
+            <a:noAutofit/>
+          </a:bodyPr>
+          <a:lstStyle/>
+          <a:p>
+            <a:pPr marL="0" marR="0" lvl="0" indent="0" algn="l" rtl="0">
+              <a:spcBef>
+                <a:spcPts val="0"/>
+              </a:spcBef>
+              <a:spcAft>
+                <a:spcPts val="0"/>
+              </a:spcAft>
+              <a:buNone/>
+            </a:pPr>
+            <a:fld id="{00000000-1234-1234-1234-123412341234}" type="slidenum">
+              <a:rPr lang="en-US" sz="1800">
+                <a:solidFill>
+                  <a:schemeClr val="dk1"/>
+                </a:solidFill>
+                <a:latin typeface="Arial"/>
+                <a:ea typeface="Arial"/>
+                <a:cs typeface="Arial"/>
+                <a:sym typeface="Arial"/>
+              </a:rPr>
+              <a:t>5</a:t>
+            </a:fld>
+            <a:endParaRPr sz="1800">
+              <a:solidFill>
+                <a:schemeClr val="dk1"/>
+              </a:solidFill>
+              <a:latin typeface="Arial"/>
+              <a:ea typeface="Arial"/>
+              <a:cs typeface="Arial"/>
+              <a:sym typeface="Arial"/>
+            </a:endParaRPr>
+          </a:p>
+        </p:txBody>
+      </p:sp>
+    </p:spTree>
+  </p:cSld>
+  <p:clrMapOvr>
+    <a:masterClrMapping/>
+  </p:clrMapOvr>
+</p:notes>
+</file>
+
+<file path=ppt/notesSlides/notesSlide6.xml><?xml version="1.0" encoding="utf-8"?>
+<p:notes xmlns:a="http://schemas.openxmlformats.org/drawingml/2006/main" xmlns:r="http://schemas.openxmlformats.org/officeDocument/2006/relationships" xmlns:p="http://schemas.openxmlformats.org/presentationml/2006/main" showMasterSp="0" showMasterPhAnim="0">
+  <p:cSld>
+    <p:spTree>
+      <p:nvGrpSpPr>
+        <p:cNvPr id="1" name="Shape 79"/>
+        <p:cNvGrpSpPr/>
+        <p:nvPr/>
+      </p:nvGrpSpPr>
+      <p:grpSpPr>
+        <a:xfrm>
+          <a:off x="0" y="0"/>
+          <a:ext cx="0" cy="0"/>
+          <a:chOff x="0" y="0"/>
+          <a:chExt cx="0" cy="0"/>
+        </a:xfrm>
+      </p:grpSpPr>
+      <p:sp>
+        <p:nvSpPr>
+          <p:cNvPr id="80" name="Google Shape;80;p7:notes"/>
+          <p:cNvSpPr>
+            <a:spLocks noGrp="1" noRot="1" noChangeAspect="1"/>
+          </p:cNvSpPr>
+          <p:nvPr>
+            <p:ph type="sldImg" idx="2"/>
+          </p:nvPr>
+        </p:nvSpPr>
+        <p:spPr>
+          <a:xfrm>
+            <a:off x="-1166813" y="0"/>
+            <a:ext cx="5334001" cy="3000375"/>
+          </a:xfrm>
+          <a:custGeom>
+            <a:avLst/>
+            <a:gdLst/>
+            <a:ahLst/>
+            <a:cxnLst/>
+            <a:rect l="l" t="t" r="r" b="b"/>
+            <a:pathLst>
+              <a:path w="120000" h="120000" extrusionOk="0">
+                <a:moveTo>
+                  <a:pt x="0" y="0"/>
+                </a:moveTo>
+                <a:lnTo>
+                  <a:pt x="120000" y="0"/>
+                </a:lnTo>
+                <a:lnTo>
+                  <a:pt x="120000" y="120000"/>
+                </a:lnTo>
+                <a:lnTo>
+                  <a:pt x="0" y="120000"/>
+                </a:lnTo>
+                <a:close/>
+              </a:path>
+            </a:pathLst>
+          </a:custGeom>
+          <a:noFill/>
+          <a:ln>
+            <a:noFill/>
+          </a:ln>
+        </p:spPr>
+      </p:sp>
+      <p:sp>
+        <p:nvSpPr>
+          <p:cNvPr id="81" name="Google Shape;81;p7:notes"/>
+          <p:cNvSpPr txBox="1">
+            <a:spLocks noGrp="1"/>
+          </p:cNvSpPr>
+          <p:nvPr>
+            <p:ph type="body" idx="1"/>
+          </p:nvPr>
+        </p:nvSpPr>
+        <p:spPr>
+          <a:xfrm>
+            <a:off x="0" y="0"/>
+            <a:ext cx="3000000" cy="3000000"/>
+          </a:xfrm>
+          <a:prstGeom prst="rect">
+            <a:avLst/>
+          </a:prstGeom>
+          <a:noFill/>
+          <a:ln>
+            <a:noFill/>
+          </a:ln>
+        </p:spPr>
+        <p:txBody>
+          <a:bodyPr spcFirstLastPara="1" wrap="square" lIns="91425" tIns="45700" rIns="91425" bIns="45700" anchor="t" anchorCtr="0">
+            <a:noAutofit/>
+          </a:bodyPr>
+          <a:lstStyle/>
+          <a:p>
+            <a:pPr marL="0" marR="0" lvl="0" indent="0" algn="l" rtl="0">
+              <a:spcBef>
+                <a:spcPts val="0"/>
+              </a:spcBef>
+              <a:spcAft>
+                <a:spcPts val="0"/>
+              </a:spcAft>
+              <a:buNone/>
+            </a:pPr>
+            <a:endParaRPr sz="1200">
+              <a:solidFill>
+                <a:schemeClr val="dk1"/>
+              </a:solidFill>
+              <a:latin typeface="Arial"/>
+              <a:ea typeface="Arial"/>
+              <a:cs typeface="Arial"/>
+              <a:sym typeface="Arial"/>
+            </a:endParaRPr>
+          </a:p>
+        </p:txBody>
+      </p:sp>
+      <p:sp>
+        <p:nvSpPr>
+          <p:cNvPr id="82" name="Google Shape;82;p7:notes"/>
           <p:cNvSpPr txBox="1">
             <a:spLocks noGrp="1"/>
           </p:cNvSpPr>
@@ -2173,7 +2202,13 @@
   <p:cSld>
     <p:spTree>
       <p:nvGrpSpPr>
-        <p:cNvPr id="1" name="Shape 101"/>
+        <p:cNvPr id="1" name="Shape 57">
+          <a:extLst>
+            <a:ext uri="{FF2B5EF4-FFF2-40B4-BE49-F238E27FC236}">
+              <a16:creationId xmlns:a16="http://schemas.microsoft.com/office/drawing/2014/main" id="{F728FA55-FD80-6A7D-C0FC-ACE4CF893439}"/>
+            </a:ext>
+          </a:extLst>
+        </p:cNvPr>
         <p:cNvGrpSpPr/>
         <p:nvPr/>
       </p:nvGrpSpPr>
@@ -2187,7 +2222,13 @@
       </p:grpSpPr>
       <p:sp>
         <p:nvSpPr>
-          <p:cNvPr id="102" name="Google Shape;102;p9:notes"/>
+          <p:cNvPr id="58" name="Google Shape;58;p5:notes">
+            <a:extLst>
+              <a:ext uri="{FF2B5EF4-FFF2-40B4-BE49-F238E27FC236}">
+                <a16:creationId xmlns:a16="http://schemas.microsoft.com/office/drawing/2014/main" id="{D6F169BC-4696-F404-ADCB-CDCD097D0231}"/>
+              </a:ext>
+            </a:extLst>
+          </p:cNvPr>
           <p:cNvSpPr>
             <a:spLocks noGrp="1" noRot="1" noChangeAspect="1"/>
           </p:cNvSpPr>
@@ -2232,7 +2273,13 @@
       </p:sp>
       <p:sp>
         <p:nvSpPr>
-          <p:cNvPr id="103" name="Google Shape;103;p9:notes"/>
+          <p:cNvPr id="59" name="Google Shape;59;p5:notes">
+            <a:extLst>
+              <a:ext uri="{FF2B5EF4-FFF2-40B4-BE49-F238E27FC236}">
+                <a16:creationId xmlns:a16="http://schemas.microsoft.com/office/drawing/2014/main" id="{DE682C12-F853-CC2D-2D03-EADE172DE680}"/>
+              </a:ext>
+            </a:extLst>
+          </p:cNvPr>
           <p:cNvSpPr txBox="1">
             <a:spLocks noGrp="1"/>
           </p:cNvSpPr>
@@ -2282,7 +2329,13 @@
       </p:sp>
       <p:sp>
         <p:nvSpPr>
-          <p:cNvPr id="104" name="Google Shape;104;p9:notes"/>
+          <p:cNvPr id="60" name="Google Shape;60;p5:notes">
+            <a:extLst>
+              <a:ext uri="{FF2B5EF4-FFF2-40B4-BE49-F238E27FC236}">
+                <a16:creationId xmlns:a16="http://schemas.microsoft.com/office/drawing/2014/main" id="{D333A24F-4DBB-ED76-F681-6733364C9417}"/>
+              </a:ext>
+            </a:extLst>
+          </p:cNvPr>
           <p:cNvSpPr txBox="1">
             <a:spLocks noGrp="1"/>
           </p:cNvSpPr>
@@ -2343,6 +2396,11 @@
         </p:txBody>
       </p:sp>
     </p:spTree>
+    <p:extLst>
+      <p:ext uri="{BB962C8B-B14F-4D97-AF65-F5344CB8AC3E}">
+        <p14:creationId xmlns:p14="http://schemas.microsoft.com/office/powerpoint/2010/main" val="1075162215"/>
+      </p:ext>
+    </p:extLst>
   </p:cSld>
   <p:clrMapOvr>
     <a:masterClrMapping/>
@@ -2355,7 +2413,7 @@
   <p:cSld>
     <p:spTree>
       <p:nvGrpSpPr>
-        <p:cNvPr id="1" name="Shape 101"/>
+        <p:cNvPr id="1" name="Shape 89"/>
         <p:cNvGrpSpPr/>
         <p:nvPr/>
       </p:nvGrpSpPr>
@@ -2369,7 +2427,7 @@
       </p:grpSpPr>
       <p:sp>
         <p:nvSpPr>
-          <p:cNvPr id="102" name="Google Shape;102;p9:notes"/>
+          <p:cNvPr id="90" name="Google Shape;90;p8:notes"/>
           <p:cNvSpPr>
             <a:spLocks noGrp="1" noRot="1" noChangeAspect="1"/>
           </p:cNvSpPr>
@@ -2414,7 +2472,7 @@
       </p:sp>
       <p:sp>
         <p:nvSpPr>
-          <p:cNvPr id="103" name="Google Shape;103;p9:notes"/>
+          <p:cNvPr id="91" name="Google Shape;91;p8:notes"/>
           <p:cNvSpPr txBox="1">
             <a:spLocks noGrp="1"/>
           </p:cNvSpPr>
@@ -2464,7 +2522,7 @@
       </p:sp>
       <p:sp>
         <p:nvSpPr>
-          <p:cNvPr id="104" name="Google Shape;104;p9:notes"/>
+          <p:cNvPr id="92" name="Google Shape;92;p8:notes"/>
           <p:cNvSpPr txBox="1">
             <a:spLocks noGrp="1"/>
           </p:cNvSpPr>
@@ -2525,11 +2583,6 @@
         </p:txBody>
       </p:sp>
     </p:spTree>
-    <p:extLst>
-      <p:ext uri="{BB962C8B-B14F-4D97-AF65-F5344CB8AC3E}">
-        <p14:creationId xmlns:p14="http://schemas.microsoft.com/office/powerpoint/2010/main" val="1066382340"/>
-      </p:ext>
-    </p:extLst>
   </p:cSld>
   <p:clrMapOvr>
     <a:masterClrMapping/>
@@ -2542,13 +2595,7 @@
   <p:cSld>
     <p:spTree>
       <p:nvGrpSpPr>
-        <p:cNvPr id="1" name="Shape 101">
-          <a:extLst>
-            <a:ext uri="{FF2B5EF4-FFF2-40B4-BE49-F238E27FC236}">
-              <a16:creationId xmlns:a16="http://schemas.microsoft.com/office/drawing/2014/main" id="{DC32A69C-A7C1-2C7E-2B63-AFD83FB644C2}"/>
-            </a:ext>
-          </a:extLst>
-        </p:cNvPr>
+        <p:cNvPr id="1" name="Shape 101"/>
         <p:cNvGrpSpPr/>
         <p:nvPr/>
       </p:nvGrpSpPr>
@@ -2562,13 +2609,7 @@
       </p:grpSpPr>
       <p:sp>
         <p:nvSpPr>
-          <p:cNvPr id="102" name="Google Shape;102;p9:notes">
-            <a:extLst>
-              <a:ext uri="{FF2B5EF4-FFF2-40B4-BE49-F238E27FC236}">
-                <a16:creationId xmlns:a16="http://schemas.microsoft.com/office/drawing/2014/main" id="{50AE3366-98B9-0DAB-7819-D2821E603F9C}"/>
-              </a:ext>
-            </a:extLst>
-          </p:cNvPr>
+          <p:cNvPr id="102" name="Google Shape;102;p9:notes"/>
           <p:cNvSpPr>
             <a:spLocks noGrp="1" noRot="1" noChangeAspect="1"/>
           </p:cNvSpPr>
@@ -2613,13 +2654,7 @@
       </p:sp>
       <p:sp>
         <p:nvSpPr>
-          <p:cNvPr id="103" name="Google Shape;103;p9:notes">
-            <a:extLst>
-              <a:ext uri="{FF2B5EF4-FFF2-40B4-BE49-F238E27FC236}">
-                <a16:creationId xmlns:a16="http://schemas.microsoft.com/office/drawing/2014/main" id="{875EE2F0-F1B8-894D-852C-82E8B5C8B326}"/>
-              </a:ext>
-            </a:extLst>
-          </p:cNvPr>
+          <p:cNvPr id="103" name="Google Shape;103;p9:notes"/>
           <p:cNvSpPr txBox="1">
             <a:spLocks noGrp="1"/>
           </p:cNvSpPr>
@@ -2669,13 +2704,7 @@
       </p:sp>
       <p:sp>
         <p:nvSpPr>
-          <p:cNvPr id="104" name="Google Shape;104;p9:notes">
-            <a:extLst>
-              <a:ext uri="{FF2B5EF4-FFF2-40B4-BE49-F238E27FC236}">
-                <a16:creationId xmlns:a16="http://schemas.microsoft.com/office/drawing/2014/main" id="{4716880F-0816-624E-32B3-BAA66323AF25}"/>
-              </a:ext>
-            </a:extLst>
-          </p:cNvPr>
+          <p:cNvPr id="104" name="Google Shape;104;p9:notes"/>
           <p:cNvSpPr txBox="1">
             <a:spLocks noGrp="1"/>
           </p:cNvSpPr>
@@ -2736,11 +2765,6 @@
         </p:txBody>
       </p:sp>
     </p:spTree>
-    <p:extLst>
-      <p:ext uri="{BB962C8B-B14F-4D97-AF65-F5344CB8AC3E}">
-        <p14:creationId xmlns:p14="http://schemas.microsoft.com/office/powerpoint/2010/main" val="3717609624"/>
-      </p:ext>
-    </p:extLst>
   </p:cSld>
   <p:clrMapOvr>
     <a:masterClrMapping/>
@@ -3882,7 +3906,7 @@
         </p:blipFill>
         <p:spPr>
           <a:xfrm>
-            <a:off x="4376058" y="-2998735"/>
+            <a:off x="4376058" y="-3013975"/>
             <a:ext cx="6720928" cy="6442352"/>
           </a:xfrm>
           <a:prstGeom prst="rect">
@@ -3899,159 +3923,18 @@
   <p:clrMapOvr>
     <a:masterClrMapping/>
   </p:clrMapOvr>
-  <mc:AlternateContent xmlns:mc="http://schemas.openxmlformats.org/markup-compatibility/2006">
-    <mc:Choice xmlns:p14="http://schemas.microsoft.com/office/powerpoint/2010/main" Requires="p14">
-      <p:transition spd="slow" p14:dur="1750">
-        <p:fade thruBlk="1"/>
+  <mc:AlternateContent xmlns:mc="http://schemas.openxmlformats.org/markup-compatibility/2006" xmlns:p14="http://schemas.microsoft.com/office/powerpoint/2010/main">
+    <mc:Choice Requires="p14">
+      <p:transition spd="slow" p14:dur="1400">
+        <p14:ripple/>
       </p:transition>
     </mc:Choice>
-    <mc:Fallback>
+    <mc:Fallback xmlns="">
       <p:transition spd="slow">
-        <p:fade thruBlk="1"/>
+        <p:fade/>
       </p:transition>
     </mc:Fallback>
   </mc:AlternateContent>
-  <p:timing>
-    <p:tnLst>
-      <p:par>
-        <p:cTn id="1" dur="indefinite" restart="never" nodeType="tmRoot">
-          <p:childTnLst>
-            <p:seq concurrent="1" nextAc="seek">
-              <p:cTn id="2" dur="indefinite" nodeType="mainSeq">
-                <p:childTnLst>
-                  <p:par>
-                    <p:cTn id="3" fill="hold">
-                      <p:stCondLst>
-                        <p:cond delay="indefinite"/>
-                        <p:cond evt="onBegin" delay="0">
-                          <p:tn val="2"/>
-                        </p:cond>
-                      </p:stCondLst>
-                      <p:childTnLst>
-                        <p:par>
-                          <p:cTn id="4" fill="hold">
-                            <p:stCondLst>
-                              <p:cond delay="0"/>
-                            </p:stCondLst>
-                            <p:childTnLst>
-                              <p:par>
-                                <p:cTn id="5" presetID="10" presetClass="entr" presetSubtype="0" fill="hold" grpId="0" nodeType="withEffect">
-                                  <p:stCondLst>
-                                    <p:cond delay="0"/>
-                                  </p:stCondLst>
-                                  <p:childTnLst>
-                                    <p:set>
-                                      <p:cBhvr>
-                                        <p:cTn id="6" dur="1" fill="hold">
-                                          <p:stCondLst>
-                                            <p:cond delay="0"/>
-                                          </p:stCondLst>
-                                        </p:cTn>
-                                        <p:tgtEl>
-                                          <p:spTgt spid="15"/>
-                                        </p:tgtEl>
-                                        <p:attrNameLst>
-                                          <p:attrName>style.visibility</p:attrName>
-                                        </p:attrNameLst>
-                                      </p:cBhvr>
-                                      <p:to>
-                                        <p:strVal val="visible"/>
-                                      </p:to>
-                                    </p:set>
-                                    <p:animEffect transition="in" filter="fade">
-                                      <p:cBhvr>
-                                        <p:cTn id="7" dur="1000"/>
-                                        <p:tgtEl>
-                                          <p:spTgt spid="15"/>
-                                        </p:tgtEl>
-                                      </p:cBhvr>
-                                    </p:animEffect>
-                                  </p:childTnLst>
-                                </p:cTn>
-                              </p:par>
-                            </p:childTnLst>
-                          </p:cTn>
-                        </p:par>
-                        <p:par>
-                          <p:cTn id="8" fill="hold">
-                            <p:stCondLst>
-                              <p:cond delay="1000"/>
-                            </p:stCondLst>
-                            <p:childTnLst>
-                              <p:par>
-                                <p:cTn id="9" presetID="10" presetClass="entr" presetSubtype="0" fill="hold" nodeType="afterEffect">
-                                  <p:stCondLst>
-                                    <p:cond delay="0"/>
-                                  </p:stCondLst>
-                                  <p:childTnLst>
-                                    <p:set>
-                                      <p:cBhvr>
-                                        <p:cTn id="10" dur="1" fill="hold">
-                                          <p:stCondLst>
-                                            <p:cond delay="0"/>
-                                          </p:stCondLst>
-                                        </p:cTn>
-                                        <p:tgtEl>
-                                          <p:spTgt spid="16">
-                                            <p:txEl>
-                                              <p:pRg st="0" end="0"/>
-                                            </p:txEl>
-                                          </p:spTgt>
-                                        </p:tgtEl>
-                                        <p:attrNameLst>
-                                          <p:attrName>style.visibility</p:attrName>
-                                        </p:attrNameLst>
-                                      </p:cBhvr>
-                                      <p:to>
-                                        <p:strVal val="visible"/>
-                                      </p:to>
-                                    </p:set>
-                                    <p:animEffect transition="in" filter="fade">
-                                      <p:cBhvr>
-                                        <p:cTn id="11" dur="1000"/>
-                                        <p:tgtEl>
-                                          <p:spTgt spid="16">
-                                            <p:txEl>
-                                              <p:pRg st="0" end="0"/>
-                                            </p:txEl>
-                                          </p:spTgt>
-                                        </p:tgtEl>
-                                      </p:cBhvr>
-                                    </p:animEffect>
-                                  </p:childTnLst>
-                                </p:cTn>
-                              </p:par>
-                            </p:childTnLst>
-                          </p:cTn>
-                        </p:par>
-                      </p:childTnLst>
-                    </p:cTn>
-                  </p:par>
-                </p:childTnLst>
-              </p:cTn>
-              <p:prevCondLst>
-                <p:cond evt="onPrev" delay="0">
-                  <p:tgtEl>
-                    <p:sldTgt/>
-                  </p:tgtEl>
-                </p:cond>
-              </p:prevCondLst>
-              <p:nextCondLst>
-                <p:cond evt="onNext" delay="0">
-                  <p:tgtEl>
-                    <p:sldTgt/>
-                  </p:tgtEl>
-                </p:cond>
-              </p:nextCondLst>
-            </p:seq>
-          </p:childTnLst>
-        </p:cTn>
-      </p:par>
-    </p:tnLst>
-    <p:bldLst>
-      <p:bldP spid="15" grpId="0"/>
-    </p:bldLst>
-  </p:timing>
 </p:sld>
 </file>
 
@@ -4188,7 +4071,7 @@
         </p:nvSpPr>
         <p:spPr>
           <a:xfrm>
-            <a:off x="752593" y="483067"/>
+            <a:off x="640556" y="609447"/>
             <a:ext cx="7862888" cy="1047750"/>
           </a:xfrm>
           <a:prstGeom prst="rect">
@@ -4415,10 +4298,10 @@
         <mc:Choice xmlns:am3d="http://schemas.microsoft.com/office/drawing/2017/model3d" Requires="am3d">
           <p:graphicFrame>
             <p:nvGraphicFramePr>
-              <p:cNvPr id="2" name="3D Model 1" descr="Smiling Face With Sunglasses Emoji">
+              <p:cNvPr id="2" name="3D модел 1" descr="Smiling Face With Sunglasses Emoji">
                 <a:extLst>
                   <a:ext uri="{FF2B5EF4-FFF2-40B4-BE49-F238E27FC236}">
-                    <a16:creationId xmlns:a16="http://schemas.microsoft.com/office/drawing/2014/main" id="{A28314BB-967D-5BC8-02F8-A2A01A477B3E}"/>
+                    <a16:creationId xmlns:a16="http://schemas.microsoft.com/office/drawing/2014/main" id="{F3E0C75B-00B6-B083-A942-BDB2528D4D00}"/>
                   </a:ext>
                 </a:extLst>
               </p:cNvPr>
@@ -4428,14 +4311,14 @@
               <p:nvPr>
                 <p:extLst>
                   <p:ext uri="{D42A27DB-BD31-4B8C-83A1-F6EECF244321}">
-                    <p14:modId xmlns:p14="http://schemas.microsoft.com/office/powerpoint/2010/main" val="916891462"/>
+                    <p14:modId xmlns:p14="http://schemas.microsoft.com/office/powerpoint/2010/main" val="3854594677"/>
                   </p:ext>
                 </p:extLst>
               </p:nvPr>
             </p:nvGraphicFramePr>
             <p:xfrm>
-              <a:off x="3411242" y="1867050"/>
-              <a:ext cx="2321513" cy="2225284"/>
+              <a:off x="3522592" y="1994805"/>
+              <a:ext cx="2098814" cy="2011818"/>
             </p:xfrm>
             <a:graphic>
               <a:graphicData uri="http://schemas.microsoft.com/office/drawing/2017/model3d">
@@ -4443,7 +4326,7 @@
                   <am3d:spPr>
                     <a:xfrm>
                       <a:off x="0" y="0"/>
-                      <a:ext cx="2321513" cy="2225284"/>
+                      <a:ext cx="2098814" cy="2011818"/>
                     </a:xfrm>
                     <a:prstGeom prst="rect">
                       <a:avLst/>
@@ -4469,7 +4352,7 @@
                   <am3d:raster rName="Office3DRenderer" rVer="16.0.8326">
                     <am3d:blip r:embed="rId7"/>
                   </am3d:raster>
-                  <am3d:objViewport viewportSz="4077683"/>
+                  <am3d:objViewport viewportSz="3686518"/>
                   <am3d:ambientLight>
                     <am3d:clr>
                       <a:scrgbClr r="50000" g="50000" b="50000"/>
@@ -4505,10 +4388,10 @@
         <mc:Fallback>
           <p:pic>
             <p:nvPicPr>
-              <p:cNvPr id="2" name="3D Model 1" descr="Smiling Face With Sunglasses Emoji">
+              <p:cNvPr id="2" name="3D модел 1" descr="Smiling Face With Sunglasses Emoji">
                 <a:extLst>
                   <a:ext uri="{FF2B5EF4-FFF2-40B4-BE49-F238E27FC236}">
-                    <a16:creationId xmlns:a16="http://schemas.microsoft.com/office/drawing/2014/main" id="{A28314BB-967D-5BC8-02F8-A2A01A477B3E}"/>
+                    <a16:creationId xmlns:a16="http://schemas.microsoft.com/office/drawing/2014/main" id="{F3E0C75B-00B6-B083-A942-BDB2528D4D00}"/>
                   </a:ext>
                 </a:extLst>
               </p:cNvPr>
@@ -4525,8 +4408,8 @@
             </p:blipFill>
             <p:spPr>
               <a:xfrm>
-                <a:off x="3411242" y="1867050"/>
-                <a:ext cx="2321513" cy="2225284"/>
+                <a:off x="3522592" y="1994805"/>
+                <a:ext cx="2098814" cy="2011818"/>
               </a:xfrm>
               <a:prstGeom prst="rect">
                 <a:avLst/>
@@ -4540,6 +4423,9 @@
   <p:clrMapOvr>
     <a:masterClrMapping/>
   </p:clrMapOvr>
+  <p:transition spd="slow">
+    <p:push dir="u"/>
+  </p:transition>
   <p:timing>
     <p:tnLst>
       <p:par>
@@ -6933,7 +6819,7 @@
                             </p:stCondLst>
                             <p:childTnLst>
                               <p:par>
-                                <p:cTn id="15" presetID="42" presetClass="path" presetSubtype="0" accel="50000" decel="50000" fill="hold" grpId="0" nodeType="afterEffect">
+                                <p:cTn id="15" presetID="42" presetClass="path" presetSubtype="0" accel="50000" decel="50000" fill="hold" nodeType="afterEffect">
                                   <p:stCondLst>
                                     <p:cond delay="0"/>
                                   </p:stCondLst>
@@ -6942,7 +6828,11 @@
                                       <p:cBhvr>
                                         <p:cTn id="16" dur="2000" fill="hold"/>
                                         <p:tgtEl>
-                                          <p:spTgt spid="121"/>
+                                          <p:spTgt spid="121">
+                                            <p:txEl>
+                                              <p:pRg st="0" end="0"/>
+                                            </p:txEl>
+                                          </p:spTgt>
                                         </p:tgtEl>
                                         <p:attrNameLst>
                                           <p:attrName>ppt_x</p:attrName>
@@ -6980,14 +6870,916 @@
         </p:cTn>
       </p:par>
     </p:tnLst>
-    <p:bldLst>
-      <p:bldP spid="121" grpId="0"/>
-    </p:bldLst>
   </p:timing>
 </p:sld>
 </file>
 
 <file path=ppt/slides/slide2.xml><?xml version="1.0" encoding="utf-8"?>
+<p:sld xmlns:a="http://schemas.openxmlformats.org/drawingml/2006/main" xmlns:r="http://schemas.openxmlformats.org/officeDocument/2006/relationships" xmlns:p="http://schemas.openxmlformats.org/presentationml/2006/main">
+  <p:cSld>
+    <p:bg>
+      <p:bgPr>
+        <a:solidFill>
+          <a:schemeClr val="tx1"/>
+        </a:solidFill>
+        <a:effectLst/>
+      </p:bgPr>
+    </p:bg>
+    <p:spTree>
+      <p:nvGrpSpPr>
+        <p:cNvPr id="1" name="Shape 11">
+          <a:extLst>
+            <a:ext uri="{FF2B5EF4-FFF2-40B4-BE49-F238E27FC236}">
+              <a16:creationId xmlns:a16="http://schemas.microsoft.com/office/drawing/2014/main" id="{09D34139-A6AF-5A39-02C5-8454CE610113}"/>
+            </a:ext>
+          </a:extLst>
+        </p:cNvPr>
+        <p:cNvGrpSpPr/>
+        <p:nvPr/>
+      </p:nvGrpSpPr>
+      <p:grpSpPr>
+        <a:xfrm>
+          <a:off x="0" y="0"/>
+          <a:ext cx="0" cy="0"/>
+          <a:chOff x="0" y="0"/>
+          <a:chExt cx="0" cy="0"/>
+        </a:xfrm>
+      </p:grpSpPr>
+      <p:sp>
+        <p:nvSpPr>
+          <p:cNvPr id="12" name="Google Shape;12;p1">
+            <a:extLst>
+              <a:ext uri="{FF2B5EF4-FFF2-40B4-BE49-F238E27FC236}">
+                <a16:creationId xmlns:a16="http://schemas.microsoft.com/office/drawing/2014/main" id="{8F65CC53-7387-F2F1-EF50-C90BDB8E097B}"/>
+              </a:ext>
+            </a:extLst>
+          </p:cNvPr>
+          <p:cNvSpPr/>
+          <p:nvPr/>
+        </p:nvSpPr>
+        <p:spPr>
+          <a:xfrm>
+            <a:off x="0" y="0"/>
+            <a:ext cx="9144000" cy="5143500"/>
+          </a:xfrm>
+          <a:prstGeom prst="rect">
+            <a:avLst/>
+          </a:prstGeom>
+          <a:noFill/>
+          <a:ln>
+            <a:noFill/>
+          </a:ln>
+        </p:spPr>
+        <p:txBody>
+          <a:bodyPr spcFirstLastPara="1" wrap="square" lIns="91425" tIns="45700" rIns="91425" bIns="45700" anchor="t" anchorCtr="0">
+            <a:noAutofit/>
+          </a:bodyPr>
+          <a:lstStyle/>
+          <a:p>
+            <a:pPr marL="0" marR="0" lvl="0" indent="0" algn="l" rtl="0">
+              <a:spcBef>
+                <a:spcPts val="0"/>
+              </a:spcBef>
+              <a:spcAft>
+                <a:spcPts val="0"/>
+              </a:spcAft>
+              <a:buNone/>
+            </a:pPr>
+            <a:endParaRPr sz="1800">
+              <a:solidFill>
+                <a:schemeClr val="dk1"/>
+              </a:solidFill>
+              <a:latin typeface="Calibri"/>
+              <a:ea typeface="Calibri"/>
+              <a:cs typeface="Calibri"/>
+              <a:sym typeface="Calibri"/>
+            </a:endParaRPr>
+          </a:p>
+        </p:txBody>
+      </p:sp>
+      <p:pic>
+        <p:nvPicPr>
+          <p:cNvPr id="13" name="Google Shape;13;p1">
+            <a:extLst>
+              <a:ext uri="{FF2B5EF4-FFF2-40B4-BE49-F238E27FC236}">
+                <a16:creationId xmlns:a16="http://schemas.microsoft.com/office/drawing/2014/main" id="{C330B150-A0F9-0C7F-F3FC-5C730D2D4136}"/>
+              </a:ext>
+            </a:extLst>
+          </p:cNvPr>
+          <p:cNvPicPr preferRelativeResize="0"/>
+          <p:nvPr/>
+        </p:nvPicPr>
+        <p:blipFill rotWithShape="1">
+          <a:blip r:embed="rId3">
+            <a:alphaModFix/>
+          </a:blip>
+          <a:srcRect/>
+          <a:stretch/>
+        </p:blipFill>
+        <p:spPr>
+          <a:xfrm>
+            <a:off x="55204" y="0"/>
+            <a:ext cx="9143999" cy="5143500"/>
+          </a:xfrm>
+          <a:prstGeom prst="rect">
+            <a:avLst/>
+          </a:prstGeom>
+          <a:noFill/>
+          <a:ln>
+            <a:noFill/>
+          </a:ln>
+        </p:spPr>
+      </p:pic>
+      <p:pic>
+        <p:nvPicPr>
+          <p:cNvPr id="14" name="Google Shape;14;p1" descr="preencoded.png">
+            <a:extLst>
+              <a:ext uri="{FF2B5EF4-FFF2-40B4-BE49-F238E27FC236}">
+                <a16:creationId xmlns:a16="http://schemas.microsoft.com/office/drawing/2014/main" id="{4C5B3580-875C-F3E3-9F24-E22BD01EA051}"/>
+              </a:ext>
+            </a:extLst>
+          </p:cNvPr>
+          <p:cNvPicPr preferRelativeResize="0"/>
+          <p:nvPr/>
+        </p:nvPicPr>
+        <p:blipFill rotWithShape="1">
+          <a:blip r:embed="rId4">
+            <a:alphaModFix/>
+          </a:blip>
+          <a:srcRect/>
+          <a:stretch/>
+        </p:blipFill>
+        <p:spPr>
+          <a:xfrm>
+            <a:off x="-2985329" y="2655880"/>
+            <a:ext cx="5556437" cy="5556437"/>
+          </a:xfrm>
+          <a:prstGeom prst="rect">
+            <a:avLst/>
+          </a:prstGeom>
+          <a:noFill/>
+          <a:ln>
+            <a:noFill/>
+          </a:ln>
+        </p:spPr>
+      </p:pic>
+      <p:sp>
+        <p:nvSpPr>
+          <p:cNvPr id="15" name="Google Shape;15;p1">
+            <a:extLst>
+              <a:ext uri="{FF2B5EF4-FFF2-40B4-BE49-F238E27FC236}">
+                <a16:creationId xmlns:a16="http://schemas.microsoft.com/office/drawing/2014/main" id="{ACF04EBB-B4E9-3862-08C6-1423FD0D5716}"/>
+              </a:ext>
+            </a:extLst>
+          </p:cNvPr>
+          <p:cNvSpPr/>
+          <p:nvPr/>
+        </p:nvSpPr>
+        <p:spPr>
+          <a:xfrm>
+            <a:off x="1276285" y="428402"/>
+            <a:ext cx="5657850" cy="762000"/>
+          </a:xfrm>
+          <a:prstGeom prst="rect">
+            <a:avLst/>
+          </a:prstGeom>
+          <a:noFill/>
+          <a:ln>
+            <a:noFill/>
+          </a:ln>
+        </p:spPr>
+        <p:txBody>
+          <a:bodyPr spcFirstLastPara="1" wrap="square" lIns="91425" tIns="45700" rIns="91425" bIns="45700" anchor="ctr" anchorCtr="0">
+            <a:noAutofit/>
+          </a:bodyPr>
+          <a:lstStyle/>
+          <a:p>
+            <a:pPr marL="0" marR="0" lvl="0" indent="0" algn="ctr" rtl="0">
+              <a:lnSpc>
+                <a:spcPct val="57142"/>
+              </a:lnSpc>
+              <a:spcBef>
+                <a:spcPts val="0"/>
+              </a:spcBef>
+              <a:spcAft>
+                <a:spcPts val="0"/>
+              </a:spcAft>
+              <a:buClr>
+                <a:srgbClr val="FFFFFF"/>
+              </a:buClr>
+              <a:buSzPts val="5000"/>
+              <a:buFont typeface="PT Mono"/>
+              <a:buNone/>
+            </a:pPr>
+            <a:r>
+              <a:rPr lang="bg-BG" sz="5250" dirty="0">
+                <a:solidFill>
+                  <a:schemeClr val="bg1"/>
+                </a:solidFill>
+                <a:latin typeface="Calibri"/>
+                <a:ea typeface="Calibri"/>
+                <a:cs typeface="Calibri"/>
+                <a:sym typeface="Calibri"/>
+              </a:rPr>
+              <a:t>Екип</a:t>
+            </a:r>
+            <a:endParaRPr sz="5250" dirty="0">
+              <a:solidFill>
+                <a:schemeClr val="bg1"/>
+              </a:solidFill>
+              <a:latin typeface="Calibri"/>
+              <a:ea typeface="Calibri"/>
+              <a:cs typeface="Calibri"/>
+              <a:sym typeface="Calibri"/>
+            </a:endParaRPr>
+          </a:p>
+        </p:txBody>
+      </p:sp>
+      <p:sp>
+        <p:nvSpPr>
+          <p:cNvPr id="16" name="Google Shape;16;p1">
+            <a:extLst>
+              <a:ext uri="{FF2B5EF4-FFF2-40B4-BE49-F238E27FC236}">
+                <a16:creationId xmlns:a16="http://schemas.microsoft.com/office/drawing/2014/main" id="{77E54DF6-1E67-2E22-8DEB-754076787B82}"/>
+              </a:ext>
+            </a:extLst>
+          </p:cNvPr>
+          <p:cNvSpPr/>
+          <p:nvPr/>
+        </p:nvSpPr>
+        <p:spPr>
+          <a:xfrm>
+            <a:off x="2628899" y="2637064"/>
+            <a:ext cx="3886200" cy="762000"/>
+          </a:xfrm>
+          <a:prstGeom prst="rect">
+            <a:avLst/>
+          </a:prstGeom>
+          <a:noFill/>
+          <a:ln>
+            <a:noFill/>
+          </a:ln>
+        </p:spPr>
+        <p:txBody>
+          <a:bodyPr spcFirstLastPara="1" wrap="square" lIns="91425" tIns="45700" rIns="91425" bIns="45700" anchor="ctr" anchorCtr="0">
+            <a:noAutofit/>
+          </a:bodyPr>
+          <a:lstStyle/>
+          <a:p>
+            <a:pPr marL="0" marR="0" lvl="0" indent="0" algn="ctr" rtl="0">
+              <a:lnSpc>
+                <a:spcPct val="75000"/>
+              </a:lnSpc>
+              <a:spcBef>
+                <a:spcPts val="0"/>
+              </a:spcBef>
+              <a:spcAft>
+                <a:spcPts val="0"/>
+              </a:spcAft>
+              <a:buClr>
+                <a:srgbClr val="FFFFFF"/>
+              </a:buClr>
+              <a:buSzPts val="4000"/>
+              <a:buFont typeface="PT Mono"/>
+              <a:buNone/>
+            </a:pPr>
+            <a:endParaRPr sz="3600" dirty="0">
+              <a:solidFill>
+                <a:schemeClr val="dk1"/>
+              </a:solidFill>
+              <a:latin typeface="Calibri"/>
+              <a:ea typeface="Calibri"/>
+              <a:cs typeface="Calibri"/>
+              <a:sym typeface="Calibri"/>
+            </a:endParaRPr>
+          </a:p>
+        </p:txBody>
+      </p:sp>
+      <p:sp>
+        <p:nvSpPr>
+          <p:cNvPr id="17" name="Google Shape;17;p1">
+            <a:extLst>
+              <a:ext uri="{FF2B5EF4-FFF2-40B4-BE49-F238E27FC236}">
+                <a16:creationId xmlns:a16="http://schemas.microsoft.com/office/drawing/2014/main" id="{89D206DE-8BF1-3BE2-046D-44C93165AB80}"/>
+              </a:ext>
+            </a:extLst>
+          </p:cNvPr>
+          <p:cNvSpPr/>
+          <p:nvPr/>
+        </p:nvSpPr>
+        <p:spPr>
+          <a:xfrm>
+            <a:off x="3543300" y="3714750"/>
+            <a:ext cx="2519363" cy="947737"/>
+          </a:xfrm>
+          <a:prstGeom prst="rect">
+            <a:avLst/>
+          </a:prstGeom>
+          <a:noFill/>
+          <a:ln>
+            <a:noFill/>
+          </a:ln>
+        </p:spPr>
+        <p:txBody>
+          <a:bodyPr spcFirstLastPara="1" wrap="square" lIns="91425" tIns="45700" rIns="91425" bIns="45700" anchor="ctr" anchorCtr="0">
+            <a:noAutofit/>
+          </a:bodyPr>
+          <a:lstStyle/>
+          <a:p>
+            <a:pPr marL="0" marR="0" lvl="0" indent="0" algn="ctr" rtl="0">
+              <a:lnSpc>
+                <a:spcPct val="468750"/>
+              </a:lnSpc>
+              <a:spcBef>
+                <a:spcPts val="0"/>
+              </a:spcBef>
+              <a:spcAft>
+                <a:spcPts val="0"/>
+              </a:spcAft>
+              <a:buClr>
+                <a:schemeClr val="dk1"/>
+              </a:buClr>
+              <a:buSzPts val="2400"/>
+              <a:buFont typeface="Calibri"/>
+              <a:buNone/>
+            </a:pPr>
+            <a:endParaRPr sz="2400">
+              <a:solidFill>
+                <a:schemeClr val="dk1"/>
+              </a:solidFill>
+              <a:latin typeface="Calibri"/>
+              <a:ea typeface="Calibri"/>
+              <a:cs typeface="Calibri"/>
+              <a:sym typeface="Calibri"/>
+            </a:endParaRPr>
+          </a:p>
+        </p:txBody>
+      </p:sp>
+      <p:pic>
+        <p:nvPicPr>
+          <p:cNvPr id="19" name="Google Shape;19;p1" descr="A green circle with lines and circles&#10;&#10;Description automatically generated">
+            <a:extLst>
+              <a:ext uri="{FF2B5EF4-FFF2-40B4-BE49-F238E27FC236}">
+                <a16:creationId xmlns:a16="http://schemas.microsoft.com/office/drawing/2014/main" id="{AD7BE3E3-FCDA-0354-4247-9DD666014172}"/>
+              </a:ext>
+            </a:extLst>
+          </p:cNvPr>
+          <p:cNvPicPr preferRelativeResize="0"/>
+          <p:nvPr/>
+        </p:nvPicPr>
+        <p:blipFill rotWithShape="1">
+          <a:blip r:embed="rId5">
+            <a:alphaModFix/>
+          </a:blip>
+          <a:srcRect/>
+          <a:stretch/>
+        </p:blipFill>
+        <p:spPr>
+          <a:xfrm>
+            <a:off x="5556437" y="-3199445"/>
+            <a:ext cx="6720928" cy="6442352"/>
+          </a:xfrm>
+          <a:prstGeom prst="rect">
+            <a:avLst/>
+          </a:prstGeom>
+          <a:noFill/>
+          <a:ln>
+            <a:noFill/>
+          </a:ln>
+        </p:spPr>
+      </p:pic>
+      <p:pic>
+        <p:nvPicPr>
+          <p:cNvPr id="3" name="Картина 2">
+            <a:extLst>
+              <a:ext uri="{FF2B5EF4-FFF2-40B4-BE49-F238E27FC236}">
+                <a16:creationId xmlns:a16="http://schemas.microsoft.com/office/drawing/2014/main" id="{D5A757F4-3C52-59BF-5987-38890145F15F}"/>
+              </a:ext>
+            </a:extLst>
+          </p:cNvPr>
+          <p:cNvPicPr>
+            <a:picLocks noChangeAspect="1"/>
+          </p:cNvPicPr>
+          <p:nvPr/>
+        </p:nvPicPr>
+        <p:blipFill>
+          <a:blip r:embed="rId6"/>
+          <a:stretch>
+            <a:fillRect/>
+          </a:stretch>
+        </p:blipFill>
+        <p:spPr>
+          <a:xfrm>
+            <a:off x="973669" y="1632375"/>
+            <a:ext cx="1017199" cy="1093625"/>
+          </a:xfrm>
+          <a:prstGeom prst="rect">
+            <a:avLst/>
+          </a:prstGeom>
+          <a:ln>
+            <a:noFill/>
+          </a:ln>
+          <a:effectLst>
+            <a:softEdge rad="112500"/>
+          </a:effectLst>
+        </p:spPr>
+      </p:pic>
+      <p:pic>
+        <p:nvPicPr>
+          <p:cNvPr id="5" name="Картина 4">
+            <a:extLst>
+              <a:ext uri="{FF2B5EF4-FFF2-40B4-BE49-F238E27FC236}">
+                <a16:creationId xmlns:a16="http://schemas.microsoft.com/office/drawing/2014/main" id="{0044BB97-1660-6822-2CD7-656E5EC875CF}"/>
+              </a:ext>
+            </a:extLst>
+          </p:cNvPr>
+          <p:cNvPicPr>
+            <a:picLocks noChangeAspect="1"/>
+          </p:cNvPicPr>
+          <p:nvPr/>
+        </p:nvPicPr>
+        <p:blipFill>
+          <a:blip r:embed="rId7"/>
+          <a:stretch>
+            <a:fillRect/>
+          </a:stretch>
+        </p:blipFill>
+        <p:spPr>
+          <a:xfrm>
+            <a:off x="3201524" y="1661001"/>
+            <a:ext cx="1040351" cy="1131442"/>
+          </a:xfrm>
+          <a:prstGeom prst="rect">
+            <a:avLst/>
+          </a:prstGeom>
+          <a:ln>
+            <a:noFill/>
+          </a:ln>
+          <a:effectLst>
+            <a:softEdge rad="112500"/>
+          </a:effectLst>
+        </p:spPr>
+      </p:pic>
+      <p:pic>
+        <p:nvPicPr>
+          <p:cNvPr id="7" name="Картина 6">
+            <a:extLst>
+              <a:ext uri="{FF2B5EF4-FFF2-40B4-BE49-F238E27FC236}">
+                <a16:creationId xmlns:a16="http://schemas.microsoft.com/office/drawing/2014/main" id="{BA40F3A8-2204-DB55-33D4-D81414D20A34}"/>
+              </a:ext>
+            </a:extLst>
+          </p:cNvPr>
+          <p:cNvPicPr>
+            <a:picLocks noChangeAspect="1"/>
+          </p:cNvPicPr>
+          <p:nvPr/>
+        </p:nvPicPr>
+        <p:blipFill>
+          <a:blip r:embed="rId8"/>
+          <a:stretch>
+            <a:fillRect/>
+          </a:stretch>
+        </p:blipFill>
+        <p:spPr>
+          <a:xfrm>
+            <a:off x="2232694" y="3600343"/>
+            <a:ext cx="1044604" cy="1065495"/>
+          </a:xfrm>
+          <a:prstGeom prst="rect">
+            <a:avLst/>
+          </a:prstGeom>
+          <a:ln>
+            <a:noFill/>
+          </a:ln>
+          <a:effectLst>
+            <a:softEdge rad="112500"/>
+          </a:effectLst>
+        </p:spPr>
+      </p:pic>
+      <p:pic>
+        <p:nvPicPr>
+          <p:cNvPr id="9" name="Картина 8">
+            <a:extLst>
+              <a:ext uri="{FF2B5EF4-FFF2-40B4-BE49-F238E27FC236}">
+                <a16:creationId xmlns:a16="http://schemas.microsoft.com/office/drawing/2014/main" id="{A5723D50-7FF9-63E8-A9A3-754D2CDADFAE}"/>
+              </a:ext>
+            </a:extLst>
+          </p:cNvPr>
+          <p:cNvPicPr>
+            <a:picLocks noChangeAspect="1"/>
+          </p:cNvPicPr>
+          <p:nvPr/>
+        </p:nvPicPr>
+        <p:blipFill>
+          <a:blip r:embed="rId9"/>
+          <a:stretch>
+            <a:fillRect/>
+          </a:stretch>
+        </p:blipFill>
+        <p:spPr>
+          <a:xfrm>
+            <a:off x="5358407" y="1700072"/>
+            <a:ext cx="1077615" cy="1067974"/>
+          </a:xfrm>
+          <a:prstGeom prst="rect">
+            <a:avLst/>
+          </a:prstGeom>
+          <a:ln>
+            <a:noFill/>
+          </a:ln>
+          <a:effectLst>
+            <a:softEdge rad="112500"/>
+          </a:effectLst>
+        </p:spPr>
+      </p:pic>
+      <p:pic>
+        <p:nvPicPr>
+          <p:cNvPr id="11" name="Картина 10">
+            <a:extLst>
+              <a:ext uri="{FF2B5EF4-FFF2-40B4-BE49-F238E27FC236}">
+                <a16:creationId xmlns:a16="http://schemas.microsoft.com/office/drawing/2014/main" id="{563A3E77-95EA-F086-B806-F14028CD5A24}"/>
+              </a:ext>
+            </a:extLst>
+          </p:cNvPr>
+          <p:cNvPicPr>
+            <a:picLocks noChangeAspect="1"/>
+          </p:cNvPicPr>
+          <p:nvPr/>
+        </p:nvPicPr>
+        <p:blipFill>
+          <a:blip r:embed="rId10"/>
+          <a:stretch>
+            <a:fillRect/>
+          </a:stretch>
+        </p:blipFill>
+        <p:spPr>
+          <a:xfrm>
+            <a:off x="4350450" y="3632383"/>
+            <a:ext cx="1117467" cy="1111908"/>
+          </a:xfrm>
+          <a:prstGeom prst="rect">
+            <a:avLst/>
+          </a:prstGeom>
+          <a:ln>
+            <a:noFill/>
+          </a:ln>
+          <a:effectLst>
+            <a:softEdge rad="112500"/>
+          </a:effectLst>
+        </p:spPr>
+      </p:pic>
+      <p:sp>
+        <p:nvSpPr>
+          <p:cNvPr id="20" name="Текстово поле 19">
+            <a:extLst>
+              <a:ext uri="{FF2B5EF4-FFF2-40B4-BE49-F238E27FC236}">
+                <a16:creationId xmlns:a16="http://schemas.microsoft.com/office/drawing/2014/main" id="{95BE69CE-2147-11A2-8D2B-A81E84A9DE6F}"/>
+              </a:ext>
+            </a:extLst>
+          </p:cNvPr>
+          <p:cNvSpPr txBox="1"/>
+          <p:nvPr/>
+        </p:nvSpPr>
+        <p:spPr>
+          <a:xfrm>
+            <a:off x="4243248" y="4631305"/>
+            <a:ext cx="1556053" cy="307777"/>
+          </a:xfrm>
+          <a:prstGeom prst="rect">
+            <a:avLst/>
+          </a:prstGeom>
+          <a:noFill/>
+        </p:spPr>
+        <p:txBody>
+          <a:bodyPr wrap="square" rtlCol="0">
+            <a:spAutoFit/>
+          </a:bodyPr>
+          <a:lstStyle/>
+          <a:p>
+            <a:r>
+              <a:rPr lang="bg-BG" dirty="0">
+                <a:solidFill>
+                  <a:schemeClr val="bg1"/>
+                </a:solidFill>
+              </a:rPr>
+              <a:t>Филип-</a:t>
+            </a:r>
+            <a:r>
+              <a:rPr lang="bg-BG" dirty="0" err="1">
+                <a:solidFill>
+                  <a:schemeClr val="bg1"/>
+                </a:solidFill>
+              </a:rPr>
+              <a:t>бакенд</a:t>
+            </a:r>
+            <a:endParaRPr lang="bg-BG" dirty="0">
+              <a:solidFill>
+                <a:schemeClr val="bg1"/>
+              </a:solidFill>
+            </a:endParaRPr>
+          </a:p>
+        </p:txBody>
+      </p:sp>
+      <p:sp>
+        <p:nvSpPr>
+          <p:cNvPr id="21" name="Текстово поле 20">
+            <a:extLst>
+              <a:ext uri="{FF2B5EF4-FFF2-40B4-BE49-F238E27FC236}">
+                <a16:creationId xmlns:a16="http://schemas.microsoft.com/office/drawing/2014/main" id="{B612DEA5-EC9E-7360-F913-1CA6A285F97E}"/>
+              </a:ext>
+            </a:extLst>
+          </p:cNvPr>
+          <p:cNvSpPr txBox="1"/>
+          <p:nvPr/>
+        </p:nvSpPr>
+        <p:spPr>
+          <a:xfrm>
+            <a:off x="5178539" y="2816879"/>
+            <a:ext cx="1556053" cy="307777"/>
+          </a:xfrm>
+          <a:prstGeom prst="rect">
+            <a:avLst/>
+          </a:prstGeom>
+          <a:noFill/>
+        </p:spPr>
+        <p:txBody>
+          <a:bodyPr wrap="square" rtlCol="0">
+            <a:spAutoFit/>
+          </a:bodyPr>
+          <a:lstStyle/>
+          <a:p>
+            <a:r>
+              <a:rPr lang="bg-BG" dirty="0">
+                <a:solidFill>
+                  <a:schemeClr val="bg1"/>
+                </a:solidFill>
+              </a:rPr>
+              <a:t>Никола-</a:t>
+            </a:r>
+            <a:r>
+              <a:rPr lang="bg-BG" dirty="0" err="1">
+                <a:solidFill>
+                  <a:schemeClr val="bg1"/>
+                </a:solidFill>
+              </a:rPr>
+              <a:t>бакенд</a:t>
+            </a:r>
+            <a:endParaRPr lang="bg-BG" dirty="0">
+              <a:solidFill>
+                <a:schemeClr val="bg1"/>
+              </a:solidFill>
+            </a:endParaRPr>
+          </a:p>
+        </p:txBody>
+      </p:sp>
+      <p:sp>
+        <p:nvSpPr>
+          <p:cNvPr id="22" name="Текстово поле 21">
+            <a:extLst>
+              <a:ext uri="{FF2B5EF4-FFF2-40B4-BE49-F238E27FC236}">
+                <a16:creationId xmlns:a16="http://schemas.microsoft.com/office/drawing/2014/main" id="{2A2E3F17-FB64-E18C-864F-72A238DE3C31}"/>
+              </a:ext>
+            </a:extLst>
+          </p:cNvPr>
+          <p:cNvSpPr txBox="1"/>
+          <p:nvPr/>
+        </p:nvSpPr>
+        <p:spPr>
+          <a:xfrm>
+            <a:off x="2960631" y="2816879"/>
+            <a:ext cx="1785279" cy="307777"/>
+          </a:xfrm>
+          <a:prstGeom prst="rect">
+            <a:avLst/>
+          </a:prstGeom>
+          <a:noFill/>
+        </p:spPr>
+        <p:txBody>
+          <a:bodyPr wrap="square" rtlCol="0">
+            <a:spAutoFit/>
+          </a:bodyPr>
+          <a:lstStyle/>
+          <a:p>
+            <a:r>
+              <a:rPr lang="bg-BG" dirty="0">
+                <a:solidFill>
+                  <a:schemeClr val="bg1"/>
+                </a:solidFill>
+              </a:rPr>
+              <a:t>Кристиан-</a:t>
+            </a:r>
+            <a:r>
+              <a:rPr lang="bg-BG" dirty="0" err="1">
+                <a:solidFill>
+                  <a:schemeClr val="bg1"/>
+                </a:solidFill>
+              </a:rPr>
+              <a:t>бакенд</a:t>
+            </a:r>
+            <a:endParaRPr lang="bg-BG" dirty="0">
+              <a:solidFill>
+                <a:schemeClr val="bg1"/>
+              </a:solidFill>
+            </a:endParaRPr>
+          </a:p>
+        </p:txBody>
+      </p:sp>
+      <p:sp>
+        <p:nvSpPr>
+          <p:cNvPr id="23" name="Текстово поле 22">
+            <a:extLst>
+              <a:ext uri="{FF2B5EF4-FFF2-40B4-BE49-F238E27FC236}">
+                <a16:creationId xmlns:a16="http://schemas.microsoft.com/office/drawing/2014/main" id="{F87EAFAF-C693-4D15-CEDE-2DFC07BB9E0E}"/>
+              </a:ext>
+            </a:extLst>
+          </p:cNvPr>
+          <p:cNvSpPr txBox="1"/>
+          <p:nvPr/>
+        </p:nvSpPr>
+        <p:spPr>
+          <a:xfrm>
+            <a:off x="2041399" y="4649178"/>
+            <a:ext cx="1785279" cy="307777"/>
+          </a:xfrm>
+          <a:prstGeom prst="rect">
+            <a:avLst/>
+          </a:prstGeom>
+          <a:noFill/>
+        </p:spPr>
+        <p:txBody>
+          <a:bodyPr wrap="square" rtlCol="0">
+            <a:spAutoFit/>
+          </a:bodyPr>
+          <a:lstStyle/>
+          <a:p>
+            <a:r>
+              <a:rPr lang="bg-BG" dirty="0">
+                <a:solidFill>
+                  <a:schemeClr val="bg1"/>
+                </a:solidFill>
+              </a:rPr>
+              <a:t>Виктор-</a:t>
+            </a:r>
+            <a:r>
+              <a:rPr lang="bg-BG" dirty="0" err="1">
+                <a:solidFill>
+                  <a:schemeClr val="bg1"/>
+                </a:solidFill>
+              </a:rPr>
+              <a:t>фронтенд</a:t>
+            </a:r>
+            <a:endParaRPr lang="bg-BG" dirty="0">
+              <a:solidFill>
+                <a:schemeClr val="bg1"/>
+              </a:solidFill>
+            </a:endParaRPr>
+          </a:p>
+        </p:txBody>
+      </p:sp>
+      <p:sp>
+        <p:nvSpPr>
+          <p:cNvPr id="24" name="Текстово поле 23">
+            <a:extLst>
+              <a:ext uri="{FF2B5EF4-FFF2-40B4-BE49-F238E27FC236}">
+                <a16:creationId xmlns:a16="http://schemas.microsoft.com/office/drawing/2014/main" id="{C7EAED73-D7BD-7C5A-A0CF-A01CA01F556C}"/>
+              </a:ext>
+            </a:extLst>
+          </p:cNvPr>
+          <p:cNvSpPr txBox="1"/>
+          <p:nvPr/>
+        </p:nvSpPr>
+        <p:spPr>
+          <a:xfrm>
+            <a:off x="570803" y="2791314"/>
+            <a:ext cx="1911797" cy="307777"/>
+          </a:xfrm>
+          <a:prstGeom prst="rect">
+            <a:avLst/>
+          </a:prstGeom>
+          <a:noFill/>
+        </p:spPr>
+        <p:txBody>
+          <a:bodyPr wrap="square" rtlCol="0">
+            <a:spAutoFit/>
+          </a:bodyPr>
+          <a:lstStyle/>
+          <a:p>
+            <a:r>
+              <a:rPr lang="bg-BG" dirty="0">
+                <a:solidFill>
+                  <a:schemeClr val="bg1"/>
+                </a:solidFill>
+              </a:rPr>
+              <a:t>Костадин-</a:t>
+            </a:r>
+            <a:r>
+              <a:rPr lang="bg-BG" dirty="0" err="1">
+                <a:solidFill>
+                  <a:schemeClr val="bg1"/>
+                </a:solidFill>
+              </a:rPr>
+              <a:t>фронтенд</a:t>
+            </a:r>
+            <a:endParaRPr lang="bg-BG" dirty="0">
+              <a:solidFill>
+                <a:schemeClr val="bg1"/>
+              </a:solidFill>
+            </a:endParaRPr>
+          </a:p>
+        </p:txBody>
+      </p:sp>
+      <p:pic>
+        <p:nvPicPr>
+          <p:cNvPr id="26" name="Картина 25">
+            <a:extLst>
+              <a:ext uri="{FF2B5EF4-FFF2-40B4-BE49-F238E27FC236}">
+                <a16:creationId xmlns:a16="http://schemas.microsoft.com/office/drawing/2014/main" id="{6D820356-52A2-6A82-2A07-69D970AB03EB}"/>
+              </a:ext>
+            </a:extLst>
+          </p:cNvPr>
+          <p:cNvPicPr>
+            <a:picLocks noChangeAspect="1"/>
+          </p:cNvPicPr>
+          <p:nvPr/>
+        </p:nvPicPr>
+        <p:blipFill>
+          <a:blip r:embed="rId11"/>
+          <a:stretch>
+            <a:fillRect/>
+          </a:stretch>
+        </p:blipFill>
+        <p:spPr>
+          <a:xfrm>
+            <a:off x="6668408" y="3629959"/>
+            <a:ext cx="1066604" cy="1030104"/>
+          </a:xfrm>
+          <a:prstGeom prst="rect">
+            <a:avLst/>
+          </a:prstGeom>
+          <a:ln>
+            <a:noFill/>
+          </a:ln>
+          <a:effectLst>
+            <a:softEdge rad="112500"/>
+          </a:effectLst>
+        </p:spPr>
+      </p:pic>
+      <p:sp>
+        <p:nvSpPr>
+          <p:cNvPr id="27" name="Текстово поле 26">
+            <a:extLst>
+              <a:ext uri="{FF2B5EF4-FFF2-40B4-BE49-F238E27FC236}">
+                <a16:creationId xmlns:a16="http://schemas.microsoft.com/office/drawing/2014/main" id="{DB193BCB-1E8B-0113-46E2-CB939DA81F30}"/>
+              </a:ext>
+            </a:extLst>
+          </p:cNvPr>
+          <p:cNvSpPr txBox="1"/>
+          <p:nvPr/>
+        </p:nvSpPr>
+        <p:spPr>
+          <a:xfrm>
+            <a:off x="6499249" y="4669812"/>
+            <a:ext cx="1556053" cy="307777"/>
+          </a:xfrm>
+          <a:prstGeom prst="rect">
+            <a:avLst/>
+          </a:prstGeom>
+          <a:noFill/>
+        </p:spPr>
+        <p:txBody>
+          <a:bodyPr wrap="square" rtlCol="0">
+            <a:spAutoFit/>
+          </a:bodyPr>
+          <a:lstStyle/>
+          <a:p>
+            <a:r>
+              <a:rPr lang="bg-BG" dirty="0">
+                <a:solidFill>
+                  <a:schemeClr val="bg1"/>
+                </a:solidFill>
+              </a:rPr>
+              <a:t>Георги-ментор</a:t>
+            </a:r>
+          </a:p>
+        </p:txBody>
+      </p:sp>
+    </p:spTree>
+    <p:extLst>
+      <p:ext uri="{BB962C8B-B14F-4D97-AF65-F5344CB8AC3E}">
+        <p14:creationId xmlns:p14="http://schemas.microsoft.com/office/powerpoint/2010/main" val="1147053043"/>
+      </p:ext>
+    </p:extLst>
+  </p:cSld>
+  <p:clrMapOvr>
+    <a:masterClrMapping/>
+  </p:clrMapOvr>
+  <p:transition spd="slow">
+    <p:push dir="u"/>
+  </p:transition>
+</p:sld>
+</file>
+
+<file path=ppt/slides/slide3.xml><?xml version="1.0" encoding="utf-8"?>
 <p:sld xmlns:a="http://schemas.openxmlformats.org/drawingml/2006/main" xmlns:r="http://schemas.openxmlformats.org/officeDocument/2006/relationships" xmlns:p="http://schemas.openxmlformats.org/presentationml/2006/main">
   <p:cSld>
     <p:bg>
@@ -7348,7 +8140,7 @@
         </p:nvSpPr>
         <p:spPr>
           <a:xfrm>
-            <a:off x="2596530" y="1756162"/>
+            <a:off x="2498945" y="1912917"/>
             <a:ext cx="3950937" cy="1631175"/>
           </a:xfrm>
           <a:prstGeom prst="rect">
@@ -7498,784 +8290,7 @@
 </p:sld>
 </file>
 
-<file path=ppt/slides/slide3.xml><?xml version="1.0" encoding="utf-8"?>
-<p:sld xmlns:a="http://schemas.openxmlformats.org/drawingml/2006/main" xmlns:r="http://schemas.openxmlformats.org/officeDocument/2006/relationships" xmlns:p="http://schemas.openxmlformats.org/presentationml/2006/main">
-  <p:cSld>
-    <p:bg>
-      <p:bgPr>
-        <a:solidFill>
-          <a:srgbClr val="000000"/>
-        </a:solidFill>
-        <a:effectLst/>
-      </p:bgPr>
-    </p:bg>
-    <p:spTree>
-      <p:nvGrpSpPr>
-        <p:cNvPr id="1" name="Shape 61"/>
-        <p:cNvGrpSpPr/>
-        <p:nvPr/>
-      </p:nvGrpSpPr>
-      <p:grpSpPr>
-        <a:xfrm>
-          <a:off x="0" y="0"/>
-          <a:ext cx="0" cy="0"/>
-          <a:chOff x="0" y="0"/>
-          <a:chExt cx="0" cy="0"/>
-        </a:xfrm>
-      </p:grpSpPr>
-      <p:sp>
-        <p:nvSpPr>
-          <p:cNvPr id="62" name="Google Shape;62;p5"/>
-          <p:cNvSpPr/>
-          <p:nvPr/>
-        </p:nvSpPr>
-        <p:spPr>
-          <a:xfrm>
-            <a:off x="0" y="0"/>
-            <a:ext cx="9144000" cy="5143500"/>
-          </a:xfrm>
-          <a:prstGeom prst="rect">
-            <a:avLst/>
-          </a:prstGeom>
-          <a:noFill/>
-          <a:ln>
-            <a:noFill/>
-          </a:ln>
-        </p:spPr>
-        <p:txBody>
-          <a:bodyPr spcFirstLastPara="1" wrap="square" lIns="91425" tIns="45700" rIns="91425" bIns="45700" anchor="t" anchorCtr="0">
-            <a:noAutofit/>
-          </a:bodyPr>
-          <a:lstStyle/>
-          <a:p>
-            <a:pPr marL="0" marR="0" lvl="0" indent="0" algn="l" rtl="0">
-              <a:spcBef>
-                <a:spcPts val="0"/>
-              </a:spcBef>
-              <a:spcAft>
-                <a:spcPts val="0"/>
-              </a:spcAft>
-              <a:buNone/>
-            </a:pPr>
-            <a:endParaRPr sz="1800">
-              <a:solidFill>
-                <a:schemeClr val="dk1"/>
-              </a:solidFill>
-              <a:latin typeface="Calibri"/>
-              <a:ea typeface="Calibri"/>
-              <a:cs typeface="Calibri"/>
-              <a:sym typeface="Calibri"/>
-            </a:endParaRPr>
-          </a:p>
-        </p:txBody>
-      </p:sp>
-      <p:pic>
-        <p:nvPicPr>
-          <p:cNvPr id="63" name="Google Shape;63;p5" descr="preencoded.png"/>
-          <p:cNvPicPr preferRelativeResize="0"/>
-          <p:nvPr/>
-        </p:nvPicPr>
-        <p:blipFill rotWithShape="1">
-          <a:blip r:embed="rId3">
-            <a:alphaModFix/>
-          </a:blip>
-          <a:srcRect/>
-          <a:stretch/>
-        </p:blipFill>
-        <p:spPr>
-          <a:xfrm>
-            <a:off x="0" y="0"/>
-            <a:ext cx="9144000" cy="5143500"/>
-          </a:xfrm>
-          <a:prstGeom prst="rect">
-            <a:avLst/>
-          </a:prstGeom>
-          <a:noFill/>
-          <a:ln>
-            <a:noFill/>
-          </a:ln>
-        </p:spPr>
-      </p:pic>
-      <p:sp>
-        <p:nvSpPr>
-          <p:cNvPr id="64" name="Google Shape;64;p5"/>
-          <p:cNvSpPr/>
-          <p:nvPr/>
-        </p:nvSpPr>
-        <p:spPr>
-          <a:xfrm>
-            <a:off x="640556" y="502116"/>
-            <a:ext cx="7862888" cy="428625"/>
-          </a:xfrm>
-          <a:prstGeom prst="rect">
-            <a:avLst/>
-          </a:prstGeom>
-          <a:noFill/>
-          <a:ln>
-            <a:noFill/>
-          </a:ln>
-        </p:spPr>
-        <p:txBody>
-          <a:bodyPr spcFirstLastPara="1" wrap="square" lIns="91425" tIns="45700" rIns="91425" bIns="45700" anchor="ctr" anchorCtr="0">
-            <a:noAutofit/>
-          </a:bodyPr>
-          <a:lstStyle/>
-          <a:p>
-            <a:pPr marL="0" marR="0" lvl="0" indent="0" algn="ctr" rtl="0">
-              <a:lnSpc>
-                <a:spcPct val="75000"/>
-              </a:lnSpc>
-              <a:spcBef>
-                <a:spcPts val="0"/>
-              </a:spcBef>
-              <a:spcAft>
-                <a:spcPts val="0"/>
-              </a:spcAft>
-              <a:buClr>
-                <a:srgbClr val="FFFFFF"/>
-              </a:buClr>
-              <a:buSzPts val="4500"/>
-              <a:buFont typeface="PT Mono"/>
-              <a:buNone/>
-            </a:pPr>
-            <a:r>
-              <a:rPr lang="en-US" sz="4000" dirty="0" err="1">
-                <a:solidFill>
-                  <a:srgbClr val="FFFFFF"/>
-                </a:solidFill>
-                <a:latin typeface="PT Mono"/>
-                <a:ea typeface="PT Mono"/>
-                <a:cs typeface="PT Mono"/>
-                <a:sym typeface="PT Mono"/>
-              </a:rPr>
-              <a:t>Как</a:t>
-            </a:r>
-            <a:r>
-              <a:rPr lang="en-US" sz="4000" dirty="0">
-                <a:solidFill>
-                  <a:srgbClr val="FFFFFF"/>
-                </a:solidFill>
-                <a:latin typeface="PT Mono"/>
-                <a:ea typeface="PT Mono"/>
-                <a:cs typeface="PT Mono"/>
-                <a:sym typeface="PT Mono"/>
-              </a:rPr>
-              <a:t> </a:t>
-            </a:r>
-            <a:r>
-              <a:rPr lang="en-US" sz="4000" dirty="0" err="1">
-                <a:solidFill>
-                  <a:srgbClr val="FFFFFF"/>
-                </a:solidFill>
-                <a:latin typeface="PT Mono"/>
-                <a:ea typeface="PT Mono"/>
-                <a:cs typeface="PT Mono"/>
-                <a:sym typeface="PT Mono"/>
-              </a:rPr>
-              <a:t>работи</a:t>
-            </a:r>
-            <a:r>
-              <a:rPr lang="en-US" sz="4000" dirty="0">
-                <a:solidFill>
-                  <a:srgbClr val="FFFFFF"/>
-                </a:solidFill>
-                <a:latin typeface="PT Mono"/>
-                <a:ea typeface="PT Mono"/>
-                <a:cs typeface="PT Mono"/>
-                <a:sym typeface="PT Mono"/>
-              </a:rPr>
-              <a:t> </a:t>
-            </a:r>
-            <a:r>
-              <a:rPr lang="en-US" sz="4000" dirty="0" err="1">
-                <a:solidFill>
-                  <a:srgbClr val="FFFFFF"/>
-                </a:solidFill>
-                <a:latin typeface="PT Mono"/>
-                <a:ea typeface="PT Mono"/>
-                <a:cs typeface="PT Mono"/>
-                <a:sym typeface="PT Mono"/>
-              </a:rPr>
-              <a:t>проектът</a:t>
-            </a:r>
-            <a:endParaRPr sz="4500" dirty="0">
-              <a:solidFill>
-                <a:schemeClr val="dk1"/>
-              </a:solidFill>
-              <a:latin typeface="Calibri"/>
-              <a:ea typeface="Calibri"/>
-              <a:cs typeface="Calibri"/>
-              <a:sym typeface="Calibri"/>
-            </a:endParaRPr>
-          </a:p>
-        </p:txBody>
-      </p:sp>
-      <p:pic>
-        <p:nvPicPr>
-          <p:cNvPr id="65" name="Google Shape;65;p5" descr="A green circle with a black background&#10;&#10;Description automatically generated"/>
-          <p:cNvPicPr preferRelativeResize="0"/>
-          <p:nvPr/>
-        </p:nvPicPr>
-        <p:blipFill rotWithShape="1">
-          <a:blip r:embed="rId4">
-            <a:alphaModFix/>
-          </a:blip>
-          <a:srcRect/>
-          <a:stretch/>
-        </p:blipFill>
-        <p:spPr>
-          <a:xfrm>
-            <a:off x="-2656057" y="2840477"/>
-            <a:ext cx="5143500" cy="5143500"/>
-          </a:xfrm>
-          <a:prstGeom prst="rect">
-            <a:avLst/>
-          </a:prstGeom>
-          <a:noFill/>
-          <a:ln>
-            <a:noFill/>
-          </a:ln>
-        </p:spPr>
-      </p:pic>
-      <p:pic>
-        <p:nvPicPr>
-          <p:cNvPr id="66" name="Google Shape;66;p5" descr="A circular logo with a black background&#10;&#10;Description automatically generated"/>
-          <p:cNvPicPr preferRelativeResize="0"/>
-          <p:nvPr/>
-        </p:nvPicPr>
-        <p:blipFill rotWithShape="1">
-          <a:blip r:embed="rId5">
-            <a:alphaModFix/>
-          </a:blip>
-          <a:srcRect/>
-          <a:stretch/>
-        </p:blipFill>
-        <p:spPr>
-          <a:xfrm>
-            <a:off x="7669531" y="107385"/>
-            <a:ext cx="5143500" cy="5143500"/>
-          </a:xfrm>
-          <a:prstGeom prst="rect">
-            <a:avLst/>
-          </a:prstGeom>
-          <a:noFill/>
-          <a:ln>
-            <a:noFill/>
-          </a:ln>
-        </p:spPr>
-      </p:pic>
-      <p:sp>
-        <p:nvSpPr>
-          <p:cNvPr id="2" name="TextBox 1"/>
-          <p:cNvSpPr txBox="1"/>
-          <p:nvPr/>
-        </p:nvSpPr>
-        <p:spPr>
-          <a:xfrm>
-            <a:off x="1924493" y="1861482"/>
-            <a:ext cx="5295014" cy="1015663"/>
-          </a:xfrm>
-          <a:prstGeom prst="rect">
-            <a:avLst/>
-          </a:prstGeom>
-          <a:noFill/>
-        </p:spPr>
-        <p:txBody>
-          <a:bodyPr wrap="square" rtlCol="0">
-            <a:spAutoFit/>
-          </a:bodyPr>
-          <a:lstStyle/>
-          <a:p>
-            <a:pPr algn="ctr"/>
-            <a:r>
-              <a:rPr lang="ru-RU" sz="2000" dirty="0" err="1">
-                <a:solidFill>
-                  <a:schemeClr val="bg1"/>
-                </a:solidFill>
-              </a:rPr>
-              <a:t>Качване</a:t>
-            </a:r>
-            <a:r>
-              <a:rPr lang="ru-RU" sz="2000" dirty="0">
-                <a:solidFill>
-                  <a:schemeClr val="bg1"/>
-                </a:solidFill>
-              </a:rPr>
-              <a:t> на </a:t>
-            </a:r>
-            <a:r>
-              <a:rPr lang="ru-RU" sz="2000" dirty="0" err="1">
-                <a:solidFill>
-                  <a:schemeClr val="bg1"/>
-                </a:solidFill>
-              </a:rPr>
-              <a:t>обяви</a:t>
-            </a:r>
-            <a:r>
-              <a:rPr lang="ru-RU" sz="2000" dirty="0">
-                <a:solidFill>
-                  <a:schemeClr val="bg1"/>
-                </a:solidFill>
-              </a:rPr>
-              <a:t> с цени, </a:t>
-            </a:r>
-            <a:r>
-              <a:rPr lang="ru-RU" sz="2000" dirty="0" err="1">
-                <a:solidFill>
-                  <a:schemeClr val="bg1"/>
-                </a:solidFill>
-              </a:rPr>
-              <a:t>продукти</a:t>
-            </a:r>
-            <a:r>
-              <a:rPr lang="ru-RU" sz="2000" dirty="0">
-                <a:solidFill>
-                  <a:schemeClr val="bg1"/>
-                </a:solidFill>
-              </a:rPr>
-              <a:t> и локации, </a:t>
-            </a:r>
-            <a:r>
-              <a:rPr lang="ru-RU" sz="2000" dirty="0" err="1">
-                <a:solidFill>
-                  <a:schemeClr val="bg1"/>
-                </a:solidFill>
-              </a:rPr>
-              <a:t>както</a:t>
-            </a:r>
-            <a:r>
-              <a:rPr lang="ru-RU" sz="2000" dirty="0">
-                <a:solidFill>
-                  <a:schemeClr val="bg1"/>
-                </a:solidFill>
-              </a:rPr>
-              <a:t> и </a:t>
-            </a:r>
-            <a:r>
-              <a:rPr lang="ru-RU" sz="2000" dirty="0" err="1">
-                <a:solidFill>
-                  <a:schemeClr val="bg1"/>
-                </a:solidFill>
-              </a:rPr>
-              <a:t>търсене</a:t>
-            </a:r>
-            <a:r>
-              <a:rPr lang="ru-RU" sz="2000" dirty="0">
-                <a:solidFill>
-                  <a:schemeClr val="bg1"/>
-                </a:solidFill>
-              </a:rPr>
-              <a:t> с </a:t>
-            </a:r>
-            <a:r>
-              <a:rPr lang="ru-RU" sz="2000" dirty="0" err="1">
-                <a:solidFill>
-                  <a:schemeClr val="bg1"/>
-                </a:solidFill>
-              </a:rPr>
-              <a:t>филтри</a:t>
-            </a:r>
-            <a:r>
-              <a:rPr lang="ru-RU" sz="2000" dirty="0">
-                <a:solidFill>
-                  <a:schemeClr val="bg1"/>
-                </a:solidFill>
-              </a:rPr>
-              <a:t> за вид продукт, цена и локация.</a:t>
-            </a:r>
-            <a:endParaRPr lang="en-US" sz="2000" dirty="0">
-              <a:solidFill>
-                <a:schemeClr val="bg1"/>
-              </a:solidFill>
-            </a:endParaRPr>
-          </a:p>
-        </p:txBody>
-      </p:sp>
-    </p:spTree>
-  </p:cSld>
-  <p:clrMapOvr>
-    <a:masterClrMapping/>
-  </p:clrMapOvr>
-  <p:transition spd="slow">
-    <p:push dir="u"/>
-  </p:transition>
-</p:sld>
-</file>
-
 <file path=ppt/slides/slide4.xml><?xml version="1.0" encoding="utf-8"?>
-<p:sld xmlns:a="http://schemas.openxmlformats.org/drawingml/2006/main" xmlns:r="http://schemas.openxmlformats.org/officeDocument/2006/relationships" xmlns:p="http://schemas.openxmlformats.org/presentationml/2006/main">
-  <p:cSld>
-    <p:bg>
-      <p:bgPr>
-        <a:solidFill>
-          <a:srgbClr val="000000"/>
-        </a:solidFill>
-        <a:effectLst/>
-      </p:bgPr>
-    </p:bg>
-    <p:spTree>
-      <p:nvGrpSpPr>
-        <p:cNvPr id="1" name="Shape 83"/>
-        <p:cNvGrpSpPr/>
-        <p:nvPr/>
-      </p:nvGrpSpPr>
-      <p:grpSpPr>
-        <a:xfrm>
-          <a:off x="0" y="0"/>
-          <a:ext cx="0" cy="0"/>
-          <a:chOff x="0" y="0"/>
-          <a:chExt cx="0" cy="0"/>
-        </a:xfrm>
-      </p:grpSpPr>
-      <p:pic>
-        <p:nvPicPr>
-          <p:cNvPr id="84" name="Google Shape;84;p7" descr="A black circle with yellow lines&#10;&#10;Description automatically generated"/>
-          <p:cNvPicPr preferRelativeResize="0"/>
-          <p:nvPr/>
-        </p:nvPicPr>
-        <p:blipFill rotWithShape="1">
-          <a:blip r:embed="rId3">
-            <a:alphaModFix/>
-          </a:blip>
-          <a:srcRect/>
-          <a:stretch/>
-        </p:blipFill>
-        <p:spPr>
-          <a:xfrm>
-            <a:off x="-3428486" y="2496639"/>
-            <a:ext cx="6686550" cy="6686550"/>
-          </a:xfrm>
-          <a:prstGeom prst="rect">
-            <a:avLst/>
-          </a:prstGeom>
-          <a:noFill/>
-          <a:ln>
-            <a:noFill/>
-          </a:ln>
-        </p:spPr>
-      </p:pic>
-      <p:pic>
-        <p:nvPicPr>
-          <p:cNvPr id="85" name="Google Shape;85;p7" descr="A screen shot of a clock&#10;&#10;Description automatically generated"/>
-          <p:cNvPicPr preferRelativeResize="0"/>
-          <p:nvPr/>
-        </p:nvPicPr>
-        <p:blipFill rotWithShape="1">
-          <a:blip r:embed="rId4">
-            <a:alphaModFix/>
-          </a:blip>
-          <a:srcRect/>
-          <a:stretch/>
-        </p:blipFill>
-        <p:spPr>
-          <a:xfrm>
-            <a:off x="6271607" y="-329453"/>
-            <a:ext cx="4133896" cy="6501324"/>
-          </a:xfrm>
-          <a:prstGeom prst="rect">
-            <a:avLst/>
-          </a:prstGeom>
-          <a:noFill/>
-          <a:ln>
-            <a:noFill/>
-          </a:ln>
-        </p:spPr>
-      </p:pic>
-      <p:sp>
-        <p:nvSpPr>
-          <p:cNvPr id="86" name="Google Shape;86;p7"/>
-          <p:cNvSpPr/>
-          <p:nvPr/>
-        </p:nvSpPr>
-        <p:spPr>
-          <a:xfrm>
-            <a:off x="0" y="0"/>
-            <a:ext cx="9144000" cy="5143500"/>
-          </a:xfrm>
-          <a:prstGeom prst="rect">
-            <a:avLst/>
-          </a:prstGeom>
-          <a:noFill/>
-          <a:ln>
-            <a:noFill/>
-          </a:ln>
-        </p:spPr>
-        <p:txBody>
-          <a:bodyPr spcFirstLastPara="1" wrap="square" lIns="91425" tIns="45700" rIns="91425" bIns="45700" anchor="t" anchorCtr="0">
-            <a:noAutofit/>
-          </a:bodyPr>
-          <a:lstStyle/>
-          <a:p>
-            <a:pPr marL="0" marR="0" lvl="0" indent="0" algn="l" rtl="0">
-              <a:spcBef>
-                <a:spcPts val="0"/>
-              </a:spcBef>
-              <a:spcAft>
-                <a:spcPts val="0"/>
-              </a:spcAft>
-              <a:buNone/>
-            </a:pPr>
-            <a:endParaRPr sz="1800">
-              <a:solidFill>
-                <a:schemeClr val="dk1"/>
-              </a:solidFill>
-              <a:latin typeface="Calibri"/>
-              <a:ea typeface="Calibri"/>
-              <a:cs typeface="Calibri"/>
-              <a:sym typeface="Calibri"/>
-            </a:endParaRPr>
-          </a:p>
-        </p:txBody>
-      </p:sp>
-      <p:pic>
-        <p:nvPicPr>
-          <p:cNvPr id="87" name="Google Shape;87;p7" descr="preencoded.png"/>
-          <p:cNvPicPr preferRelativeResize="0"/>
-          <p:nvPr/>
-        </p:nvPicPr>
-        <p:blipFill rotWithShape="1">
-          <a:blip r:embed="rId5">
-            <a:alphaModFix/>
-          </a:blip>
-          <a:srcRect/>
-          <a:stretch/>
-        </p:blipFill>
-        <p:spPr>
-          <a:xfrm>
-            <a:off x="0" y="0"/>
-            <a:ext cx="9144000" cy="5143500"/>
-          </a:xfrm>
-          <a:prstGeom prst="rect">
-            <a:avLst/>
-          </a:prstGeom>
-          <a:noFill/>
-          <a:ln>
-            <a:noFill/>
-          </a:ln>
-        </p:spPr>
-      </p:pic>
-      <p:sp>
-        <p:nvSpPr>
-          <p:cNvPr id="88" name="Google Shape;88;p7"/>
-          <p:cNvSpPr/>
-          <p:nvPr/>
-        </p:nvSpPr>
-        <p:spPr>
-          <a:xfrm>
-            <a:off x="594836" y="540068"/>
-            <a:ext cx="7862888" cy="428625"/>
-          </a:xfrm>
-          <a:prstGeom prst="rect">
-            <a:avLst/>
-          </a:prstGeom>
-          <a:noFill/>
-          <a:ln>
-            <a:noFill/>
-          </a:ln>
-        </p:spPr>
-        <p:txBody>
-          <a:bodyPr spcFirstLastPara="1" wrap="square" lIns="91425" tIns="45700" rIns="91425" bIns="45700" anchor="ctr" anchorCtr="0">
-            <a:noAutofit/>
-          </a:bodyPr>
-          <a:lstStyle/>
-          <a:p>
-            <a:pPr marL="0" marR="0" lvl="0" indent="0" algn="ctr" rtl="0">
-              <a:lnSpc>
-                <a:spcPct val="75000"/>
-              </a:lnSpc>
-              <a:spcBef>
-                <a:spcPts val="0"/>
-              </a:spcBef>
-              <a:spcAft>
-                <a:spcPts val="0"/>
-              </a:spcAft>
-              <a:buClr>
-                <a:srgbClr val="FFFFFF"/>
-              </a:buClr>
-              <a:buSzPts val="4500"/>
-              <a:buFont typeface="PT Mono"/>
-              <a:buNone/>
-            </a:pPr>
-            <a:r>
-              <a:rPr lang="en-US" sz="4000" dirty="0" err="1">
-                <a:solidFill>
-                  <a:srgbClr val="FFFFFF"/>
-                </a:solidFill>
-                <a:latin typeface="PT Mono"/>
-                <a:ea typeface="PT Mono"/>
-                <a:cs typeface="PT Mono"/>
-                <a:sym typeface="PT Mono"/>
-              </a:rPr>
-              <a:t>Използвани</a:t>
-            </a:r>
-            <a:r>
-              <a:rPr lang="en-US" sz="4000" dirty="0">
-                <a:solidFill>
-                  <a:srgbClr val="FFFFFF"/>
-                </a:solidFill>
-                <a:latin typeface="PT Mono"/>
-                <a:ea typeface="PT Mono"/>
-                <a:cs typeface="PT Mono"/>
-                <a:sym typeface="PT Mono"/>
-              </a:rPr>
-              <a:t> </a:t>
-            </a:r>
-            <a:r>
-              <a:rPr lang="en-US" sz="4000" dirty="0" err="1">
-                <a:solidFill>
-                  <a:srgbClr val="FFFFFF"/>
-                </a:solidFill>
-                <a:latin typeface="PT Mono"/>
-                <a:ea typeface="PT Mono"/>
-                <a:cs typeface="PT Mono"/>
-                <a:sym typeface="PT Mono"/>
-              </a:rPr>
-              <a:t>технологии</a:t>
-            </a:r>
-            <a:endParaRPr sz="4000" dirty="0">
-              <a:solidFill>
-                <a:schemeClr val="dk1"/>
-              </a:solidFill>
-              <a:latin typeface="Calibri"/>
-              <a:ea typeface="Calibri"/>
-              <a:cs typeface="Calibri"/>
-              <a:sym typeface="Calibri"/>
-            </a:endParaRPr>
-          </a:p>
-        </p:txBody>
-      </p:sp>
-      <p:sp>
-        <p:nvSpPr>
-          <p:cNvPr id="2" name="TextBox 1"/>
-          <p:cNvSpPr txBox="1"/>
-          <p:nvPr/>
-        </p:nvSpPr>
-        <p:spPr>
-          <a:xfrm>
-            <a:off x="2640212" y="2169907"/>
-            <a:ext cx="6368903" cy="1631216"/>
-          </a:xfrm>
-          <a:prstGeom prst="rect">
-            <a:avLst/>
-          </a:prstGeom>
-          <a:noFill/>
-        </p:spPr>
-        <p:txBody>
-          <a:bodyPr wrap="square" rtlCol="0">
-            <a:spAutoFit/>
-          </a:bodyPr>
-          <a:lstStyle/>
-          <a:p>
-            <a:r>
-              <a:rPr lang="en-US" sz="2000" dirty="0">
-                <a:solidFill>
-                  <a:schemeClr val="bg1"/>
-                </a:solidFill>
-              </a:rPr>
-              <a:t>Backend – Python</a:t>
-            </a:r>
-            <a:r>
-              <a:rPr lang="bg-BG" sz="2000" dirty="0">
-                <a:solidFill>
-                  <a:schemeClr val="bg1"/>
-                </a:solidFill>
-              </a:rPr>
-              <a:t> и</a:t>
-            </a:r>
-            <a:r>
-              <a:rPr lang="en-US" sz="2000" dirty="0">
-                <a:solidFill>
-                  <a:schemeClr val="bg1"/>
-                </a:solidFill>
-              </a:rPr>
-              <a:t> Flask;</a:t>
-            </a:r>
-          </a:p>
-          <a:p>
-            <a:endParaRPr lang="en-US" sz="2000" dirty="0">
-              <a:solidFill>
-                <a:schemeClr val="bg1"/>
-              </a:solidFill>
-            </a:endParaRPr>
-          </a:p>
-          <a:p>
-            <a:r>
-              <a:rPr lang="en-US" sz="2000" dirty="0">
-                <a:solidFill>
-                  <a:schemeClr val="bg1"/>
-                </a:solidFill>
-              </a:rPr>
-              <a:t>Database – MongoDB</a:t>
-            </a:r>
-            <a:r>
-              <a:rPr lang="en-GB" sz="2000" dirty="0">
-                <a:solidFill>
-                  <a:schemeClr val="bg1"/>
-                </a:solidFill>
-              </a:rPr>
-              <a:t>;</a:t>
-            </a:r>
-            <a:endParaRPr lang="en-US" sz="2000" dirty="0">
-              <a:solidFill>
-                <a:schemeClr val="bg1"/>
-              </a:solidFill>
-            </a:endParaRPr>
-          </a:p>
-          <a:p>
-            <a:endParaRPr lang="en-US" sz="2000" dirty="0">
-              <a:solidFill>
-                <a:schemeClr val="bg1"/>
-              </a:solidFill>
-            </a:endParaRPr>
-          </a:p>
-          <a:p>
-            <a:r>
-              <a:rPr lang="en-GB" sz="2000" dirty="0">
-                <a:solidFill>
-                  <a:schemeClr val="bg1"/>
-                </a:solidFill>
-              </a:rPr>
-              <a:t>Frontend - </a:t>
-            </a:r>
-            <a:r>
-              <a:rPr lang="en-US" sz="2000" dirty="0">
-                <a:solidFill>
-                  <a:schemeClr val="bg1"/>
-                </a:solidFill>
-              </a:rPr>
-              <a:t>Vue.js </a:t>
-            </a:r>
-            <a:r>
-              <a:rPr lang="bg-BG" sz="2000" dirty="0">
-                <a:solidFill>
-                  <a:schemeClr val="bg1"/>
-                </a:solidFill>
-              </a:rPr>
-              <a:t>и </a:t>
-            </a:r>
-            <a:r>
-              <a:rPr lang="en-US" sz="2000" dirty="0">
-                <a:solidFill>
-                  <a:schemeClr val="bg1"/>
-                </a:solidFill>
-              </a:rPr>
-              <a:t>Tailwind CSS;</a:t>
-            </a:r>
-          </a:p>
-        </p:txBody>
-      </p:sp>
-    </p:spTree>
-  </p:cSld>
-  <p:clrMapOvr>
-    <a:masterClrMapping/>
-  </p:clrMapOvr>
-  <p:transition spd="slow">
-    <p:push dir="u"/>
-  </p:transition>
-</p:sld>
-</file>
-
-<file path=ppt/slides/slide5.xml><?xml version="1.0" encoding="utf-8"?>
 <p:sld xmlns:a="http://schemas.openxmlformats.org/drawingml/2006/main" xmlns:r="http://schemas.openxmlformats.org/officeDocument/2006/relationships" xmlns:p="http://schemas.openxmlformats.org/presentationml/2006/main">
   <p:cSld>
     <p:bg>
@@ -8765,7 +8780,1038 @@
 </p:sld>
 </file>
 
+<file path=ppt/slides/slide5.xml><?xml version="1.0" encoding="utf-8"?>
+<p:sld xmlns:a="http://schemas.openxmlformats.org/drawingml/2006/main" xmlns:r="http://schemas.openxmlformats.org/officeDocument/2006/relationships" xmlns:p="http://schemas.openxmlformats.org/presentationml/2006/main">
+  <p:cSld>
+    <p:bg>
+      <p:bgPr>
+        <a:solidFill>
+          <a:srgbClr val="000000"/>
+        </a:solidFill>
+        <a:effectLst/>
+      </p:bgPr>
+    </p:bg>
+    <p:spTree>
+      <p:nvGrpSpPr>
+        <p:cNvPr id="1" name="Shape 61"/>
+        <p:cNvGrpSpPr/>
+        <p:nvPr/>
+      </p:nvGrpSpPr>
+      <p:grpSpPr>
+        <a:xfrm>
+          <a:off x="0" y="0"/>
+          <a:ext cx="0" cy="0"/>
+          <a:chOff x="0" y="0"/>
+          <a:chExt cx="0" cy="0"/>
+        </a:xfrm>
+      </p:grpSpPr>
+      <p:sp>
+        <p:nvSpPr>
+          <p:cNvPr id="62" name="Google Shape;62;p5"/>
+          <p:cNvSpPr/>
+          <p:nvPr/>
+        </p:nvSpPr>
+        <p:spPr>
+          <a:xfrm>
+            <a:off x="0" y="0"/>
+            <a:ext cx="9144000" cy="5143500"/>
+          </a:xfrm>
+          <a:prstGeom prst="rect">
+            <a:avLst/>
+          </a:prstGeom>
+          <a:noFill/>
+          <a:ln>
+            <a:noFill/>
+          </a:ln>
+        </p:spPr>
+        <p:txBody>
+          <a:bodyPr spcFirstLastPara="1" wrap="square" lIns="91425" tIns="45700" rIns="91425" bIns="45700" anchor="t" anchorCtr="0">
+            <a:noAutofit/>
+          </a:bodyPr>
+          <a:lstStyle/>
+          <a:p>
+            <a:pPr marL="0" marR="0" lvl="0" indent="0" algn="l" rtl="0">
+              <a:spcBef>
+                <a:spcPts val="0"/>
+              </a:spcBef>
+              <a:spcAft>
+                <a:spcPts val="0"/>
+              </a:spcAft>
+              <a:buNone/>
+            </a:pPr>
+            <a:endParaRPr sz="1800">
+              <a:solidFill>
+                <a:schemeClr val="dk1"/>
+              </a:solidFill>
+              <a:latin typeface="Calibri"/>
+              <a:ea typeface="Calibri"/>
+              <a:cs typeface="Calibri"/>
+              <a:sym typeface="Calibri"/>
+            </a:endParaRPr>
+          </a:p>
+        </p:txBody>
+      </p:sp>
+      <p:pic>
+        <p:nvPicPr>
+          <p:cNvPr id="63" name="Google Shape;63;p5" descr="preencoded.png"/>
+          <p:cNvPicPr preferRelativeResize="0"/>
+          <p:nvPr/>
+        </p:nvPicPr>
+        <p:blipFill rotWithShape="1">
+          <a:blip r:embed="rId3">
+            <a:alphaModFix/>
+          </a:blip>
+          <a:srcRect/>
+          <a:stretch/>
+        </p:blipFill>
+        <p:spPr>
+          <a:xfrm>
+            <a:off x="0" y="0"/>
+            <a:ext cx="9144000" cy="5143500"/>
+          </a:xfrm>
+          <a:prstGeom prst="rect">
+            <a:avLst/>
+          </a:prstGeom>
+          <a:noFill/>
+          <a:ln>
+            <a:noFill/>
+          </a:ln>
+        </p:spPr>
+      </p:pic>
+      <p:sp>
+        <p:nvSpPr>
+          <p:cNvPr id="64" name="Google Shape;64;p5"/>
+          <p:cNvSpPr/>
+          <p:nvPr/>
+        </p:nvSpPr>
+        <p:spPr>
+          <a:xfrm>
+            <a:off x="640556" y="502116"/>
+            <a:ext cx="7862888" cy="428625"/>
+          </a:xfrm>
+          <a:prstGeom prst="rect">
+            <a:avLst/>
+          </a:prstGeom>
+          <a:noFill/>
+          <a:ln>
+            <a:noFill/>
+          </a:ln>
+        </p:spPr>
+        <p:txBody>
+          <a:bodyPr spcFirstLastPara="1" wrap="square" lIns="91425" tIns="45700" rIns="91425" bIns="45700" anchor="ctr" anchorCtr="0">
+            <a:noAutofit/>
+          </a:bodyPr>
+          <a:lstStyle/>
+          <a:p>
+            <a:pPr marL="0" marR="0" lvl="0" indent="0" algn="ctr" rtl="0">
+              <a:lnSpc>
+                <a:spcPct val="75000"/>
+              </a:lnSpc>
+              <a:spcBef>
+                <a:spcPts val="0"/>
+              </a:spcBef>
+              <a:spcAft>
+                <a:spcPts val="0"/>
+              </a:spcAft>
+              <a:buClr>
+                <a:srgbClr val="FFFFFF"/>
+              </a:buClr>
+              <a:buSzPts val="4500"/>
+              <a:buFont typeface="PT Mono"/>
+              <a:buNone/>
+            </a:pPr>
+            <a:r>
+              <a:rPr lang="en-US" sz="4000" dirty="0" err="1">
+                <a:solidFill>
+                  <a:srgbClr val="FFFFFF"/>
+                </a:solidFill>
+                <a:latin typeface="PT Mono"/>
+                <a:ea typeface="PT Mono"/>
+                <a:cs typeface="PT Mono"/>
+                <a:sym typeface="PT Mono"/>
+              </a:rPr>
+              <a:t>Как</a:t>
+            </a:r>
+            <a:r>
+              <a:rPr lang="en-US" sz="4000" dirty="0">
+                <a:solidFill>
+                  <a:srgbClr val="FFFFFF"/>
+                </a:solidFill>
+                <a:latin typeface="PT Mono"/>
+                <a:ea typeface="PT Mono"/>
+                <a:cs typeface="PT Mono"/>
+                <a:sym typeface="PT Mono"/>
+              </a:rPr>
+              <a:t> </a:t>
+            </a:r>
+            <a:r>
+              <a:rPr lang="en-US" sz="4000" dirty="0" err="1">
+                <a:solidFill>
+                  <a:srgbClr val="FFFFFF"/>
+                </a:solidFill>
+                <a:latin typeface="PT Mono"/>
+                <a:ea typeface="PT Mono"/>
+                <a:cs typeface="PT Mono"/>
+                <a:sym typeface="PT Mono"/>
+              </a:rPr>
+              <a:t>работи</a:t>
+            </a:r>
+            <a:r>
+              <a:rPr lang="en-US" sz="4000" dirty="0">
+                <a:solidFill>
+                  <a:srgbClr val="FFFFFF"/>
+                </a:solidFill>
+                <a:latin typeface="PT Mono"/>
+                <a:ea typeface="PT Mono"/>
+                <a:cs typeface="PT Mono"/>
+                <a:sym typeface="PT Mono"/>
+              </a:rPr>
+              <a:t> </a:t>
+            </a:r>
+            <a:r>
+              <a:rPr lang="en-US" sz="4000" dirty="0" err="1">
+                <a:solidFill>
+                  <a:srgbClr val="FFFFFF"/>
+                </a:solidFill>
+                <a:latin typeface="PT Mono"/>
+                <a:ea typeface="PT Mono"/>
+                <a:cs typeface="PT Mono"/>
+                <a:sym typeface="PT Mono"/>
+              </a:rPr>
+              <a:t>проектът</a:t>
+            </a:r>
+            <a:endParaRPr sz="4500" dirty="0">
+              <a:solidFill>
+                <a:schemeClr val="dk1"/>
+              </a:solidFill>
+              <a:latin typeface="Calibri"/>
+              <a:ea typeface="Calibri"/>
+              <a:cs typeface="Calibri"/>
+              <a:sym typeface="Calibri"/>
+            </a:endParaRPr>
+          </a:p>
+        </p:txBody>
+      </p:sp>
+      <p:pic>
+        <p:nvPicPr>
+          <p:cNvPr id="65" name="Google Shape;65;p5" descr="A green circle with a black background&#10;&#10;Description automatically generated"/>
+          <p:cNvPicPr preferRelativeResize="0"/>
+          <p:nvPr/>
+        </p:nvPicPr>
+        <p:blipFill rotWithShape="1">
+          <a:blip r:embed="rId4">
+            <a:alphaModFix/>
+          </a:blip>
+          <a:srcRect/>
+          <a:stretch/>
+        </p:blipFill>
+        <p:spPr>
+          <a:xfrm>
+            <a:off x="-2656057" y="2840477"/>
+            <a:ext cx="5143500" cy="5143500"/>
+          </a:xfrm>
+          <a:prstGeom prst="rect">
+            <a:avLst/>
+          </a:prstGeom>
+          <a:noFill/>
+          <a:ln>
+            <a:noFill/>
+          </a:ln>
+        </p:spPr>
+      </p:pic>
+      <p:pic>
+        <p:nvPicPr>
+          <p:cNvPr id="66" name="Google Shape;66;p5" descr="A circular logo with a black background&#10;&#10;Description automatically generated"/>
+          <p:cNvPicPr preferRelativeResize="0"/>
+          <p:nvPr/>
+        </p:nvPicPr>
+        <p:blipFill rotWithShape="1">
+          <a:blip r:embed="rId5">
+            <a:alphaModFix/>
+          </a:blip>
+          <a:srcRect/>
+          <a:stretch/>
+        </p:blipFill>
+        <p:spPr>
+          <a:xfrm>
+            <a:off x="7669531" y="107385"/>
+            <a:ext cx="5143500" cy="5143500"/>
+          </a:xfrm>
+          <a:prstGeom prst="rect">
+            <a:avLst/>
+          </a:prstGeom>
+          <a:noFill/>
+          <a:ln>
+            <a:noFill/>
+          </a:ln>
+        </p:spPr>
+      </p:pic>
+      <p:sp>
+        <p:nvSpPr>
+          <p:cNvPr id="2" name="TextBox 1"/>
+          <p:cNvSpPr txBox="1"/>
+          <p:nvPr/>
+        </p:nvSpPr>
+        <p:spPr>
+          <a:xfrm>
+            <a:off x="1924493" y="1861482"/>
+            <a:ext cx="5295014" cy="1015663"/>
+          </a:xfrm>
+          <a:prstGeom prst="rect">
+            <a:avLst/>
+          </a:prstGeom>
+          <a:noFill/>
+        </p:spPr>
+        <p:txBody>
+          <a:bodyPr wrap="square" rtlCol="0">
+            <a:spAutoFit/>
+          </a:bodyPr>
+          <a:lstStyle/>
+          <a:p>
+            <a:pPr algn="ctr"/>
+            <a:r>
+              <a:rPr lang="ru-RU" sz="2000" dirty="0" err="1">
+                <a:solidFill>
+                  <a:schemeClr val="bg1"/>
+                </a:solidFill>
+              </a:rPr>
+              <a:t>Качване</a:t>
+            </a:r>
+            <a:r>
+              <a:rPr lang="ru-RU" sz="2000" dirty="0">
+                <a:solidFill>
+                  <a:schemeClr val="bg1"/>
+                </a:solidFill>
+              </a:rPr>
+              <a:t> на </a:t>
+            </a:r>
+            <a:r>
+              <a:rPr lang="ru-RU" sz="2000" dirty="0" err="1">
+                <a:solidFill>
+                  <a:schemeClr val="bg1"/>
+                </a:solidFill>
+              </a:rPr>
+              <a:t>обяви</a:t>
+            </a:r>
+            <a:r>
+              <a:rPr lang="ru-RU" sz="2000" dirty="0">
+                <a:solidFill>
+                  <a:schemeClr val="bg1"/>
+                </a:solidFill>
+              </a:rPr>
+              <a:t> с цени, </a:t>
+            </a:r>
+            <a:r>
+              <a:rPr lang="ru-RU" sz="2000" dirty="0" err="1">
+                <a:solidFill>
+                  <a:schemeClr val="bg1"/>
+                </a:solidFill>
+              </a:rPr>
+              <a:t>продукти</a:t>
+            </a:r>
+            <a:r>
+              <a:rPr lang="ru-RU" sz="2000" dirty="0">
+                <a:solidFill>
+                  <a:schemeClr val="bg1"/>
+                </a:solidFill>
+              </a:rPr>
+              <a:t> и локации, </a:t>
+            </a:r>
+            <a:r>
+              <a:rPr lang="ru-RU" sz="2000" dirty="0" err="1">
+                <a:solidFill>
+                  <a:schemeClr val="bg1"/>
+                </a:solidFill>
+              </a:rPr>
+              <a:t>както</a:t>
+            </a:r>
+            <a:r>
+              <a:rPr lang="ru-RU" sz="2000" dirty="0">
+                <a:solidFill>
+                  <a:schemeClr val="bg1"/>
+                </a:solidFill>
+              </a:rPr>
+              <a:t> и </a:t>
+            </a:r>
+            <a:r>
+              <a:rPr lang="ru-RU" sz="2000" dirty="0" err="1">
+                <a:solidFill>
+                  <a:schemeClr val="bg1"/>
+                </a:solidFill>
+              </a:rPr>
+              <a:t>търсене</a:t>
+            </a:r>
+            <a:r>
+              <a:rPr lang="ru-RU" sz="2000" dirty="0">
+                <a:solidFill>
+                  <a:schemeClr val="bg1"/>
+                </a:solidFill>
+              </a:rPr>
+              <a:t> с </a:t>
+            </a:r>
+            <a:r>
+              <a:rPr lang="ru-RU" sz="2000" dirty="0" err="1">
+                <a:solidFill>
+                  <a:schemeClr val="bg1"/>
+                </a:solidFill>
+              </a:rPr>
+              <a:t>филтри</a:t>
+            </a:r>
+            <a:r>
+              <a:rPr lang="ru-RU" sz="2000" dirty="0">
+                <a:solidFill>
+                  <a:schemeClr val="bg1"/>
+                </a:solidFill>
+              </a:rPr>
+              <a:t> за вид продукт, цена и локация.</a:t>
+            </a:r>
+            <a:endParaRPr lang="en-US" sz="2000" dirty="0">
+              <a:solidFill>
+                <a:schemeClr val="bg1"/>
+              </a:solidFill>
+            </a:endParaRPr>
+          </a:p>
+        </p:txBody>
+      </p:sp>
+    </p:spTree>
+  </p:cSld>
+  <p:clrMapOvr>
+    <a:masterClrMapping/>
+  </p:clrMapOvr>
+  <p:transition spd="slow">
+    <p:push dir="u"/>
+  </p:transition>
+</p:sld>
+</file>
+
 <file path=ppt/slides/slide6.xml><?xml version="1.0" encoding="utf-8"?>
+<p:sld xmlns:a="http://schemas.openxmlformats.org/drawingml/2006/main" xmlns:r="http://schemas.openxmlformats.org/officeDocument/2006/relationships" xmlns:p="http://schemas.openxmlformats.org/presentationml/2006/main">
+  <p:cSld>
+    <p:bg>
+      <p:bgPr>
+        <a:solidFill>
+          <a:srgbClr val="000000"/>
+        </a:solidFill>
+        <a:effectLst/>
+      </p:bgPr>
+    </p:bg>
+    <p:spTree>
+      <p:nvGrpSpPr>
+        <p:cNvPr id="1" name="Shape 83"/>
+        <p:cNvGrpSpPr/>
+        <p:nvPr/>
+      </p:nvGrpSpPr>
+      <p:grpSpPr>
+        <a:xfrm>
+          <a:off x="0" y="0"/>
+          <a:ext cx="0" cy="0"/>
+          <a:chOff x="0" y="0"/>
+          <a:chExt cx="0" cy="0"/>
+        </a:xfrm>
+      </p:grpSpPr>
+      <p:pic>
+        <p:nvPicPr>
+          <p:cNvPr id="84" name="Google Shape;84;p7" descr="A black circle with yellow lines&#10;&#10;Description automatically generated"/>
+          <p:cNvPicPr preferRelativeResize="0"/>
+          <p:nvPr/>
+        </p:nvPicPr>
+        <p:blipFill rotWithShape="1">
+          <a:blip r:embed="rId3">
+            <a:alphaModFix/>
+          </a:blip>
+          <a:srcRect/>
+          <a:stretch/>
+        </p:blipFill>
+        <p:spPr>
+          <a:xfrm>
+            <a:off x="-3428486" y="2496639"/>
+            <a:ext cx="6686550" cy="6686550"/>
+          </a:xfrm>
+          <a:prstGeom prst="rect">
+            <a:avLst/>
+          </a:prstGeom>
+          <a:noFill/>
+          <a:ln>
+            <a:noFill/>
+          </a:ln>
+        </p:spPr>
+      </p:pic>
+      <p:pic>
+        <p:nvPicPr>
+          <p:cNvPr id="85" name="Google Shape;85;p7" descr="A screen shot of a clock&#10;&#10;Description automatically generated"/>
+          <p:cNvPicPr preferRelativeResize="0"/>
+          <p:nvPr/>
+        </p:nvPicPr>
+        <p:blipFill rotWithShape="1">
+          <a:blip r:embed="rId4">
+            <a:alphaModFix/>
+          </a:blip>
+          <a:srcRect/>
+          <a:stretch/>
+        </p:blipFill>
+        <p:spPr>
+          <a:xfrm>
+            <a:off x="6271607" y="-329453"/>
+            <a:ext cx="4133896" cy="6501324"/>
+          </a:xfrm>
+          <a:prstGeom prst="rect">
+            <a:avLst/>
+          </a:prstGeom>
+          <a:noFill/>
+          <a:ln>
+            <a:noFill/>
+          </a:ln>
+        </p:spPr>
+      </p:pic>
+      <p:sp>
+        <p:nvSpPr>
+          <p:cNvPr id="86" name="Google Shape;86;p7"/>
+          <p:cNvSpPr/>
+          <p:nvPr/>
+        </p:nvSpPr>
+        <p:spPr>
+          <a:xfrm>
+            <a:off x="0" y="0"/>
+            <a:ext cx="9144000" cy="5143500"/>
+          </a:xfrm>
+          <a:prstGeom prst="rect">
+            <a:avLst/>
+          </a:prstGeom>
+          <a:noFill/>
+          <a:ln>
+            <a:noFill/>
+          </a:ln>
+        </p:spPr>
+        <p:txBody>
+          <a:bodyPr spcFirstLastPara="1" wrap="square" lIns="91425" tIns="45700" rIns="91425" bIns="45700" anchor="t" anchorCtr="0">
+            <a:noAutofit/>
+          </a:bodyPr>
+          <a:lstStyle/>
+          <a:p>
+            <a:pPr marL="0" marR="0" lvl="0" indent="0" algn="l" rtl="0">
+              <a:spcBef>
+                <a:spcPts val="0"/>
+              </a:spcBef>
+              <a:spcAft>
+                <a:spcPts val="0"/>
+              </a:spcAft>
+              <a:buNone/>
+            </a:pPr>
+            <a:endParaRPr sz="1800">
+              <a:solidFill>
+                <a:schemeClr val="dk1"/>
+              </a:solidFill>
+              <a:latin typeface="Calibri"/>
+              <a:ea typeface="Calibri"/>
+              <a:cs typeface="Calibri"/>
+              <a:sym typeface="Calibri"/>
+            </a:endParaRPr>
+          </a:p>
+        </p:txBody>
+      </p:sp>
+      <p:pic>
+        <p:nvPicPr>
+          <p:cNvPr id="87" name="Google Shape;87;p7" descr="preencoded.png"/>
+          <p:cNvPicPr preferRelativeResize="0"/>
+          <p:nvPr/>
+        </p:nvPicPr>
+        <p:blipFill rotWithShape="1">
+          <a:blip r:embed="rId5">
+            <a:alphaModFix/>
+          </a:blip>
+          <a:srcRect/>
+          <a:stretch/>
+        </p:blipFill>
+        <p:spPr>
+          <a:xfrm>
+            <a:off x="0" y="0"/>
+            <a:ext cx="9144000" cy="5143500"/>
+          </a:xfrm>
+          <a:prstGeom prst="rect">
+            <a:avLst/>
+          </a:prstGeom>
+          <a:noFill/>
+          <a:ln>
+            <a:noFill/>
+          </a:ln>
+        </p:spPr>
+      </p:pic>
+      <p:sp>
+        <p:nvSpPr>
+          <p:cNvPr id="88" name="Google Shape;88;p7"/>
+          <p:cNvSpPr/>
+          <p:nvPr/>
+        </p:nvSpPr>
+        <p:spPr>
+          <a:xfrm>
+            <a:off x="594836" y="540068"/>
+            <a:ext cx="7862888" cy="428625"/>
+          </a:xfrm>
+          <a:prstGeom prst="rect">
+            <a:avLst/>
+          </a:prstGeom>
+          <a:noFill/>
+          <a:ln>
+            <a:noFill/>
+          </a:ln>
+        </p:spPr>
+        <p:txBody>
+          <a:bodyPr spcFirstLastPara="1" wrap="square" lIns="91425" tIns="45700" rIns="91425" bIns="45700" anchor="ctr" anchorCtr="0">
+            <a:noAutofit/>
+          </a:bodyPr>
+          <a:lstStyle/>
+          <a:p>
+            <a:pPr marL="0" marR="0" lvl="0" indent="0" algn="ctr" rtl="0">
+              <a:lnSpc>
+                <a:spcPct val="75000"/>
+              </a:lnSpc>
+              <a:spcBef>
+                <a:spcPts val="0"/>
+              </a:spcBef>
+              <a:spcAft>
+                <a:spcPts val="0"/>
+              </a:spcAft>
+              <a:buClr>
+                <a:srgbClr val="FFFFFF"/>
+              </a:buClr>
+              <a:buSzPts val="4500"/>
+              <a:buFont typeface="PT Mono"/>
+              <a:buNone/>
+            </a:pPr>
+            <a:r>
+              <a:rPr lang="en-US" sz="4000" dirty="0" err="1">
+                <a:solidFill>
+                  <a:srgbClr val="FFFFFF"/>
+                </a:solidFill>
+                <a:latin typeface="PT Mono"/>
+                <a:ea typeface="PT Mono"/>
+                <a:cs typeface="PT Mono"/>
+                <a:sym typeface="PT Mono"/>
+              </a:rPr>
+              <a:t>Използвани</a:t>
+            </a:r>
+            <a:r>
+              <a:rPr lang="en-US" sz="4000" dirty="0">
+                <a:solidFill>
+                  <a:srgbClr val="FFFFFF"/>
+                </a:solidFill>
+                <a:latin typeface="PT Mono"/>
+                <a:ea typeface="PT Mono"/>
+                <a:cs typeface="PT Mono"/>
+                <a:sym typeface="PT Mono"/>
+              </a:rPr>
+              <a:t> </a:t>
+            </a:r>
+            <a:r>
+              <a:rPr lang="en-US" sz="4000" dirty="0" err="1">
+                <a:solidFill>
+                  <a:srgbClr val="FFFFFF"/>
+                </a:solidFill>
+                <a:latin typeface="PT Mono"/>
+                <a:ea typeface="PT Mono"/>
+                <a:cs typeface="PT Mono"/>
+                <a:sym typeface="PT Mono"/>
+              </a:rPr>
+              <a:t>технологии</a:t>
+            </a:r>
+            <a:endParaRPr sz="4000" dirty="0">
+              <a:solidFill>
+                <a:schemeClr val="dk1"/>
+              </a:solidFill>
+              <a:latin typeface="Calibri"/>
+              <a:ea typeface="Calibri"/>
+              <a:cs typeface="Calibri"/>
+              <a:sym typeface="Calibri"/>
+            </a:endParaRPr>
+          </a:p>
+        </p:txBody>
+      </p:sp>
+      <p:sp>
+        <p:nvSpPr>
+          <p:cNvPr id="2" name="TextBox 1"/>
+          <p:cNvSpPr txBox="1"/>
+          <p:nvPr/>
+        </p:nvSpPr>
+        <p:spPr>
+          <a:xfrm>
+            <a:off x="2936932" y="2240488"/>
+            <a:ext cx="6368903" cy="1631216"/>
+          </a:xfrm>
+          <a:prstGeom prst="rect">
+            <a:avLst/>
+          </a:prstGeom>
+          <a:noFill/>
+        </p:spPr>
+        <p:txBody>
+          <a:bodyPr wrap="square" rtlCol="0">
+            <a:spAutoFit/>
+          </a:bodyPr>
+          <a:lstStyle/>
+          <a:p>
+            <a:r>
+              <a:rPr lang="en-US" sz="2000" dirty="0">
+                <a:solidFill>
+                  <a:schemeClr val="bg1"/>
+                </a:solidFill>
+              </a:rPr>
+              <a:t>Backend - Python, Flask;</a:t>
+            </a:r>
+          </a:p>
+          <a:p>
+            <a:endParaRPr lang="en-US" sz="2000" dirty="0">
+              <a:solidFill>
+                <a:schemeClr val="bg1"/>
+              </a:solidFill>
+            </a:endParaRPr>
+          </a:p>
+          <a:p>
+            <a:r>
+              <a:rPr lang="en-US" sz="2000" dirty="0">
+                <a:solidFill>
+                  <a:schemeClr val="bg1"/>
+                </a:solidFill>
+              </a:rPr>
+              <a:t>Database – MongoDB</a:t>
+            </a:r>
+            <a:r>
+              <a:rPr lang="en-GB" sz="2000" dirty="0">
+                <a:solidFill>
+                  <a:schemeClr val="bg1"/>
+                </a:solidFill>
+              </a:rPr>
+              <a:t>;</a:t>
+            </a:r>
+            <a:endParaRPr lang="en-US" sz="2000" dirty="0">
+              <a:solidFill>
+                <a:schemeClr val="bg1"/>
+              </a:solidFill>
+            </a:endParaRPr>
+          </a:p>
+          <a:p>
+            <a:endParaRPr lang="en-US" sz="2000" dirty="0">
+              <a:solidFill>
+                <a:schemeClr val="bg1"/>
+              </a:solidFill>
+            </a:endParaRPr>
+          </a:p>
+          <a:p>
+            <a:r>
+              <a:rPr lang="en-GB" sz="2000" dirty="0">
+                <a:solidFill>
+                  <a:schemeClr val="bg1"/>
+                </a:solidFill>
+              </a:rPr>
+              <a:t>Frontend - </a:t>
+            </a:r>
+            <a:r>
+              <a:rPr lang="en-US" sz="2000" dirty="0">
+                <a:solidFill>
+                  <a:schemeClr val="bg1"/>
+                </a:solidFill>
+              </a:rPr>
+              <a:t>Vue.js </a:t>
+            </a:r>
+            <a:r>
+              <a:rPr lang="bg-BG" sz="2000" dirty="0">
+                <a:solidFill>
+                  <a:schemeClr val="bg1"/>
+                </a:solidFill>
+              </a:rPr>
+              <a:t>и </a:t>
+            </a:r>
+            <a:r>
+              <a:rPr lang="en-US" sz="2000" dirty="0">
+                <a:solidFill>
+                  <a:schemeClr val="bg1"/>
+                </a:solidFill>
+              </a:rPr>
+              <a:t>Tailwind CSS;</a:t>
+            </a:r>
+          </a:p>
+        </p:txBody>
+      </p:sp>
+    </p:spTree>
+  </p:cSld>
+  <p:clrMapOvr>
+    <a:masterClrMapping/>
+  </p:clrMapOvr>
+  <p:transition spd="slow">
+    <p:push dir="u"/>
+  </p:transition>
+</p:sld>
+</file>
+
+<file path=ppt/slides/slide7.xml><?xml version="1.0" encoding="utf-8"?>
+<p:sld xmlns:a="http://schemas.openxmlformats.org/drawingml/2006/main" xmlns:r="http://schemas.openxmlformats.org/officeDocument/2006/relationships" xmlns:p="http://schemas.openxmlformats.org/presentationml/2006/main">
+  <p:cSld>
+    <p:bg>
+      <p:bgPr>
+        <a:solidFill>
+          <a:schemeClr val="tx1"/>
+        </a:solidFill>
+        <a:effectLst/>
+      </p:bgPr>
+    </p:bg>
+    <p:spTree>
+      <p:nvGrpSpPr>
+        <p:cNvPr id="1" name="Shape 61">
+          <a:extLst>
+            <a:ext uri="{FF2B5EF4-FFF2-40B4-BE49-F238E27FC236}">
+              <a16:creationId xmlns:a16="http://schemas.microsoft.com/office/drawing/2014/main" id="{40025084-56B4-13E2-8E56-729D60C1EE3D}"/>
+            </a:ext>
+          </a:extLst>
+        </p:cNvPr>
+        <p:cNvGrpSpPr/>
+        <p:nvPr/>
+      </p:nvGrpSpPr>
+      <p:grpSpPr>
+        <a:xfrm>
+          <a:off x="0" y="0"/>
+          <a:ext cx="0" cy="0"/>
+          <a:chOff x="0" y="0"/>
+          <a:chExt cx="0" cy="0"/>
+        </a:xfrm>
+      </p:grpSpPr>
+      <p:sp>
+        <p:nvSpPr>
+          <p:cNvPr id="62" name="Google Shape;62;p5">
+            <a:extLst>
+              <a:ext uri="{FF2B5EF4-FFF2-40B4-BE49-F238E27FC236}">
+                <a16:creationId xmlns:a16="http://schemas.microsoft.com/office/drawing/2014/main" id="{64B4C4BD-6C6B-690A-5BE0-08B84195F547}"/>
+              </a:ext>
+            </a:extLst>
+          </p:cNvPr>
+          <p:cNvSpPr/>
+          <p:nvPr/>
+        </p:nvSpPr>
+        <p:spPr>
+          <a:xfrm>
+            <a:off x="0" y="0"/>
+            <a:ext cx="9144000" cy="5143500"/>
+          </a:xfrm>
+          <a:prstGeom prst="rect">
+            <a:avLst/>
+          </a:prstGeom>
+          <a:noFill/>
+          <a:ln>
+            <a:noFill/>
+          </a:ln>
+        </p:spPr>
+        <p:txBody>
+          <a:bodyPr spcFirstLastPara="1" wrap="square" lIns="91425" tIns="45700" rIns="91425" bIns="45700" anchor="t" anchorCtr="0">
+            <a:noAutofit/>
+          </a:bodyPr>
+          <a:lstStyle/>
+          <a:p>
+            <a:pPr marL="0" marR="0" lvl="0" indent="0" algn="l" rtl="0">
+              <a:spcBef>
+                <a:spcPts val="0"/>
+              </a:spcBef>
+              <a:spcAft>
+                <a:spcPts val="0"/>
+              </a:spcAft>
+              <a:buNone/>
+            </a:pPr>
+            <a:endParaRPr sz="1800">
+              <a:solidFill>
+                <a:schemeClr val="dk1"/>
+              </a:solidFill>
+              <a:latin typeface="Calibri"/>
+              <a:ea typeface="Calibri"/>
+              <a:cs typeface="Calibri"/>
+              <a:sym typeface="Calibri"/>
+            </a:endParaRPr>
+          </a:p>
+        </p:txBody>
+      </p:sp>
+      <p:pic>
+        <p:nvPicPr>
+          <p:cNvPr id="63" name="Google Shape;63;p5" descr="preencoded.png">
+            <a:extLst>
+              <a:ext uri="{FF2B5EF4-FFF2-40B4-BE49-F238E27FC236}">
+                <a16:creationId xmlns:a16="http://schemas.microsoft.com/office/drawing/2014/main" id="{852F0F24-6F00-B3E8-D815-4E5CD81C867F}"/>
+              </a:ext>
+            </a:extLst>
+          </p:cNvPr>
+          <p:cNvPicPr preferRelativeResize="0"/>
+          <p:nvPr/>
+        </p:nvPicPr>
+        <p:blipFill rotWithShape="1">
+          <a:blip r:embed="rId3">
+            <a:alphaModFix/>
+          </a:blip>
+          <a:srcRect/>
+          <a:stretch/>
+        </p:blipFill>
+        <p:spPr>
+          <a:xfrm>
+            <a:off x="-159425" y="0"/>
+            <a:ext cx="9144000" cy="5143500"/>
+          </a:xfrm>
+          <a:prstGeom prst="rect">
+            <a:avLst/>
+          </a:prstGeom>
+          <a:noFill/>
+          <a:ln>
+            <a:noFill/>
+          </a:ln>
+        </p:spPr>
+      </p:pic>
+      <p:sp>
+        <p:nvSpPr>
+          <p:cNvPr id="64" name="Google Shape;64;p5">
+            <a:extLst>
+              <a:ext uri="{FF2B5EF4-FFF2-40B4-BE49-F238E27FC236}">
+                <a16:creationId xmlns:a16="http://schemas.microsoft.com/office/drawing/2014/main" id="{ADBAB8EC-EA12-5521-79C0-55538F768CE5}"/>
+              </a:ext>
+            </a:extLst>
+          </p:cNvPr>
+          <p:cNvSpPr/>
+          <p:nvPr/>
+        </p:nvSpPr>
+        <p:spPr>
+          <a:xfrm>
+            <a:off x="640556" y="2250510"/>
+            <a:ext cx="7862888" cy="428625"/>
+          </a:xfrm>
+          <a:prstGeom prst="rect">
+            <a:avLst/>
+          </a:prstGeom>
+          <a:noFill/>
+          <a:ln>
+            <a:noFill/>
+          </a:ln>
+        </p:spPr>
+        <p:txBody>
+          <a:bodyPr spcFirstLastPara="1" wrap="square" lIns="91425" tIns="45700" rIns="91425" bIns="45700" anchor="ctr" anchorCtr="0">
+            <a:noAutofit/>
+          </a:bodyPr>
+          <a:lstStyle/>
+          <a:p>
+            <a:pPr marL="0" marR="0" lvl="0" indent="0" algn="ctr" rtl="0">
+              <a:lnSpc>
+                <a:spcPct val="75000"/>
+              </a:lnSpc>
+              <a:spcBef>
+                <a:spcPts val="0"/>
+              </a:spcBef>
+              <a:spcAft>
+                <a:spcPts val="0"/>
+              </a:spcAft>
+              <a:buClr>
+                <a:srgbClr val="FFFFFF"/>
+              </a:buClr>
+              <a:buSzPts val="4500"/>
+              <a:buFont typeface="PT Mono"/>
+              <a:buNone/>
+            </a:pPr>
+            <a:r>
+              <a:rPr lang="bg-BG" sz="6000" dirty="0">
+                <a:solidFill>
+                  <a:schemeClr val="bg1"/>
+                </a:solidFill>
+                <a:latin typeface="Calibri"/>
+                <a:ea typeface="Calibri"/>
+                <a:cs typeface="Calibri"/>
+                <a:sym typeface="Calibri"/>
+              </a:rPr>
+              <a:t>Демо</a:t>
+            </a:r>
+            <a:endParaRPr sz="6000" dirty="0">
+              <a:solidFill>
+                <a:schemeClr val="bg1"/>
+              </a:solidFill>
+              <a:latin typeface="Calibri"/>
+              <a:ea typeface="Calibri"/>
+              <a:cs typeface="Calibri"/>
+              <a:sym typeface="Calibri"/>
+            </a:endParaRPr>
+          </a:p>
+        </p:txBody>
+      </p:sp>
+      <p:pic>
+        <p:nvPicPr>
+          <p:cNvPr id="65" name="Google Shape;65;p5" descr="A green circle with a black background&#10;&#10;Description automatically generated">
+            <a:extLst>
+              <a:ext uri="{FF2B5EF4-FFF2-40B4-BE49-F238E27FC236}">
+                <a16:creationId xmlns:a16="http://schemas.microsoft.com/office/drawing/2014/main" id="{F53AFBEC-D6EC-8B2F-7E66-A51A022366EE}"/>
+              </a:ext>
+            </a:extLst>
+          </p:cNvPr>
+          <p:cNvPicPr preferRelativeResize="0"/>
+          <p:nvPr/>
+        </p:nvPicPr>
+        <p:blipFill rotWithShape="1">
+          <a:blip r:embed="rId4">
+            <a:alphaModFix/>
+          </a:blip>
+          <a:srcRect/>
+          <a:stretch/>
+        </p:blipFill>
+        <p:spPr>
+          <a:xfrm>
+            <a:off x="-2656057" y="2840477"/>
+            <a:ext cx="5143500" cy="5143500"/>
+          </a:xfrm>
+          <a:prstGeom prst="rect">
+            <a:avLst/>
+          </a:prstGeom>
+          <a:noFill/>
+          <a:ln>
+            <a:noFill/>
+          </a:ln>
+        </p:spPr>
+      </p:pic>
+      <p:pic>
+        <p:nvPicPr>
+          <p:cNvPr id="66" name="Google Shape;66;p5" descr="A circular logo with a black background&#10;&#10;Description automatically generated">
+            <a:extLst>
+              <a:ext uri="{FF2B5EF4-FFF2-40B4-BE49-F238E27FC236}">
+                <a16:creationId xmlns:a16="http://schemas.microsoft.com/office/drawing/2014/main" id="{8D973624-A3B2-4FCC-E21A-3964F65DBCA7}"/>
+              </a:ext>
+            </a:extLst>
+          </p:cNvPr>
+          <p:cNvPicPr preferRelativeResize="0"/>
+          <p:nvPr/>
+        </p:nvPicPr>
+        <p:blipFill rotWithShape="1">
+          <a:blip r:embed="rId5">
+            <a:alphaModFix/>
+          </a:blip>
+          <a:srcRect/>
+          <a:stretch/>
+        </p:blipFill>
+        <p:spPr>
+          <a:xfrm>
+            <a:off x="7669531" y="107385"/>
+            <a:ext cx="5143500" cy="5143500"/>
+          </a:xfrm>
+          <a:prstGeom prst="rect">
+            <a:avLst/>
+          </a:prstGeom>
+          <a:noFill/>
+          <a:ln>
+            <a:noFill/>
+          </a:ln>
+        </p:spPr>
+      </p:pic>
+    </p:spTree>
+    <p:extLst>
+      <p:ext uri="{BB962C8B-B14F-4D97-AF65-F5344CB8AC3E}">
+        <p14:creationId xmlns:p14="http://schemas.microsoft.com/office/powerpoint/2010/main" val="4204756426"/>
+      </p:ext>
+    </p:extLst>
+  </p:cSld>
+  <p:clrMapOvr>
+    <a:masterClrMapping/>
+  </p:clrMapOvr>
+  <p:transition spd="slow">
+    <p:push dir="u"/>
+  </p:transition>
+</p:sld>
+</file>
+
+<file path=ppt/slides/slide8.xml><?xml version="1.0" encoding="utf-8"?>
 <p:sld xmlns:a="http://schemas.openxmlformats.org/drawingml/2006/main" xmlns:r="http://schemas.openxmlformats.org/officeDocument/2006/relationships" xmlns:p="http://schemas.openxmlformats.org/presentationml/2006/main">
   <p:cSld>
     <p:bg>
@@ -9225,7 +10271,7 @@
 </p:sld>
 </file>
 
-<file path=ppt/slides/slide7.xml><?xml version="1.0" encoding="utf-8"?>
+<file path=ppt/slides/slide9.xml><?xml version="1.0" encoding="utf-8"?>
 <p:sld xmlns:a="http://schemas.openxmlformats.org/drawingml/2006/main" xmlns:r="http://schemas.openxmlformats.org/officeDocument/2006/relationships" xmlns:p="http://schemas.openxmlformats.org/presentationml/2006/main">
   <p:cSld>
     <p:bg>
@@ -9385,7 +10431,7 @@
         </p:nvSpPr>
         <p:spPr>
           <a:xfrm>
-            <a:off x="640556" y="2233612"/>
+            <a:off x="745718" y="2233612"/>
             <a:ext cx="7862888" cy="428625"/>
           </a:xfrm>
           <a:prstGeom prst="rect">
@@ -9592,610 +10638,6 @@
         </p:spPr>
       </p:pic>
     </p:spTree>
-  </p:cSld>
-  <p:clrMapOvr>
-    <a:masterClrMapping/>
-  </p:clrMapOvr>
-  <p:transition spd="slow">
-    <p:push dir="u"/>
-  </p:transition>
-</p:sld>
-</file>
-
-<file path=ppt/slides/slide8.xml><?xml version="1.0" encoding="utf-8"?>
-<p:sld xmlns:a="http://schemas.openxmlformats.org/drawingml/2006/main" xmlns:r="http://schemas.openxmlformats.org/officeDocument/2006/relationships" xmlns:p="http://schemas.openxmlformats.org/presentationml/2006/main">
-  <p:cSld>
-    <p:bg>
-      <p:bgPr>
-        <a:solidFill>
-          <a:srgbClr val="000000"/>
-        </a:solidFill>
-        <a:effectLst/>
-      </p:bgPr>
-    </p:bg>
-    <p:spTree>
-      <p:nvGrpSpPr>
-        <p:cNvPr id="1" name="Shape 105"/>
-        <p:cNvGrpSpPr/>
-        <p:nvPr/>
-      </p:nvGrpSpPr>
-      <p:grpSpPr>
-        <a:xfrm>
-          <a:off x="0" y="0"/>
-          <a:ext cx="0" cy="0"/>
-          <a:chOff x="0" y="0"/>
-          <a:chExt cx="0" cy="0"/>
-        </a:xfrm>
-      </p:grpSpPr>
-      <p:pic>
-        <p:nvPicPr>
-          <p:cNvPr id="112" name="Google Shape;112;p9" descr="A black and gold circle with black lines&#10;&#10;Description automatically generated"/>
-          <p:cNvPicPr preferRelativeResize="0"/>
-          <p:nvPr/>
-        </p:nvPicPr>
-        <p:blipFill rotWithShape="1">
-          <a:blip r:embed="rId3">
-            <a:alphaModFix/>
-          </a:blip>
-          <a:srcRect/>
-          <a:stretch/>
-        </p:blipFill>
-        <p:spPr>
-          <a:xfrm>
-            <a:off x="-2459664" y="-1655361"/>
-            <a:ext cx="8864569" cy="8864569"/>
-          </a:xfrm>
-          <a:prstGeom prst="rect">
-            <a:avLst/>
-          </a:prstGeom>
-          <a:noFill/>
-          <a:ln>
-            <a:noFill/>
-          </a:ln>
-        </p:spPr>
-      </p:pic>
-      <p:sp>
-        <p:nvSpPr>
-          <p:cNvPr id="106" name="Google Shape;106;p9"/>
-          <p:cNvSpPr/>
-          <p:nvPr/>
-        </p:nvSpPr>
-        <p:spPr>
-          <a:xfrm>
-            <a:off x="0" y="0"/>
-            <a:ext cx="9144000" cy="5143500"/>
-          </a:xfrm>
-          <a:prstGeom prst="rect">
-            <a:avLst/>
-          </a:prstGeom>
-          <a:noFill/>
-          <a:ln>
-            <a:noFill/>
-          </a:ln>
-        </p:spPr>
-        <p:txBody>
-          <a:bodyPr spcFirstLastPara="1" wrap="square" lIns="91425" tIns="45700" rIns="91425" bIns="45700" anchor="t" anchorCtr="0">
-            <a:noAutofit/>
-          </a:bodyPr>
-          <a:lstStyle/>
-          <a:p>
-            <a:pPr marL="0" marR="0" lvl="0" indent="0" algn="l" rtl="0">
-              <a:spcBef>
-                <a:spcPts val="0"/>
-              </a:spcBef>
-              <a:spcAft>
-                <a:spcPts val="0"/>
-              </a:spcAft>
-              <a:buNone/>
-            </a:pPr>
-            <a:endParaRPr sz="1800">
-              <a:solidFill>
-                <a:schemeClr val="dk1"/>
-              </a:solidFill>
-              <a:latin typeface="Calibri"/>
-              <a:ea typeface="Calibri"/>
-              <a:cs typeface="Calibri"/>
-              <a:sym typeface="Calibri"/>
-            </a:endParaRPr>
-          </a:p>
-        </p:txBody>
-      </p:sp>
-      <p:pic>
-        <p:nvPicPr>
-          <p:cNvPr id="107" name="Google Shape;107;p9" descr="preencoded.png"/>
-          <p:cNvPicPr preferRelativeResize="0"/>
-          <p:nvPr/>
-        </p:nvPicPr>
-        <p:blipFill rotWithShape="1">
-          <a:blip r:embed="rId4">
-            <a:alphaModFix/>
-          </a:blip>
-          <a:srcRect/>
-          <a:stretch/>
-        </p:blipFill>
-        <p:spPr>
-          <a:xfrm>
-            <a:off x="0" y="124098"/>
-            <a:ext cx="9144000" cy="5143500"/>
-          </a:xfrm>
-          <a:prstGeom prst="rect">
-            <a:avLst/>
-          </a:prstGeom>
-          <a:noFill/>
-          <a:ln>
-            <a:noFill/>
-          </a:ln>
-        </p:spPr>
-      </p:pic>
-      <p:sp>
-        <p:nvSpPr>
-          <p:cNvPr id="110" name="Google Shape;110;p9"/>
-          <p:cNvSpPr/>
-          <p:nvPr/>
-        </p:nvSpPr>
-        <p:spPr>
-          <a:xfrm>
-            <a:off x="640556" y="590550"/>
-            <a:ext cx="7862888" cy="428625"/>
-          </a:xfrm>
-          <a:prstGeom prst="rect">
-            <a:avLst/>
-          </a:prstGeom>
-          <a:noFill/>
-          <a:ln>
-            <a:noFill/>
-          </a:ln>
-        </p:spPr>
-        <p:txBody>
-          <a:bodyPr spcFirstLastPara="1" wrap="square" lIns="91425" tIns="45700" rIns="91425" bIns="45700" anchor="ctr" anchorCtr="0">
-            <a:noAutofit/>
-          </a:bodyPr>
-          <a:lstStyle/>
-          <a:p>
-            <a:pPr algn="ctr">
-              <a:lnSpc>
-                <a:spcPct val="75000"/>
-              </a:lnSpc>
-              <a:buClr>
-                <a:srgbClr val="FFFFFF"/>
-              </a:buClr>
-              <a:buSzPts val="4500"/>
-            </a:pPr>
-            <a:r>
-              <a:rPr lang="bg-BG" sz="4000" dirty="0">
-                <a:solidFill>
-                  <a:srgbClr val="FFFFFF"/>
-                </a:solidFill>
-                <a:latin typeface="PT Mono" panose="020B0604020202020204" charset="0"/>
-                <a:ea typeface="PT Mono"/>
-                <a:cs typeface="PT Mono"/>
-                <a:sym typeface="PT Mono"/>
-              </a:rPr>
-              <a:t>П</a:t>
-            </a:r>
-            <a:r>
-              <a:rPr lang="en-US" sz="4000" dirty="0" err="1">
-                <a:solidFill>
-                  <a:srgbClr val="FFFFFF"/>
-                </a:solidFill>
-                <a:latin typeface="PT Mono" panose="020B0604020202020204" charset="0"/>
-                <a:ea typeface="PT Mono"/>
-                <a:cs typeface="PT Mono"/>
-                <a:sym typeface="PT Mono"/>
-              </a:rPr>
-              <a:t>реживяване</a:t>
-            </a:r>
-            <a:endParaRPr sz="4000" dirty="0">
-              <a:solidFill>
-                <a:schemeClr val="dk1"/>
-              </a:solidFill>
-              <a:latin typeface="PT Mono" panose="020B0604020202020204" charset="0"/>
-              <a:ea typeface="Calibri"/>
-              <a:cs typeface="Calibri"/>
-              <a:sym typeface="Calibri"/>
-            </a:endParaRPr>
-          </a:p>
-        </p:txBody>
-      </p:sp>
-      <p:sp>
-        <p:nvSpPr>
-          <p:cNvPr id="111" name="Google Shape;111;p9"/>
-          <p:cNvSpPr/>
-          <p:nvPr/>
-        </p:nvSpPr>
-        <p:spPr>
-          <a:xfrm>
-            <a:off x="745718" y="1019175"/>
-            <a:ext cx="6633277" cy="1256192"/>
-          </a:xfrm>
-          <a:prstGeom prst="rect">
-            <a:avLst/>
-          </a:prstGeom>
-          <a:noFill/>
-          <a:ln>
-            <a:noFill/>
-          </a:ln>
-        </p:spPr>
-        <p:txBody>
-          <a:bodyPr spcFirstLastPara="1" wrap="square" lIns="91425" tIns="45700" rIns="91425" bIns="45700" anchor="ctr" anchorCtr="0">
-            <a:noAutofit/>
-          </a:bodyPr>
-          <a:lstStyle/>
-          <a:p>
-            <a:pPr lvl="0">
-              <a:lnSpc>
-                <a:spcPct val="140625"/>
-              </a:lnSpc>
-              <a:buClr>
-                <a:srgbClr val="FFFFFF"/>
-              </a:buClr>
-              <a:buSzPts val="2400"/>
-            </a:pPr>
-            <a:endParaRPr sz="2400" dirty="0">
-              <a:solidFill>
-                <a:schemeClr val="dk1"/>
-              </a:solidFill>
-              <a:latin typeface="Calibri"/>
-              <a:ea typeface="Calibri"/>
-              <a:cs typeface="Calibri"/>
-              <a:sym typeface="Calibri"/>
-            </a:endParaRPr>
-          </a:p>
-        </p:txBody>
-      </p:sp>
-      <p:pic>
-        <p:nvPicPr>
-          <p:cNvPr id="2" name="Google Shape;146;p11" descr="preencoded.png">
-            <a:extLst>
-              <a:ext uri="{FF2B5EF4-FFF2-40B4-BE49-F238E27FC236}">
-                <a16:creationId xmlns:a16="http://schemas.microsoft.com/office/drawing/2014/main" id="{816CBF65-3C6C-0653-800E-30F400C084FD}"/>
-              </a:ext>
-            </a:extLst>
-          </p:cNvPr>
-          <p:cNvPicPr preferRelativeResize="0"/>
-          <p:nvPr/>
-        </p:nvPicPr>
-        <p:blipFill rotWithShape="1">
-          <a:blip r:embed="rId5">
-            <a:alphaModFix/>
-          </a:blip>
-          <a:srcRect/>
-          <a:stretch/>
-        </p:blipFill>
-        <p:spPr>
-          <a:xfrm>
-            <a:off x="-357077" y="1743460"/>
-            <a:ext cx="1023938" cy="2066925"/>
-          </a:xfrm>
-          <a:prstGeom prst="rect">
-            <a:avLst/>
-          </a:prstGeom>
-          <a:noFill/>
-          <a:ln>
-            <a:noFill/>
-          </a:ln>
-        </p:spPr>
-      </p:pic>
-    </p:spTree>
-    <p:extLst>
-      <p:ext uri="{BB962C8B-B14F-4D97-AF65-F5344CB8AC3E}">
-        <p14:creationId xmlns:p14="http://schemas.microsoft.com/office/powerpoint/2010/main" val="4122085397"/>
-      </p:ext>
-    </p:extLst>
-  </p:cSld>
-  <p:clrMapOvr>
-    <a:masterClrMapping/>
-  </p:clrMapOvr>
-  <p:transition spd="slow">
-    <p:push dir="u"/>
-  </p:transition>
-</p:sld>
-</file>
-
-<file path=ppt/slides/slide9.xml><?xml version="1.0" encoding="utf-8"?>
-<p:sld xmlns:a="http://schemas.openxmlformats.org/drawingml/2006/main" xmlns:r="http://schemas.openxmlformats.org/officeDocument/2006/relationships" xmlns:p="http://schemas.openxmlformats.org/presentationml/2006/main">
-  <p:cSld>
-    <p:bg>
-      <p:bgPr>
-        <a:solidFill>
-          <a:schemeClr val="tx1"/>
-        </a:solidFill>
-        <a:effectLst/>
-      </p:bgPr>
-    </p:bg>
-    <p:spTree>
-      <p:nvGrpSpPr>
-        <p:cNvPr id="1" name="Shape 105">
-          <a:extLst>
-            <a:ext uri="{FF2B5EF4-FFF2-40B4-BE49-F238E27FC236}">
-              <a16:creationId xmlns:a16="http://schemas.microsoft.com/office/drawing/2014/main" id="{B93021DD-DE50-BBC7-1176-B470A06B7C32}"/>
-            </a:ext>
-          </a:extLst>
-        </p:cNvPr>
-        <p:cNvGrpSpPr/>
-        <p:nvPr/>
-      </p:nvGrpSpPr>
-      <p:grpSpPr>
-        <a:xfrm>
-          <a:off x="0" y="0"/>
-          <a:ext cx="0" cy="0"/>
-          <a:chOff x="0" y="0"/>
-          <a:chExt cx="0" cy="0"/>
-        </a:xfrm>
-      </p:grpSpPr>
-      <p:pic>
-        <p:nvPicPr>
-          <p:cNvPr id="112" name="Google Shape;112;p9" descr="A black and gold circle with black lines&#10;&#10;Description automatically generated">
-            <a:extLst>
-              <a:ext uri="{FF2B5EF4-FFF2-40B4-BE49-F238E27FC236}">
-                <a16:creationId xmlns:a16="http://schemas.microsoft.com/office/drawing/2014/main" id="{FBD6B0D4-2AE2-7F0C-A551-252900DE110D}"/>
-              </a:ext>
-            </a:extLst>
-          </p:cNvPr>
-          <p:cNvPicPr preferRelativeResize="0"/>
-          <p:nvPr/>
-        </p:nvPicPr>
-        <p:blipFill rotWithShape="1">
-          <a:blip r:embed="rId3">
-            <a:alphaModFix/>
-          </a:blip>
-          <a:srcRect/>
-          <a:stretch/>
-        </p:blipFill>
-        <p:spPr>
-          <a:xfrm>
-            <a:off x="-5811723" y="-1334930"/>
-            <a:ext cx="8864569" cy="8864569"/>
-          </a:xfrm>
-          <a:prstGeom prst="rect">
-            <a:avLst/>
-          </a:prstGeom>
-          <a:noFill/>
-          <a:ln>
-            <a:noFill/>
-          </a:ln>
-        </p:spPr>
-      </p:pic>
-      <p:sp>
-        <p:nvSpPr>
-          <p:cNvPr id="106" name="Google Shape;106;p9">
-            <a:extLst>
-              <a:ext uri="{FF2B5EF4-FFF2-40B4-BE49-F238E27FC236}">
-                <a16:creationId xmlns:a16="http://schemas.microsoft.com/office/drawing/2014/main" id="{B0B7F720-E70D-0BDD-3B44-C56647E73264}"/>
-              </a:ext>
-            </a:extLst>
-          </p:cNvPr>
-          <p:cNvSpPr/>
-          <p:nvPr/>
-        </p:nvSpPr>
-        <p:spPr>
-          <a:xfrm>
-            <a:off x="0" y="0"/>
-            <a:ext cx="9144000" cy="5143500"/>
-          </a:xfrm>
-          <a:prstGeom prst="rect">
-            <a:avLst/>
-          </a:prstGeom>
-          <a:noFill/>
-          <a:ln>
-            <a:noFill/>
-          </a:ln>
-        </p:spPr>
-        <p:txBody>
-          <a:bodyPr spcFirstLastPara="1" wrap="square" lIns="91425" tIns="45700" rIns="91425" bIns="45700" anchor="t" anchorCtr="0">
-            <a:noAutofit/>
-          </a:bodyPr>
-          <a:lstStyle/>
-          <a:p>
-            <a:pPr marL="0" marR="0" lvl="0" indent="0" algn="l" rtl="0">
-              <a:spcBef>
-                <a:spcPts val="0"/>
-              </a:spcBef>
-              <a:spcAft>
-                <a:spcPts val="0"/>
-              </a:spcAft>
-              <a:buNone/>
-            </a:pPr>
-            <a:endParaRPr sz="1800">
-              <a:solidFill>
-                <a:schemeClr val="dk1"/>
-              </a:solidFill>
-              <a:latin typeface="Calibri"/>
-              <a:ea typeface="Calibri"/>
-              <a:cs typeface="Calibri"/>
-              <a:sym typeface="Calibri"/>
-            </a:endParaRPr>
-          </a:p>
-        </p:txBody>
-      </p:sp>
-      <p:pic>
-        <p:nvPicPr>
-          <p:cNvPr id="107" name="Google Shape;107;p9" descr="preencoded.png">
-            <a:extLst>
-              <a:ext uri="{FF2B5EF4-FFF2-40B4-BE49-F238E27FC236}">
-                <a16:creationId xmlns:a16="http://schemas.microsoft.com/office/drawing/2014/main" id="{2ED2E951-064A-9AC4-A5E2-542693CA2288}"/>
-              </a:ext>
-            </a:extLst>
-          </p:cNvPr>
-          <p:cNvPicPr preferRelativeResize="0"/>
-          <p:nvPr/>
-        </p:nvPicPr>
-        <p:blipFill rotWithShape="1">
-          <a:blip r:embed="rId4">
-            <a:alphaModFix/>
-          </a:blip>
-          <a:srcRect/>
-          <a:stretch/>
-        </p:blipFill>
-        <p:spPr>
-          <a:xfrm>
-            <a:off x="212271" y="0"/>
-            <a:ext cx="9144000" cy="5143500"/>
-          </a:xfrm>
-          <a:prstGeom prst="rect">
-            <a:avLst/>
-          </a:prstGeom>
-          <a:noFill/>
-          <a:ln>
-            <a:noFill/>
-          </a:ln>
-        </p:spPr>
-      </p:pic>
-      <p:sp>
-        <p:nvSpPr>
-          <p:cNvPr id="110" name="Google Shape;110;p9">
-            <a:extLst>
-              <a:ext uri="{FF2B5EF4-FFF2-40B4-BE49-F238E27FC236}">
-                <a16:creationId xmlns:a16="http://schemas.microsoft.com/office/drawing/2014/main" id="{A538F5C1-DE7F-07E5-5D3A-016C2628505F}"/>
-              </a:ext>
-            </a:extLst>
-          </p:cNvPr>
-          <p:cNvSpPr/>
-          <p:nvPr/>
-        </p:nvSpPr>
-        <p:spPr>
-          <a:xfrm>
-            <a:off x="640556" y="551962"/>
-            <a:ext cx="7862888" cy="428625"/>
-          </a:xfrm>
-          <a:prstGeom prst="rect">
-            <a:avLst/>
-          </a:prstGeom>
-          <a:noFill/>
-          <a:ln>
-            <a:noFill/>
-          </a:ln>
-        </p:spPr>
-        <p:txBody>
-          <a:bodyPr spcFirstLastPara="1" wrap="square" lIns="91425" tIns="45700" rIns="91425" bIns="45700" anchor="ctr" anchorCtr="0">
-            <a:noAutofit/>
-          </a:bodyPr>
-          <a:lstStyle/>
-          <a:p>
-            <a:pPr algn="ctr">
-              <a:lnSpc>
-                <a:spcPct val="75000"/>
-              </a:lnSpc>
-              <a:buClr>
-                <a:srgbClr val="FFFFFF"/>
-              </a:buClr>
-              <a:buSzPts val="4500"/>
-            </a:pPr>
-            <a:r>
-              <a:rPr lang="bg-BG" sz="4000" dirty="0">
-                <a:solidFill>
-                  <a:schemeClr val="bg1"/>
-                </a:solidFill>
-                <a:latin typeface="PT Mono" panose="020B0604020202020204" charset="0"/>
-                <a:ea typeface="Calibri"/>
-                <a:cs typeface="Calibri"/>
-                <a:sym typeface="Calibri"/>
-              </a:rPr>
-              <a:t>Екип</a:t>
-            </a:r>
-            <a:endParaRPr sz="4000" dirty="0">
-              <a:solidFill>
-                <a:schemeClr val="bg1"/>
-              </a:solidFill>
-              <a:latin typeface="PT Mono" panose="020B0604020202020204" charset="0"/>
-              <a:ea typeface="Calibri"/>
-              <a:cs typeface="Calibri"/>
-              <a:sym typeface="Calibri"/>
-            </a:endParaRPr>
-          </a:p>
-        </p:txBody>
-      </p:sp>
-      <p:sp>
-        <p:nvSpPr>
-          <p:cNvPr id="111" name="Google Shape;111;p9">
-            <a:extLst>
-              <a:ext uri="{FF2B5EF4-FFF2-40B4-BE49-F238E27FC236}">
-                <a16:creationId xmlns:a16="http://schemas.microsoft.com/office/drawing/2014/main" id="{77FFA7E8-0A12-89BC-9146-D4891DC9D532}"/>
-              </a:ext>
-            </a:extLst>
-          </p:cNvPr>
-          <p:cNvSpPr/>
-          <p:nvPr/>
-        </p:nvSpPr>
-        <p:spPr>
-          <a:xfrm>
-            <a:off x="745718" y="1019175"/>
-            <a:ext cx="6633277" cy="1256192"/>
-          </a:xfrm>
-          <a:prstGeom prst="rect">
-            <a:avLst/>
-          </a:prstGeom>
-          <a:noFill/>
-          <a:ln>
-            <a:noFill/>
-          </a:ln>
-        </p:spPr>
-        <p:txBody>
-          <a:bodyPr spcFirstLastPara="1" wrap="square" lIns="91425" tIns="45700" rIns="91425" bIns="45700" anchor="ctr" anchorCtr="0">
-            <a:noAutofit/>
-          </a:bodyPr>
-          <a:lstStyle/>
-          <a:p>
-            <a:pPr lvl="0">
-              <a:lnSpc>
-                <a:spcPct val="140625"/>
-              </a:lnSpc>
-              <a:buClr>
-                <a:srgbClr val="FFFFFF"/>
-              </a:buClr>
-              <a:buSzPts val="2400"/>
-            </a:pPr>
-            <a:endParaRPr sz="2400" dirty="0">
-              <a:solidFill>
-                <a:schemeClr val="dk1"/>
-              </a:solidFill>
-              <a:latin typeface="Calibri"/>
-              <a:ea typeface="Calibri"/>
-              <a:cs typeface="Calibri"/>
-              <a:sym typeface="Calibri"/>
-            </a:endParaRPr>
-          </a:p>
-        </p:txBody>
-      </p:sp>
-      <p:pic>
-        <p:nvPicPr>
-          <p:cNvPr id="4" name="Google Shape;147;p11" descr="preencoded.png">
-            <a:extLst>
-              <a:ext uri="{FF2B5EF4-FFF2-40B4-BE49-F238E27FC236}">
-                <a16:creationId xmlns:a16="http://schemas.microsoft.com/office/drawing/2014/main" id="{E931A286-FF47-5A6F-593F-A74C8C5DCA39}"/>
-              </a:ext>
-            </a:extLst>
-          </p:cNvPr>
-          <p:cNvPicPr preferRelativeResize="0"/>
-          <p:nvPr/>
-        </p:nvPicPr>
-        <p:blipFill rotWithShape="1">
-          <a:blip r:embed="rId5">
-            <a:alphaModFix/>
-          </a:blip>
-          <a:srcRect/>
-          <a:stretch/>
-        </p:blipFill>
-        <p:spPr>
-          <a:xfrm>
-            <a:off x="7908120" y="3685743"/>
-            <a:ext cx="1587572" cy="1419169"/>
-          </a:xfrm>
-          <a:prstGeom prst="rect">
-            <a:avLst/>
-          </a:prstGeom>
-          <a:noFill/>
-          <a:ln>
-            <a:noFill/>
-          </a:ln>
-        </p:spPr>
-      </p:pic>
-    </p:spTree>
-    <p:extLst>
-      <p:ext uri="{BB962C8B-B14F-4D97-AF65-F5344CB8AC3E}">
-        <p14:creationId xmlns:p14="http://schemas.microsoft.com/office/powerpoint/2010/main" val="3682514201"/>
-      </p:ext>
-    </p:extLst>
   </p:cSld>
   <p:clrMapOvr>
     <a:masterClrMapping/>
